--- a/docs/Dragons_Den_Presentation_Template.pptx
+++ b/docs/Dragons_Den_Presentation_Template.pptx
@@ -13,6 +13,8 @@
     <p:sldId id="258" r:id="rId4"/>
     <p:sldId id="259" r:id="rId5"/>
     <p:sldId id="260" r:id="rId6"/>
+    <p:sldId id="261" r:id="rId14"/>
+    <p:sldId id="262" r:id="rId15"/>
   </p:sldIdLst>
   <p:sldSz cx="12192000" cy="6858000"/>
   <p:notesSz cx="6858000" cy="12192000"/>
@@ -935,7 +937,7 @@
           <a:p>
             <a:fld id="{5282F153-3F37-0F45-9E97-73ACFA13230C}" type="datetimeFigureOut">
               <a:rPr lang="en-US"/>
-              <a:t>7/31/2026</a:t>
+              <a:t>8/27/26</a:t>
             </a:fld>
             <a:endParaRPr lang="en-US"/>
           </a:p>
@@ -3625,6 +3627,1125 @@
           </a:p>
         </p:txBody>
       </p:sp>
+      <p:sp>
+        <p:nvSpPr>
+          <p:cNvPr id="7" name="Text 0">
+            <a:extLst>
+              <a:ext uri="{FF2B5EF4-FFF2-40B4-BE49-F238E27FC236}">
+                <a16:creationId xmlns:a16="http://schemas.microsoft.com/office/drawing/2014/main" id="{4E4CF21F-7EC9-185F-BAB2-ECE6AE010E2E}"/>
+              </a:ext>
+            </a:extLst>
+          </p:cNvPr>
+          <p:cNvSpPr/>
+          <p:nvPr/>
+        </p:nvSpPr>
+        <p:spPr>
+          <a:xfrm>
+            <a:off x="411480" y="347472"/>
+            <a:ext cx="566928" cy="384048"/>
+          </a:xfrm>
+          <a:prstGeom prst="rect">
+            <a:avLst/>
+          </a:prstGeom>
+          <a:noFill/>
+          <a:ln/>
+        </p:spPr>
+        <p:txBody>
+          <a:bodyPr wrap="square" lIns="0" tIns="0" rIns="0" bIns="0" rtlCol="0" anchor="ctr"/>
+          <a:lstStyle/>
+          <a:p>
+            <a:pPr marL="0" indent="0">
+              <a:buNone/>
+            </a:pPr>
+            <a:r>
+              <a:rPr lang="en-US" sz="2000" b="1" dirty="0">
+                <a:solidFill>
+                  <a:srgbClr val="FB4D0A"/>
+                </a:solidFill>
+                <a:latin typeface="Calibri" pitchFamily="34" charset="0"/>
+                <a:ea typeface="Calibri" pitchFamily="34" charset="-122"/>
+                <a:cs typeface="Calibri" pitchFamily="34" charset="-120"/>
+              </a:rPr>
+              <a:t>01</a:t>
+            </a:r>
+            <a:endParaRPr lang="en-US" sz="2000" dirty="0"/>
+          </a:p>
+        </p:txBody>
+      </p:sp>
+      <p:sp>
+        <p:nvSpPr>
+          <p:cNvPr id="9" name="Shape 1">
+            <a:extLst>
+              <a:ext uri="{FF2B5EF4-FFF2-40B4-BE49-F238E27FC236}">
+                <a16:creationId xmlns:a16="http://schemas.microsoft.com/office/drawing/2014/main" id="{D76AFB12-DED7-C8F7-F293-09706BEEE436}"/>
+              </a:ext>
+            </a:extLst>
+          </p:cNvPr>
+          <p:cNvSpPr/>
+          <p:nvPr/>
+        </p:nvSpPr>
+        <p:spPr>
+          <a:xfrm>
+            <a:off x="1078992" y="429768"/>
+            <a:ext cx="0" cy="320040"/>
+          </a:xfrm>
+          <a:prstGeom prst="line">
+            <a:avLst/>
+          </a:prstGeom>
+          <a:noFill/>
+          <a:ln w="15240">
+            <a:solidFill>
+              <a:srgbClr val="D6E4EA"/>
+            </a:solidFill>
+            <a:prstDash val="solid"/>
+          </a:ln>
+        </p:spPr>
+        <p:txBody>
+          <a:bodyPr/>
+          <a:lstStyle/>
+          <a:p>
+            <a:endParaRPr lang="en-IN"/>
+          </a:p>
+        </p:txBody>
+      </p:sp>
+      <p:sp>
+        <p:nvSpPr>
+          <p:cNvPr id="10" name="Text 2">
+            <a:extLst>
+              <a:ext uri="{FF2B5EF4-FFF2-40B4-BE49-F238E27FC236}">
+                <a16:creationId xmlns:a16="http://schemas.microsoft.com/office/drawing/2014/main" id="{2F194AC4-93E7-8FC3-A601-F4E32D6375DF}"/>
+              </a:ext>
+            </a:extLst>
+          </p:cNvPr>
+          <p:cNvSpPr/>
+          <p:nvPr/>
+        </p:nvSpPr>
+        <p:spPr>
+          <a:xfrm>
+            <a:off x="1207008" y="256032"/>
+            <a:ext cx="8046720" cy="347472"/>
+          </a:xfrm>
+          <a:prstGeom prst="rect">
+            <a:avLst/>
+          </a:prstGeom>
+          <a:noFill/>
+          <a:ln/>
+        </p:spPr>
+        <p:txBody>
+          <a:bodyPr wrap="square" lIns="0" tIns="0" rIns="0" bIns="0" rtlCol="0" anchor="ctr"/>
+          <a:lstStyle/>
+          <a:p>
+            <a:r>
+              <a:rPr lang="en-US" sz="1700" b="1" dirty="0">
+                <a:solidFill>
+                  <a:srgbClr val="005071"/>
+                </a:solidFill>
+                <a:latin typeface="Calibri" pitchFamily="34" charset="0"/>
+                <a:ea typeface="Calibri" pitchFamily="34" charset="-122"/>
+                <a:cs typeface="Calibri" pitchFamily="34" charset="-120"/>
+              </a:rPr>
+              <a:t>Problem &amp; Customer Focus</a:t>
+            </a:r>
+            <a:endParaRPr lang="en-US" sz="1700" dirty="0"/>
+          </a:p>
+        </p:txBody>
+      </p:sp>
+      <p:sp>
+        <p:nvSpPr>
+          <p:cNvPr id="11" name="Text 3">
+            <a:extLst>
+              <a:ext uri="{FF2B5EF4-FFF2-40B4-BE49-F238E27FC236}">
+                <a16:creationId xmlns:a16="http://schemas.microsoft.com/office/drawing/2014/main" id="{B7306A14-3DCF-2D83-E951-1EBD9B3C0E02}"/>
+              </a:ext>
+            </a:extLst>
+          </p:cNvPr>
+          <p:cNvSpPr/>
+          <p:nvPr/>
+        </p:nvSpPr>
+        <p:spPr>
+          <a:xfrm>
+            <a:off x="1207008" y="649224"/>
+            <a:ext cx="9509760" cy="256032"/>
+          </a:xfrm>
+          <a:prstGeom prst="rect">
+            <a:avLst/>
+          </a:prstGeom>
+          <a:noFill/>
+          <a:ln/>
+        </p:spPr>
+        <p:txBody>
+          <a:bodyPr wrap="square" lIns="0" tIns="0" rIns="0" bIns="0" rtlCol="0" anchor="ctr"/>
+          <a:lstStyle/>
+          <a:p>
+            <a:r>
+              <a:rPr lang="en-US" sz="880" dirty="0">
+                <a:solidFill>
+                  <a:srgbClr val="484848"/>
+                </a:solidFill>
+                <a:latin typeface="Calibri" pitchFamily="34" charset="0"/>
+                <a:ea typeface="Calibri" pitchFamily="34" charset="-122"/>
+                <a:cs typeface="Calibri" pitchFamily="34" charset="-120"/>
+              </a:rPr>
+              <a:t>Clearly define the business problem and show a deep understanding of the customer's journey and pain points</a:t>
+            </a:r>
+            <a:endParaRPr lang="en-US" sz="880" dirty="0"/>
+          </a:p>
+        </p:txBody>
+      </p:sp>
+      <p:sp>
+        <p:nvSpPr>
+          <p:cNvPr id="12" name="Shape 4">
+            <a:extLst>
+              <a:ext uri="{FF2B5EF4-FFF2-40B4-BE49-F238E27FC236}">
+                <a16:creationId xmlns:a16="http://schemas.microsoft.com/office/drawing/2014/main" id="{C40D0ABC-628F-7957-DD67-01C5528823C9}"/>
+              </a:ext>
+            </a:extLst>
+          </p:cNvPr>
+          <p:cNvSpPr/>
+          <p:nvPr/>
+        </p:nvSpPr>
+        <p:spPr>
+          <a:xfrm>
+            <a:off x="411480" y="960120"/>
+            <a:ext cx="11064240" cy="0"/>
+          </a:xfrm>
+          <a:prstGeom prst="line">
+            <a:avLst/>
+          </a:prstGeom>
+          <a:noFill/>
+          <a:ln w="5080">
+            <a:solidFill>
+              <a:srgbClr val="D6E4EA"/>
+            </a:solidFill>
+            <a:prstDash val="solid"/>
+          </a:ln>
+        </p:spPr>
+        <p:txBody>
+          <a:bodyPr/>
+          <a:lstStyle/>
+          <a:p>
+            <a:endParaRPr lang="en-IN"/>
+          </a:p>
+        </p:txBody>
+      </p:sp>
+      <p:sp>
+        <p:nvSpPr>
+          <p:cNvPr id="13" name="Shape 6">
+            <a:extLst>
+              <a:ext uri="{FF2B5EF4-FFF2-40B4-BE49-F238E27FC236}">
+                <a16:creationId xmlns:a16="http://schemas.microsoft.com/office/drawing/2014/main" id="{017D2E9F-42C8-16CE-E449-7635929928D1}"/>
+              </a:ext>
+            </a:extLst>
+          </p:cNvPr>
+          <p:cNvSpPr/>
+          <p:nvPr/>
+        </p:nvSpPr>
+        <p:spPr>
+          <a:xfrm>
+            <a:off x="594360" y="1298448"/>
+            <a:ext cx="91440" cy="4846320"/>
+          </a:xfrm>
+          <a:prstGeom prst="rect">
+            <a:avLst/>
+          </a:prstGeom>
+          <a:solidFill>
+            <a:srgbClr val="FB4D0A"/>
+          </a:solidFill>
+          <a:ln w="12700">
+            <a:solidFill>
+              <a:srgbClr val="FB4D0A"/>
+            </a:solidFill>
+            <a:prstDash val="solid"/>
+          </a:ln>
+        </p:spPr>
+        <p:txBody>
+          <a:bodyPr/>
+          <a:lstStyle/>
+          <a:p>
+            <a:endParaRPr lang="en-IN"/>
+          </a:p>
+        </p:txBody>
+      </p:sp>
+      <p:sp>
+        <p:nvSpPr>
+          <p:cNvPr id="14" name="Rounded Rectangle 13">
+            <a:extLst>
+              <a:ext uri="{FF2B5EF4-FFF2-40B4-BE49-F238E27FC236}">
+                <a16:creationId xmlns:a16="http://schemas.microsoft.com/office/drawing/2014/main" id="{75B98C0E-2E04-BD83-C1D0-BEF4400053F8}"/>
+              </a:ext>
+            </a:extLst>
+          </p:cNvPr>
+          <p:cNvSpPr/>
+          <p:nvPr/>
+        </p:nvSpPr>
+        <p:spPr>
+          <a:xfrm>
+            <a:off x="868680" y="1298448"/>
+            <a:ext cx="5074920" cy="2148840"/>
+          </a:xfrm>
+          <a:prstGeom prst="roundRect">
+            <a:avLst>
+              <a:gd name="adj" fmla="val 6000"/>
+            </a:avLst>
+          </a:prstGeom>
+          <a:solidFill>
+            <a:srgbClr val="F3F8FA"/>
+          </a:solidFill>
+          <a:ln>
+            <a:noFill/>
+          </a:ln>
+          <a:effectLst/>
+        </p:spPr>
+        <p:style>
+          <a:lnRef idx="1">
+            <a:schemeClr val="accent1"/>
+          </a:lnRef>
+          <a:fillRef idx="3">
+            <a:schemeClr val="accent1"/>
+          </a:fillRef>
+          <a:effectRef idx="2">
+            <a:schemeClr val="accent1"/>
+          </a:effectRef>
+          <a:fontRef idx="minor">
+            <a:schemeClr val="lt1"/>
+          </a:fontRef>
+        </p:style>
+        <p:txBody>
+          <a:bodyPr rtlCol="0" anchor="ctr"/>
+          <a:lstStyle/>
+          <a:p>
+            <a:pPr algn="ctr"/>
+            <a:endParaRPr/>
+          </a:p>
+        </p:txBody>
+      </p:sp>
+      <p:sp>
+        <p:nvSpPr>
+          <p:cNvPr id="15" name="Oval 14">
+            <a:extLst>
+              <a:ext uri="{FF2B5EF4-FFF2-40B4-BE49-F238E27FC236}">
+                <a16:creationId xmlns:a16="http://schemas.microsoft.com/office/drawing/2014/main" id="{AECA8CDC-4640-3AD2-5868-5B97105F6A6E}"/>
+              </a:ext>
+            </a:extLst>
+          </p:cNvPr>
+          <p:cNvSpPr/>
+          <p:nvPr/>
+        </p:nvSpPr>
+        <p:spPr>
+          <a:xfrm>
+            <a:off x="1124712" y="1554480"/>
+            <a:ext cx="548640" cy="548640"/>
+          </a:xfrm>
+          <a:prstGeom prst="ellipse">
+            <a:avLst/>
+          </a:prstGeom>
+          <a:solidFill>
+            <a:srgbClr val="005071"/>
+          </a:solidFill>
+          <a:ln>
+            <a:noFill/>
+          </a:ln>
+          <a:effectLst/>
+        </p:spPr>
+        <p:style>
+          <a:lnRef idx="1">
+            <a:schemeClr val="accent1"/>
+          </a:lnRef>
+          <a:fillRef idx="3">
+            <a:schemeClr val="accent1"/>
+          </a:fillRef>
+          <a:effectRef idx="2">
+            <a:schemeClr val="accent1"/>
+          </a:effectRef>
+          <a:fontRef idx="minor">
+            <a:schemeClr val="lt1"/>
+          </a:fontRef>
+        </p:style>
+        <p:txBody>
+          <a:bodyPr rtlCol="0" anchor="ctr"/>
+          <a:lstStyle/>
+          <a:p>
+            <a:pPr algn="ctr"/>
+            <a:endParaRPr/>
+          </a:p>
+        </p:txBody>
+      </p:sp>
+      <p:pic>
+        <p:nvPicPr>
+          <p:cNvPr id="16" name="Picture 15" descr="alert_white.png">
+            <a:extLst>
+              <a:ext uri="{FF2B5EF4-FFF2-40B4-BE49-F238E27FC236}">
+                <a16:creationId xmlns:a16="http://schemas.microsoft.com/office/drawing/2014/main" id="{7C4F2D19-C21D-B2D7-43D8-FCB5B4A7F43F}"/>
+              </a:ext>
+            </a:extLst>
+          </p:cNvPr>
+          <p:cNvPicPr>
+            <a:picLocks noChangeAspect="1"/>
+          </p:cNvPicPr>
+          <p:nvPr/>
+        </p:nvPicPr>
+        <p:blipFill>
+          <a:blip r:embed="rId3"/>
+          <a:stretch>
+            <a:fillRect/>
+          </a:stretch>
+        </p:blipFill>
+        <p:spPr>
+          <a:xfrm>
+            <a:off x="1267358" y="1697126"/>
+            <a:ext cx="263347" cy="263347"/>
+          </a:xfrm>
+          <a:prstGeom prst="rect">
+            <a:avLst/>
+          </a:prstGeom>
+        </p:spPr>
+      </p:pic>
+      <p:sp>
+        <p:nvSpPr>
+          <p:cNvPr id="17" name="TextBox 16">
+            <a:extLst>
+              <a:ext uri="{FF2B5EF4-FFF2-40B4-BE49-F238E27FC236}">
+                <a16:creationId xmlns:a16="http://schemas.microsoft.com/office/drawing/2014/main" id="{2C52B47B-F531-E8E0-BF4E-DD7E5AE3C5EB}"/>
+              </a:ext>
+            </a:extLst>
+          </p:cNvPr>
+          <p:cNvSpPr txBox="1"/>
+          <p:nvPr/>
+        </p:nvSpPr>
+        <p:spPr>
+          <a:xfrm>
+            <a:off x="1828800" y="1591056"/>
+            <a:ext cx="3886200" cy="457200"/>
+          </a:xfrm>
+          <a:prstGeom prst="rect">
+            <a:avLst/>
+          </a:prstGeom>
+          <a:noFill/>
+        </p:spPr>
+        <p:txBody>
+          <a:bodyPr wrap="square" lIns="0" tIns="0" rIns="0" bIns="0" anchor="t">
+            <a:spAutoFit/>
+          </a:bodyPr>
+          <a:lstStyle/>
+          <a:p>
+            <a:pPr algn="l"/>
+            <a:r>
+              <a:rPr sz="1450" b="1" i="0">
+                <a:solidFill>
+                  <a:srgbClr val="005071"/>
+                </a:solidFill>
+                <a:latin typeface="Calibri"/>
+              </a:rPr>
+              <a:t>The Bottleneck</a:t>
+            </a:r>
+          </a:p>
+        </p:txBody>
+      </p:sp>
+      <p:sp>
+        <p:nvSpPr>
+          <p:cNvPr id="18" name="TextBox 17">
+            <a:extLst>
+              <a:ext uri="{FF2B5EF4-FFF2-40B4-BE49-F238E27FC236}">
+                <a16:creationId xmlns:a16="http://schemas.microsoft.com/office/drawing/2014/main" id="{E47918D4-BCE7-8CBB-AE43-61B902FA6B29}"/>
+              </a:ext>
+            </a:extLst>
+          </p:cNvPr>
+          <p:cNvSpPr txBox="1"/>
+          <p:nvPr/>
+        </p:nvSpPr>
+        <p:spPr>
+          <a:xfrm>
+            <a:off x="1124712" y="2212848"/>
+            <a:ext cx="4562856" cy="1051560"/>
+          </a:xfrm>
+          <a:prstGeom prst="rect">
+            <a:avLst/>
+          </a:prstGeom>
+          <a:noFill/>
+        </p:spPr>
+        <p:txBody>
+          <a:bodyPr wrap="square" lIns="0" tIns="0" rIns="0" bIns="0" anchor="ctr">
+            <a:spAutoFit/>
+          </a:bodyPr>
+          <a:lstStyle/>
+          <a:p>
+            <a:pPr algn="l">
+              <a:lnSpc>
+                <a:spcPct val="125000"/>
+              </a:lnSpc>
+            </a:pPr>
+            <a:r>
+              <a:rPr sz="1250" b="0" i="0">
+                <a:solidFill>
+                  <a:srgbClr val="484848"/>
+                </a:solidFill>
+                <a:latin typeface="Calibri"/>
+              </a:rPr>
+              <a:t>Banking, healthcare, insurance, retail &amp; telecom are accelerating cloud adoption — legacy ETL stands in the way.</a:t>
+            </a:r>
+          </a:p>
+        </p:txBody>
+      </p:sp>
+      <p:sp>
+        <p:nvSpPr>
+          <p:cNvPr id="19" name="Rounded Rectangle 18">
+            <a:extLst>
+              <a:ext uri="{FF2B5EF4-FFF2-40B4-BE49-F238E27FC236}">
+                <a16:creationId xmlns:a16="http://schemas.microsoft.com/office/drawing/2014/main" id="{F6FD8858-ADCF-C1C4-6B5C-6F318A32062F}"/>
+              </a:ext>
+            </a:extLst>
+          </p:cNvPr>
+          <p:cNvSpPr/>
+          <p:nvPr/>
+        </p:nvSpPr>
+        <p:spPr>
+          <a:xfrm>
+            <a:off x="6263640" y="1298448"/>
+            <a:ext cx="5074920" cy="2148840"/>
+          </a:xfrm>
+          <a:prstGeom prst="roundRect">
+            <a:avLst>
+              <a:gd name="adj" fmla="val 6000"/>
+            </a:avLst>
+          </a:prstGeom>
+          <a:solidFill>
+            <a:srgbClr val="F3F8FA"/>
+          </a:solidFill>
+          <a:ln>
+            <a:noFill/>
+          </a:ln>
+          <a:effectLst/>
+        </p:spPr>
+        <p:style>
+          <a:lnRef idx="1">
+            <a:schemeClr val="accent1"/>
+          </a:lnRef>
+          <a:fillRef idx="3">
+            <a:schemeClr val="accent1"/>
+          </a:fillRef>
+          <a:effectRef idx="2">
+            <a:schemeClr val="accent1"/>
+          </a:effectRef>
+          <a:fontRef idx="minor">
+            <a:schemeClr val="lt1"/>
+          </a:fontRef>
+        </p:style>
+        <p:txBody>
+          <a:bodyPr rtlCol="0" anchor="ctr"/>
+          <a:lstStyle/>
+          <a:p>
+            <a:pPr algn="ctr"/>
+            <a:endParaRPr/>
+          </a:p>
+        </p:txBody>
+      </p:sp>
+      <p:sp>
+        <p:nvSpPr>
+          <p:cNvPr id="20" name="Oval 19">
+            <a:extLst>
+              <a:ext uri="{FF2B5EF4-FFF2-40B4-BE49-F238E27FC236}">
+                <a16:creationId xmlns:a16="http://schemas.microsoft.com/office/drawing/2014/main" id="{EE427924-2313-7678-7264-C6A7FD2EBF37}"/>
+              </a:ext>
+            </a:extLst>
+          </p:cNvPr>
+          <p:cNvSpPr/>
+          <p:nvPr/>
+        </p:nvSpPr>
+        <p:spPr>
+          <a:xfrm>
+            <a:off x="6519672" y="1554480"/>
+            <a:ext cx="548640" cy="548640"/>
+          </a:xfrm>
+          <a:prstGeom prst="ellipse">
+            <a:avLst/>
+          </a:prstGeom>
+          <a:solidFill>
+            <a:srgbClr val="005071"/>
+          </a:solidFill>
+          <a:ln>
+            <a:noFill/>
+          </a:ln>
+          <a:effectLst/>
+        </p:spPr>
+        <p:style>
+          <a:lnRef idx="1">
+            <a:schemeClr val="accent1"/>
+          </a:lnRef>
+          <a:fillRef idx="3">
+            <a:schemeClr val="accent1"/>
+          </a:fillRef>
+          <a:effectRef idx="2">
+            <a:schemeClr val="accent1"/>
+          </a:effectRef>
+          <a:fontRef idx="minor">
+            <a:schemeClr val="lt1"/>
+          </a:fontRef>
+        </p:style>
+        <p:txBody>
+          <a:bodyPr rtlCol="0" anchor="ctr"/>
+          <a:lstStyle/>
+          <a:p>
+            <a:pPr algn="ctr"/>
+            <a:endParaRPr/>
+          </a:p>
+        </p:txBody>
+      </p:sp>
+      <p:pic>
+        <p:nvPicPr>
+          <p:cNvPr id="21" name="Picture 20" descr="lock_white.png">
+            <a:extLst>
+              <a:ext uri="{FF2B5EF4-FFF2-40B4-BE49-F238E27FC236}">
+                <a16:creationId xmlns:a16="http://schemas.microsoft.com/office/drawing/2014/main" id="{CC6EAAE2-8280-BBE7-BCBB-3C94D75DE1C3}"/>
+              </a:ext>
+            </a:extLst>
+          </p:cNvPr>
+          <p:cNvPicPr>
+            <a:picLocks noChangeAspect="1"/>
+          </p:cNvPicPr>
+          <p:nvPr/>
+        </p:nvPicPr>
+        <p:blipFill>
+          <a:blip r:embed="rId4"/>
+          <a:stretch>
+            <a:fillRect/>
+          </a:stretch>
+        </p:blipFill>
+        <p:spPr>
+          <a:xfrm>
+            <a:off x="6662318" y="1697126"/>
+            <a:ext cx="263347" cy="263347"/>
+          </a:xfrm>
+          <a:prstGeom prst="rect">
+            <a:avLst/>
+          </a:prstGeom>
+        </p:spPr>
+      </p:pic>
+      <p:sp>
+        <p:nvSpPr>
+          <p:cNvPr id="22" name="TextBox 21">
+            <a:extLst>
+              <a:ext uri="{FF2B5EF4-FFF2-40B4-BE49-F238E27FC236}">
+                <a16:creationId xmlns:a16="http://schemas.microsoft.com/office/drawing/2014/main" id="{62406C0D-82A4-8A7A-CD99-9265893A5727}"/>
+              </a:ext>
+            </a:extLst>
+          </p:cNvPr>
+          <p:cNvSpPr txBox="1"/>
+          <p:nvPr/>
+        </p:nvSpPr>
+        <p:spPr>
+          <a:xfrm>
+            <a:off x="7223759" y="1591056"/>
+            <a:ext cx="3886200" cy="457200"/>
+          </a:xfrm>
+          <a:prstGeom prst="rect">
+            <a:avLst/>
+          </a:prstGeom>
+          <a:noFill/>
+        </p:spPr>
+        <p:txBody>
+          <a:bodyPr wrap="square" lIns="0" tIns="0" rIns="0" bIns="0" anchor="t">
+            <a:spAutoFit/>
+          </a:bodyPr>
+          <a:lstStyle/>
+          <a:p>
+            <a:pPr algn="l"/>
+            <a:r>
+              <a:rPr sz="1450" b="1" i="0">
+                <a:solidFill>
+                  <a:srgbClr val="005071"/>
+                </a:solidFill>
+                <a:latin typeface="Calibri"/>
+              </a:rPr>
+              <a:t>Tribal Knowledge Risk</a:t>
+            </a:r>
+          </a:p>
+        </p:txBody>
+      </p:sp>
+      <p:sp>
+        <p:nvSpPr>
+          <p:cNvPr id="23" name="TextBox 22">
+            <a:extLst>
+              <a:ext uri="{FF2B5EF4-FFF2-40B4-BE49-F238E27FC236}">
+                <a16:creationId xmlns:a16="http://schemas.microsoft.com/office/drawing/2014/main" id="{D5AD8B90-E1C7-7C9F-CD67-6716C25181D9}"/>
+              </a:ext>
+            </a:extLst>
+          </p:cNvPr>
+          <p:cNvSpPr txBox="1"/>
+          <p:nvPr/>
+        </p:nvSpPr>
+        <p:spPr>
+          <a:xfrm>
+            <a:off x="6519672" y="2212848"/>
+            <a:ext cx="4562856" cy="1051560"/>
+          </a:xfrm>
+          <a:prstGeom prst="rect">
+            <a:avLst/>
+          </a:prstGeom>
+          <a:noFill/>
+        </p:spPr>
+        <p:txBody>
+          <a:bodyPr wrap="square" lIns="0" tIns="0" rIns="0" bIns="0" anchor="ctr">
+            <a:spAutoFit/>
+          </a:bodyPr>
+          <a:lstStyle/>
+          <a:p>
+            <a:pPr algn="l">
+              <a:lnSpc>
+                <a:spcPct val="125000"/>
+              </a:lnSpc>
+            </a:pPr>
+            <a:r>
+              <a:rPr sz="1250" b="0" i="0">
+                <a:solidFill>
+                  <a:srgbClr val="484848"/>
+                </a:solidFill>
+                <a:latin typeface="Calibri"/>
+              </a:rPr>
+              <a:t>Undocumented business rules survive only in the heads of a handful of senior engineers.</a:t>
+            </a:r>
+          </a:p>
+        </p:txBody>
+      </p:sp>
+      <p:sp>
+        <p:nvSpPr>
+          <p:cNvPr id="24" name="Rounded Rectangle 23">
+            <a:extLst>
+              <a:ext uri="{FF2B5EF4-FFF2-40B4-BE49-F238E27FC236}">
+                <a16:creationId xmlns:a16="http://schemas.microsoft.com/office/drawing/2014/main" id="{CFF6DABB-5D50-0824-1EFB-EA8414F3232B}"/>
+              </a:ext>
+            </a:extLst>
+          </p:cNvPr>
+          <p:cNvSpPr/>
+          <p:nvPr/>
+        </p:nvSpPr>
+        <p:spPr>
+          <a:xfrm>
+            <a:off x="868680" y="3721608"/>
+            <a:ext cx="5074920" cy="2148840"/>
+          </a:xfrm>
+          <a:prstGeom prst="roundRect">
+            <a:avLst>
+              <a:gd name="adj" fmla="val 6000"/>
+            </a:avLst>
+          </a:prstGeom>
+          <a:solidFill>
+            <a:srgbClr val="F3F8FA"/>
+          </a:solidFill>
+          <a:ln>
+            <a:noFill/>
+          </a:ln>
+          <a:effectLst/>
+        </p:spPr>
+        <p:style>
+          <a:lnRef idx="1">
+            <a:schemeClr val="accent1"/>
+          </a:lnRef>
+          <a:fillRef idx="3">
+            <a:schemeClr val="accent1"/>
+          </a:fillRef>
+          <a:effectRef idx="2">
+            <a:schemeClr val="accent1"/>
+          </a:effectRef>
+          <a:fontRef idx="minor">
+            <a:schemeClr val="lt1"/>
+          </a:fontRef>
+        </p:style>
+        <p:txBody>
+          <a:bodyPr rtlCol="0" anchor="ctr"/>
+          <a:lstStyle/>
+          <a:p>
+            <a:pPr algn="ctr"/>
+            <a:endParaRPr/>
+          </a:p>
+        </p:txBody>
+      </p:sp>
+      <p:sp>
+        <p:nvSpPr>
+          <p:cNvPr id="25" name="Oval 24">
+            <a:extLst>
+              <a:ext uri="{FF2B5EF4-FFF2-40B4-BE49-F238E27FC236}">
+                <a16:creationId xmlns:a16="http://schemas.microsoft.com/office/drawing/2014/main" id="{D7F16790-638D-2A58-59D9-FC2B1B1B09ED}"/>
+              </a:ext>
+            </a:extLst>
+          </p:cNvPr>
+          <p:cNvSpPr/>
+          <p:nvPr/>
+        </p:nvSpPr>
+        <p:spPr>
+          <a:xfrm>
+            <a:off x="1124712" y="3977640"/>
+            <a:ext cx="548640" cy="548640"/>
+          </a:xfrm>
+          <a:prstGeom prst="ellipse">
+            <a:avLst/>
+          </a:prstGeom>
+          <a:solidFill>
+            <a:srgbClr val="005071"/>
+          </a:solidFill>
+          <a:ln>
+            <a:noFill/>
+          </a:ln>
+          <a:effectLst/>
+        </p:spPr>
+        <p:style>
+          <a:lnRef idx="1">
+            <a:schemeClr val="accent1"/>
+          </a:lnRef>
+          <a:fillRef idx="3">
+            <a:schemeClr val="accent1"/>
+          </a:fillRef>
+          <a:effectRef idx="2">
+            <a:schemeClr val="accent1"/>
+          </a:effectRef>
+          <a:fontRef idx="minor">
+            <a:schemeClr val="lt1"/>
+          </a:fontRef>
+        </p:style>
+        <p:txBody>
+          <a:bodyPr rtlCol="0" anchor="ctr"/>
+          <a:lstStyle/>
+          <a:p>
+            <a:pPr algn="ctr"/>
+            <a:endParaRPr/>
+          </a:p>
+        </p:txBody>
+      </p:sp>
+      <p:pic>
+        <p:nvPicPr>
+          <p:cNvPr id="26" name="Picture 25" descr="search_white.png">
+            <a:extLst>
+              <a:ext uri="{FF2B5EF4-FFF2-40B4-BE49-F238E27FC236}">
+                <a16:creationId xmlns:a16="http://schemas.microsoft.com/office/drawing/2014/main" id="{7A8E4A17-6DDC-769E-6D75-C397E74914FB}"/>
+              </a:ext>
+            </a:extLst>
+          </p:cNvPr>
+          <p:cNvPicPr>
+            <a:picLocks noChangeAspect="1"/>
+          </p:cNvPicPr>
+          <p:nvPr/>
+        </p:nvPicPr>
+        <p:blipFill>
+          <a:blip r:embed="rId5"/>
+          <a:stretch>
+            <a:fillRect/>
+          </a:stretch>
+        </p:blipFill>
+        <p:spPr>
+          <a:xfrm>
+            <a:off x="1267358" y="4120286"/>
+            <a:ext cx="263347" cy="263347"/>
+          </a:xfrm>
+          <a:prstGeom prst="rect">
+            <a:avLst/>
+          </a:prstGeom>
+        </p:spPr>
+      </p:pic>
+      <p:sp>
+        <p:nvSpPr>
+          <p:cNvPr id="27" name="TextBox 26">
+            <a:extLst>
+              <a:ext uri="{FF2B5EF4-FFF2-40B4-BE49-F238E27FC236}">
+                <a16:creationId xmlns:a16="http://schemas.microsoft.com/office/drawing/2014/main" id="{8DA3D411-00CA-4246-17AD-7BA0CD4F0A42}"/>
+              </a:ext>
+            </a:extLst>
+          </p:cNvPr>
+          <p:cNvSpPr txBox="1"/>
+          <p:nvPr/>
+        </p:nvSpPr>
+        <p:spPr>
+          <a:xfrm>
+            <a:off x="1828800" y="4014216"/>
+            <a:ext cx="3886200" cy="457200"/>
+          </a:xfrm>
+          <a:prstGeom prst="rect">
+            <a:avLst/>
+          </a:prstGeom>
+          <a:noFill/>
+        </p:spPr>
+        <p:txBody>
+          <a:bodyPr wrap="square" lIns="0" tIns="0" rIns="0" bIns="0" anchor="t">
+            <a:spAutoFit/>
+          </a:bodyPr>
+          <a:lstStyle/>
+          <a:p>
+            <a:pPr algn="l"/>
+            <a:r>
+              <a:rPr sz="1450" b="1" i="0">
+                <a:solidFill>
+                  <a:srgbClr val="005071"/>
+                </a:solidFill>
+                <a:latin typeface="Calibri"/>
+              </a:rPr>
+              <a:t>Where the Pain Really Is</a:t>
+            </a:r>
+          </a:p>
+        </p:txBody>
+      </p:sp>
+      <p:sp>
+        <p:nvSpPr>
+          <p:cNvPr id="28" name="TextBox 27">
+            <a:extLst>
+              <a:ext uri="{FF2B5EF4-FFF2-40B4-BE49-F238E27FC236}">
+                <a16:creationId xmlns:a16="http://schemas.microsoft.com/office/drawing/2014/main" id="{00B77534-D47F-ADFA-5EB2-D91229EA390E}"/>
+              </a:ext>
+            </a:extLst>
+          </p:cNvPr>
+          <p:cNvSpPr txBox="1"/>
+          <p:nvPr/>
+        </p:nvSpPr>
+        <p:spPr>
+          <a:xfrm>
+            <a:off x="1124712" y="4636008"/>
+            <a:ext cx="4562856" cy="1051560"/>
+          </a:xfrm>
+          <a:prstGeom prst="rect">
+            <a:avLst/>
+          </a:prstGeom>
+          <a:noFill/>
+        </p:spPr>
+        <p:txBody>
+          <a:bodyPr wrap="square" lIns="0" tIns="0" rIns="0" bIns="0" anchor="ctr">
+            <a:spAutoFit/>
+          </a:bodyPr>
+          <a:lstStyle/>
+          <a:p>
+            <a:pPr algn="l">
+              <a:lnSpc>
+                <a:spcPct val="125000"/>
+              </a:lnSpc>
+            </a:pPr>
+            <a:r>
+              <a:rPr sz="1250" b="0" i="0">
+                <a:solidFill>
+                  <a:srgbClr val="484848"/>
+                </a:solidFill>
+                <a:latin typeface="Calibri"/>
+              </a:rPr>
+              <a:t>Most migration effort is spent discovering hidden logic — before a single line is rewritten.</a:t>
+            </a:r>
+          </a:p>
+        </p:txBody>
+      </p:sp>
+      <p:sp>
+        <p:nvSpPr>
+          <p:cNvPr id="29" name="Rounded Rectangle 28">
+            <a:extLst>
+              <a:ext uri="{FF2B5EF4-FFF2-40B4-BE49-F238E27FC236}">
+                <a16:creationId xmlns:a16="http://schemas.microsoft.com/office/drawing/2014/main" id="{5913AF2F-45E8-9D0E-3E08-8AC5D582851B}"/>
+              </a:ext>
+            </a:extLst>
+          </p:cNvPr>
+          <p:cNvSpPr/>
+          <p:nvPr/>
+        </p:nvSpPr>
+        <p:spPr>
+          <a:xfrm>
+            <a:off x="6263640" y="3721608"/>
+            <a:ext cx="5074920" cy="2148840"/>
+          </a:xfrm>
+          <a:prstGeom prst="roundRect">
+            <a:avLst>
+              <a:gd name="adj" fmla="val 6000"/>
+            </a:avLst>
+          </a:prstGeom>
+          <a:solidFill>
+            <a:srgbClr val="F3F8FA"/>
+          </a:solidFill>
+          <a:ln>
+            <a:noFill/>
+          </a:ln>
+          <a:effectLst/>
+        </p:spPr>
+        <p:style>
+          <a:lnRef idx="1">
+            <a:schemeClr val="accent1"/>
+          </a:lnRef>
+          <a:fillRef idx="3">
+            <a:schemeClr val="accent1"/>
+          </a:fillRef>
+          <a:effectRef idx="2">
+            <a:schemeClr val="accent1"/>
+          </a:effectRef>
+          <a:fontRef idx="minor">
+            <a:schemeClr val="lt1"/>
+          </a:fontRef>
+        </p:style>
+        <p:txBody>
+          <a:bodyPr rtlCol="0" anchor="ctr"/>
+          <a:lstStyle/>
+          <a:p>
+            <a:pPr algn="ctr"/>
+            <a:endParaRPr/>
+          </a:p>
+        </p:txBody>
+      </p:sp>
+      <p:sp>
+        <p:nvSpPr>
+          <p:cNvPr id="30" name="Oval 29">
+            <a:extLst>
+              <a:ext uri="{FF2B5EF4-FFF2-40B4-BE49-F238E27FC236}">
+                <a16:creationId xmlns:a16="http://schemas.microsoft.com/office/drawing/2014/main" id="{5B45060D-F56E-28C5-5ECF-D2B6779B294D}"/>
+              </a:ext>
+            </a:extLst>
+          </p:cNvPr>
+          <p:cNvSpPr/>
+          <p:nvPr/>
+        </p:nvSpPr>
+        <p:spPr>
+          <a:xfrm>
+            <a:off x="6519672" y="3977640"/>
+            <a:ext cx="548640" cy="548640"/>
+          </a:xfrm>
+          <a:prstGeom prst="ellipse">
+            <a:avLst/>
+          </a:prstGeom>
+          <a:solidFill>
+            <a:srgbClr val="FB4D0A"/>
+          </a:solidFill>
+          <a:ln>
+            <a:noFill/>
+          </a:ln>
+          <a:effectLst/>
+        </p:spPr>
+        <p:style>
+          <a:lnRef idx="1">
+            <a:schemeClr val="accent1"/>
+          </a:lnRef>
+          <a:fillRef idx="3">
+            <a:schemeClr val="accent1"/>
+          </a:fillRef>
+          <a:effectRef idx="2">
+            <a:schemeClr val="accent1"/>
+          </a:effectRef>
+          <a:fontRef idx="minor">
+            <a:schemeClr val="lt1"/>
+          </a:fontRef>
+        </p:style>
+        <p:txBody>
+          <a:bodyPr rtlCol="0" anchor="ctr"/>
+          <a:lstStyle/>
+          <a:p>
+            <a:pPr algn="ctr"/>
+            <a:endParaRPr/>
+          </a:p>
+        </p:txBody>
+      </p:sp>
+      <p:pic>
+        <p:nvPicPr>
+          <p:cNvPr id="31" name="Picture 30" descr="filetext_white.png">
+            <a:extLst>
+              <a:ext uri="{FF2B5EF4-FFF2-40B4-BE49-F238E27FC236}">
+                <a16:creationId xmlns:a16="http://schemas.microsoft.com/office/drawing/2014/main" id="{3CA333EA-9903-FE61-1185-3D51548403BF}"/>
+              </a:ext>
+            </a:extLst>
+          </p:cNvPr>
+          <p:cNvPicPr>
+            <a:picLocks noChangeAspect="1"/>
+          </p:cNvPicPr>
+          <p:nvPr/>
+        </p:nvPicPr>
+        <p:blipFill>
+          <a:blip r:embed="rId6"/>
+          <a:stretch>
+            <a:fillRect/>
+          </a:stretch>
+        </p:blipFill>
+        <p:spPr>
+          <a:xfrm>
+            <a:off x="6662318" y="4120286"/>
+            <a:ext cx="263347" cy="263347"/>
+          </a:xfrm>
+          <a:prstGeom prst="rect">
+            <a:avLst/>
+          </a:prstGeom>
+        </p:spPr>
+      </p:pic>
+      <p:sp>
+        <p:nvSpPr>
+          <p:cNvPr id="32" name="TextBox 31">
+            <a:extLst>
+              <a:ext uri="{FF2B5EF4-FFF2-40B4-BE49-F238E27FC236}">
+                <a16:creationId xmlns:a16="http://schemas.microsoft.com/office/drawing/2014/main" id="{2EB25234-CC8B-4CC9-481C-DC00B961BADF}"/>
+              </a:ext>
+            </a:extLst>
+          </p:cNvPr>
+          <p:cNvSpPr txBox="1"/>
+          <p:nvPr/>
+        </p:nvSpPr>
+        <p:spPr>
+          <a:xfrm>
+            <a:off x="7223759" y="4014216"/>
+            <a:ext cx="3886200" cy="457200"/>
+          </a:xfrm>
+          <a:prstGeom prst="rect">
+            <a:avLst/>
+          </a:prstGeom>
+          <a:noFill/>
+        </p:spPr>
+        <p:txBody>
+          <a:bodyPr wrap="square" lIns="0" tIns="0" rIns="0" bIns="0" anchor="t">
+            <a:spAutoFit/>
+          </a:bodyPr>
+          <a:lstStyle/>
+          <a:p>
+            <a:pPr algn="l"/>
+            <a:r>
+              <a:rPr sz="1450" b="1" i="0">
+                <a:solidFill>
+                  <a:srgbClr val="005071"/>
+                </a:solidFill>
+                <a:latin typeface="Calibri"/>
+              </a:rPr>
+              <a:t>Proof Point</a:t>
+            </a:r>
+          </a:p>
+        </p:txBody>
+      </p:sp>
+      <p:sp>
+        <p:nvSpPr>
+          <p:cNvPr id="33" name="TextBox 32">
+            <a:extLst>
+              <a:ext uri="{FF2B5EF4-FFF2-40B4-BE49-F238E27FC236}">
+                <a16:creationId xmlns:a16="http://schemas.microsoft.com/office/drawing/2014/main" id="{BE1BA6CC-E83F-D91B-5BF7-AF1BD83D4FB4}"/>
+              </a:ext>
+            </a:extLst>
+          </p:cNvPr>
+          <p:cNvSpPr txBox="1"/>
+          <p:nvPr/>
+        </p:nvSpPr>
+        <p:spPr>
+          <a:xfrm>
+            <a:off x="6519672" y="4636008"/>
+            <a:ext cx="4562856" cy="1051560"/>
+          </a:xfrm>
+          <a:prstGeom prst="rect">
+            <a:avLst/>
+          </a:prstGeom>
+          <a:noFill/>
+        </p:spPr>
+        <p:txBody>
+          <a:bodyPr wrap="square" lIns="0" tIns="0" rIns="0" bIns="0" anchor="ctr">
+            <a:spAutoFit/>
+          </a:bodyPr>
+          <a:lstStyle/>
+          <a:p>
+            <a:pPr algn="l">
+              <a:lnSpc>
+                <a:spcPct val="125000"/>
+              </a:lnSpc>
+            </a:pPr>
+            <a:r>
+              <a:rPr sz="1250" b="0" i="0">
+                <a:solidFill>
+                  <a:srgbClr val="484848"/>
+                </a:solidFill>
+                <a:latin typeface="Calibri"/>
+              </a:rPr>
+              <a:t>Our sample legacy script hid 2 undocumented rules — a 90-day discount, a 24-month cutoff — with zero rationale in the code.</a:t>
+            </a:r>
+          </a:p>
+        </p:txBody>
+      </p:sp>
     </p:spTree>
   </p:cSld>
   <p:clrMapOvr>
@@ -3853,6 +4974,1759 @@
           </a:p>
         </p:txBody>
       </p:sp>
+      <p:sp>
+        <p:nvSpPr>
+          <p:cNvPr id="7" name="Text 0">
+            <a:extLst>
+              <a:ext uri="{FF2B5EF4-FFF2-40B4-BE49-F238E27FC236}">
+                <a16:creationId xmlns:a16="http://schemas.microsoft.com/office/drawing/2014/main" id="{F479572F-C3CD-A899-47DC-21556152CF2E}"/>
+              </a:ext>
+            </a:extLst>
+          </p:cNvPr>
+          <p:cNvSpPr/>
+          <p:nvPr/>
+        </p:nvSpPr>
+        <p:spPr>
+          <a:xfrm>
+            <a:off x="411480" y="347472"/>
+            <a:ext cx="566928" cy="384048"/>
+          </a:xfrm>
+          <a:prstGeom prst="rect">
+            <a:avLst/>
+          </a:prstGeom>
+          <a:noFill/>
+          <a:ln/>
+        </p:spPr>
+        <p:txBody>
+          <a:bodyPr wrap="square" lIns="0" tIns="0" rIns="0" bIns="0" rtlCol="0" anchor="ctr"/>
+          <a:lstStyle/>
+          <a:p>
+            <a:pPr marL="0" indent="0">
+              <a:buNone/>
+            </a:pPr>
+            <a:r>
+              <a:rPr lang="en-US" sz="2000" b="1" dirty="0">
+                <a:solidFill>
+                  <a:srgbClr val="FB4D0A"/>
+                </a:solidFill>
+                <a:latin typeface="Calibri" pitchFamily="34" charset="0"/>
+                <a:ea typeface="Calibri" pitchFamily="34" charset="-122"/>
+                <a:cs typeface="Calibri" pitchFamily="34" charset="-120"/>
+              </a:rPr>
+              <a:t>02</a:t>
+            </a:r>
+            <a:endParaRPr lang="en-US" sz="2000" dirty="0"/>
+          </a:p>
+        </p:txBody>
+      </p:sp>
+      <p:sp>
+        <p:nvSpPr>
+          <p:cNvPr id="9" name="Shape 1">
+            <a:extLst>
+              <a:ext uri="{FF2B5EF4-FFF2-40B4-BE49-F238E27FC236}">
+                <a16:creationId xmlns:a16="http://schemas.microsoft.com/office/drawing/2014/main" id="{61582247-BA75-76BF-BC1A-56071F1F3E97}"/>
+              </a:ext>
+            </a:extLst>
+          </p:cNvPr>
+          <p:cNvSpPr/>
+          <p:nvPr/>
+        </p:nvSpPr>
+        <p:spPr>
+          <a:xfrm>
+            <a:off x="1078992" y="429768"/>
+            <a:ext cx="0" cy="320040"/>
+          </a:xfrm>
+          <a:prstGeom prst="line">
+            <a:avLst/>
+          </a:prstGeom>
+          <a:noFill/>
+          <a:ln w="15240">
+            <a:solidFill>
+              <a:srgbClr val="D6E4EA"/>
+            </a:solidFill>
+            <a:prstDash val="solid"/>
+          </a:ln>
+        </p:spPr>
+        <p:txBody>
+          <a:bodyPr/>
+          <a:lstStyle/>
+          <a:p>
+            <a:endParaRPr lang="en-IN"/>
+          </a:p>
+        </p:txBody>
+      </p:sp>
+      <p:sp>
+        <p:nvSpPr>
+          <p:cNvPr id="10" name="Text 2">
+            <a:extLst>
+              <a:ext uri="{FF2B5EF4-FFF2-40B4-BE49-F238E27FC236}">
+                <a16:creationId xmlns:a16="http://schemas.microsoft.com/office/drawing/2014/main" id="{3ACD24AF-3721-3251-9D62-6EF5A4507ADB}"/>
+              </a:ext>
+            </a:extLst>
+          </p:cNvPr>
+          <p:cNvSpPr/>
+          <p:nvPr/>
+        </p:nvSpPr>
+        <p:spPr>
+          <a:xfrm>
+            <a:off x="1207008" y="256032"/>
+            <a:ext cx="8046720" cy="347472"/>
+          </a:xfrm>
+          <a:prstGeom prst="rect">
+            <a:avLst/>
+          </a:prstGeom>
+          <a:noFill/>
+          <a:ln/>
+        </p:spPr>
+        <p:txBody>
+          <a:bodyPr wrap="square" lIns="0" tIns="0" rIns="0" bIns="0" rtlCol="0" anchor="ctr"/>
+          <a:lstStyle/>
+          <a:p>
+            <a:r>
+              <a:rPr lang="en-US" sz="1700" b="1" dirty="0">
+                <a:solidFill>
+                  <a:srgbClr val="005071"/>
+                </a:solidFill>
+                <a:latin typeface="Calibri" pitchFamily="34" charset="0"/>
+                <a:ea typeface="Calibri" pitchFamily="34" charset="-122"/>
+                <a:cs typeface="Calibri" pitchFamily="34" charset="-120"/>
+              </a:rPr>
+              <a:t>The AI Solution &amp; Innovation</a:t>
+            </a:r>
+            <a:endParaRPr lang="en-US" sz="1700" dirty="0"/>
+          </a:p>
+        </p:txBody>
+      </p:sp>
+      <p:sp>
+        <p:nvSpPr>
+          <p:cNvPr id="11" name="Text 3">
+            <a:extLst>
+              <a:ext uri="{FF2B5EF4-FFF2-40B4-BE49-F238E27FC236}">
+                <a16:creationId xmlns:a16="http://schemas.microsoft.com/office/drawing/2014/main" id="{9F5958EF-0D4A-6F2F-9C7B-EDD368120FD7}"/>
+              </a:ext>
+            </a:extLst>
+          </p:cNvPr>
+          <p:cNvSpPr/>
+          <p:nvPr/>
+        </p:nvSpPr>
+        <p:spPr>
+          <a:xfrm>
+            <a:off x="1207008" y="649224"/>
+            <a:ext cx="9509760" cy="256032"/>
+          </a:xfrm>
+          <a:prstGeom prst="rect">
+            <a:avLst/>
+          </a:prstGeom>
+          <a:noFill/>
+          <a:ln/>
+        </p:spPr>
+        <p:txBody>
+          <a:bodyPr wrap="square" lIns="0" tIns="0" rIns="0" bIns="0" rtlCol="0" anchor="ctr"/>
+          <a:lstStyle/>
+          <a:p>
+            <a:r>
+              <a:rPr lang="en-US" sz="880" dirty="0">
+                <a:solidFill>
+                  <a:srgbClr val="484848"/>
+                </a:solidFill>
+                <a:latin typeface="Calibri" pitchFamily="34" charset="0"/>
+                <a:ea typeface="Calibri" pitchFamily="34" charset="-122"/>
+                <a:cs typeface="Calibri" pitchFamily="34" charset="-120"/>
+              </a:rPr>
+              <a:t>Deliver a practical and scalable framework with a clear step-by-step methodology for solving the challenge</a:t>
+            </a:r>
+            <a:endParaRPr lang="en-US" sz="880" dirty="0"/>
+          </a:p>
+        </p:txBody>
+      </p:sp>
+      <p:sp>
+        <p:nvSpPr>
+          <p:cNvPr id="12" name="Shape 4">
+            <a:extLst>
+              <a:ext uri="{FF2B5EF4-FFF2-40B4-BE49-F238E27FC236}">
+                <a16:creationId xmlns:a16="http://schemas.microsoft.com/office/drawing/2014/main" id="{FDF91BB0-CCE1-B5D3-2C0F-0F04F2678C86}"/>
+              </a:ext>
+            </a:extLst>
+          </p:cNvPr>
+          <p:cNvSpPr/>
+          <p:nvPr/>
+        </p:nvSpPr>
+        <p:spPr>
+          <a:xfrm>
+            <a:off x="411480" y="960120"/>
+            <a:ext cx="11064240" cy="0"/>
+          </a:xfrm>
+          <a:prstGeom prst="line">
+            <a:avLst/>
+          </a:prstGeom>
+          <a:noFill/>
+          <a:ln w="5080">
+            <a:solidFill>
+              <a:srgbClr val="D6E4EA"/>
+            </a:solidFill>
+            <a:prstDash val="solid"/>
+          </a:ln>
+        </p:spPr>
+        <p:txBody>
+          <a:bodyPr/>
+          <a:lstStyle/>
+          <a:p>
+            <a:endParaRPr lang="en-IN"/>
+          </a:p>
+        </p:txBody>
+      </p:sp>
+      <p:sp>
+        <p:nvSpPr>
+          <p:cNvPr id="13" name="Shape 6">
+            <a:extLst>
+              <a:ext uri="{FF2B5EF4-FFF2-40B4-BE49-F238E27FC236}">
+                <a16:creationId xmlns:a16="http://schemas.microsoft.com/office/drawing/2014/main" id="{75F6DD0A-0B78-BCB9-9906-F8A3C907F38D}"/>
+              </a:ext>
+            </a:extLst>
+          </p:cNvPr>
+          <p:cNvSpPr/>
+          <p:nvPr/>
+        </p:nvSpPr>
+        <p:spPr>
+          <a:xfrm>
+            <a:off x="594360" y="1298448"/>
+            <a:ext cx="91440" cy="4846320"/>
+          </a:xfrm>
+          <a:prstGeom prst="rect">
+            <a:avLst/>
+          </a:prstGeom>
+          <a:solidFill>
+            <a:srgbClr val="FB4D0A"/>
+          </a:solidFill>
+          <a:ln w="12700">
+            <a:solidFill>
+              <a:srgbClr val="FB4D0A"/>
+            </a:solidFill>
+            <a:prstDash val="solid"/>
+          </a:ln>
+        </p:spPr>
+        <p:txBody>
+          <a:bodyPr/>
+          <a:lstStyle/>
+          <a:p>
+            <a:endParaRPr lang="en-IN"/>
+          </a:p>
+        </p:txBody>
+      </p:sp>
+      <p:sp>
+        <p:nvSpPr>
+          <p:cNvPr id="14" name="Rounded Rectangle 13">
+            <a:extLst>
+              <a:ext uri="{FF2B5EF4-FFF2-40B4-BE49-F238E27FC236}">
+                <a16:creationId xmlns:a16="http://schemas.microsoft.com/office/drawing/2014/main" id="{A26E8533-ECD2-07CD-0D9E-A3CD8F194882}"/>
+              </a:ext>
+            </a:extLst>
+          </p:cNvPr>
+          <p:cNvSpPr/>
+          <p:nvPr/>
+        </p:nvSpPr>
+        <p:spPr>
+          <a:xfrm>
+            <a:off x="868680" y="1298448"/>
+            <a:ext cx="2423160" cy="2240280"/>
+          </a:xfrm>
+          <a:prstGeom prst="roundRect">
+            <a:avLst>
+              <a:gd name="adj" fmla="val 7000"/>
+            </a:avLst>
+          </a:prstGeom>
+          <a:solidFill>
+            <a:srgbClr val="F3F8FA"/>
+          </a:solidFill>
+          <a:ln>
+            <a:noFill/>
+          </a:ln>
+          <a:effectLst/>
+        </p:spPr>
+        <p:style>
+          <a:lnRef idx="1">
+            <a:schemeClr val="accent1"/>
+          </a:lnRef>
+          <a:fillRef idx="3">
+            <a:schemeClr val="accent1"/>
+          </a:fillRef>
+          <a:effectRef idx="2">
+            <a:schemeClr val="accent1"/>
+          </a:effectRef>
+          <a:fontRef idx="minor">
+            <a:schemeClr val="lt1"/>
+          </a:fontRef>
+        </p:style>
+        <p:txBody>
+          <a:bodyPr rtlCol="0" anchor="ctr"/>
+          <a:lstStyle/>
+          <a:p>
+            <a:pPr algn="ctr"/>
+            <a:endParaRPr/>
+          </a:p>
+        </p:txBody>
+      </p:sp>
+      <p:sp>
+        <p:nvSpPr>
+          <p:cNvPr id="15" name="Oval 14">
+            <a:extLst>
+              <a:ext uri="{FF2B5EF4-FFF2-40B4-BE49-F238E27FC236}">
+                <a16:creationId xmlns:a16="http://schemas.microsoft.com/office/drawing/2014/main" id="{2A11D7BC-7FE2-CE74-AF83-C90297369AB1}"/>
+              </a:ext>
+            </a:extLst>
+          </p:cNvPr>
+          <p:cNvSpPr/>
+          <p:nvPr/>
+        </p:nvSpPr>
+        <p:spPr>
+          <a:xfrm>
+            <a:off x="1778507" y="1536192"/>
+            <a:ext cx="603504" cy="603504"/>
+          </a:xfrm>
+          <a:prstGeom prst="ellipse">
+            <a:avLst/>
+          </a:prstGeom>
+          <a:solidFill>
+            <a:srgbClr val="005071"/>
+          </a:solidFill>
+          <a:ln>
+            <a:noFill/>
+          </a:ln>
+          <a:effectLst/>
+        </p:spPr>
+        <p:style>
+          <a:lnRef idx="1">
+            <a:schemeClr val="accent1"/>
+          </a:lnRef>
+          <a:fillRef idx="3">
+            <a:schemeClr val="accent1"/>
+          </a:fillRef>
+          <a:effectRef idx="2">
+            <a:schemeClr val="accent1"/>
+          </a:effectRef>
+          <a:fontRef idx="minor">
+            <a:schemeClr val="lt1"/>
+          </a:fontRef>
+        </p:style>
+        <p:txBody>
+          <a:bodyPr rtlCol="0" anchor="ctr"/>
+          <a:lstStyle/>
+          <a:p>
+            <a:pPr algn="ctr"/>
+            <a:endParaRPr/>
+          </a:p>
+        </p:txBody>
+      </p:sp>
+      <p:pic>
+        <p:nvPicPr>
+          <p:cNvPr id="16" name="Picture 15" descr="database_white.png">
+            <a:extLst>
+              <a:ext uri="{FF2B5EF4-FFF2-40B4-BE49-F238E27FC236}">
+                <a16:creationId xmlns:a16="http://schemas.microsoft.com/office/drawing/2014/main" id="{B8B4EAFF-8245-ED87-3E5A-2BC62E3DDA66}"/>
+              </a:ext>
+            </a:extLst>
+          </p:cNvPr>
+          <p:cNvPicPr>
+            <a:picLocks noChangeAspect="1"/>
+          </p:cNvPicPr>
+          <p:nvPr/>
+        </p:nvPicPr>
+        <p:blipFill>
+          <a:blip r:embed="rId3"/>
+          <a:stretch>
+            <a:fillRect/>
+          </a:stretch>
+        </p:blipFill>
+        <p:spPr>
+          <a:xfrm>
+            <a:off x="1935419" y="1693103"/>
+            <a:ext cx="289681" cy="289681"/>
+          </a:xfrm>
+          <a:prstGeom prst="rect">
+            <a:avLst/>
+          </a:prstGeom>
+        </p:spPr>
+      </p:pic>
+      <p:sp>
+        <p:nvSpPr>
+          <p:cNvPr id="17" name="TextBox 16">
+            <a:extLst>
+              <a:ext uri="{FF2B5EF4-FFF2-40B4-BE49-F238E27FC236}">
+                <a16:creationId xmlns:a16="http://schemas.microsoft.com/office/drawing/2014/main" id="{FD6134D5-19B3-E985-762B-B1474A07BAA3}"/>
+              </a:ext>
+            </a:extLst>
+          </p:cNvPr>
+          <p:cNvSpPr txBox="1"/>
+          <p:nvPr/>
+        </p:nvSpPr>
+        <p:spPr>
+          <a:xfrm>
+            <a:off x="2834639" y="1389888"/>
+            <a:ext cx="365760" cy="320040"/>
+          </a:xfrm>
+          <a:prstGeom prst="rect">
+            <a:avLst/>
+          </a:prstGeom>
+          <a:noFill/>
+        </p:spPr>
+        <p:txBody>
+          <a:bodyPr wrap="square" lIns="0" tIns="0" rIns="0" bIns="0" anchor="t">
+            <a:spAutoFit/>
+          </a:bodyPr>
+          <a:lstStyle/>
+          <a:p>
+            <a:pPr algn="r"/>
+            <a:r>
+              <a:rPr sz="1300" b="1" i="0">
+                <a:solidFill>
+                  <a:srgbClr val="FB4D0A"/>
+                </a:solidFill>
+                <a:latin typeface="Calibri"/>
+              </a:rPr>
+              <a:t>1</a:t>
+            </a:r>
+          </a:p>
+        </p:txBody>
+      </p:sp>
+      <p:sp>
+        <p:nvSpPr>
+          <p:cNvPr id="18" name="TextBox 17">
+            <a:extLst>
+              <a:ext uri="{FF2B5EF4-FFF2-40B4-BE49-F238E27FC236}">
+                <a16:creationId xmlns:a16="http://schemas.microsoft.com/office/drawing/2014/main" id="{3E665151-A74B-91C4-E032-741094D97042}"/>
+              </a:ext>
+            </a:extLst>
+          </p:cNvPr>
+          <p:cNvSpPr txBox="1"/>
+          <p:nvPr/>
+        </p:nvSpPr>
+        <p:spPr>
+          <a:xfrm>
+            <a:off x="1005839" y="2286000"/>
+            <a:ext cx="2148840" cy="502920"/>
+          </a:xfrm>
+          <a:prstGeom prst="rect">
+            <a:avLst/>
+          </a:prstGeom>
+          <a:noFill/>
+        </p:spPr>
+        <p:txBody>
+          <a:bodyPr wrap="square" lIns="0" tIns="0" rIns="0" bIns="0" anchor="t">
+            <a:spAutoFit/>
+          </a:bodyPr>
+          <a:lstStyle/>
+          <a:p>
+            <a:pPr algn="ctr"/>
+            <a:r>
+              <a:rPr sz="1300" b="1" i="0">
+                <a:solidFill>
+                  <a:srgbClr val="005071"/>
+                </a:solidFill>
+                <a:latin typeface="Calibri"/>
+              </a:rPr>
+              <a:t>Input &amp; AI Analysis</a:t>
+            </a:r>
+          </a:p>
+        </p:txBody>
+      </p:sp>
+      <p:sp>
+        <p:nvSpPr>
+          <p:cNvPr id="19" name="TextBox 18">
+            <a:extLst>
+              <a:ext uri="{FF2B5EF4-FFF2-40B4-BE49-F238E27FC236}">
+                <a16:creationId xmlns:a16="http://schemas.microsoft.com/office/drawing/2014/main" id="{42354604-99B0-459F-C54B-B0D795E44020}"/>
+              </a:ext>
+            </a:extLst>
+          </p:cNvPr>
+          <p:cNvSpPr txBox="1"/>
+          <p:nvPr/>
+        </p:nvSpPr>
+        <p:spPr>
+          <a:xfrm>
+            <a:off x="1033271" y="2761488"/>
+            <a:ext cx="2093976" cy="667512"/>
+          </a:xfrm>
+          <a:prstGeom prst="rect">
+            <a:avLst/>
+          </a:prstGeom>
+          <a:noFill/>
+        </p:spPr>
+        <p:txBody>
+          <a:bodyPr wrap="square" lIns="0" tIns="0" rIns="0" bIns="0" anchor="t">
+            <a:spAutoFit/>
+          </a:bodyPr>
+          <a:lstStyle/>
+          <a:p>
+            <a:pPr algn="ctr">
+              <a:lnSpc>
+                <a:spcPct val="110000"/>
+              </a:lnSpc>
+            </a:pPr>
+            <a:r>
+              <a:rPr sz="1050" b="0" i="0">
+                <a:solidFill>
+                  <a:srgbClr val="484848"/>
+                </a:solidFill>
+                <a:latin typeface="Calibri"/>
+              </a:rPr>
+              <a:t>Legacy SQL + metadata read; business rules, tables &amp; dependencies extracted automatically.</a:t>
+            </a:r>
+          </a:p>
+        </p:txBody>
+      </p:sp>
+      <p:sp>
+        <p:nvSpPr>
+          <p:cNvPr id="20" name="TextBox 19">
+            <a:extLst>
+              <a:ext uri="{FF2B5EF4-FFF2-40B4-BE49-F238E27FC236}">
+                <a16:creationId xmlns:a16="http://schemas.microsoft.com/office/drawing/2014/main" id="{C927260B-2838-B27A-DB28-3CD800CDC754}"/>
+              </a:ext>
+            </a:extLst>
+          </p:cNvPr>
+          <p:cNvSpPr txBox="1"/>
+          <p:nvPr/>
+        </p:nvSpPr>
+        <p:spPr>
+          <a:xfrm>
+            <a:off x="3300983" y="2217420"/>
+            <a:ext cx="274320" cy="402336"/>
+          </a:xfrm>
+          <a:prstGeom prst="rect">
+            <a:avLst/>
+          </a:prstGeom>
+          <a:noFill/>
+        </p:spPr>
+        <p:txBody>
+          <a:bodyPr wrap="square" lIns="0" tIns="0" rIns="0" bIns="0" anchor="ctr">
+            <a:spAutoFit/>
+          </a:bodyPr>
+          <a:lstStyle/>
+          <a:p>
+            <a:pPr algn="ctr"/>
+            <a:r>
+              <a:rPr sz="1800" b="1" i="0">
+                <a:solidFill>
+                  <a:srgbClr val="FB4D0A"/>
+                </a:solidFill>
+                <a:latin typeface="Calibri"/>
+              </a:rPr>
+              <a:t>→</a:t>
+            </a:r>
+          </a:p>
+        </p:txBody>
+      </p:sp>
+      <p:sp>
+        <p:nvSpPr>
+          <p:cNvPr id="21" name="Rounded Rectangle 20">
+            <a:extLst>
+              <a:ext uri="{FF2B5EF4-FFF2-40B4-BE49-F238E27FC236}">
+                <a16:creationId xmlns:a16="http://schemas.microsoft.com/office/drawing/2014/main" id="{BF6ADBB4-856F-C0C9-A2E0-E6CD0055B5D4}"/>
+              </a:ext>
+            </a:extLst>
+          </p:cNvPr>
+          <p:cNvSpPr/>
+          <p:nvPr/>
+        </p:nvSpPr>
+        <p:spPr>
+          <a:xfrm>
+            <a:off x="3584448" y="1298448"/>
+            <a:ext cx="2423160" cy="2240280"/>
+          </a:xfrm>
+          <a:prstGeom prst="roundRect">
+            <a:avLst>
+              <a:gd name="adj" fmla="val 7000"/>
+            </a:avLst>
+          </a:prstGeom>
+          <a:solidFill>
+            <a:srgbClr val="F3F8FA"/>
+          </a:solidFill>
+          <a:ln>
+            <a:noFill/>
+          </a:ln>
+          <a:effectLst/>
+        </p:spPr>
+        <p:style>
+          <a:lnRef idx="1">
+            <a:schemeClr val="accent1"/>
+          </a:lnRef>
+          <a:fillRef idx="3">
+            <a:schemeClr val="accent1"/>
+          </a:fillRef>
+          <a:effectRef idx="2">
+            <a:schemeClr val="accent1"/>
+          </a:effectRef>
+          <a:fontRef idx="minor">
+            <a:schemeClr val="lt1"/>
+          </a:fontRef>
+        </p:style>
+        <p:txBody>
+          <a:bodyPr rtlCol="0" anchor="ctr"/>
+          <a:lstStyle/>
+          <a:p>
+            <a:pPr algn="ctr"/>
+            <a:endParaRPr/>
+          </a:p>
+        </p:txBody>
+      </p:sp>
+      <p:sp>
+        <p:nvSpPr>
+          <p:cNvPr id="22" name="Oval 21">
+            <a:extLst>
+              <a:ext uri="{FF2B5EF4-FFF2-40B4-BE49-F238E27FC236}">
+                <a16:creationId xmlns:a16="http://schemas.microsoft.com/office/drawing/2014/main" id="{19C5BA43-9655-A3EC-DA22-0B3BE648E816}"/>
+              </a:ext>
+            </a:extLst>
+          </p:cNvPr>
+          <p:cNvSpPr/>
+          <p:nvPr/>
+        </p:nvSpPr>
+        <p:spPr>
+          <a:xfrm>
+            <a:off x="4494276" y="1536192"/>
+            <a:ext cx="603504" cy="603504"/>
+          </a:xfrm>
+          <a:prstGeom prst="ellipse">
+            <a:avLst/>
+          </a:prstGeom>
+          <a:solidFill>
+            <a:srgbClr val="005071"/>
+          </a:solidFill>
+          <a:ln>
+            <a:noFill/>
+          </a:ln>
+          <a:effectLst/>
+        </p:spPr>
+        <p:style>
+          <a:lnRef idx="1">
+            <a:schemeClr val="accent1"/>
+          </a:lnRef>
+          <a:fillRef idx="3">
+            <a:schemeClr val="accent1"/>
+          </a:fillRef>
+          <a:effectRef idx="2">
+            <a:schemeClr val="accent1"/>
+          </a:effectRef>
+          <a:fontRef idx="minor">
+            <a:schemeClr val="lt1"/>
+          </a:fontRef>
+        </p:style>
+        <p:txBody>
+          <a:bodyPr rtlCol="0" anchor="ctr"/>
+          <a:lstStyle/>
+          <a:p>
+            <a:pPr algn="ctr"/>
+            <a:endParaRPr/>
+          </a:p>
+        </p:txBody>
+      </p:sp>
+      <p:pic>
+        <p:nvPicPr>
+          <p:cNvPr id="23" name="Picture 22" descr="cpu_white.png">
+            <a:extLst>
+              <a:ext uri="{FF2B5EF4-FFF2-40B4-BE49-F238E27FC236}">
+                <a16:creationId xmlns:a16="http://schemas.microsoft.com/office/drawing/2014/main" id="{3B3C95AB-F519-820E-C4E4-5B6610F13CDA}"/>
+              </a:ext>
+            </a:extLst>
+          </p:cNvPr>
+          <p:cNvPicPr>
+            <a:picLocks noChangeAspect="1"/>
+          </p:cNvPicPr>
+          <p:nvPr/>
+        </p:nvPicPr>
+        <p:blipFill>
+          <a:blip r:embed="rId4"/>
+          <a:stretch>
+            <a:fillRect/>
+          </a:stretch>
+        </p:blipFill>
+        <p:spPr>
+          <a:xfrm>
+            <a:off x="4651187" y="1693103"/>
+            <a:ext cx="289681" cy="289681"/>
+          </a:xfrm>
+          <a:prstGeom prst="rect">
+            <a:avLst/>
+          </a:prstGeom>
+        </p:spPr>
+      </p:pic>
+      <p:sp>
+        <p:nvSpPr>
+          <p:cNvPr id="24" name="TextBox 23">
+            <a:extLst>
+              <a:ext uri="{FF2B5EF4-FFF2-40B4-BE49-F238E27FC236}">
+                <a16:creationId xmlns:a16="http://schemas.microsoft.com/office/drawing/2014/main" id="{383E4F67-9089-9C06-3549-EF0B20C917BF}"/>
+              </a:ext>
+            </a:extLst>
+          </p:cNvPr>
+          <p:cNvSpPr txBox="1"/>
+          <p:nvPr/>
+        </p:nvSpPr>
+        <p:spPr>
+          <a:xfrm>
+            <a:off x="5550408" y="1389888"/>
+            <a:ext cx="365760" cy="320040"/>
+          </a:xfrm>
+          <a:prstGeom prst="rect">
+            <a:avLst/>
+          </a:prstGeom>
+          <a:noFill/>
+        </p:spPr>
+        <p:txBody>
+          <a:bodyPr wrap="square" lIns="0" tIns="0" rIns="0" bIns="0" anchor="t">
+            <a:spAutoFit/>
+          </a:bodyPr>
+          <a:lstStyle/>
+          <a:p>
+            <a:pPr algn="r"/>
+            <a:r>
+              <a:rPr sz="1300" b="1" i="0">
+                <a:solidFill>
+                  <a:srgbClr val="FB4D0A"/>
+                </a:solidFill>
+                <a:latin typeface="Calibri"/>
+              </a:rPr>
+              <a:t>2</a:t>
+            </a:r>
+          </a:p>
+        </p:txBody>
+      </p:sp>
+      <p:sp>
+        <p:nvSpPr>
+          <p:cNvPr id="25" name="TextBox 24">
+            <a:extLst>
+              <a:ext uri="{FF2B5EF4-FFF2-40B4-BE49-F238E27FC236}">
+                <a16:creationId xmlns:a16="http://schemas.microsoft.com/office/drawing/2014/main" id="{7F0AC1B8-CD7B-9428-C3A4-57AE5D7004CC}"/>
+              </a:ext>
+            </a:extLst>
+          </p:cNvPr>
+          <p:cNvSpPr txBox="1"/>
+          <p:nvPr/>
+        </p:nvSpPr>
+        <p:spPr>
+          <a:xfrm>
+            <a:off x="3721608" y="2286000"/>
+            <a:ext cx="2148840" cy="502920"/>
+          </a:xfrm>
+          <a:prstGeom prst="rect">
+            <a:avLst/>
+          </a:prstGeom>
+          <a:noFill/>
+        </p:spPr>
+        <p:txBody>
+          <a:bodyPr wrap="square" lIns="0" tIns="0" rIns="0" bIns="0" anchor="t">
+            <a:spAutoFit/>
+          </a:bodyPr>
+          <a:lstStyle/>
+          <a:p>
+            <a:pPr algn="ctr"/>
+            <a:r>
+              <a:rPr sz="1300" b="1" i="0">
+                <a:solidFill>
+                  <a:srgbClr val="005071"/>
+                </a:solidFill>
+                <a:latin typeface="Calibri"/>
+              </a:rPr>
+              <a:t>Transformation</a:t>
+            </a:r>
+          </a:p>
+        </p:txBody>
+      </p:sp>
+      <p:sp>
+        <p:nvSpPr>
+          <p:cNvPr id="26" name="TextBox 25">
+            <a:extLst>
+              <a:ext uri="{FF2B5EF4-FFF2-40B4-BE49-F238E27FC236}">
+                <a16:creationId xmlns:a16="http://schemas.microsoft.com/office/drawing/2014/main" id="{80C933E1-5AEB-0435-E705-A73C055C97FA}"/>
+              </a:ext>
+            </a:extLst>
+          </p:cNvPr>
+          <p:cNvSpPr txBox="1"/>
+          <p:nvPr/>
+        </p:nvSpPr>
+        <p:spPr>
+          <a:xfrm>
+            <a:off x="3749039" y="2761488"/>
+            <a:ext cx="2093976" cy="667512"/>
+          </a:xfrm>
+          <a:prstGeom prst="rect">
+            <a:avLst/>
+          </a:prstGeom>
+          <a:noFill/>
+        </p:spPr>
+        <p:txBody>
+          <a:bodyPr wrap="square" lIns="0" tIns="0" rIns="0" bIns="0" anchor="t">
+            <a:spAutoFit/>
+          </a:bodyPr>
+          <a:lstStyle/>
+          <a:p>
+            <a:pPr algn="ctr">
+              <a:lnSpc>
+                <a:spcPct val="110000"/>
+              </a:lnSpc>
+            </a:pPr>
+            <a:r>
+              <a:rPr sz="1050" b="0" i="0">
+                <a:solidFill>
+                  <a:srgbClr val="484848"/>
+                </a:solidFill>
+                <a:latin typeface="Calibri"/>
+              </a:rPr>
+              <a:t>Legacy logic converted into a Snowflake / dbt-ready design.</a:t>
+            </a:r>
+          </a:p>
+        </p:txBody>
+      </p:sp>
+      <p:sp>
+        <p:nvSpPr>
+          <p:cNvPr id="27" name="TextBox 26">
+            <a:extLst>
+              <a:ext uri="{FF2B5EF4-FFF2-40B4-BE49-F238E27FC236}">
+                <a16:creationId xmlns:a16="http://schemas.microsoft.com/office/drawing/2014/main" id="{49E4810C-9D71-B047-729C-64F717B6E19E}"/>
+              </a:ext>
+            </a:extLst>
+          </p:cNvPr>
+          <p:cNvSpPr txBox="1"/>
+          <p:nvPr/>
+        </p:nvSpPr>
+        <p:spPr>
+          <a:xfrm>
+            <a:off x="6016752" y="2217420"/>
+            <a:ext cx="274320" cy="402336"/>
+          </a:xfrm>
+          <a:prstGeom prst="rect">
+            <a:avLst/>
+          </a:prstGeom>
+          <a:noFill/>
+        </p:spPr>
+        <p:txBody>
+          <a:bodyPr wrap="square" lIns="0" tIns="0" rIns="0" bIns="0" anchor="ctr">
+            <a:spAutoFit/>
+          </a:bodyPr>
+          <a:lstStyle/>
+          <a:p>
+            <a:pPr algn="ctr"/>
+            <a:r>
+              <a:rPr sz="1800" b="1" i="0">
+                <a:solidFill>
+                  <a:srgbClr val="FB4D0A"/>
+                </a:solidFill>
+                <a:latin typeface="Calibri"/>
+              </a:rPr>
+              <a:t>→</a:t>
+            </a:r>
+          </a:p>
+        </p:txBody>
+      </p:sp>
+      <p:sp>
+        <p:nvSpPr>
+          <p:cNvPr id="28" name="Rounded Rectangle 27">
+            <a:extLst>
+              <a:ext uri="{FF2B5EF4-FFF2-40B4-BE49-F238E27FC236}">
+                <a16:creationId xmlns:a16="http://schemas.microsoft.com/office/drawing/2014/main" id="{E185B60E-9343-E930-6E23-5A4C4E9CBB39}"/>
+              </a:ext>
+            </a:extLst>
+          </p:cNvPr>
+          <p:cNvSpPr/>
+          <p:nvPr/>
+        </p:nvSpPr>
+        <p:spPr>
+          <a:xfrm>
+            <a:off x="6300216" y="1298448"/>
+            <a:ext cx="2423160" cy="2240280"/>
+          </a:xfrm>
+          <a:prstGeom prst="roundRect">
+            <a:avLst>
+              <a:gd name="adj" fmla="val 7000"/>
+            </a:avLst>
+          </a:prstGeom>
+          <a:solidFill>
+            <a:srgbClr val="F3F8FA"/>
+          </a:solidFill>
+          <a:ln>
+            <a:noFill/>
+          </a:ln>
+          <a:effectLst/>
+        </p:spPr>
+        <p:style>
+          <a:lnRef idx="1">
+            <a:schemeClr val="accent1"/>
+          </a:lnRef>
+          <a:fillRef idx="3">
+            <a:schemeClr val="accent1"/>
+          </a:fillRef>
+          <a:effectRef idx="2">
+            <a:schemeClr val="accent1"/>
+          </a:effectRef>
+          <a:fontRef idx="minor">
+            <a:schemeClr val="lt1"/>
+          </a:fontRef>
+        </p:style>
+        <p:txBody>
+          <a:bodyPr rtlCol="0" anchor="ctr"/>
+          <a:lstStyle/>
+          <a:p>
+            <a:pPr algn="ctr"/>
+            <a:endParaRPr/>
+          </a:p>
+        </p:txBody>
+      </p:sp>
+      <p:sp>
+        <p:nvSpPr>
+          <p:cNvPr id="29" name="Oval 28">
+            <a:extLst>
+              <a:ext uri="{FF2B5EF4-FFF2-40B4-BE49-F238E27FC236}">
+                <a16:creationId xmlns:a16="http://schemas.microsoft.com/office/drawing/2014/main" id="{EDC92CD5-6800-7679-8DDF-E39C27D46F56}"/>
+              </a:ext>
+            </a:extLst>
+          </p:cNvPr>
+          <p:cNvSpPr/>
+          <p:nvPr/>
+        </p:nvSpPr>
+        <p:spPr>
+          <a:xfrm>
+            <a:off x="7210044" y="1536192"/>
+            <a:ext cx="603504" cy="603504"/>
+          </a:xfrm>
+          <a:prstGeom prst="ellipse">
+            <a:avLst/>
+          </a:prstGeom>
+          <a:solidFill>
+            <a:srgbClr val="005071"/>
+          </a:solidFill>
+          <a:ln>
+            <a:noFill/>
+          </a:ln>
+          <a:effectLst/>
+        </p:spPr>
+        <p:style>
+          <a:lnRef idx="1">
+            <a:schemeClr val="accent1"/>
+          </a:lnRef>
+          <a:fillRef idx="3">
+            <a:schemeClr val="accent1"/>
+          </a:fillRef>
+          <a:effectRef idx="2">
+            <a:schemeClr val="accent1"/>
+          </a:effectRef>
+          <a:fontRef idx="minor">
+            <a:schemeClr val="lt1"/>
+          </a:fontRef>
+        </p:style>
+        <p:txBody>
+          <a:bodyPr rtlCol="0" anchor="ctr"/>
+          <a:lstStyle/>
+          <a:p>
+            <a:pPr algn="ctr"/>
+            <a:endParaRPr/>
+          </a:p>
+        </p:txBody>
+      </p:sp>
+      <p:pic>
+        <p:nvPicPr>
+          <p:cNvPr id="30" name="Picture 29" descr="shield_white.png">
+            <a:extLst>
+              <a:ext uri="{FF2B5EF4-FFF2-40B4-BE49-F238E27FC236}">
+                <a16:creationId xmlns:a16="http://schemas.microsoft.com/office/drawing/2014/main" id="{8593873D-F850-05A5-4810-891BCEAA869E}"/>
+              </a:ext>
+            </a:extLst>
+          </p:cNvPr>
+          <p:cNvPicPr>
+            <a:picLocks noChangeAspect="1"/>
+          </p:cNvPicPr>
+          <p:nvPr/>
+        </p:nvPicPr>
+        <p:blipFill>
+          <a:blip r:embed="rId5"/>
+          <a:stretch>
+            <a:fillRect/>
+          </a:stretch>
+        </p:blipFill>
+        <p:spPr>
+          <a:xfrm>
+            <a:off x="7366955" y="1693103"/>
+            <a:ext cx="289681" cy="289681"/>
+          </a:xfrm>
+          <a:prstGeom prst="rect">
+            <a:avLst/>
+          </a:prstGeom>
+        </p:spPr>
+      </p:pic>
+      <p:sp>
+        <p:nvSpPr>
+          <p:cNvPr id="31" name="TextBox 30">
+            <a:extLst>
+              <a:ext uri="{FF2B5EF4-FFF2-40B4-BE49-F238E27FC236}">
+                <a16:creationId xmlns:a16="http://schemas.microsoft.com/office/drawing/2014/main" id="{DD593C86-A0AE-420F-625F-B3A8B0F775E7}"/>
+              </a:ext>
+            </a:extLst>
+          </p:cNvPr>
+          <p:cNvSpPr txBox="1"/>
+          <p:nvPr/>
+        </p:nvSpPr>
+        <p:spPr>
+          <a:xfrm>
+            <a:off x="8266175" y="1389888"/>
+            <a:ext cx="365760" cy="320040"/>
+          </a:xfrm>
+          <a:prstGeom prst="rect">
+            <a:avLst/>
+          </a:prstGeom>
+          <a:noFill/>
+        </p:spPr>
+        <p:txBody>
+          <a:bodyPr wrap="square" lIns="0" tIns="0" rIns="0" bIns="0" anchor="t">
+            <a:spAutoFit/>
+          </a:bodyPr>
+          <a:lstStyle/>
+          <a:p>
+            <a:pPr algn="r"/>
+            <a:r>
+              <a:rPr sz="1300" b="1" i="0">
+                <a:solidFill>
+                  <a:srgbClr val="FB4D0A"/>
+                </a:solidFill>
+                <a:latin typeface="Calibri"/>
+              </a:rPr>
+              <a:t>3</a:t>
+            </a:r>
+          </a:p>
+        </p:txBody>
+      </p:sp>
+      <p:sp>
+        <p:nvSpPr>
+          <p:cNvPr id="32" name="TextBox 31">
+            <a:extLst>
+              <a:ext uri="{FF2B5EF4-FFF2-40B4-BE49-F238E27FC236}">
+                <a16:creationId xmlns:a16="http://schemas.microsoft.com/office/drawing/2014/main" id="{C17E45E4-5132-7A71-01D7-5B94E3207B7B}"/>
+              </a:ext>
+            </a:extLst>
+          </p:cNvPr>
+          <p:cNvSpPr txBox="1"/>
+          <p:nvPr/>
+        </p:nvSpPr>
+        <p:spPr>
+          <a:xfrm>
+            <a:off x="6437376" y="2286000"/>
+            <a:ext cx="2148840" cy="502920"/>
+          </a:xfrm>
+          <a:prstGeom prst="rect">
+            <a:avLst/>
+          </a:prstGeom>
+          <a:noFill/>
+        </p:spPr>
+        <p:txBody>
+          <a:bodyPr wrap="square" lIns="0" tIns="0" rIns="0" bIns="0" anchor="t">
+            <a:spAutoFit/>
+          </a:bodyPr>
+          <a:lstStyle/>
+          <a:p>
+            <a:pPr algn="ctr"/>
+            <a:r>
+              <a:rPr sz="1300" b="1" i="0">
+                <a:solidFill>
+                  <a:srgbClr val="005071"/>
+                </a:solidFill>
+                <a:latin typeface="Calibri"/>
+              </a:rPr>
+              <a:t>Human Review &amp; Validation</a:t>
+            </a:r>
+          </a:p>
+        </p:txBody>
+      </p:sp>
+      <p:sp>
+        <p:nvSpPr>
+          <p:cNvPr id="33" name="TextBox 32">
+            <a:extLst>
+              <a:ext uri="{FF2B5EF4-FFF2-40B4-BE49-F238E27FC236}">
+                <a16:creationId xmlns:a16="http://schemas.microsoft.com/office/drawing/2014/main" id="{A4AB9184-E891-6704-9C22-9236D2403624}"/>
+              </a:ext>
+            </a:extLst>
+          </p:cNvPr>
+          <p:cNvSpPr txBox="1"/>
+          <p:nvPr/>
+        </p:nvSpPr>
+        <p:spPr>
+          <a:xfrm>
+            <a:off x="6464807" y="2761488"/>
+            <a:ext cx="2093976" cy="667512"/>
+          </a:xfrm>
+          <a:prstGeom prst="rect">
+            <a:avLst/>
+          </a:prstGeom>
+          <a:noFill/>
+        </p:spPr>
+        <p:txBody>
+          <a:bodyPr wrap="square" lIns="0" tIns="0" rIns="0" bIns="0" anchor="t">
+            <a:spAutoFit/>
+          </a:bodyPr>
+          <a:lstStyle/>
+          <a:p>
+            <a:pPr algn="ctr">
+              <a:lnSpc>
+                <a:spcPct val="110000"/>
+              </a:lnSpc>
+            </a:pPr>
+            <a:r>
+              <a:rPr sz="1050" b="0" i="0">
+                <a:solidFill>
+                  <a:srgbClr val="484848"/>
+                </a:solidFill>
+                <a:latin typeface="Calibri"/>
+              </a:rPr>
+              <a:t>Every AI claim fact-checked against source; ambiguous rules routed to a human first.</a:t>
+            </a:r>
+          </a:p>
+        </p:txBody>
+      </p:sp>
+      <p:sp>
+        <p:nvSpPr>
+          <p:cNvPr id="34" name="TextBox 33">
+            <a:extLst>
+              <a:ext uri="{FF2B5EF4-FFF2-40B4-BE49-F238E27FC236}">
+                <a16:creationId xmlns:a16="http://schemas.microsoft.com/office/drawing/2014/main" id="{2FA7CFFE-A6B9-ECCF-0D89-99BD60E8614F}"/>
+              </a:ext>
+            </a:extLst>
+          </p:cNvPr>
+          <p:cNvSpPr txBox="1"/>
+          <p:nvPr/>
+        </p:nvSpPr>
+        <p:spPr>
+          <a:xfrm>
+            <a:off x="8732519" y="2217420"/>
+            <a:ext cx="274320" cy="402336"/>
+          </a:xfrm>
+          <a:prstGeom prst="rect">
+            <a:avLst/>
+          </a:prstGeom>
+          <a:noFill/>
+        </p:spPr>
+        <p:txBody>
+          <a:bodyPr wrap="square" lIns="0" tIns="0" rIns="0" bIns="0" anchor="ctr">
+            <a:spAutoFit/>
+          </a:bodyPr>
+          <a:lstStyle/>
+          <a:p>
+            <a:pPr algn="ctr"/>
+            <a:r>
+              <a:rPr sz="1800" b="1" i="0">
+                <a:solidFill>
+                  <a:srgbClr val="FB4D0A"/>
+                </a:solidFill>
+                <a:latin typeface="Calibri"/>
+              </a:rPr>
+              <a:t>→</a:t>
+            </a:r>
+          </a:p>
+        </p:txBody>
+      </p:sp>
+      <p:sp>
+        <p:nvSpPr>
+          <p:cNvPr id="35" name="Rounded Rectangle 34">
+            <a:extLst>
+              <a:ext uri="{FF2B5EF4-FFF2-40B4-BE49-F238E27FC236}">
+                <a16:creationId xmlns:a16="http://schemas.microsoft.com/office/drawing/2014/main" id="{4F0CE9E5-F02D-9C53-AA3F-449C33DBFB95}"/>
+              </a:ext>
+            </a:extLst>
+          </p:cNvPr>
+          <p:cNvSpPr/>
+          <p:nvPr/>
+        </p:nvSpPr>
+        <p:spPr>
+          <a:xfrm>
+            <a:off x="9015984" y="1298448"/>
+            <a:ext cx="2423160" cy="2240280"/>
+          </a:xfrm>
+          <a:prstGeom prst="roundRect">
+            <a:avLst>
+              <a:gd name="adj" fmla="val 7000"/>
+            </a:avLst>
+          </a:prstGeom>
+          <a:solidFill>
+            <a:srgbClr val="F3F8FA"/>
+          </a:solidFill>
+          <a:ln>
+            <a:noFill/>
+          </a:ln>
+          <a:effectLst/>
+        </p:spPr>
+        <p:style>
+          <a:lnRef idx="1">
+            <a:schemeClr val="accent1"/>
+          </a:lnRef>
+          <a:fillRef idx="3">
+            <a:schemeClr val="accent1"/>
+          </a:fillRef>
+          <a:effectRef idx="2">
+            <a:schemeClr val="accent1"/>
+          </a:effectRef>
+          <a:fontRef idx="minor">
+            <a:schemeClr val="lt1"/>
+          </a:fontRef>
+        </p:style>
+        <p:txBody>
+          <a:bodyPr rtlCol="0" anchor="ctr"/>
+          <a:lstStyle/>
+          <a:p>
+            <a:pPr algn="ctr"/>
+            <a:endParaRPr/>
+          </a:p>
+        </p:txBody>
+      </p:sp>
+      <p:sp>
+        <p:nvSpPr>
+          <p:cNvPr id="36" name="Oval 35">
+            <a:extLst>
+              <a:ext uri="{FF2B5EF4-FFF2-40B4-BE49-F238E27FC236}">
+                <a16:creationId xmlns:a16="http://schemas.microsoft.com/office/drawing/2014/main" id="{4D082F2F-D23B-8543-9895-82464AD58CC8}"/>
+              </a:ext>
+            </a:extLst>
+          </p:cNvPr>
+          <p:cNvSpPr/>
+          <p:nvPr/>
+        </p:nvSpPr>
+        <p:spPr>
+          <a:xfrm>
+            <a:off x="9925811" y="1536192"/>
+            <a:ext cx="603504" cy="603504"/>
+          </a:xfrm>
+          <a:prstGeom prst="ellipse">
+            <a:avLst/>
+          </a:prstGeom>
+          <a:solidFill>
+            <a:srgbClr val="005071"/>
+          </a:solidFill>
+          <a:ln>
+            <a:noFill/>
+          </a:ln>
+          <a:effectLst/>
+        </p:spPr>
+        <p:style>
+          <a:lnRef idx="1">
+            <a:schemeClr val="accent1"/>
+          </a:lnRef>
+          <a:fillRef idx="3">
+            <a:schemeClr val="accent1"/>
+          </a:fillRef>
+          <a:effectRef idx="2">
+            <a:schemeClr val="accent1"/>
+          </a:effectRef>
+          <a:fontRef idx="minor">
+            <a:schemeClr val="lt1"/>
+          </a:fontRef>
+        </p:style>
+        <p:txBody>
+          <a:bodyPr rtlCol="0" anchor="ctr"/>
+          <a:lstStyle/>
+          <a:p>
+            <a:pPr algn="ctr"/>
+            <a:endParaRPr/>
+          </a:p>
+        </p:txBody>
+      </p:sp>
+      <p:pic>
+        <p:nvPicPr>
+          <p:cNvPr id="37" name="Picture 36" descr="gitbranch_white.png">
+            <a:extLst>
+              <a:ext uri="{FF2B5EF4-FFF2-40B4-BE49-F238E27FC236}">
+                <a16:creationId xmlns:a16="http://schemas.microsoft.com/office/drawing/2014/main" id="{AFC3390A-28C8-4F04-6244-0E3402A7951A}"/>
+              </a:ext>
+            </a:extLst>
+          </p:cNvPr>
+          <p:cNvPicPr>
+            <a:picLocks noChangeAspect="1"/>
+          </p:cNvPicPr>
+          <p:nvPr/>
+        </p:nvPicPr>
+        <p:blipFill>
+          <a:blip r:embed="rId6"/>
+          <a:stretch>
+            <a:fillRect/>
+          </a:stretch>
+        </p:blipFill>
+        <p:spPr>
+          <a:xfrm>
+            <a:off x="10082723" y="1693103"/>
+            <a:ext cx="289681" cy="289681"/>
+          </a:xfrm>
+          <a:prstGeom prst="rect">
+            <a:avLst/>
+          </a:prstGeom>
+        </p:spPr>
+      </p:pic>
+      <p:sp>
+        <p:nvSpPr>
+          <p:cNvPr id="38" name="TextBox 37">
+            <a:extLst>
+              <a:ext uri="{FF2B5EF4-FFF2-40B4-BE49-F238E27FC236}">
+                <a16:creationId xmlns:a16="http://schemas.microsoft.com/office/drawing/2014/main" id="{7A30E7B9-E6F7-85A4-97E3-A31DB4C0A408}"/>
+              </a:ext>
+            </a:extLst>
+          </p:cNvPr>
+          <p:cNvSpPr txBox="1"/>
+          <p:nvPr/>
+        </p:nvSpPr>
+        <p:spPr>
+          <a:xfrm>
+            <a:off x="10981944" y="1389888"/>
+            <a:ext cx="365760" cy="320040"/>
+          </a:xfrm>
+          <a:prstGeom prst="rect">
+            <a:avLst/>
+          </a:prstGeom>
+          <a:noFill/>
+        </p:spPr>
+        <p:txBody>
+          <a:bodyPr wrap="square" lIns="0" tIns="0" rIns="0" bIns="0" anchor="t">
+            <a:spAutoFit/>
+          </a:bodyPr>
+          <a:lstStyle/>
+          <a:p>
+            <a:pPr algn="r"/>
+            <a:r>
+              <a:rPr sz="1300" b="1" i="0">
+                <a:solidFill>
+                  <a:srgbClr val="FB4D0A"/>
+                </a:solidFill>
+                <a:latin typeface="Calibri"/>
+              </a:rPr>
+              <a:t>4</a:t>
+            </a:r>
+          </a:p>
+        </p:txBody>
+      </p:sp>
+      <p:sp>
+        <p:nvSpPr>
+          <p:cNvPr id="39" name="TextBox 38">
+            <a:extLst>
+              <a:ext uri="{FF2B5EF4-FFF2-40B4-BE49-F238E27FC236}">
+                <a16:creationId xmlns:a16="http://schemas.microsoft.com/office/drawing/2014/main" id="{D4644119-D9AC-D9DE-6AE5-24499D2ECA0F}"/>
+              </a:ext>
+            </a:extLst>
+          </p:cNvPr>
+          <p:cNvSpPr txBox="1"/>
+          <p:nvPr/>
+        </p:nvSpPr>
+        <p:spPr>
+          <a:xfrm>
+            <a:off x="9153144" y="2286000"/>
+            <a:ext cx="2148840" cy="502920"/>
+          </a:xfrm>
+          <a:prstGeom prst="rect">
+            <a:avLst/>
+          </a:prstGeom>
+          <a:noFill/>
+        </p:spPr>
+        <p:txBody>
+          <a:bodyPr wrap="square" lIns="0" tIns="0" rIns="0" bIns="0" anchor="t">
+            <a:spAutoFit/>
+          </a:bodyPr>
+          <a:lstStyle/>
+          <a:p>
+            <a:pPr algn="ctr"/>
+            <a:r>
+              <a:rPr sz="1300" b="1" i="0">
+                <a:solidFill>
+                  <a:srgbClr val="005071"/>
+                </a:solidFill>
+                <a:latin typeface="Calibri"/>
+              </a:rPr>
+              <a:t>Migration Planning &amp; Output</a:t>
+            </a:r>
+          </a:p>
+        </p:txBody>
+      </p:sp>
+      <p:sp>
+        <p:nvSpPr>
+          <p:cNvPr id="40" name="TextBox 39">
+            <a:extLst>
+              <a:ext uri="{FF2B5EF4-FFF2-40B4-BE49-F238E27FC236}">
+                <a16:creationId xmlns:a16="http://schemas.microsoft.com/office/drawing/2014/main" id="{77843D7B-47A8-9984-1913-8308139AC1C7}"/>
+              </a:ext>
+            </a:extLst>
+          </p:cNvPr>
+          <p:cNvSpPr txBox="1"/>
+          <p:nvPr/>
+        </p:nvSpPr>
+        <p:spPr>
+          <a:xfrm>
+            <a:off x="9180576" y="2761488"/>
+            <a:ext cx="2093976" cy="667512"/>
+          </a:xfrm>
+          <a:prstGeom prst="rect">
+            <a:avLst/>
+          </a:prstGeom>
+          <a:noFill/>
+        </p:spPr>
+        <p:txBody>
+          <a:bodyPr wrap="square" lIns="0" tIns="0" rIns="0" bIns="0" anchor="t">
+            <a:spAutoFit/>
+          </a:bodyPr>
+          <a:lstStyle/>
+          <a:p>
+            <a:pPr algn="ctr">
+              <a:lnSpc>
+                <a:spcPct val="110000"/>
+              </a:lnSpc>
+            </a:pPr>
+            <a:r>
+              <a:rPr sz="1050" b="0" i="0">
+                <a:solidFill>
+                  <a:srgbClr val="484848"/>
+                </a:solidFill>
+                <a:latin typeface="Calibri"/>
+              </a:rPr>
+              <a:t>Steps sequenced by dependency; migration report &amp; lineage diagram generated.</a:t>
+            </a:r>
+          </a:p>
+        </p:txBody>
+      </p:sp>
+      <p:sp>
+        <p:nvSpPr>
+          <p:cNvPr id="41" name="TextBox 40">
+            <a:extLst>
+              <a:ext uri="{FF2B5EF4-FFF2-40B4-BE49-F238E27FC236}">
+                <a16:creationId xmlns:a16="http://schemas.microsoft.com/office/drawing/2014/main" id="{1F213552-04C1-93FC-4DC6-5EDA9397667E}"/>
+              </a:ext>
+            </a:extLst>
+          </p:cNvPr>
+          <p:cNvSpPr txBox="1"/>
+          <p:nvPr/>
+        </p:nvSpPr>
+        <p:spPr>
+          <a:xfrm>
+            <a:off x="1234440" y="3950208"/>
+            <a:ext cx="3246120" cy="685800"/>
+          </a:xfrm>
+          <a:prstGeom prst="rect">
+            <a:avLst/>
+          </a:prstGeom>
+          <a:noFill/>
+        </p:spPr>
+        <p:txBody>
+          <a:bodyPr wrap="square" lIns="0" tIns="0" rIns="0" bIns="0" anchor="t">
+            <a:spAutoFit/>
+          </a:bodyPr>
+          <a:lstStyle/>
+          <a:p>
+            <a:pPr algn="ctr"/>
+            <a:r>
+              <a:rPr sz="3800" b="1" i="0">
+                <a:solidFill>
+                  <a:srgbClr val="005071"/>
+                </a:solidFill>
+                <a:latin typeface="Calibri"/>
+              </a:rPr>
+              <a:t>100%</a:t>
+            </a:r>
+          </a:p>
+        </p:txBody>
+      </p:sp>
+      <p:sp>
+        <p:nvSpPr>
+          <p:cNvPr id="42" name="TextBox 41">
+            <a:extLst>
+              <a:ext uri="{FF2B5EF4-FFF2-40B4-BE49-F238E27FC236}">
+                <a16:creationId xmlns:a16="http://schemas.microsoft.com/office/drawing/2014/main" id="{4C3C3345-A542-00B6-1611-B0FD25EFE477}"/>
+              </a:ext>
+            </a:extLst>
+          </p:cNvPr>
+          <p:cNvSpPr txBox="1"/>
+          <p:nvPr/>
+        </p:nvSpPr>
+        <p:spPr>
+          <a:xfrm>
+            <a:off x="1234440" y="4663440"/>
+            <a:ext cx="3246120" cy="457200"/>
+          </a:xfrm>
+          <a:prstGeom prst="rect">
+            <a:avLst/>
+          </a:prstGeom>
+          <a:noFill/>
+        </p:spPr>
+        <p:txBody>
+          <a:bodyPr wrap="square" lIns="0" tIns="0" rIns="0" bIns="0" anchor="t">
+            <a:spAutoFit/>
+          </a:bodyPr>
+          <a:lstStyle/>
+          <a:p>
+            <a:pPr algn="ctr">
+              <a:lnSpc>
+                <a:spcPct val="105000"/>
+              </a:lnSpc>
+            </a:pPr>
+            <a:r>
+              <a:rPr sz="1050" b="0" i="0">
+                <a:solidFill>
+                  <a:srgbClr val="484848"/>
+                </a:solidFill>
+                <a:latin typeface="Calibri"/>
+              </a:rPr>
+              <a:t>business rules</a:t>
+            </a:r>
+          </a:p>
+          <a:p>
+            <a:pPr algn="ctr">
+              <a:lnSpc>
+                <a:spcPct val="105000"/>
+              </a:lnSpc>
+            </a:pPr>
+            <a:r>
+              <a:rPr sz="1050" b="0" i="0">
+                <a:solidFill>
+                  <a:srgbClr val="484848"/>
+                </a:solidFill>
+                <a:latin typeface="Calibri"/>
+              </a:rPr>
+              <a:t>correctly identified</a:t>
+            </a:r>
+          </a:p>
+        </p:txBody>
+      </p:sp>
+      <p:sp>
+        <p:nvSpPr>
+          <p:cNvPr id="43" name="TextBox 42">
+            <a:extLst>
+              <a:ext uri="{FF2B5EF4-FFF2-40B4-BE49-F238E27FC236}">
+                <a16:creationId xmlns:a16="http://schemas.microsoft.com/office/drawing/2014/main" id="{53A6B7C8-1E0E-4255-1433-49C334E31E45}"/>
+              </a:ext>
+            </a:extLst>
+          </p:cNvPr>
+          <p:cNvSpPr txBox="1"/>
+          <p:nvPr/>
+        </p:nvSpPr>
+        <p:spPr>
+          <a:xfrm>
+            <a:off x="4937760" y="3950208"/>
+            <a:ext cx="3246120" cy="685800"/>
+          </a:xfrm>
+          <a:prstGeom prst="rect">
+            <a:avLst/>
+          </a:prstGeom>
+          <a:noFill/>
+        </p:spPr>
+        <p:txBody>
+          <a:bodyPr wrap="square" lIns="0" tIns="0" rIns="0" bIns="0" anchor="t">
+            <a:spAutoFit/>
+          </a:bodyPr>
+          <a:lstStyle/>
+          <a:p>
+            <a:pPr algn="ctr"/>
+            <a:r>
+              <a:rPr sz="3800" b="1" i="0">
+                <a:solidFill>
+                  <a:srgbClr val="005071"/>
+                </a:solidFill>
+                <a:latin typeface="Calibri"/>
+              </a:rPr>
+              <a:t>0</a:t>
+            </a:r>
+          </a:p>
+        </p:txBody>
+      </p:sp>
+      <p:sp>
+        <p:nvSpPr>
+          <p:cNvPr id="44" name="TextBox 43">
+            <a:extLst>
+              <a:ext uri="{FF2B5EF4-FFF2-40B4-BE49-F238E27FC236}">
+                <a16:creationId xmlns:a16="http://schemas.microsoft.com/office/drawing/2014/main" id="{C8586176-794C-2AED-AD3C-8397E5A6A210}"/>
+              </a:ext>
+            </a:extLst>
+          </p:cNvPr>
+          <p:cNvSpPr txBox="1"/>
+          <p:nvPr/>
+        </p:nvSpPr>
+        <p:spPr>
+          <a:xfrm>
+            <a:off x="4937760" y="4663440"/>
+            <a:ext cx="3246120" cy="457200"/>
+          </a:xfrm>
+          <a:prstGeom prst="rect">
+            <a:avLst/>
+          </a:prstGeom>
+          <a:noFill/>
+        </p:spPr>
+        <p:txBody>
+          <a:bodyPr wrap="square" lIns="0" tIns="0" rIns="0" bIns="0" anchor="t">
+            <a:spAutoFit/>
+          </a:bodyPr>
+          <a:lstStyle/>
+          <a:p>
+            <a:pPr algn="ctr">
+              <a:lnSpc>
+                <a:spcPct val="105000"/>
+              </a:lnSpc>
+            </a:pPr>
+            <a:r>
+              <a:rPr sz="1050" b="0" i="0">
+                <a:solidFill>
+                  <a:srgbClr val="484848"/>
+                </a:solidFill>
+                <a:latin typeface="Calibri"/>
+              </a:rPr>
+              <a:t>fabricated table or</a:t>
+            </a:r>
+          </a:p>
+          <a:p>
+            <a:pPr algn="ctr">
+              <a:lnSpc>
+                <a:spcPct val="105000"/>
+              </a:lnSpc>
+            </a:pPr>
+            <a:r>
+              <a:rPr sz="1050" b="0" i="0">
+                <a:solidFill>
+                  <a:srgbClr val="484848"/>
+                </a:solidFill>
+                <a:latin typeface="Calibri"/>
+              </a:rPr>
+              <a:t>column references</a:t>
+            </a:r>
+          </a:p>
+        </p:txBody>
+      </p:sp>
+      <p:sp>
+        <p:nvSpPr>
+          <p:cNvPr id="45" name="TextBox 44">
+            <a:extLst>
+              <a:ext uri="{FF2B5EF4-FFF2-40B4-BE49-F238E27FC236}">
+                <a16:creationId xmlns:a16="http://schemas.microsoft.com/office/drawing/2014/main" id="{A979FA5E-5EAB-DF4E-342B-D6F61C3E6D26}"/>
+              </a:ext>
+            </a:extLst>
+          </p:cNvPr>
+          <p:cNvSpPr txBox="1"/>
+          <p:nvPr/>
+        </p:nvSpPr>
+        <p:spPr>
+          <a:xfrm>
+            <a:off x="8641080" y="3950208"/>
+            <a:ext cx="3246120" cy="685800"/>
+          </a:xfrm>
+          <a:prstGeom prst="rect">
+            <a:avLst/>
+          </a:prstGeom>
+          <a:noFill/>
+        </p:spPr>
+        <p:txBody>
+          <a:bodyPr wrap="square" lIns="0" tIns="0" rIns="0" bIns="0" anchor="t">
+            <a:spAutoFit/>
+          </a:bodyPr>
+          <a:lstStyle/>
+          <a:p>
+            <a:pPr algn="ctr"/>
+            <a:r>
+              <a:rPr sz="3800" b="1" i="0">
+                <a:solidFill>
+                  <a:srgbClr val="005071"/>
+                </a:solidFill>
+                <a:latin typeface="Calibri"/>
+              </a:rPr>
+              <a:t>2 / 2</a:t>
+            </a:r>
+          </a:p>
+        </p:txBody>
+      </p:sp>
+      <p:sp>
+        <p:nvSpPr>
+          <p:cNvPr id="46" name="TextBox 45">
+            <a:extLst>
+              <a:ext uri="{FF2B5EF4-FFF2-40B4-BE49-F238E27FC236}">
+                <a16:creationId xmlns:a16="http://schemas.microsoft.com/office/drawing/2014/main" id="{F54C5AEF-7B34-CB3F-4D30-54A091D5672F}"/>
+              </a:ext>
+            </a:extLst>
+          </p:cNvPr>
+          <p:cNvSpPr txBox="1"/>
+          <p:nvPr/>
+        </p:nvSpPr>
+        <p:spPr>
+          <a:xfrm>
+            <a:off x="8641080" y="4663440"/>
+            <a:ext cx="3246120" cy="457200"/>
+          </a:xfrm>
+          <a:prstGeom prst="rect">
+            <a:avLst/>
+          </a:prstGeom>
+          <a:noFill/>
+        </p:spPr>
+        <p:txBody>
+          <a:bodyPr wrap="square" lIns="0" tIns="0" rIns="0" bIns="0" anchor="t">
+            <a:spAutoFit/>
+          </a:bodyPr>
+          <a:lstStyle/>
+          <a:p>
+            <a:pPr algn="ctr">
+              <a:lnSpc>
+                <a:spcPct val="105000"/>
+              </a:lnSpc>
+            </a:pPr>
+            <a:r>
+              <a:rPr sz="1050" b="0" i="0">
+                <a:solidFill>
+                  <a:srgbClr val="484848"/>
+                </a:solidFill>
+                <a:latin typeface="Calibri"/>
+              </a:rPr>
+              <a:t>ambiguous rules correctly</a:t>
+            </a:r>
+          </a:p>
+          <a:p>
+            <a:pPr algn="ctr">
+              <a:lnSpc>
+                <a:spcPct val="105000"/>
+              </a:lnSpc>
+            </a:pPr>
+            <a:r>
+              <a:rPr sz="1050" b="0" i="0">
+                <a:solidFill>
+                  <a:srgbClr val="484848"/>
+                </a:solidFill>
+                <a:latin typeface="Calibri"/>
+              </a:rPr>
+              <a:t>flagged for human review</a:t>
+            </a:r>
+          </a:p>
+        </p:txBody>
+      </p:sp>
+      <p:sp>
+        <p:nvSpPr>
+          <p:cNvPr id="47" name="TextBox 46">
+            <a:extLst>
+              <a:ext uri="{FF2B5EF4-FFF2-40B4-BE49-F238E27FC236}">
+                <a16:creationId xmlns:a16="http://schemas.microsoft.com/office/drawing/2014/main" id="{E7687C5B-523F-4036-D749-BF8F02EFB9C9}"/>
+              </a:ext>
+            </a:extLst>
+          </p:cNvPr>
+          <p:cNvSpPr txBox="1"/>
+          <p:nvPr/>
+        </p:nvSpPr>
+        <p:spPr>
+          <a:xfrm>
+            <a:off x="868680" y="5888736"/>
+            <a:ext cx="10469880" cy="274320"/>
+          </a:xfrm>
+          <a:prstGeom prst="rect">
+            <a:avLst/>
+          </a:prstGeom>
+          <a:noFill/>
+        </p:spPr>
+        <p:txBody>
+          <a:bodyPr wrap="square" lIns="0" tIns="0" rIns="0" bIns="0" anchor="t">
+            <a:spAutoFit/>
+          </a:bodyPr>
+          <a:lstStyle/>
+          <a:p>
+            <a:pPr algn="ctr"/>
+            <a:r>
+              <a:rPr sz="950" b="0" i="1">
+                <a:solidFill>
+                  <a:srgbClr val="484848"/>
+                </a:solidFill>
+                <a:latin typeface="Calibri"/>
+              </a:rPr>
+              <a:t>Measured on a live pipeline run against a representative legacy script — not a projected estimate</a:t>
+            </a:r>
+          </a:p>
+        </p:txBody>
+      </p:sp>
     </p:spTree>
   </p:cSld>
   <p:clrMapOvr>
@@ -4126,6 +7000,1938 @@
           </a:p>
         </p:txBody>
       </p:sp>
+      <p:sp>
+        <p:nvSpPr>
+          <p:cNvPr id="7" name="Text 0">
+            <a:extLst>
+              <a:ext uri="{FF2B5EF4-FFF2-40B4-BE49-F238E27FC236}">
+                <a16:creationId xmlns:a16="http://schemas.microsoft.com/office/drawing/2014/main" id="{2E5557A8-A21E-C820-7A50-6132F9DFE8BA}"/>
+              </a:ext>
+            </a:extLst>
+          </p:cNvPr>
+          <p:cNvSpPr/>
+          <p:nvPr/>
+        </p:nvSpPr>
+        <p:spPr>
+          <a:xfrm>
+            <a:off x="411480" y="347472"/>
+            <a:ext cx="566928" cy="384048"/>
+          </a:xfrm>
+          <a:prstGeom prst="rect">
+            <a:avLst/>
+          </a:prstGeom>
+          <a:noFill/>
+          <a:ln/>
+        </p:spPr>
+        <p:txBody>
+          <a:bodyPr wrap="square" lIns="0" tIns="0" rIns="0" bIns="0" rtlCol="0" anchor="ctr"/>
+          <a:lstStyle/>
+          <a:p>
+            <a:pPr marL="0" indent="0">
+              <a:buNone/>
+            </a:pPr>
+            <a:r>
+              <a:rPr lang="en-US" sz="2000" b="1" dirty="0">
+                <a:solidFill>
+                  <a:srgbClr val="FB4D0A"/>
+                </a:solidFill>
+                <a:latin typeface="Calibri" pitchFamily="34" charset="0"/>
+                <a:ea typeface="Calibri" pitchFamily="34" charset="-122"/>
+                <a:cs typeface="Calibri" pitchFamily="34" charset="-120"/>
+              </a:rPr>
+              <a:t>03</a:t>
+            </a:r>
+            <a:endParaRPr lang="en-US" sz="2000" dirty="0"/>
+          </a:p>
+        </p:txBody>
+      </p:sp>
+      <p:sp>
+        <p:nvSpPr>
+          <p:cNvPr id="9" name="Shape 1">
+            <a:extLst>
+              <a:ext uri="{FF2B5EF4-FFF2-40B4-BE49-F238E27FC236}">
+                <a16:creationId xmlns:a16="http://schemas.microsoft.com/office/drawing/2014/main" id="{9DDCC46B-7607-D59F-E079-6E3B00A0E886}"/>
+              </a:ext>
+            </a:extLst>
+          </p:cNvPr>
+          <p:cNvSpPr/>
+          <p:nvPr/>
+        </p:nvSpPr>
+        <p:spPr>
+          <a:xfrm>
+            <a:off x="1078992" y="429768"/>
+            <a:ext cx="0" cy="320040"/>
+          </a:xfrm>
+          <a:prstGeom prst="line">
+            <a:avLst/>
+          </a:prstGeom>
+          <a:noFill/>
+          <a:ln w="15240">
+            <a:solidFill>
+              <a:srgbClr val="D6E4EA"/>
+            </a:solidFill>
+            <a:prstDash val="solid"/>
+          </a:ln>
+        </p:spPr>
+        <p:txBody>
+          <a:bodyPr/>
+          <a:lstStyle/>
+          <a:p>
+            <a:endParaRPr lang="en-IN"/>
+          </a:p>
+        </p:txBody>
+      </p:sp>
+      <p:sp>
+        <p:nvSpPr>
+          <p:cNvPr id="10" name="Text 2">
+            <a:extLst>
+              <a:ext uri="{FF2B5EF4-FFF2-40B4-BE49-F238E27FC236}">
+                <a16:creationId xmlns:a16="http://schemas.microsoft.com/office/drawing/2014/main" id="{3C10165F-7DD4-B467-025C-79F5253C3571}"/>
+              </a:ext>
+            </a:extLst>
+          </p:cNvPr>
+          <p:cNvSpPr/>
+          <p:nvPr/>
+        </p:nvSpPr>
+        <p:spPr>
+          <a:xfrm>
+            <a:off x="1207008" y="256032"/>
+            <a:ext cx="8046720" cy="347472"/>
+          </a:xfrm>
+          <a:prstGeom prst="rect">
+            <a:avLst/>
+          </a:prstGeom>
+          <a:noFill/>
+          <a:ln/>
+        </p:spPr>
+        <p:txBody>
+          <a:bodyPr wrap="square" lIns="0" tIns="0" rIns="0" bIns="0" rtlCol="0" anchor="ctr"/>
+          <a:lstStyle/>
+          <a:p>
+            <a:r>
+              <a:rPr lang="en-US" sz="1700" b="1" dirty="0">
+                <a:solidFill>
+                  <a:srgbClr val="005071"/>
+                </a:solidFill>
+                <a:latin typeface="Calibri" pitchFamily="34" charset="0"/>
+                <a:ea typeface="Calibri" pitchFamily="34" charset="-122"/>
+                <a:cs typeface="Calibri" pitchFamily="34" charset="-120"/>
+              </a:rPr>
+              <a:t>Standing Out From Competitors</a:t>
+            </a:r>
+            <a:endParaRPr lang="en-US" sz="1700" dirty="0"/>
+          </a:p>
+        </p:txBody>
+      </p:sp>
+      <p:sp>
+        <p:nvSpPr>
+          <p:cNvPr id="11" name="Text 3">
+            <a:extLst>
+              <a:ext uri="{FF2B5EF4-FFF2-40B4-BE49-F238E27FC236}">
+                <a16:creationId xmlns:a16="http://schemas.microsoft.com/office/drawing/2014/main" id="{583068E3-B01C-5E0E-1AEA-37D00927355E}"/>
+              </a:ext>
+            </a:extLst>
+          </p:cNvPr>
+          <p:cNvSpPr/>
+          <p:nvPr/>
+        </p:nvSpPr>
+        <p:spPr>
+          <a:xfrm>
+            <a:off x="1207008" y="649224"/>
+            <a:ext cx="9509760" cy="256032"/>
+          </a:xfrm>
+          <a:prstGeom prst="rect">
+            <a:avLst/>
+          </a:prstGeom>
+          <a:noFill/>
+          <a:ln/>
+        </p:spPr>
+        <p:txBody>
+          <a:bodyPr wrap="square" lIns="0" tIns="0" rIns="0" bIns="0" rtlCol="0" anchor="ctr"/>
+          <a:lstStyle/>
+          <a:p>
+            <a:r>
+              <a:rPr lang="en-US" sz="880" dirty="0">
+                <a:solidFill>
+                  <a:srgbClr val="484848"/>
+                </a:solidFill>
+                <a:latin typeface="Calibri" pitchFamily="34" charset="0"/>
+                <a:ea typeface="Calibri" pitchFamily="34" charset="-122"/>
+                <a:cs typeface="Calibri" pitchFamily="34" charset="-120"/>
+              </a:rPr>
+              <a:t>Articulate exactly what makes your solution unique and how it delivers better value than existing market options</a:t>
+            </a:r>
+            <a:endParaRPr lang="en-US" sz="880" dirty="0"/>
+          </a:p>
+        </p:txBody>
+      </p:sp>
+      <p:sp>
+        <p:nvSpPr>
+          <p:cNvPr id="12" name="Shape 4">
+            <a:extLst>
+              <a:ext uri="{FF2B5EF4-FFF2-40B4-BE49-F238E27FC236}">
+                <a16:creationId xmlns:a16="http://schemas.microsoft.com/office/drawing/2014/main" id="{F2E33096-E302-AB6E-0E76-153A299AC2AA}"/>
+              </a:ext>
+            </a:extLst>
+          </p:cNvPr>
+          <p:cNvSpPr/>
+          <p:nvPr/>
+        </p:nvSpPr>
+        <p:spPr>
+          <a:xfrm>
+            <a:off x="411480" y="960120"/>
+            <a:ext cx="11064240" cy="0"/>
+          </a:xfrm>
+          <a:prstGeom prst="line">
+            <a:avLst/>
+          </a:prstGeom>
+          <a:noFill/>
+          <a:ln w="5080">
+            <a:solidFill>
+              <a:srgbClr val="D6E4EA"/>
+            </a:solidFill>
+            <a:prstDash val="solid"/>
+          </a:ln>
+        </p:spPr>
+        <p:txBody>
+          <a:bodyPr/>
+          <a:lstStyle/>
+          <a:p>
+            <a:endParaRPr lang="en-IN"/>
+          </a:p>
+        </p:txBody>
+      </p:sp>
+      <p:sp>
+        <p:nvSpPr>
+          <p:cNvPr id="13" name="Shape 6">
+            <a:extLst>
+              <a:ext uri="{FF2B5EF4-FFF2-40B4-BE49-F238E27FC236}">
+                <a16:creationId xmlns:a16="http://schemas.microsoft.com/office/drawing/2014/main" id="{4A49E851-B8A8-E5CD-2EAD-6BBD7DD099B4}"/>
+              </a:ext>
+            </a:extLst>
+          </p:cNvPr>
+          <p:cNvSpPr/>
+          <p:nvPr/>
+        </p:nvSpPr>
+        <p:spPr>
+          <a:xfrm>
+            <a:off x="594360" y="1298448"/>
+            <a:ext cx="91440" cy="4846320"/>
+          </a:xfrm>
+          <a:prstGeom prst="rect">
+            <a:avLst/>
+          </a:prstGeom>
+          <a:solidFill>
+            <a:srgbClr val="FB4D0A"/>
+          </a:solidFill>
+          <a:ln w="12700">
+            <a:solidFill>
+              <a:srgbClr val="FB4D0A"/>
+            </a:solidFill>
+            <a:prstDash val="solid"/>
+          </a:ln>
+        </p:spPr>
+        <p:txBody>
+          <a:bodyPr/>
+          <a:lstStyle/>
+          <a:p>
+            <a:endParaRPr lang="en-IN"/>
+          </a:p>
+        </p:txBody>
+      </p:sp>
+      <p:sp>
+        <p:nvSpPr>
+          <p:cNvPr id="14" name="Text 19">
+            <a:extLst>
+              <a:ext uri="{FF2B5EF4-FFF2-40B4-BE49-F238E27FC236}">
+                <a16:creationId xmlns:a16="http://schemas.microsoft.com/office/drawing/2014/main" id="{42262139-9EE3-A07D-3FC0-898B1F503314}"/>
+              </a:ext>
+            </a:extLst>
+          </p:cNvPr>
+          <p:cNvSpPr/>
+          <p:nvPr/>
+        </p:nvSpPr>
+        <p:spPr>
+          <a:xfrm>
+            <a:off x="7708392" y="1037844"/>
+            <a:ext cx="1088136" cy="118872"/>
+          </a:xfrm>
+          <a:prstGeom prst="rect">
+            <a:avLst/>
+          </a:prstGeom>
+          <a:noFill/>
+          <a:ln/>
+        </p:spPr>
+        <p:txBody>
+          <a:bodyPr wrap="square" lIns="0" tIns="0" rIns="0" bIns="0" rtlCol="0" anchor="ctr"/>
+          <a:lstStyle/>
+          <a:p>
+            <a:pPr marL="0" indent="0" algn="ctr">
+              <a:buNone/>
+            </a:pPr>
+            <a:r>
+              <a:rPr lang="en-US" sz="750" b="1" dirty="0">
+                <a:solidFill>
+                  <a:srgbClr val="FFFFFF"/>
+                </a:solidFill>
+                <a:latin typeface="Calibri" pitchFamily="34" charset="0"/>
+                <a:ea typeface="Calibri" pitchFamily="34" charset="-122"/>
+                <a:cs typeface="Calibri" pitchFamily="34" charset="-120"/>
+              </a:rPr>
+              <a:t>Market lens</a:t>
+            </a:r>
+            <a:endParaRPr lang="en-US" sz="750" dirty="0"/>
+          </a:p>
+        </p:txBody>
+      </p:sp>
+      <p:sp>
+        <p:nvSpPr>
+          <p:cNvPr id="15" name="Rounded Rectangle 14">
+            <a:extLst>
+              <a:ext uri="{FF2B5EF4-FFF2-40B4-BE49-F238E27FC236}">
+                <a16:creationId xmlns:a16="http://schemas.microsoft.com/office/drawing/2014/main" id="{898C8850-CBE3-7AAD-157F-13F2DA5CE139}"/>
+              </a:ext>
+            </a:extLst>
+          </p:cNvPr>
+          <p:cNvSpPr/>
+          <p:nvPr/>
+        </p:nvSpPr>
+        <p:spPr>
+          <a:xfrm>
+            <a:off x="7635240" y="1005840"/>
+            <a:ext cx="1234440" cy="219456"/>
+          </a:xfrm>
+          <a:prstGeom prst="roundRect">
+            <a:avLst>
+              <a:gd name="adj" fmla="val 50000"/>
+            </a:avLst>
+          </a:prstGeom>
+          <a:solidFill>
+            <a:srgbClr val="005071"/>
+          </a:solidFill>
+          <a:ln>
+            <a:noFill/>
+          </a:ln>
+          <a:effectLst/>
+        </p:spPr>
+        <p:style>
+          <a:lnRef idx="1">
+            <a:schemeClr val="accent1"/>
+          </a:lnRef>
+          <a:fillRef idx="3">
+            <a:schemeClr val="accent1"/>
+          </a:fillRef>
+          <a:effectRef idx="2">
+            <a:schemeClr val="accent1"/>
+          </a:effectRef>
+          <a:fontRef idx="minor">
+            <a:schemeClr val="lt1"/>
+          </a:fontRef>
+        </p:style>
+        <p:txBody>
+          <a:bodyPr rtlCol="0" anchor="ctr"/>
+          <a:lstStyle/>
+          <a:p>
+            <a:pPr algn="ctr"/>
+            <a:endParaRPr/>
+          </a:p>
+        </p:txBody>
+      </p:sp>
+      <p:sp>
+        <p:nvSpPr>
+          <p:cNvPr id="16" name="TextBox 15">
+            <a:extLst>
+              <a:ext uri="{FF2B5EF4-FFF2-40B4-BE49-F238E27FC236}">
+                <a16:creationId xmlns:a16="http://schemas.microsoft.com/office/drawing/2014/main" id="{AABA2EC3-3F50-1D24-9A5A-12F97EBB4DBE}"/>
+              </a:ext>
+            </a:extLst>
+          </p:cNvPr>
+          <p:cNvSpPr txBox="1"/>
+          <p:nvPr/>
+        </p:nvSpPr>
+        <p:spPr>
+          <a:xfrm>
+            <a:off x="7635240" y="1005840"/>
+            <a:ext cx="1234440" cy="219456"/>
+          </a:xfrm>
+          <a:prstGeom prst="rect">
+            <a:avLst/>
+          </a:prstGeom>
+          <a:noFill/>
+        </p:spPr>
+        <p:txBody>
+          <a:bodyPr wrap="square" lIns="0" tIns="0" rIns="0" bIns="0" anchor="ctr">
+            <a:spAutoFit/>
+          </a:bodyPr>
+          <a:lstStyle/>
+          <a:p>
+            <a:pPr algn="ctr"/>
+            <a:r>
+              <a:rPr sz="850" b="1" i="0">
+                <a:solidFill>
+                  <a:srgbClr val="FFFFFF"/>
+                </a:solidFill>
+                <a:latin typeface="Calibri"/>
+              </a:rPr>
+              <a:t>MARKET LENS</a:t>
+            </a:r>
+          </a:p>
+        </p:txBody>
+      </p:sp>
+      <p:sp>
+        <p:nvSpPr>
+          <p:cNvPr id="17" name="Rounded Rectangle 16">
+            <a:extLst>
+              <a:ext uri="{FF2B5EF4-FFF2-40B4-BE49-F238E27FC236}">
+                <a16:creationId xmlns:a16="http://schemas.microsoft.com/office/drawing/2014/main" id="{78330A31-8A6F-38A9-6224-08BB75B6879C}"/>
+              </a:ext>
+            </a:extLst>
+          </p:cNvPr>
+          <p:cNvSpPr/>
+          <p:nvPr/>
+        </p:nvSpPr>
+        <p:spPr>
+          <a:xfrm>
+            <a:off x="868680" y="1435607"/>
+            <a:ext cx="2514600" cy="502920"/>
+          </a:xfrm>
+          <a:prstGeom prst="roundRect">
+            <a:avLst>
+              <a:gd name="adj" fmla="val 12000"/>
+            </a:avLst>
+          </a:prstGeom>
+          <a:solidFill>
+            <a:srgbClr val="005071"/>
+          </a:solidFill>
+          <a:ln>
+            <a:noFill/>
+          </a:ln>
+          <a:effectLst/>
+        </p:spPr>
+        <p:style>
+          <a:lnRef idx="1">
+            <a:schemeClr val="accent1"/>
+          </a:lnRef>
+          <a:fillRef idx="3">
+            <a:schemeClr val="accent1"/>
+          </a:fillRef>
+          <a:effectRef idx="2">
+            <a:schemeClr val="accent1"/>
+          </a:effectRef>
+          <a:fontRef idx="minor">
+            <a:schemeClr val="lt1"/>
+          </a:fontRef>
+        </p:style>
+        <p:txBody>
+          <a:bodyPr rtlCol="0" anchor="ctr"/>
+          <a:lstStyle/>
+          <a:p>
+            <a:pPr algn="ctr"/>
+            <a:endParaRPr/>
+          </a:p>
+        </p:txBody>
+      </p:sp>
+      <p:sp>
+        <p:nvSpPr>
+          <p:cNvPr id="18" name="TextBox 17">
+            <a:extLst>
+              <a:ext uri="{FF2B5EF4-FFF2-40B4-BE49-F238E27FC236}">
+                <a16:creationId xmlns:a16="http://schemas.microsoft.com/office/drawing/2014/main" id="{18CA7267-AE8A-486A-081E-2B373C172007}"/>
+              </a:ext>
+            </a:extLst>
+          </p:cNvPr>
+          <p:cNvSpPr txBox="1"/>
+          <p:nvPr/>
+        </p:nvSpPr>
+        <p:spPr>
+          <a:xfrm>
+            <a:off x="941832" y="1435607"/>
+            <a:ext cx="2368296" cy="502920"/>
+          </a:xfrm>
+          <a:prstGeom prst="rect">
+            <a:avLst/>
+          </a:prstGeom>
+          <a:noFill/>
+        </p:spPr>
+        <p:txBody>
+          <a:bodyPr wrap="square" lIns="0" tIns="0" rIns="0" bIns="0" anchor="ctr">
+            <a:spAutoFit/>
+          </a:bodyPr>
+          <a:lstStyle/>
+          <a:p>
+            <a:pPr algn="ctr"/>
+            <a:r>
+              <a:rPr sz="1150" b="1" i="0">
+                <a:solidFill>
+                  <a:srgbClr val="FFFFFF"/>
+                </a:solidFill>
+                <a:latin typeface="Calibri"/>
+              </a:rPr>
+              <a:t>SnowConvert /</a:t>
+            </a:r>
+          </a:p>
+          <a:p>
+            <a:pPr algn="ctr"/>
+            <a:r>
+              <a:rPr sz="1150" b="1" i="0">
+                <a:solidFill>
+                  <a:srgbClr val="FFFFFF"/>
+                </a:solidFill>
+                <a:latin typeface="Calibri"/>
+              </a:rPr>
+              <a:t>AWS SCT</a:t>
+            </a:r>
+          </a:p>
+        </p:txBody>
+      </p:sp>
+      <p:sp>
+        <p:nvSpPr>
+          <p:cNvPr id="19" name="Rounded Rectangle 18">
+            <a:extLst>
+              <a:ext uri="{FF2B5EF4-FFF2-40B4-BE49-F238E27FC236}">
+                <a16:creationId xmlns:a16="http://schemas.microsoft.com/office/drawing/2014/main" id="{EF213B93-E740-17D0-E7D8-9E7C7518085D}"/>
+              </a:ext>
+            </a:extLst>
+          </p:cNvPr>
+          <p:cNvSpPr/>
+          <p:nvPr/>
+        </p:nvSpPr>
+        <p:spPr>
+          <a:xfrm>
+            <a:off x="868680" y="1984248"/>
+            <a:ext cx="2514600" cy="1965960"/>
+          </a:xfrm>
+          <a:prstGeom prst="roundRect">
+            <a:avLst>
+              <a:gd name="adj" fmla="val 8000"/>
+            </a:avLst>
+          </a:prstGeom>
+          <a:solidFill>
+            <a:srgbClr val="F3F8FA"/>
+          </a:solidFill>
+          <a:ln>
+            <a:noFill/>
+          </a:ln>
+          <a:effectLst/>
+        </p:spPr>
+        <p:style>
+          <a:lnRef idx="1">
+            <a:schemeClr val="accent1"/>
+          </a:lnRef>
+          <a:fillRef idx="3">
+            <a:schemeClr val="accent1"/>
+          </a:fillRef>
+          <a:effectRef idx="2">
+            <a:schemeClr val="accent1"/>
+          </a:effectRef>
+          <a:fontRef idx="minor">
+            <a:schemeClr val="lt1"/>
+          </a:fontRef>
+        </p:style>
+        <p:txBody>
+          <a:bodyPr rtlCol="0" anchor="ctr"/>
+          <a:lstStyle/>
+          <a:p>
+            <a:pPr algn="ctr"/>
+            <a:endParaRPr/>
+          </a:p>
+        </p:txBody>
+      </p:sp>
+      <p:sp>
+        <p:nvSpPr>
+          <p:cNvPr id="20" name="TextBox 19">
+            <a:extLst>
+              <a:ext uri="{FF2B5EF4-FFF2-40B4-BE49-F238E27FC236}">
+                <a16:creationId xmlns:a16="http://schemas.microsoft.com/office/drawing/2014/main" id="{A4E99BCF-395A-1AA6-AADD-1D17B3D5A0C8}"/>
+              </a:ext>
+            </a:extLst>
+          </p:cNvPr>
+          <p:cNvSpPr txBox="1"/>
+          <p:nvPr/>
+        </p:nvSpPr>
+        <p:spPr>
+          <a:xfrm>
+            <a:off x="1033271" y="2139696"/>
+            <a:ext cx="2185416" cy="1691639"/>
+          </a:xfrm>
+          <a:prstGeom prst="rect">
+            <a:avLst/>
+          </a:prstGeom>
+          <a:noFill/>
+        </p:spPr>
+        <p:txBody>
+          <a:bodyPr wrap="square" lIns="0" tIns="0" rIns="0" bIns="0" anchor="t">
+            <a:spAutoFit/>
+          </a:bodyPr>
+          <a:lstStyle/>
+          <a:p>
+            <a:pPr algn="l">
+              <a:lnSpc>
+                <a:spcPct val="115000"/>
+              </a:lnSpc>
+            </a:pPr>
+            <a:r>
+              <a:rPr sz="850" b="1" i="0">
+                <a:solidFill>
+                  <a:srgbClr val="8A8A8A"/>
+                </a:solidFill>
+                <a:latin typeface="Calibri"/>
+              </a:rPr>
+              <a:t>GOOD AT</a:t>
+            </a:r>
+          </a:p>
+          <a:p>
+            <a:pPr algn="l">
+              <a:lnSpc>
+                <a:spcPct val="115000"/>
+              </a:lnSpc>
+            </a:pPr>
+            <a:r>
+              <a:rPr sz="1050" b="0" i="0">
+                <a:solidFill>
+                  <a:srgbClr val="1F2A2E"/>
+                </a:solidFill>
+                <a:latin typeface="Calibri"/>
+              </a:rPr>
+              <a:t>Automated syntax conversion</a:t>
+            </a:r>
+          </a:p>
+          <a:p>
+            <a:pPr algn="l">
+              <a:lnSpc>
+                <a:spcPct val="115000"/>
+              </a:lnSpc>
+            </a:pPr>
+            <a:endParaRPr sz="1050" b="0" i="0">
+              <a:solidFill>
+                <a:srgbClr val="1F2A2E"/>
+              </a:solidFill>
+              <a:latin typeface="Calibri"/>
+            </a:endParaRPr>
+          </a:p>
+          <a:p>
+            <a:pPr algn="l">
+              <a:lnSpc>
+                <a:spcPct val="115000"/>
+              </a:lnSpc>
+            </a:pPr>
+            <a:r>
+              <a:rPr sz="850" b="1" i="0">
+                <a:solidFill>
+                  <a:srgbClr val="8A8A8A"/>
+                </a:solidFill>
+                <a:latin typeface="Calibri"/>
+              </a:rPr>
+              <a:t>THE GAP</a:t>
+            </a:r>
+          </a:p>
+          <a:p>
+            <a:pPr algn="l">
+              <a:lnSpc>
+                <a:spcPct val="115000"/>
+              </a:lnSpc>
+            </a:pPr>
+            <a:r>
+              <a:rPr sz="1050" b="0" i="0">
+                <a:solidFill>
+                  <a:srgbClr val="1F2A2E"/>
+                </a:solidFill>
+                <a:latin typeface="Calibri"/>
+              </a:rPr>
+              <a:t>No rule rationale or usable documentation</a:t>
+            </a:r>
+          </a:p>
+        </p:txBody>
+      </p:sp>
+      <p:sp>
+        <p:nvSpPr>
+          <p:cNvPr id="21" name="Rounded Rectangle 20">
+            <a:extLst>
+              <a:ext uri="{FF2B5EF4-FFF2-40B4-BE49-F238E27FC236}">
+                <a16:creationId xmlns:a16="http://schemas.microsoft.com/office/drawing/2014/main" id="{D971A709-A5A4-EDE8-F79A-C2C004255E5B}"/>
+              </a:ext>
+            </a:extLst>
+          </p:cNvPr>
+          <p:cNvSpPr/>
+          <p:nvPr/>
+        </p:nvSpPr>
+        <p:spPr>
+          <a:xfrm>
+            <a:off x="3547872" y="1435607"/>
+            <a:ext cx="2514600" cy="502920"/>
+          </a:xfrm>
+          <a:prstGeom prst="roundRect">
+            <a:avLst>
+              <a:gd name="adj" fmla="val 12000"/>
+            </a:avLst>
+          </a:prstGeom>
+          <a:solidFill>
+            <a:srgbClr val="005071"/>
+          </a:solidFill>
+          <a:ln>
+            <a:noFill/>
+          </a:ln>
+          <a:effectLst/>
+        </p:spPr>
+        <p:style>
+          <a:lnRef idx="1">
+            <a:schemeClr val="accent1"/>
+          </a:lnRef>
+          <a:fillRef idx="3">
+            <a:schemeClr val="accent1"/>
+          </a:fillRef>
+          <a:effectRef idx="2">
+            <a:schemeClr val="accent1"/>
+          </a:effectRef>
+          <a:fontRef idx="minor">
+            <a:schemeClr val="lt1"/>
+          </a:fontRef>
+        </p:style>
+        <p:txBody>
+          <a:bodyPr rtlCol="0" anchor="ctr"/>
+          <a:lstStyle/>
+          <a:p>
+            <a:pPr algn="ctr"/>
+            <a:endParaRPr/>
+          </a:p>
+        </p:txBody>
+      </p:sp>
+      <p:sp>
+        <p:nvSpPr>
+          <p:cNvPr id="22" name="TextBox 21">
+            <a:extLst>
+              <a:ext uri="{FF2B5EF4-FFF2-40B4-BE49-F238E27FC236}">
+                <a16:creationId xmlns:a16="http://schemas.microsoft.com/office/drawing/2014/main" id="{38562E69-3247-19B8-F231-B1DC100D7F15}"/>
+              </a:ext>
+            </a:extLst>
+          </p:cNvPr>
+          <p:cNvSpPr txBox="1"/>
+          <p:nvPr/>
+        </p:nvSpPr>
+        <p:spPr>
+          <a:xfrm>
+            <a:off x="3621024" y="1435607"/>
+            <a:ext cx="2368296" cy="502920"/>
+          </a:xfrm>
+          <a:prstGeom prst="rect">
+            <a:avLst/>
+          </a:prstGeom>
+          <a:noFill/>
+        </p:spPr>
+        <p:txBody>
+          <a:bodyPr wrap="square" lIns="0" tIns="0" rIns="0" bIns="0" anchor="ctr">
+            <a:spAutoFit/>
+          </a:bodyPr>
+          <a:lstStyle/>
+          <a:p>
+            <a:pPr algn="ctr"/>
+            <a:r>
+              <a:rPr sz="1150" b="1" i="0">
+                <a:solidFill>
+                  <a:srgbClr val="FFFFFF"/>
+                </a:solidFill>
+                <a:latin typeface="Calibri"/>
+              </a:rPr>
+              <a:t>BladeBridge /</a:t>
+            </a:r>
+          </a:p>
+          <a:p>
+            <a:pPr algn="ctr"/>
+            <a:r>
+              <a:rPr sz="1150" b="1" i="0">
+                <a:solidFill>
+                  <a:srgbClr val="FFFFFF"/>
+                </a:solidFill>
+                <a:latin typeface="Calibri"/>
+              </a:rPr>
+              <a:t>Datometry</a:t>
+            </a:r>
+          </a:p>
+        </p:txBody>
+      </p:sp>
+      <p:sp>
+        <p:nvSpPr>
+          <p:cNvPr id="23" name="Rounded Rectangle 22">
+            <a:extLst>
+              <a:ext uri="{FF2B5EF4-FFF2-40B4-BE49-F238E27FC236}">
+                <a16:creationId xmlns:a16="http://schemas.microsoft.com/office/drawing/2014/main" id="{D7B58599-62E9-9ED7-1C54-87968116426A}"/>
+              </a:ext>
+            </a:extLst>
+          </p:cNvPr>
+          <p:cNvSpPr/>
+          <p:nvPr/>
+        </p:nvSpPr>
+        <p:spPr>
+          <a:xfrm>
+            <a:off x="3547872" y="1984248"/>
+            <a:ext cx="2514600" cy="1965960"/>
+          </a:xfrm>
+          <a:prstGeom prst="roundRect">
+            <a:avLst>
+              <a:gd name="adj" fmla="val 8000"/>
+            </a:avLst>
+          </a:prstGeom>
+          <a:solidFill>
+            <a:srgbClr val="F3F8FA"/>
+          </a:solidFill>
+          <a:ln>
+            <a:noFill/>
+          </a:ln>
+          <a:effectLst/>
+        </p:spPr>
+        <p:style>
+          <a:lnRef idx="1">
+            <a:schemeClr val="accent1"/>
+          </a:lnRef>
+          <a:fillRef idx="3">
+            <a:schemeClr val="accent1"/>
+          </a:fillRef>
+          <a:effectRef idx="2">
+            <a:schemeClr val="accent1"/>
+          </a:effectRef>
+          <a:fontRef idx="minor">
+            <a:schemeClr val="lt1"/>
+          </a:fontRef>
+        </p:style>
+        <p:txBody>
+          <a:bodyPr rtlCol="0" anchor="ctr"/>
+          <a:lstStyle/>
+          <a:p>
+            <a:pPr algn="ctr"/>
+            <a:endParaRPr/>
+          </a:p>
+        </p:txBody>
+      </p:sp>
+      <p:sp>
+        <p:nvSpPr>
+          <p:cNvPr id="24" name="TextBox 23">
+            <a:extLst>
+              <a:ext uri="{FF2B5EF4-FFF2-40B4-BE49-F238E27FC236}">
+                <a16:creationId xmlns:a16="http://schemas.microsoft.com/office/drawing/2014/main" id="{837DB566-C6BB-15BE-2B44-D9B70AE74B7B}"/>
+              </a:ext>
+            </a:extLst>
+          </p:cNvPr>
+          <p:cNvSpPr txBox="1"/>
+          <p:nvPr/>
+        </p:nvSpPr>
+        <p:spPr>
+          <a:xfrm>
+            <a:off x="3712463" y="2139696"/>
+            <a:ext cx="2185416" cy="1691639"/>
+          </a:xfrm>
+          <a:prstGeom prst="rect">
+            <a:avLst/>
+          </a:prstGeom>
+          <a:noFill/>
+        </p:spPr>
+        <p:txBody>
+          <a:bodyPr wrap="square" lIns="0" tIns="0" rIns="0" bIns="0" anchor="t">
+            <a:spAutoFit/>
+          </a:bodyPr>
+          <a:lstStyle/>
+          <a:p>
+            <a:pPr algn="l">
+              <a:lnSpc>
+                <a:spcPct val="115000"/>
+              </a:lnSpc>
+            </a:pPr>
+            <a:r>
+              <a:rPr sz="850" b="1" i="0">
+                <a:solidFill>
+                  <a:srgbClr val="8A8A8A"/>
+                </a:solidFill>
+                <a:latin typeface="Calibri"/>
+              </a:rPr>
+              <a:t>GOOD AT</a:t>
+            </a:r>
+          </a:p>
+          <a:p>
+            <a:pPr algn="l">
+              <a:lnSpc>
+                <a:spcPct val="115000"/>
+              </a:lnSpc>
+            </a:pPr>
+            <a:r>
+              <a:rPr sz="1050" b="0" i="0">
+                <a:solidFill>
+                  <a:srgbClr val="1F2A2E"/>
+                </a:solidFill>
+                <a:latin typeface="Calibri"/>
+              </a:rPr>
+              <a:t>Automated transpile-and-lift</a:t>
+            </a:r>
+          </a:p>
+          <a:p>
+            <a:pPr algn="l">
+              <a:lnSpc>
+                <a:spcPct val="115000"/>
+              </a:lnSpc>
+            </a:pPr>
+            <a:endParaRPr sz="1050" b="0" i="0">
+              <a:solidFill>
+                <a:srgbClr val="1F2A2E"/>
+              </a:solidFill>
+              <a:latin typeface="Calibri"/>
+            </a:endParaRPr>
+          </a:p>
+          <a:p>
+            <a:pPr algn="l">
+              <a:lnSpc>
+                <a:spcPct val="115000"/>
+              </a:lnSpc>
+            </a:pPr>
+            <a:r>
+              <a:rPr sz="850" b="1" i="0">
+                <a:solidFill>
+                  <a:srgbClr val="8A8A8A"/>
+                </a:solidFill>
+                <a:latin typeface="Calibri"/>
+              </a:rPr>
+              <a:t>THE GAP</a:t>
+            </a:r>
+          </a:p>
+          <a:p>
+            <a:pPr algn="l">
+              <a:lnSpc>
+                <a:spcPct val="115000"/>
+              </a:lnSpc>
+            </a:pPr>
+            <a:r>
+              <a:rPr sz="1050" b="0" i="0">
+                <a:solidFill>
+                  <a:srgbClr val="1F2A2E"/>
+                </a:solidFill>
+                <a:latin typeface="Calibri"/>
+              </a:rPr>
+              <a:t>Docs &amp; governance treated as afterthought</a:t>
+            </a:r>
+          </a:p>
+        </p:txBody>
+      </p:sp>
+      <p:sp>
+        <p:nvSpPr>
+          <p:cNvPr id="25" name="Rounded Rectangle 24">
+            <a:extLst>
+              <a:ext uri="{FF2B5EF4-FFF2-40B4-BE49-F238E27FC236}">
+                <a16:creationId xmlns:a16="http://schemas.microsoft.com/office/drawing/2014/main" id="{751B3BDD-9818-85A0-C169-CD21E7EE6C49}"/>
+              </a:ext>
+            </a:extLst>
+          </p:cNvPr>
+          <p:cNvSpPr/>
+          <p:nvPr/>
+        </p:nvSpPr>
+        <p:spPr>
+          <a:xfrm>
+            <a:off x="6227064" y="1435607"/>
+            <a:ext cx="2514600" cy="502920"/>
+          </a:xfrm>
+          <a:prstGeom prst="roundRect">
+            <a:avLst>
+              <a:gd name="adj" fmla="val 12000"/>
+            </a:avLst>
+          </a:prstGeom>
+          <a:solidFill>
+            <a:srgbClr val="005071"/>
+          </a:solidFill>
+          <a:ln>
+            <a:noFill/>
+          </a:ln>
+          <a:effectLst/>
+        </p:spPr>
+        <p:style>
+          <a:lnRef idx="1">
+            <a:schemeClr val="accent1"/>
+          </a:lnRef>
+          <a:fillRef idx="3">
+            <a:schemeClr val="accent1"/>
+          </a:fillRef>
+          <a:effectRef idx="2">
+            <a:schemeClr val="accent1"/>
+          </a:effectRef>
+          <a:fontRef idx="minor">
+            <a:schemeClr val="lt1"/>
+          </a:fontRef>
+        </p:style>
+        <p:txBody>
+          <a:bodyPr rtlCol="0" anchor="ctr"/>
+          <a:lstStyle/>
+          <a:p>
+            <a:pPr algn="ctr"/>
+            <a:endParaRPr/>
+          </a:p>
+        </p:txBody>
+      </p:sp>
+      <p:sp>
+        <p:nvSpPr>
+          <p:cNvPr id="26" name="TextBox 25">
+            <a:extLst>
+              <a:ext uri="{FF2B5EF4-FFF2-40B4-BE49-F238E27FC236}">
+                <a16:creationId xmlns:a16="http://schemas.microsoft.com/office/drawing/2014/main" id="{24A1BBDE-D115-A9AF-2352-3C59EC378356}"/>
+              </a:ext>
+            </a:extLst>
+          </p:cNvPr>
+          <p:cNvSpPr txBox="1"/>
+          <p:nvPr/>
+        </p:nvSpPr>
+        <p:spPr>
+          <a:xfrm>
+            <a:off x="6300216" y="1435607"/>
+            <a:ext cx="2368296" cy="502920"/>
+          </a:xfrm>
+          <a:prstGeom prst="rect">
+            <a:avLst/>
+          </a:prstGeom>
+          <a:noFill/>
+        </p:spPr>
+        <p:txBody>
+          <a:bodyPr wrap="square" lIns="0" tIns="0" rIns="0" bIns="0" anchor="ctr">
+            <a:spAutoFit/>
+          </a:bodyPr>
+          <a:lstStyle/>
+          <a:p>
+            <a:pPr algn="ctr"/>
+            <a:r>
+              <a:rPr sz="1150" b="1" i="0">
+                <a:solidFill>
+                  <a:srgbClr val="FFFFFF"/>
+                </a:solidFill>
+                <a:latin typeface="Calibri"/>
+              </a:rPr>
+              <a:t>Generic AI</a:t>
+            </a:r>
+          </a:p>
+          <a:p>
+            <a:pPr algn="ctr"/>
+            <a:r>
+              <a:rPr sz="1150" b="1" i="0">
+                <a:solidFill>
+                  <a:srgbClr val="FFFFFF"/>
+                </a:solidFill>
+                <a:latin typeface="Calibri"/>
+              </a:rPr>
+              <a:t>Copilots</a:t>
+            </a:r>
+          </a:p>
+        </p:txBody>
+      </p:sp>
+      <p:sp>
+        <p:nvSpPr>
+          <p:cNvPr id="27" name="Rounded Rectangle 26">
+            <a:extLst>
+              <a:ext uri="{FF2B5EF4-FFF2-40B4-BE49-F238E27FC236}">
+                <a16:creationId xmlns:a16="http://schemas.microsoft.com/office/drawing/2014/main" id="{ED780A22-CBDE-2778-D46A-ECDC9322B566}"/>
+              </a:ext>
+            </a:extLst>
+          </p:cNvPr>
+          <p:cNvSpPr/>
+          <p:nvPr/>
+        </p:nvSpPr>
+        <p:spPr>
+          <a:xfrm>
+            <a:off x="6227064" y="1984248"/>
+            <a:ext cx="2514600" cy="1965960"/>
+          </a:xfrm>
+          <a:prstGeom prst="roundRect">
+            <a:avLst>
+              <a:gd name="adj" fmla="val 8000"/>
+            </a:avLst>
+          </a:prstGeom>
+          <a:solidFill>
+            <a:srgbClr val="F3F8FA"/>
+          </a:solidFill>
+          <a:ln>
+            <a:noFill/>
+          </a:ln>
+          <a:effectLst/>
+        </p:spPr>
+        <p:style>
+          <a:lnRef idx="1">
+            <a:schemeClr val="accent1"/>
+          </a:lnRef>
+          <a:fillRef idx="3">
+            <a:schemeClr val="accent1"/>
+          </a:fillRef>
+          <a:effectRef idx="2">
+            <a:schemeClr val="accent1"/>
+          </a:effectRef>
+          <a:fontRef idx="minor">
+            <a:schemeClr val="lt1"/>
+          </a:fontRef>
+        </p:style>
+        <p:txBody>
+          <a:bodyPr rtlCol="0" anchor="ctr"/>
+          <a:lstStyle/>
+          <a:p>
+            <a:pPr algn="ctr"/>
+            <a:endParaRPr/>
+          </a:p>
+        </p:txBody>
+      </p:sp>
+      <p:sp>
+        <p:nvSpPr>
+          <p:cNvPr id="28" name="TextBox 27">
+            <a:extLst>
+              <a:ext uri="{FF2B5EF4-FFF2-40B4-BE49-F238E27FC236}">
+                <a16:creationId xmlns:a16="http://schemas.microsoft.com/office/drawing/2014/main" id="{25809493-EE2B-143F-5194-6F6722D4853E}"/>
+              </a:ext>
+            </a:extLst>
+          </p:cNvPr>
+          <p:cNvSpPr txBox="1"/>
+          <p:nvPr/>
+        </p:nvSpPr>
+        <p:spPr>
+          <a:xfrm>
+            <a:off x="6391656" y="2139696"/>
+            <a:ext cx="2185416" cy="1691639"/>
+          </a:xfrm>
+          <a:prstGeom prst="rect">
+            <a:avLst/>
+          </a:prstGeom>
+          <a:noFill/>
+        </p:spPr>
+        <p:txBody>
+          <a:bodyPr wrap="square" lIns="0" tIns="0" rIns="0" bIns="0" anchor="t">
+            <a:spAutoFit/>
+          </a:bodyPr>
+          <a:lstStyle/>
+          <a:p>
+            <a:pPr algn="l">
+              <a:lnSpc>
+                <a:spcPct val="115000"/>
+              </a:lnSpc>
+            </a:pPr>
+            <a:r>
+              <a:rPr sz="850" b="1" i="0">
+                <a:solidFill>
+                  <a:srgbClr val="8A8A8A"/>
+                </a:solidFill>
+                <a:latin typeface="Calibri"/>
+              </a:rPr>
+              <a:t>GOOD AT</a:t>
+            </a:r>
+          </a:p>
+          <a:p>
+            <a:pPr algn="l">
+              <a:lnSpc>
+                <a:spcPct val="115000"/>
+              </a:lnSpc>
+            </a:pPr>
+            <a:r>
+              <a:rPr sz="1050" b="0" i="0">
+                <a:solidFill>
+                  <a:srgbClr val="1F2A2E"/>
+                </a:solidFill>
+                <a:latin typeface="Calibri"/>
+              </a:rPr>
+              <a:t>Fast, flexible code explanation</a:t>
+            </a:r>
+          </a:p>
+          <a:p>
+            <a:pPr algn="l">
+              <a:lnSpc>
+                <a:spcPct val="115000"/>
+              </a:lnSpc>
+            </a:pPr>
+            <a:endParaRPr sz="1050" b="0" i="0">
+              <a:solidFill>
+                <a:srgbClr val="1F2A2E"/>
+              </a:solidFill>
+              <a:latin typeface="Calibri"/>
+            </a:endParaRPr>
+          </a:p>
+          <a:p>
+            <a:pPr algn="l">
+              <a:lnSpc>
+                <a:spcPct val="115000"/>
+              </a:lnSpc>
+            </a:pPr>
+            <a:r>
+              <a:rPr sz="850" b="1" i="0">
+                <a:solidFill>
+                  <a:srgbClr val="8A8A8A"/>
+                </a:solidFill>
+                <a:latin typeface="Calibri"/>
+              </a:rPr>
+              <a:t>THE GAP</a:t>
+            </a:r>
+          </a:p>
+          <a:p>
+            <a:pPr algn="l">
+              <a:lnSpc>
+                <a:spcPct val="115000"/>
+              </a:lnSpc>
+            </a:pPr>
+            <a:r>
+              <a:rPr sz="1050" b="0" i="0">
+                <a:solidFill>
+                  <a:srgbClr val="1F2A2E"/>
+                </a:solidFill>
+                <a:latin typeface="Calibri"/>
+              </a:rPr>
+              <a:t>No fact-check — can invent rules that don't exist</a:t>
+            </a:r>
+          </a:p>
+        </p:txBody>
+      </p:sp>
+      <p:sp>
+        <p:nvSpPr>
+          <p:cNvPr id="30" name="Rounded Rectangle 29">
+            <a:extLst>
+              <a:ext uri="{FF2B5EF4-FFF2-40B4-BE49-F238E27FC236}">
+                <a16:creationId xmlns:a16="http://schemas.microsoft.com/office/drawing/2014/main" id="{602124CA-7485-0F95-C0EC-F3959B88F356}"/>
+              </a:ext>
+            </a:extLst>
+          </p:cNvPr>
+          <p:cNvSpPr/>
+          <p:nvPr/>
+        </p:nvSpPr>
+        <p:spPr>
+          <a:xfrm>
+            <a:off x="8906256" y="1435607"/>
+            <a:ext cx="2514600" cy="502920"/>
+          </a:xfrm>
+          <a:prstGeom prst="roundRect">
+            <a:avLst>
+              <a:gd name="adj" fmla="val 12000"/>
+            </a:avLst>
+          </a:prstGeom>
+          <a:solidFill>
+            <a:srgbClr val="FB4D0A"/>
+          </a:solidFill>
+          <a:ln>
+            <a:noFill/>
+          </a:ln>
+          <a:effectLst/>
+        </p:spPr>
+        <p:style>
+          <a:lnRef idx="1">
+            <a:schemeClr val="accent1"/>
+          </a:lnRef>
+          <a:fillRef idx="3">
+            <a:schemeClr val="accent1"/>
+          </a:fillRef>
+          <a:effectRef idx="2">
+            <a:schemeClr val="accent1"/>
+          </a:effectRef>
+          <a:fontRef idx="minor">
+            <a:schemeClr val="lt1"/>
+          </a:fontRef>
+        </p:style>
+        <p:txBody>
+          <a:bodyPr rtlCol="0" anchor="ctr"/>
+          <a:lstStyle/>
+          <a:p>
+            <a:pPr algn="ctr"/>
+            <a:endParaRPr/>
+          </a:p>
+        </p:txBody>
+      </p:sp>
+      <p:sp>
+        <p:nvSpPr>
+          <p:cNvPr id="31" name="TextBox 30">
+            <a:extLst>
+              <a:ext uri="{FF2B5EF4-FFF2-40B4-BE49-F238E27FC236}">
+                <a16:creationId xmlns:a16="http://schemas.microsoft.com/office/drawing/2014/main" id="{4B188229-986D-58E7-9528-32D137B05133}"/>
+              </a:ext>
+            </a:extLst>
+          </p:cNvPr>
+          <p:cNvSpPr txBox="1"/>
+          <p:nvPr/>
+        </p:nvSpPr>
+        <p:spPr>
+          <a:xfrm>
+            <a:off x="8979408" y="1435607"/>
+            <a:ext cx="2368296" cy="502920"/>
+          </a:xfrm>
+          <a:prstGeom prst="rect">
+            <a:avLst/>
+          </a:prstGeom>
+          <a:noFill/>
+        </p:spPr>
+        <p:txBody>
+          <a:bodyPr wrap="square" lIns="0" tIns="0" rIns="0" bIns="0" anchor="ctr">
+            <a:spAutoFit/>
+          </a:bodyPr>
+          <a:lstStyle/>
+          <a:p>
+            <a:pPr algn="ctr"/>
+            <a:r>
+              <a:rPr sz="1150" b="1" i="0">
+                <a:solidFill>
+                  <a:srgbClr val="FFFFFF"/>
+                </a:solidFill>
+                <a:latin typeface="Calibri"/>
+              </a:rPr>
+              <a:t>Our Framework</a:t>
+            </a:r>
+          </a:p>
+        </p:txBody>
+      </p:sp>
+      <p:sp>
+        <p:nvSpPr>
+          <p:cNvPr id="32" name="Rounded Rectangle 31">
+            <a:extLst>
+              <a:ext uri="{FF2B5EF4-FFF2-40B4-BE49-F238E27FC236}">
+                <a16:creationId xmlns:a16="http://schemas.microsoft.com/office/drawing/2014/main" id="{5394FF34-BDF7-3D75-2D06-05844EC92D0F}"/>
+              </a:ext>
+            </a:extLst>
+          </p:cNvPr>
+          <p:cNvSpPr/>
+          <p:nvPr/>
+        </p:nvSpPr>
+        <p:spPr>
+          <a:xfrm>
+            <a:off x="8906256" y="1984248"/>
+            <a:ext cx="2514600" cy="1965960"/>
+          </a:xfrm>
+          <a:prstGeom prst="roundRect">
+            <a:avLst>
+              <a:gd name="adj" fmla="val 8000"/>
+            </a:avLst>
+          </a:prstGeom>
+          <a:solidFill>
+            <a:srgbClr val="FFF3EA"/>
+          </a:solidFill>
+          <a:ln w="15875">
+            <a:solidFill>
+              <a:srgbClr val="FB4D0A"/>
+            </a:solidFill>
+          </a:ln>
+          <a:effectLst/>
+        </p:spPr>
+        <p:style>
+          <a:lnRef idx="1">
+            <a:schemeClr val="accent1"/>
+          </a:lnRef>
+          <a:fillRef idx="3">
+            <a:schemeClr val="accent1"/>
+          </a:fillRef>
+          <a:effectRef idx="2">
+            <a:schemeClr val="accent1"/>
+          </a:effectRef>
+          <a:fontRef idx="minor">
+            <a:schemeClr val="lt1"/>
+          </a:fontRef>
+        </p:style>
+        <p:txBody>
+          <a:bodyPr rtlCol="0" anchor="ctr"/>
+          <a:lstStyle/>
+          <a:p>
+            <a:pPr algn="ctr"/>
+            <a:endParaRPr/>
+          </a:p>
+        </p:txBody>
+      </p:sp>
+      <p:sp>
+        <p:nvSpPr>
+          <p:cNvPr id="33" name="TextBox 32">
+            <a:extLst>
+              <a:ext uri="{FF2B5EF4-FFF2-40B4-BE49-F238E27FC236}">
+                <a16:creationId xmlns:a16="http://schemas.microsoft.com/office/drawing/2014/main" id="{6E7BA7F1-EB74-BF4D-C837-3942B90AB2E8}"/>
+              </a:ext>
+            </a:extLst>
+          </p:cNvPr>
+          <p:cNvSpPr txBox="1"/>
+          <p:nvPr/>
+        </p:nvSpPr>
+        <p:spPr>
+          <a:xfrm>
+            <a:off x="9070848" y="2139696"/>
+            <a:ext cx="2185416" cy="1691639"/>
+          </a:xfrm>
+          <a:prstGeom prst="rect">
+            <a:avLst/>
+          </a:prstGeom>
+          <a:noFill/>
+        </p:spPr>
+        <p:txBody>
+          <a:bodyPr wrap="square" lIns="0" tIns="0" rIns="0" bIns="0" anchor="t">
+            <a:spAutoFit/>
+          </a:bodyPr>
+          <a:lstStyle/>
+          <a:p>
+            <a:pPr algn="l">
+              <a:lnSpc>
+                <a:spcPct val="115000"/>
+              </a:lnSpc>
+            </a:pPr>
+            <a:r>
+              <a:rPr sz="850" b="1" i="0">
+                <a:solidFill>
+                  <a:srgbClr val="FB4D0A"/>
+                </a:solidFill>
+                <a:latin typeface="Calibri"/>
+              </a:rPr>
+              <a:t>GOOD AT</a:t>
+            </a:r>
+          </a:p>
+          <a:p>
+            <a:pPr algn="l">
+              <a:lnSpc>
+                <a:spcPct val="115000"/>
+              </a:lnSpc>
+            </a:pPr>
+            <a:r>
+              <a:rPr sz="1050" b="0" i="0">
+                <a:solidFill>
+                  <a:srgbClr val="1F2A2E"/>
+                </a:solidFill>
+                <a:latin typeface="Calibri"/>
+              </a:rPr>
+              <a:t>Rule extraction + validated transformation</a:t>
+            </a:r>
+          </a:p>
+          <a:p>
+            <a:pPr algn="l">
+              <a:lnSpc>
+                <a:spcPct val="115000"/>
+              </a:lnSpc>
+            </a:pPr>
+            <a:endParaRPr sz="1050" b="0" i="0">
+              <a:solidFill>
+                <a:srgbClr val="1F2A2E"/>
+              </a:solidFill>
+              <a:latin typeface="Calibri"/>
+            </a:endParaRPr>
+          </a:p>
+          <a:p>
+            <a:pPr algn="l">
+              <a:lnSpc>
+                <a:spcPct val="115000"/>
+              </a:lnSpc>
+            </a:pPr>
+            <a:r>
+              <a:rPr sz="850" b="1" i="0">
+                <a:solidFill>
+                  <a:srgbClr val="FB4D0A"/>
+                </a:solidFill>
+                <a:latin typeface="Calibri"/>
+              </a:rPr>
+              <a:t>WHY IT WINS</a:t>
+            </a:r>
+          </a:p>
+          <a:p>
+            <a:pPr algn="l">
+              <a:lnSpc>
+                <a:spcPct val="115000"/>
+              </a:lnSpc>
+            </a:pPr>
+            <a:r>
+              <a:rPr sz="1050" b="0" i="0">
+                <a:solidFill>
+                  <a:srgbClr val="1F2A2E"/>
+                </a:solidFill>
+                <a:latin typeface="Calibri"/>
+              </a:rPr>
+              <a:t>Fact-checked, human- reviewed, vendor-agnostic</a:t>
+            </a:r>
+          </a:p>
+        </p:txBody>
+      </p:sp>
+      <p:sp>
+        <p:nvSpPr>
+          <p:cNvPr id="34" name="Oval 33">
+            <a:extLst>
+              <a:ext uri="{FF2B5EF4-FFF2-40B4-BE49-F238E27FC236}">
+                <a16:creationId xmlns:a16="http://schemas.microsoft.com/office/drawing/2014/main" id="{64D74903-864E-4518-142D-CCA3D4AF1406}"/>
+              </a:ext>
+            </a:extLst>
+          </p:cNvPr>
+          <p:cNvSpPr/>
+          <p:nvPr/>
+        </p:nvSpPr>
+        <p:spPr>
+          <a:xfrm>
+            <a:off x="914400" y="4178807"/>
+            <a:ext cx="457200" cy="457200"/>
+          </a:xfrm>
+          <a:prstGeom prst="ellipse">
+            <a:avLst/>
+          </a:prstGeom>
+          <a:solidFill>
+            <a:srgbClr val="005071"/>
+          </a:solidFill>
+          <a:ln>
+            <a:noFill/>
+          </a:ln>
+          <a:effectLst/>
+        </p:spPr>
+        <p:style>
+          <a:lnRef idx="1">
+            <a:schemeClr val="accent1"/>
+          </a:lnRef>
+          <a:fillRef idx="3">
+            <a:schemeClr val="accent1"/>
+          </a:fillRef>
+          <a:effectRef idx="2">
+            <a:schemeClr val="accent1"/>
+          </a:effectRef>
+          <a:fontRef idx="minor">
+            <a:schemeClr val="lt1"/>
+          </a:fontRef>
+        </p:style>
+        <p:txBody>
+          <a:bodyPr rtlCol="0" anchor="ctr"/>
+          <a:lstStyle/>
+          <a:p>
+            <a:pPr algn="ctr"/>
+            <a:endParaRPr/>
+          </a:p>
+        </p:txBody>
+      </p:sp>
+      <p:pic>
+        <p:nvPicPr>
+          <p:cNvPr id="35" name="Picture 34" descr="filetext_white.png">
+            <a:extLst>
+              <a:ext uri="{FF2B5EF4-FFF2-40B4-BE49-F238E27FC236}">
+                <a16:creationId xmlns:a16="http://schemas.microsoft.com/office/drawing/2014/main" id="{3EFE19D1-ECE8-905D-EA9A-3199B68A9D93}"/>
+              </a:ext>
+            </a:extLst>
+          </p:cNvPr>
+          <p:cNvPicPr>
+            <a:picLocks noChangeAspect="1"/>
+          </p:cNvPicPr>
+          <p:nvPr/>
+        </p:nvPicPr>
+        <p:blipFill>
+          <a:blip r:embed="rId3"/>
+          <a:stretch>
+            <a:fillRect/>
+          </a:stretch>
+        </p:blipFill>
+        <p:spPr>
+          <a:xfrm>
+            <a:off x="1033271" y="4297679"/>
+            <a:ext cx="219456" cy="219456"/>
+          </a:xfrm>
+          <a:prstGeom prst="rect">
+            <a:avLst/>
+          </a:prstGeom>
+        </p:spPr>
+      </p:pic>
+      <p:sp>
+        <p:nvSpPr>
+          <p:cNvPr id="36" name="TextBox 35">
+            <a:extLst>
+              <a:ext uri="{FF2B5EF4-FFF2-40B4-BE49-F238E27FC236}">
+                <a16:creationId xmlns:a16="http://schemas.microsoft.com/office/drawing/2014/main" id="{33289970-674D-18AB-8E2D-8118BA6F9FF7}"/>
+              </a:ext>
+            </a:extLst>
+          </p:cNvPr>
+          <p:cNvSpPr txBox="1"/>
+          <p:nvPr/>
+        </p:nvSpPr>
+        <p:spPr>
+          <a:xfrm>
+            <a:off x="1490472" y="4123944"/>
+            <a:ext cx="1874519" cy="594360"/>
+          </a:xfrm>
+          <a:prstGeom prst="rect">
+            <a:avLst/>
+          </a:prstGeom>
+          <a:noFill/>
+        </p:spPr>
+        <p:txBody>
+          <a:bodyPr wrap="square" lIns="0" tIns="0" rIns="0" bIns="0" anchor="ctr">
+            <a:spAutoFit/>
+          </a:bodyPr>
+          <a:lstStyle/>
+          <a:p>
+            <a:pPr algn="l">
+              <a:lnSpc>
+                <a:spcPct val="105000"/>
+              </a:lnSpc>
+            </a:pPr>
+            <a:r>
+              <a:rPr sz="1100" b="1" i="0">
+                <a:solidFill>
+                  <a:srgbClr val="005071"/>
+                </a:solidFill>
+                <a:latin typeface="Calibri"/>
+              </a:rPr>
+              <a:t>Documentation-first</a:t>
+            </a:r>
+          </a:p>
+        </p:txBody>
+      </p:sp>
+      <p:sp>
+        <p:nvSpPr>
+          <p:cNvPr id="37" name="Oval 36">
+            <a:extLst>
+              <a:ext uri="{FF2B5EF4-FFF2-40B4-BE49-F238E27FC236}">
+                <a16:creationId xmlns:a16="http://schemas.microsoft.com/office/drawing/2014/main" id="{43755416-603F-4E0B-CE95-51099B69B909}"/>
+              </a:ext>
+            </a:extLst>
+          </p:cNvPr>
+          <p:cNvSpPr/>
+          <p:nvPr/>
+        </p:nvSpPr>
+        <p:spPr>
+          <a:xfrm>
+            <a:off x="3593591" y="4178807"/>
+            <a:ext cx="457200" cy="457200"/>
+          </a:xfrm>
+          <a:prstGeom prst="ellipse">
+            <a:avLst/>
+          </a:prstGeom>
+          <a:solidFill>
+            <a:srgbClr val="005071"/>
+          </a:solidFill>
+          <a:ln>
+            <a:noFill/>
+          </a:ln>
+          <a:effectLst/>
+        </p:spPr>
+        <p:style>
+          <a:lnRef idx="1">
+            <a:schemeClr val="accent1"/>
+          </a:lnRef>
+          <a:fillRef idx="3">
+            <a:schemeClr val="accent1"/>
+          </a:fillRef>
+          <a:effectRef idx="2">
+            <a:schemeClr val="accent1"/>
+          </a:effectRef>
+          <a:fontRef idx="minor">
+            <a:schemeClr val="lt1"/>
+          </a:fontRef>
+        </p:style>
+        <p:txBody>
+          <a:bodyPr rtlCol="0" anchor="ctr"/>
+          <a:lstStyle/>
+          <a:p>
+            <a:pPr algn="ctr"/>
+            <a:endParaRPr/>
+          </a:p>
+        </p:txBody>
+      </p:sp>
+      <p:pic>
+        <p:nvPicPr>
+          <p:cNvPr id="38" name="Picture 37" descr="checkcircle_white.png">
+            <a:extLst>
+              <a:ext uri="{FF2B5EF4-FFF2-40B4-BE49-F238E27FC236}">
+                <a16:creationId xmlns:a16="http://schemas.microsoft.com/office/drawing/2014/main" id="{2AB5F2CE-E17C-87A1-9079-B38387AA1ED3}"/>
+              </a:ext>
+            </a:extLst>
+          </p:cNvPr>
+          <p:cNvPicPr>
+            <a:picLocks noChangeAspect="1"/>
+          </p:cNvPicPr>
+          <p:nvPr/>
+        </p:nvPicPr>
+        <p:blipFill>
+          <a:blip r:embed="rId4"/>
+          <a:stretch>
+            <a:fillRect/>
+          </a:stretch>
+        </p:blipFill>
+        <p:spPr>
+          <a:xfrm>
+            <a:off x="3712463" y="4297679"/>
+            <a:ext cx="219456" cy="219456"/>
+          </a:xfrm>
+          <a:prstGeom prst="rect">
+            <a:avLst/>
+          </a:prstGeom>
+        </p:spPr>
+      </p:pic>
+      <p:sp>
+        <p:nvSpPr>
+          <p:cNvPr id="39" name="TextBox 38">
+            <a:extLst>
+              <a:ext uri="{FF2B5EF4-FFF2-40B4-BE49-F238E27FC236}">
+                <a16:creationId xmlns:a16="http://schemas.microsoft.com/office/drawing/2014/main" id="{428434FE-0907-ADED-2F8D-7ECBDD98255C}"/>
+              </a:ext>
+            </a:extLst>
+          </p:cNvPr>
+          <p:cNvSpPr txBox="1"/>
+          <p:nvPr/>
+        </p:nvSpPr>
+        <p:spPr>
+          <a:xfrm>
+            <a:off x="4169663" y="4123944"/>
+            <a:ext cx="1874519" cy="594360"/>
+          </a:xfrm>
+          <a:prstGeom prst="rect">
+            <a:avLst/>
+          </a:prstGeom>
+          <a:noFill/>
+        </p:spPr>
+        <p:txBody>
+          <a:bodyPr wrap="square" lIns="0" tIns="0" rIns="0" bIns="0" anchor="ctr">
+            <a:spAutoFit/>
+          </a:bodyPr>
+          <a:lstStyle/>
+          <a:p>
+            <a:pPr algn="l">
+              <a:lnSpc>
+                <a:spcPct val="105000"/>
+              </a:lnSpc>
+            </a:pPr>
+            <a:r>
+              <a:rPr sz="1100" b="1" i="0">
+                <a:solidFill>
+                  <a:srgbClr val="005071"/>
+                </a:solidFill>
+                <a:latin typeface="Calibri"/>
+              </a:rPr>
+              <a:t>Built-in fact-checking</a:t>
+            </a:r>
+          </a:p>
+        </p:txBody>
+      </p:sp>
+      <p:sp>
+        <p:nvSpPr>
+          <p:cNvPr id="40" name="Oval 39">
+            <a:extLst>
+              <a:ext uri="{FF2B5EF4-FFF2-40B4-BE49-F238E27FC236}">
+                <a16:creationId xmlns:a16="http://schemas.microsoft.com/office/drawing/2014/main" id="{AF495434-C1A5-C8E3-CA96-9A929E8DE9C7}"/>
+              </a:ext>
+            </a:extLst>
+          </p:cNvPr>
+          <p:cNvSpPr/>
+          <p:nvPr/>
+        </p:nvSpPr>
+        <p:spPr>
+          <a:xfrm>
+            <a:off x="6272784" y="4178807"/>
+            <a:ext cx="457200" cy="457200"/>
+          </a:xfrm>
+          <a:prstGeom prst="ellipse">
+            <a:avLst/>
+          </a:prstGeom>
+          <a:solidFill>
+            <a:srgbClr val="005071"/>
+          </a:solidFill>
+          <a:ln>
+            <a:noFill/>
+          </a:ln>
+          <a:effectLst/>
+        </p:spPr>
+        <p:style>
+          <a:lnRef idx="1">
+            <a:schemeClr val="accent1"/>
+          </a:lnRef>
+          <a:fillRef idx="3">
+            <a:schemeClr val="accent1"/>
+          </a:fillRef>
+          <a:effectRef idx="2">
+            <a:schemeClr val="accent1"/>
+          </a:effectRef>
+          <a:fontRef idx="minor">
+            <a:schemeClr val="lt1"/>
+          </a:fontRef>
+        </p:style>
+        <p:txBody>
+          <a:bodyPr rtlCol="0" anchor="ctr"/>
+          <a:lstStyle/>
+          <a:p>
+            <a:pPr algn="ctr"/>
+            <a:endParaRPr/>
+          </a:p>
+        </p:txBody>
+      </p:sp>
+      <p:pic>
+        <p:nvPicPr>
+          <p:cNvPr id="41" name="Picture 40" descr="users_white.png">
+            <a:extLst>
+              <a:ext uri="{FF2B5EF4-FFF2-40B4-BE49-F238E27FC236}">
+                <a16:creationId xmlns:a16="http://schemas.microsoft.com/office/drawing/2014/main" id="{0B4CE21D-B11C-4649-8994-F8BC346EEFE7}"/>
+              </a:ext>
+            </a:extLst>
+          </p:cNvPr>
+          <p:cNvPicPr>
+            <a:picLocks noChangeAspect="1"/>
+          </p:cNvPicPr>
+          <p:nvPr/>
+        </p:nvPicPr>
+        <p:blipFill>
+          <a:blip r:embed="rId5"/>
+          <a:stretch>
+            <a:fillRect/>
+          </a:stretch>
+        </p:blipFill>
+        <p:spPr>
+          <a:xfrm>
+            <a:off x="6391656" y="4297679"/>
+            <a:ext cx="219456" cy="219456"/>
+          </a:xfrm>
+          <a:prstGeom prst="rect">
+            <a:avLst/>
+          </a:prstGeom>
+        </p:spPr>
+      </p:pic>
+      <p:sp>
+        <p:nvSpPr>
+          <p:cNvPr id="42" name="TextBox 41">
+            <a:extLst>
+              <a:ext uri="{FF2B5EF4-FFF2-40B4-BE49-F238E27FC236}">
+                <a16:creationId xmlns:a16="http://schemas.microsoft.com/office/drawing/2014/main" id="{D5F833FC-6349-0869-FE39-A379E3B4556A}"/>
+              </a:ext>
+            </a:extLst>
+          </p:cNvPr>
+          <p:cNvSpPr txBox="1"/>
+          <p:nvPr/>
+        </p:nvSpPr>
+        <p:spPr>
+          <a:xfrm>
+            <a:off x="6848856" y="4123944"/>
+            <a:ext cx="1874519" cy="594360"/>
+          </a:xfrm>
+          <a:prstGeom prst="rect">
+            <a:avLst/>
+          </a:prstGeom>
+          <a:noFill/>
+        </p:spPr>
+        <p:txBody>
+          <a:bodyPr wrap="square" lIns="0" tIns="0" rIns="0" bIns="0" anchor="ctr">
+            <a:spAutoFit/>
+          </a:bodyPr>
+          <a:lstStyle/>
+          <a:p>
+            <a:pPr algn="l">
+              <a:lnSpc>
+                <a:spcPct val="105000"/>
+              </a:lnSpc>
+            </a:pPr>
+            <a:r>
+              <a:rPr sz="1100" b="1" i="0">
+                <a:solidFill>
+                  <a:srgbClr val="005071"/>
+                </a:solidFill>
+                <a:latin typeface="Calibri"/>
+              </a:rPr>
+              <a:t>Human-in-the-loop by design</a:t>
+            </a:r>
+          </a:p>
+        </p:txBody>
+      </p:sp>
+      <p:sp>
+        <p:nvSpPr>
+          <p:cNvPr id="43" name="Oval 42">
+            <a:extLst>
+              <a:ext uri="{FF2B5EF4-FFF2-40B4-BE49-F238E27FC236}">
+                <a16:creationId xmlns:a16="http://schemas.microsoft.com/office/drawing/2014/main" id="{745B21C6-DE5E-7BBD-3B0D-2B2267F81581}"/>
+              </a:ext>
+            </a:extLst>
+          </p:cNvPr>
+          <p:cNvSpPr/>
+          <p:nvPr/>
+        </p:nvSpPr>
+        <p:spPr>
+          <a:xfrm>
+            <a:off x="8951976" y="4178807"/>
+            <a:ext cx="457200" cy="457200"/>
+          </a:xfrm>
+          <a:prstGeom prst="ellipse">
+            <a:avLst/>
+          </a:prstGeom>
+          <a:solidFill>
+            <a:srgbClr val="005071"/>
+          </a:solidFill>
+          <a:ln>
+            <a:noFill/>
+          </a:ln>
+          <a:effectLst/>
+        </p:spPr>
+        <p:style>
+          <a:lnRef idx="1">
+            <a:schemeClr val="accent1"/>
+          </a:lnRef>
+          <a:fillRef idx="3">
+            <a:schemeClr val="accent1"/>
+          </a:fillRef>
+          <a:effectRef idx="2">
+            <a:schemeClr val="accent1"/>
+          </a:effectRef>
+          <a:fontRef idx="minor">
+            <a:schemeClr val="lt1"/>
+          </a:fontRef>
+        </p:style>
+        <p:txBody>
+          <a:bodyPr rtlCol="0" anchor="ctr"/>
+          <a:lstStyle/>
+          <a:p>
+            <a:pPr algn="ctr"/>
+            <a:endParaRPr/>
+          </a:p>
+        </p:txBody>
+      </p:sp>
+      <p:pic>
+        <p:nvPicPr>
+          <p:cNvPr id="44" name="Picture 43" descr="layers_white.png">
+            <a:extLst>
+              <a:ext uri="{FF2B5EF4-FFF2-40B4-BE49-F238E27FC236}">
+                <a16:creationId xmlns:a16="http://schemas.microsoft.com/office/drawing/2014/main" id="{F4766D82-DA78-B010-B5F1-C9FE6EA3DA40}"/>
+              </a:ext>
+            </a:extLst>
+          </p:cNvPr>
+          <p:cNvPicPr>
+            <a:picLocks noChangeAspect="1"/>
+          </p:cNvPicPr>
+          <p:nvPr/>
+        </p:nvPicPr>
+        <p:blipFill>
+          <a:blip r:embed="rId6"/>
+          <a:stretch>
+            <a:fillRect/>
+          </a:stretch>
+        </p:blipFill>
+        <p:spPr>
+          <a:xfrm>
+            <a:off x="9070848" y="4297679"/>
+            <a:ext cx="219456" cy="219456"/>
+          </a:xfrm>
+          <a:prstGeom prst="rect">
+            <a:avLst/>
+          </a:prstGeom>
+        </p:spPr>
+      </p:pic>
+      <p:sp>
+        <p:nvSpPr>
+          <p:cNvPr id="45" name="TextBox 44">
+            <a:extLst>
+              <a:ext uri="{FF2B5EF4-FFF2-40B4-BE49-F238E27FC236}">
+                <a16:creationId xmlns:a16="http://schemas.microsoft.com/office/drawing/2014/main" id="{FF7FD563-694E-17ED-B5B7-EEF95E810093}"/>
+              </a:ext>
+            </a:extLst>
+          </p:cNvPr>
+          <p:cNvSpPr txBox="1"/>
+          <p:nvPr/>
+        </p:nvSpPr>
+        <p:spPr>
+          <a:xfrm>
+            <a:off x="9528048" y="4123944"/>
+            <a:ext cx="1874519" cy="594360"/>
+          </a:xfrm>
+          <a:prstGeom prst="rect">
+            <a:avLst/>
+          </a:prstGeom>
+          <a:noFill/>
+        </p:spPr>
+        <p:txBody>
+          <a:bodyPr wrap="square" lIns="0" tIns="0" rIns="0" bIns="0" anchor="ctr">
+            <a:spAutoFit/>
+          </a:bodyPr>
+          <a:lstStyle/>
+          <a:p>
+            <a:pPr algn="l">
+              <a:lnSpc>
+                <a:spcPct val="105000"/>
+              </a:lnSpc>
+            </a:pPr>
+            <a:r>
+              <a:rPr sz="1100" b="1" i="0">
+                <a:solidFill>
+                  <a:srgbClr val="005071"/>
+                </a:solidFill>
+                <a:latin typeface="Calibri"/>
+              </a:rPr>
+              <a:t>Not locked to one AI vendor</a:t>
+            </a:r>
+          </a:p>
+        </p:txBody>
+      </p:sp>
     </p:spTree>
   </p:cSld>
   <p:clrMapOvr>
@@ -4396,6 +9202,3003 @@
               <a:t>GTM map</a:t>
             </a:r>
             <a:endParaRPr lang="en-US" sz="750" dirty="0"/>
+          </a:p>
+        </p:txBody>
+      </p:sp>
+      <p:sp>
+        <p:nvSpPr>
+          <p:cNvPr id="7" name="Text 0">
+            <a:extLst>
+              <a:ext uri="{FF2B5EF4-FFF2-40B4-BE49-F238E27FC236}">
+                <a16:creationId xmlns:a16="http://schemas.microsoft.com/office/drawing/2014/main" id="{721BD779-BB6F-8E69-44EF-06233CC0A501}"/>
+              </a:ext>
+            </a:extLst>
+          </p:cNvPr>
+          <p:cNvSpPr/>
+          <p:nvPr/>
+        </p:nvSpPr>
+        <p:spPr>
+          <a:xfrm>
+            <a:off x="411480" y="347472"/>
+            <a:ext cx="566928" cy="384048"/>
+          </a:xfrm>
+          <a:prstGeom prst="rect">
+            <a:avLst/>
+          </a:prstGeom>
+          <a:noFill/>
+          <a:ln/>
+        </p:spPr>
+        <p:txBody>
+          <a:bodyPr wrap="square" lIns="0" tIns="0" rIns="0" bIns="0" rtlCol="0" anchor="ctr"/>
+          <a:lstStyle/>
+          <a:p>
+            <a:pPr marL="0" indent="0">
+              <a:buNone/>
+            </a:pPr>
+            <a:r>
+              <a:rPr lang="en-US" sz="2000" b="1" dirty="0">
+                <a:solidFill>
+                  <a:srgbClr val="FB4D0A"/>
+                </a:solidFill>
+                <a:latin typeface="Calibri" pitchFamily="34" charset="0"/>
+                <a:ea typeface="Calibri" pitchFamily="34" charset="-122"/>
+                <a:cs typeface="Calibri" pitchFamily="34" charset="-120"/>
+              </a:rPr>
+              <a:t>04</a:t>
+            </a:r>
+            <a:endParaRPr lang="en-US" sz="2000" dirty="0"/>
+          </a:p>
+        </p:txBody>
+      </p:sp>
+      <p:sp>
+        <p:nvSpPr>
+          <p:cNvPr id="9" name="Shape 1">
+            <a:extLst>
+              <a:ext uri="{FF2B5EF4-FFF2-40B4-BE49-F238E27FC236}">
+                <a16:creationId xmlns:a16="http://schemas.microsoft.com/office/drawing/2014/main" id="{CD2EC4D1-8C1B-ED13-8712-FCD217940EE6}"/>
+              </a:ext>
+            </a:extLst>
+          </p:cNvPr>
+          <p:cNvSpPr/>
+          <p:nvPr/>
+        </p:nvSpPr>
+        <p:spPr>
+          <a:xfrm>
+            <a:off x="1078992" y="429768"/>
+            <a:ext cx="0" cy="320040"/>
+          </a:xfrm>
+          <a:prstGeom prst="line">
+            <a:avLst/>
+          </a:prstGeom>
+          <a:noFill/>
+          <a:ln w="15240">
+            <a:solidFill>
+              <a:srgbClr val="D6E4EA"/>
+            </a:solidFill>
+            <a:prstDash val="solid"/>
+          </a:ln>
+        </p:spPr>
+        <p:txBody>
+          <a:bodyPr/>
+          <a:lstStyle/>
+          <a:p>
+            <a:endParaRPr lang="en-IN"/>
+          </a:p>
+        </p:txBody>
+      </p:sp>
+      <p:sp>
+        <p:nvSpPr>
+          <p:cNvPr id="10" name="Text 2">
+            <a:extLst>
+              <a:ext uri="{FF2B5EF4-FFF2-40B4-BE49-F238E27FC236}">
+                <a16:creationId xmlns:a16="http://schemas.microsoft.com/office/drawing/2014/main" id="{B7C98BDA-8439-B02D-2942-01A121676D21}"/>
+              </a:ext>
+            </a:extLst>
+          </p:cNvPr>
+          <p:cNvSpPr/>
+          <p:nvPr/>
+        </p:nvSpPr>
+        <p:spPr>
+          <a:xfrm>
+            <a:off x="1207008" y="256032"/>
+            <a:ext cx="8046720" cy="347472"/>
+          </a:xfrm>
+          <a:prstGeom prst="rect">
+            <a:avLst/>
+          </a:prstGeom>
+          <a:noFill/>
+          <a:ln/>
+        </p:spPr>
+        <p:txBody>
+          <a:bodyPr wrap="square" lIns="0" tIns="0" rIns="0" bIns="0" rtlCol="0" anchor="ctr"/>
+          <a:lstStyle/>
+          <a:p>
+            <a:r>
+              <a:rPr lang="en-US" sz="1700" b="1" dirty="0">
+                <a:solidFill>
+                  <a:srgbClr val="005071"/>
+                </a:solidFill>
+                <a:latin typeface="Calibri" pitchFamily="34" charset="0"/>
+                <a:ea typeface="Calibri" pitchFamily="34" charset="-122"/>
+                <a:cs typeface="Calibri" pitchFamily="34" charset="-120"/>
+              </a:rPr>
+              <a:t>Revenue &amp; Business Growth</a:t>
+            </a:r>
+            <a:endParaRPr lang="en-US" sz="1700" dirty="0"/>
+          </a:p>
+        </p:txBody>
+      </p:sp>
+      <p:sp>
+        <p:nvSpPr>
+          <p:cNvPr id="11" name="Text 3">
+            <a:extLst>
+              <a:ext uri="{FF2B5EF4-FFF2-40B4-BE49-F238E27FC236}">
+                <a16:creationId xmlns:a16="http://schemas.microsoft.com/office/drawing/2014/main" id="{BF792AA0-2D38-483B-0919-DBD9DC431EA4}"/>
+              </a:ext>
+            </a:extLst>
+          </p:cNvPr>
+          <p:cNvSpPr/>
+          <p:nvPr/>
+        </p:nvSpPr>
+        <p:spPr>
+          <a:xfrm>
+            <a:off x="1207008" y="649224"/>
+            <a:ext cx="9509760" cy="256032"/>
+          </a:xfrm>
+          <a:prstGeom prst="rect">
+            <a:avLst/>
+          </a:prstGeom>
+          <a:noFill/>
+          <a:ln/>
+        </p:spPr>
+        <p:txBody>
+          <a:bodyPr wrap="square" lIns="0" tIns="0" rIns="0" bIns="0" rtlCol="0" anchor="ctr"/>
+          <a:lstStyle/>
+          <a:p>
+            <a:r>
+              <a:rPr lang="en-US" sz="880" dirty="0">
+                <a:solidFill>
+                  <a:srgbClr val="484848"/>
+                </a:solidFill>
+                <a:latin typeface="Calibri" pitchFamily="34" charset="0"/>
+                <a:ea typeface="Calibri" pitchFamily="34" charset="-122"/>
+                <a:cs typeface="Calibri" pitchFamily="34" charset="-120"/>
+              </a:rPr>
+              <a:t>Identify target buyer segments and prove the solution's potential for high scalability and market commercialization</a:t>
+            </a:r>
+            <a:endParaRPr lang="en-US" sz="880" dirty="0"/>
+          </a:p>
+        </p:txBody>
+      </p:sp>
+      <p:sp>
+        <p:nvSpPr>
+          <p:cNvPr id="12" name="Shape 4">
+            <a:extLst>
+              <a:ext uri="{FF2B5EF4-FFF2-40B4-BE49-F238E27FC236}">
+                <a16:creationId xmlns:a16="http://schemas.microsoft.com/office/drawing/2014/main" id="{A784BF5E-2EAA-D6A5-08BD-99EBBDD8A160}"/>
+              </a:ext>
+            </a:extLst>
+          </p:cNvPr>
+          <p:cNvSpPr/>
+          <p:nvPr/>
+        </p:nvSpPr>
+        <p:spPr>
+          <a:xfrm>
+            <a:off x="411480" y="960120"/>
+            <a:ext cx="11064240" cy="0"/>
+          </a:xfrm>
+          <a:prstGeom prst="line">
+            <a:avLst/>
+          </a:prstGeom>
+          <a:noFill/>
+          <a:ln w="5080">
+            <a:solidFill>
+              <a:srgbClr val="D6E4EA"/>
+            </a:solidFill>
+            <a:prstDash val="solid"/>
+          </a:ln>
+        </p:spPr>
+        <p:txBody>
+          <a:bodyPr/>
+          <a:lstStyle/>
+          <a:p>
+            <a:endParaRPr lang="en-IN"/>
+          </a:p>
+        </p:txBody>
+      </p:sp>
+      <p:sp>
+        <p:nvSpPr>
+          <p:cNvPr id="13" name="Shape 6">
+            <a:extLst>
+              <a:ext uri="{FF2B5EF4-FFF2-40B4-BE49-F238E27FC236}">
+                <a16:creationId xmlns:a16="http://schemas.microsoft.com/office/drawing/2014/main" id="{3693F37F-38BC-9AA2-C820-C9D06B067169}"/>
+              </a:ext>
+            </a:extLst>
+          </p:cNvPr>
+          <p:cNvSpPr/>
+          <p:nvPr/>
+        </p:nvSpPr>
+        <p:spPr>
+          <a:xfrm>
+            <a:off x="594360" y="1298448"/>
+            <a:ext cx="91440" cy="4846320"/>
+          </a:xfrm>
+          <a:prstGeom prst="rect">
+            <a:avLst/>
+          </a:prstGeom>
+          <a:solidFill>
+            <a:srgbClr val="FB4D0A"/>
+          </a:solidFill>
+          <a:ln w="12700">
+            <a:solidFill>
+              <a:srgbClr val="FB4D0A"/>
+            </a:solidFill>
+            <a:prstDash val="solid"/>
+          </a:ln>
+        </p:spPr>
+        <p:txBody>
+          <a:bodyPr/>
+          <a:lstStyle/>
+          <a:p>
+            <a:endParaRPr lang="en-IN"/>
+          </a:p>
+        </p:txBody>
+      </p:sp>
+      <p:sp>
+        <p:nvSpPr>
+          <p:cNvPr id="14" name="Text 22">
+            <a:extLst>
+              <a:ext uri="{FF2B5EF4-FFF2-40B4-BE49-F238E27FC236}">
+                <a16:creationId xmlns:a16="http://schemas.microsoft.com/office/drawing/2014/main" id="{C4A34847-FF64-7DB8-513D-DA2533660537}"/>
+              </a:ext>
+            </a:extLst>
+          </p:cNvPr>
+          <p:cNvSpPr/>
+          <p:nvPr/>
+        </p:nvSpPr>
+        <p:spPr>
+          <a:xfrm>
+            <a:off x="7708392" y="1056132"/>
+            <a:ext cx="905256" cy="118872"/>
+          </a:xfrm>
+          <a:prstGeom prst="rect">
+            <a:avLst/>
+          </a:prstGeom>
+          <a:noFill/>
+          <a:ln/>
+        </p:spPr>
+        <p:txBody>
+          <a:bodyPr wrap="square" lIns="0" tIns="0" rIns="0" bIns="0" rtlCol="0" anchor="ctr"/>
+          <a:lstStyle/>
+          <a:p>
+            <a:pPr marL="0" indent="0" algn="ctr">
+              <a:buNone/>
+            </a:pPr>
+            <a:r>
+              <a:rPr lang="en-US" sz="750" b="1" dirty="0">
+                <a:solidFill>
+                  <a:srgbClr val="FFFFFF"/>
+                </a:solidFill>
+                <a:latin typeface="Calibri" pitchFamily="34" charset="0"/>
+                <a:ea typeface="Calibri" pitchFamily="34" charset="-122"/>
+                <a:cs typeface="Calibri" pitchFamily="34" charset="-120"/>
+              </a:rPr>
+              <a:t>GTM map</a:t>
+            </a:r>
+            <a:endParaRPr lang="en-US" sz="750" dirty="0"/>
+          </a:p>
+        </p:txBody>
+      </p:sp>
+      <p:sp>
+        <p:nvSpPr>
+          <p:cNvPr id="15" name="Rounded Rectangle 14">
+            <a:extLst>
+              <a:ext uri="{FF2B5EF4-FFF2-40B4-BE49-F238E27FC236}">
+                <a16:creationId xmlns:a16="http://schemas.microsoft.com/office/drawing/2014/main" id="{73F39A2F-A0F2-1BDB-5133-4A071CC75156}"/>
+              </a:ext>
+            </a:extLst>
+          </p:cNvPr>
+          <p:cNvSpPr/>
+          <p:nvPr/>
+        </p:nvSpPr>
+        <p:spPr>
+          <a:xfrm>
+            <a:off x="7635240" y="1005840"/>
+            <a:ext cx="1051560" cy="219456"/>
+          </a:xfrm>
+          <a:prstGeom prst="roundRect">
+            <a:avLst>
+              <a:gd name="adj" fmla="val 50000"/>
+            </a:avLst>
+          </a:prstGeom>
+          <a:solidFill>
+            <a:srgbClr val="005071"/>
+          </a:solidFill>
+          <a:ln>
+            <a:noFill/>
+          </a:ln>
+          <a:effectLst/>
+        </p:spPr>
+        <p:style>
+          <a:lnRef idx="1">
+            <a:schemeClr val="accent1"/>
+          </a:lnRef>
+          <a:fillRef idx="3">
+            <a:schemeClr val="accent1"/>
+          </a:fillRef>
+          <a:effectRef idx="2">
+            <a:schemeClr val="accent1"/>
+          </a:effectRef>
+          <a:fontRef idx="minor">
+            <a:schemeClr val="lt1"/>
+          </a:fontRef>
+        </p:style>
+        <p:txBody>
+          <a:bodyPr rtlCol="0" anchor="ctr"/>
+          <a:lstStyle/>
+          <a:p>
+            <a:pPr algn="ctr"/>
+            <a:endParaRPr/>
+          </a:p>
+        </p:txBody>
+      </p:sp>
+      <p:sp>
+        <p:nvSpPr>
+          <p:cNvPr id="16" name="TextBox 15">
+            <a:extLst>
+              <a:ext uri="{FF2B5EF4-FFF2-40B4-BE49-F238E27FC236}">
+                <a16:creationId xmlns:a16="http://schemas.microsoft.com/office/drawing/2014/main" id="{E714B485-4155-8D06-6B61-DF24C7C03671}"/>
+              </a:ext>
+            </a:extLst>
+          </p:cNvPr>
+          <p:cNvSpPr txBox="1"/>
+          <p:nvPr/>
+        </p:nvSpPr>
+        <p:spPr>
+          <a:xfrm>
+            <a:off x="7635240" y="1005840"/>
+            <a:ext cx="1051560" cy="219456"/>
+          </a:xfrm>
+          <a:prstGeom prst="rect">
+            <a:avLst/>
+          </a:prstGeom>
+          <a:noFill/>
+        </p:spPr>
+        <p:txBody>
+          <a:bodyPr wrap="square" lIns="0" tIns="0" rIns="0" bIns="0" anchor="ctr">
+            <a:spAutoFit/>
+          </a:bodyPr>
+          <a:lstStyle/>
+          <a:p>
+            <a:pPr algn="ctr"/>
+            <a:r>
+              <a:rPr sz="850" b="1" i="0">
+                <a:solidFill>
+                  <a:srgbClr val="FFFFFF"/>
+                </a:solidFill>
+                <a:latin typeface="Calibri"/>
+              </a:rPr>
+              <a:t>GTM MAP</a:t>
+            </a:r>
+          </a:p>
+        </p:txBody>
+      </p:sp>
+      <p:sp>
+        <p:nvSpPr>
+          <p:cNvPr id="17" name="Rounded Rectangle 16">
+            <a:extLst>
+              <a:ext uri="{FF2B5EF4-FFF2-40B4-BE49-F238E27FC236}">
+                <a16:creationId xmlns:a16="http://schemas.microsoft.com/office/drawing/2014/main" id="{A99A1F93-22E1-947A-281A-99B3EFA3D0FA}"/>
+              </a:ext>
+            </a:extLst>
+          </p:cNvPr>
+          <p:cNvSpPr/>
+          <p:nvPr/>
+        </p:nvSpPr>
+        <p:spPr>
+          <a:xfrm>
+            <a:off x="868680" y="1435607"/>
+            <a:ext cx="3566160" cy="3886200"/>
+          </a:xfrm>
+          <a:prstGeom prst="roundRect">
+            <a:avLst>
+              <a:gd name="adj" fmla="val 7000"/>
+            </a:avLst>
+          </a:prstGeom>
+          <a:solidFill>
+            <a:srgbClr val="005071"/>
+          </a:solidFill>
+          <a:ln>
+            <a:noFill/>
+          </a:ln>
+          <a:effectLst/>
+        </p:spPr>
+        <p:style>
+          <a:lnRef idx="1">
+            <a:schemeClr val="accent1"/>
+          </a:lnRef>
+          <a:fillRef idx="3">
+            <a:schemeClr val="accent1"/>
+          </a:fillRef>
+          <a:effectRef idx="2">
+            <a:schemeClr val="accent1"/>
+          </a:effectRef>
+          <a:fontRef idx="minor">
+            <a:schemeClr val="lt1"/>
+          </a:fontRef>
+        </p:style>
+        <p:txBody>
+          <a:bodyPr rtlCol="0" anchor="ctr"/>
+          <a:lstStyle/>
+          <a:p>
+            <a:pPr algn="ctr"/>
+            <a:endParaRPr/>
+          </a:p>
+        </p:txBody>
+      </p:sp>
+      <p:sp>
+        <p:nvSpPr>
+          <p:cNvPr id="18" name="Oval 17">
+            <a:extLst>
+              <a:ext uri="{FF2B5EF4-FFF2-40B4-BE49-F238E27FC236}">
+                <a16:creationId xmlns:a16="http://schemas.microsoft.com/office/drawing/2014/main" id="{EC378188-5BDA-EED1-0C4B-0CABF835736D}"/>
+              </a:ext>
+            </a:extLst>
+          </p:cNvPr>
+          <p:cNvSpPr/>
+          <p:nvPr/>
+        </p:nvSpPr>
+        <p:spPr>
+          <a:xfrm>
+            <a:off x="1143000" y="1709928"/>
+            <a:ext cx="566928" cy="566928"/>
+          </a:xfrm>
+          <a:prstGeom prst="ellipse">
+            <a:avLst/>
+          </a:prstGeom>
+          <a:solidFill>
+            <a:srgbClr val="FB4D0A"/>
+          </a:solidFill>
+          <a:ln>
+            <a:noFill/>
+          </a:ln>
+          <a:effectLst/>
+        </p:spPr>
+        <p:style>
+          <a:lnRef idx="1">
+            <a:schemeClr val="accent1"/>
+          </a:lnRef>
+          <a:fillRef idx="3">
+            <a:schemeClr val="accent1"/>
+          </a:fillRef>
+          <a:effectRef idx="2">
+            <a:schemeClr val="accent1"/>
+          </a:effectRef>
+          <a:fontRef idx="minor">
+            <a:schemeClr val="lt1"/>
+          </a:fontRef>
+        </p:style>
+        <p:txBody>
+          <a:bodyPr rtlCol="0" anchor="ctr"/>
+          <a:lstStyle/>
+          <a:p>
+            <a:pPr algn="ctr"/>
+            <a:endParaRPr/>
+          </a:p>
+        </p:txBody>
+      </p:sp>
+      <p:pic>
+        <p:nvPicPr>
+          <p:cNvPr id="19" name="Picture 18" descr="target_white.png">
+            <a:extLst>
+              <a:ext uri="{FF2B5EF4-FFF2-40B4-BE49-F238E27FC236}">
+                <a16:creationId xmlns:a16="http://schemas.microsoft.com/office/drawing/2014/main" id="{EC9496EA-16B5-9C40-F182-66A0E67E255D}"/>
+              </a:ext>
+            </a:extLst>
+          </p:cNvPr>
+          <p:cNvPicPr>
+            <a:picLocks noChangeAspect="1"/>
+          </p:cNvPicPr>
+          <p:nvPr/>
+        </p:nvPicPr>
+        <p:blipFill>
+          <a:blip r:embed="rId3"/>
+          <a:stretch>
+            <a:fillRect/>
+          </a:stretch>
+        </p:blipFill>
+        <p:spPr>
+          <a:xfrm>
+            <a:off x="1290401" y="1857329"/>
+            <a:ext cx="272125" cy="272125"/>
+          </a:xfrm>
+          <a:prstGeom prst="rect">
+            <a:avLst/>
+          </a:prstGeom>
+        </p:spPr>
+      </p:pic>
+      <p:sp>
+        <p:nvSpPr>
+          <p:cNvPr id="20" name="TextBox 19">
+            <a:extLst>
+              <a:ext uri="{FF2B5EF4-FFF2-40B4-BE49-F238E27FC236}">
+                <a16:creationId xmlns:a16="http://schemas.microsoft.com/office/drawing/2014/main" id="{CF4FD69F-5643-8747-C4F7-47EA8E0BFB16}"/>
+              </a:ext>
+            </a:extLst>
+          </p:cNvPr>
+          <p:cNvSpPr txBox="1"/>
+          <p:nvPr/>
+        </p:nvSpPr>
+        <p:spPr>
+          <a:xfrm>
+            <a:off x="1143000" y="2441448"/>
+            <a:ext cx="3017520" cy="365760"/>
+          </a:xfrm>
+          <a:prstGeom prst="rect">
+            <a:avLst/>
+          </a:prstGeom>
+          <a:noFill/>
+        </p:spPr>
+        <p:txBody>
+          <a:bodyPr wrap="square" lIns="0" tIns="0" rIns="0" bIns="0" anchor="t">
+            <a:spAutoFit/>
+          </a:bodyPr>
+          <a:lstStyle/>
+          <a:p>
+            <a:pPr algn="l"/>
+            <a:r>
+              <a:rPr sz="1550" b="1" i="0">
+                <a:solidFill>
+                  <a:srgbClr val="FFFFFF"/>
+                </a:solidFill>
+                <a:latin typeface="Calibri"/>
+              </a:rPr>
+              <a:t>Target Segment</a:t>
+            </a:r>
+          </a:p>
+        </p:txBody>
+      </p:sp>
+      <p:sp>
+        <p:nvSpPr>
+          <p:cNvPr id="21" name="TextBox 20">
+            <a:extLst>
+              <a:ext uri="{FF2B5EF4-FFF2-40B4-BE49-F238E27FC236}">
+                <a16:creationId xmlns:a16="http://schemas.microsoft.com/office/drawing/2014/main" id="{437CE837-9897-E10F-EEF9-7ED9370C8767}"/>
+              </a:ext>
+            </a:extLst>
+          </p:cNvPr>
+          <p:cNvSpPr txBox="1"/>
+          <p:nvPr/>
+        </p:nvSpPr>
+        <p:spPr>
+          <a:xfrm>
+            <a:off x="1143000" y="2898648"/>
+            <a:ext cx="3017520" cy="548640"/>
+          </a:xfrm>
+          <a:prstGeom prst="rect">
+            <a:avLst/>
+          </a:prstGeom>
+          <a:noFill/>
+        </p:spPr>
+        <p:txBody>
+          <a:bodyPr wrap="square" lIns="0" tIns="0" rIns="0" bIns="0" anchor="t">
+            <a:spAutoFit/>
+          </a:bodyPr>
+          <a:lstStyle/>
+          <a:p>
+            <a:pPr algn="l">
+              <a:lnSpc>
+                <a:spcPct val="115000"/>
+              </a:lnSpc>
+            </a:pPr>
+            <a:r>
+              <a:rPr sz="1150" b="1" i="0">
+                <a:solidFill>
+                  <a:srgbClr val="CAE0EA"/>
+                </a:solidFill>
+                <a:latin typeface="Calibri"/>
+              </a:rPr>
+              <a:t>Retail &amp; D2C brands modernizing legacy ETL to Snowflake.</a:t>
+            </a:r>
+          </a:p>
+        </p:txBody>
+      </p:sp>
+      <p:sp>
+        <p:nvSpPr>
+          <p:cNvPr id="22" name="TextBox 21">
+            <a:extLst>
+              <a:ext uri="{FF2B5EF4-FFF2-40B4-BE49-F238E27FC236}">
+                <a16:creationId xmlns:a16="http://schemas.microsoft.com/office/drawing/2014/main" id="{A8FEFC0A-5000-052E-FD11-B8683C7A5757}"/>
+              </a:ext>
+            </a:extLst>
+          </p:cNvPr>
+          <p:cNvSpPr txBox="1"/>
+          <p:nvPr/>
+        </p:nvSpPr>
+        <p:spPr>
+          <a:xfrm>
+            <a:off x="1143000" y="3584448"/>
+            <a:ext cx="3017520" cy="1280160"/>
+          </a:xfrm>
+          <a:prstGeom prst="rect">
+            <a:avLst/>
+          </a:prstGeom>
+          <a:noFill/>
+        </p:spPr>
+        <p:txBody>
+          <a:bodyPr wrap="square" lIns="0" tIns="0" rIns="0" bIns="0" anchor="t">
+            <a:spAutoFit/>
+          </a:bodyPr>
+          <a:lstStyle/>
+          <a:p>
+            <a:pPr algn="l">
+              <a:lnSpc>
+                <a:spcPct val="120000"/>
+              </a:lnSpc>
+            </a:pPr>
+            <a:r>
+              <a:rPr sz="1050" b="0" i="0">
+                <a:solidFill>
+                  <a:srgbClr val="B9CFDA"/>
+                </a:solidFill>
+                <a:latin typeface="Calibri"/>
+              </a:rPr>
+              <a:t>Highest-value entry point: de-risking pricing, discount, and customer-tier logic during migration — not customer analytics or marketing efficiency, which this framework doesn't directly produce.</a:t>
+            </a:r>
+          </a:p>
+        </p:txBody>
+      </p:sp>
+      <p:sp>
+        <p:nvSpPr>
+          <p:cNvPr id="23" name="Rounded Rectangle 22">
+            <a:extLst>
+              <a:ext uri="{FF2B5EF4-FFF2-40B4-BE49-F238E27FC236}">
+                <a16:creationId xmlns:a16="http://schemas.microsoft.com/office/drawing/2014/main" id="{5D307D56-6A76-3BF9-645A-558BE83F7E11}"/>
+              </a:ext>
+            </a:extLst>
+          </p:cNvPr>
+          <p:cNvSpPr/>
+          <p:nvPr/>
+        </p:nvSpPr>
+        <p:spPr>
+          <a:xfrm>
+            <a:off x="1143000" y="4608576"/>
+            <a:ext cx="3017520" cy="10972"/>
+          </a:xfrm>
+          <a:prstGeom prst="roundRect">
+            <a:avLst>
+              <a:gd name="adj" fmla="val 0"/>
+            </a:avLst>
+          </a:prstGeom>
+          <a:solidFill>
+            <a:srgbClr val="2E6D86"/>
+          </a:solidFill>
+          <a:ln>
+            <a:noFill/>
+          </a:ln>
+          <a:effectLst/>
+        </p:spPr>
+        <p:style>
+          <a:lnRef idx="1">
+            <a:schemeClr val="accent1"/>
+          </a:lnRef>
+          <a:fillRef idx="3">
+            <a:schemeClr val="accent1"/>
+          </a:fillRef>
+          <a:effectRef idx="2">
+            <a:schemeClr val="accent1"/>
+          </a:effectRef>
+          <a:fontRef idx="minor">
+            <a:schemeClr val="lt1"/>
+          </a:fontRef>
+        </p:style>
+        <p:txBody>
+          <a:bodyPr rtlCol="0" anchor="ctr"/>
+          <a:lstStyle/>
+          <a:p>
+            <a:pPr algn="ctr"/>
+            <a:endParaRPr/>
+          </a:p>
+        </p:txBody>
+      </p:sp>
+      <p:sp>
+        <p:nvSpPr>
+          <p:cNvPr id="24" name="TextBox 23">
+            <a:extLst>
+              <a:ext uri="{FF2B5EF4-FFF2-40B4-BE49-F238E27FC236}">
+                <a16:creationId xmlns:a16="http://schemas.microsoft.com/office/drawing/2014/main" id="{2AC08F26-F410-6CBF-46E0-9974D425D5B7}"/>
+              </a:ext>
+            </a:extLst>
+          </p:cNvPr>
+          <p:cNvSpPr txBox="1"/>
+          <p:nvPr/>
+        </p:nvSpPr>
+        <p:spPr>
+          <a:xfrm>
+            <a:off x="1143000" y="4754879"/>
+            <a:ext cx="3017520" cy="502920"/>
+          </a:xfrm>
+          <a:prstGeom prst="rect">
+            <a:avLst/>
+          </a:prstGeom>
+          <a:noFill/>
+        </p:spPr>
+        <p:txBody>
+          <a:bodyPr wrap="square" lIns="0" tIns="0" rIns="0" bIns="0" anchor="t">
+            <a:spAutoFit/>
+          </a:bodyPr>
+          <a:lstStyle/>
+          <a:p>
+            <a:pPr algn="l">
+              <a:lnSpc>
+                <a:spcPct val="120000"/>
+              </a:lnSpc>
+            </a:pPr>
+            <a:r>
+              <a:rPr sz="1000" b="1" i="1">
+                <a:solidFill>
+                  <a:srgbClr val="CAE0EA"/>
+                </a:solidFill>
+                <a:latin typeface="Calibri"/>
+              </a:rPr>
+              <a:t>Validated on 2 different legacy patterns — a single script and a multi-job workflow.</a:t>
+            </a:r>
+          </a:p>
+        </p:txBody>
+      </p:sp>
+      <p:sp>
+        <p:nvSpPr>
+          <p:cNvPr id="25" name="Rounded Rectangle 24">
+            <a:extLst>
+              <a:ext uri="{FF2B5EF4-FFF2-40B4-BE49-F238E27FC236}">
+                <a16:creationId xmlns:a16="http://schemas.microsoft.com/office/drawing/2014/main" id="{CF185D12-2E26-0457-9D39-1D3B99BA6695}"/>
+              </a:ext>
+            </a:extLst>
+          </p:cNvPr>
+          <p:cNvSpPr/>
+          <p:nvPr/>
+        </p:nvSpPr>
+        <p:spPr>
+          <a:xfrm>
+            <a:off x="4754879" y="1435607"/>
+            <a:ext cx="6583680" cy="1417320"/>
+          </a:xfrm>
+          <a:prstGeom prst="roundRect">
+            <a:avLst>
+              <a:gd name="adj" fmla="val 7000"/>
+            </a:avLst>
+          </a:prstGeom>
+          <a:solidFill>
+            <a:srgbClr val="F3F8FA"/>
+          </a:solidFill>
+          <a:ln>
+            <a:noFill/>
+          </a:ln>
+          <a:effectLst/>
+        </p:spPr>
+        <p:style>
+          <a:lnRef idx="1">
+            <a:schemeClr val="accent1"/>
+          </a:lnRef>
+          <a:fillRef idx="3">
+            <a:schemeClr val="accent1"/>
+          </a:fillRef>
+          <a:effectRef idx="2">
+            <a:schemeClr val="accent1"/>
+          </a:effectRef>
+          <a:fontRef idx="minor">
+            <a:schemeClr val="lt1"/>
+          </a:fontRef>
+        </p:style>
+        <p:txBody>
+          <a:bodyPr rtlCol="0" anchor="ctr"/>
+          <a:lstStyle/>
+          <a:p>
+            <a:pPr algn="ctr"/>
+            <a:endParaRPr/>
+          </a:p>
+        </p:txBody>
+      </p:sp>
+      <p:sp>
+        <p:nvSpPr>
+          <p:cNvPr id="26" name="Oval 25">
+            <a:extLst>
+              <a:ext uri="{FF2B5EF4-FFF2-40B4-BE49-F238E27FC236}">
+                <a16:creationId xmlns:a16="http://schemas.microsoft.com/office/drawing/2014/main" id="{0CEEC43D-B1A9-52F9-082B-C64E54B6D5C4}"/>
+              </a:ext>
+            </a:extLst>
+          </p:cNvPr>
+          <p:cNvSpPr/>
+          <p:nvPr/>
+        </p:nvSpPr>
+        <p:spPr>
+          <a:xfrm>
+            <a:off x="4956047" y="1636775"/>
+            <a:ext cx="475488" cy="475488"/>
+          </a:xfrm>
+          <a:prstGeom prst="ellipse">
+            <a:avLst/>
+          </a:prstGeom>
+          <a:solidFill>
+            <a:srgbClr val="005071"/>
+          </a:solidFill>
+          <a:ln>
+            <a:noFill/>
+          </a:ln>
+          <a:effectLst/>
+        </p:spPr>
+        <p:style>
+          <a:lnRef idx="1">
+            <a:schemeClr val="accent1"/>
+          </a:lnRef>
+          <a:fillRef idx="3">
+            <a:schemeClr val="accent1"/>
+          </a:fillRef>
+          <a:effectRef idx="2">
+            <a:schemeClr val="accent1"/>
+          </a:effectRef>
+          <a:fontRef idx="minor">
+            <a:schemeClr val="lt1"/>
+          </a:fontRef>
+        </p:style>
+        <p:txBody>
+          <a:bodyPr rtlCol="0" anchor="ctr"/>
+          <a:lstStyle/>
+          <a:p>
+            <a:pPr algn="ctr"/>
+            <a:endParaRPr/>
+          </a:p>
+        </p:txBody>
+      </p:sp>
+      <p:pic>
+        <p:nvPicPr>
+          <p:cNvPr id="27" name="Picture 26" descr="zap_white.png">
+            <a:extLst>
+              <a:ext uri="{FF2B5EF4-FFF2-40B4-BE49-F238E27FC236}">
+                <a16:creationId xmlns:a16="http://schemas.microsoft.com/office/drawing/2014/main" id="{29DD4289-6993-9913-9F40-0B27D835E884}"/>
+              </a:ext>
+            </a:extLst>
+          </p:cNvPr>
+          <p:cNvPicPr>
+            <a:picLocks noChangeAspect="1"/>
+          </p:cNvPicPr>
+          <p:nvPr/>
+        </p:nvPicPr>
+        <p:blipFill>
+          <a:blip r:embed="rId4"/>
+          <a:stretch>
+            <a:fillRect/>
+          </a:stretch>
+        </p:blipFill>
+        <p:spPr>
+          <a:xfrm>
+            <a:off x="5079674" y="1760402"/>
+            <a:ext cx="228234" cy="228234"/>
+          </a:xfrm>
+          <a:prstGeom prst="rect">
+            <a:avLst/>
+          </a:prstGeom>
+        </p:spPr>
+      </p:pic>
+      <p:sp>
+        <p:nvSpPr>
+          <p:cNvPr id="28" name="TextBox 27">
+            <a:extLst>
+              <a:ext uri="{FF2B5EF4-FFF2-40B4-BE49-F238E27FC236}">
+                <a16:creationId xmlns:a16="http://schemas.microsoft.com/office/drawing/2014/main" id="{ADCBBF0E-0064-9D2C-DA91-4F97CC991A3A}"/>
+              </a:ext>
+            </a:extLst>
+          </p:cNvPr>
+          <p:cNvSpPr txBox="1"/>
+          <p:nvPr/>
+        </p:nvSpPr>
+        <p:spPr>
+          <a:xfrm>
+            <a:off x="5577840" y="1600199"/>
+            <a:ext cx="4663440" cy="365760"/>
+          </a:xfrm>
+          <a:prstGeom prst="rect">
+            <a:avLst/>
+          </a:prstGeom>
+          <a:noFill/>
+        </p:spPr>
+        <p:txBody>
+          <a:bodyPr wrap="square" lIns="0" tIns="0" rIns="0" bIns="0" anchor="t">
+            <a:spAutoFit/>
+          </a:bodyPr>
+          <a:lstStyle/>
+          <a:p>
+            <a:pPr algn="l"/>
+            <a:r>
+              <a:rPr sz="1300" b="1" i="0">
+                <a:solidFill>
+                  <a:srgbClr val="005071"/>
+                </a:solidFill>
+                <a:latin typeface="Calibri"/>
+              </a:rPr>
+              <a:t>Path 1 — Diagnostic / Audit Offering</a:t>
+            </a:r>
+          </a:p>
+        </p:txBody>
+      </p:sp>
+      <p:sp>
+        <p:nvSpPr>
+          <p:cNvPr id="29" name="Rounded Rectangle 28">
+            <a:extLst>
+              <a:ext uri="{FF2B5EF4-FFF2-40B4-BE49-F238E27FC236}">
+                <a16:creationId xmlns:a16="http://schemas.microsoft.com/office/drawing/2014/main" id="{D8835C03-5E0A-A5C6-BC0B-5B71D1D9DBB8}"/>
+              </a:ext>
+            </a:extLst>
+          </p:cNvPr>
+          <p:cNvSpPr/>
+          <p:nvPr/>
+        </p:nvSpPr>
+        <p:spPr>
+          <a:xfrm>
+            <a:off x="9784080" y="1600199"/>
+            <a:ext cx="1371600" cy="256032"/>
+          </a:xfrm>
+          <a:prstGeom prst="roundRect">
+            <a:avLst>
+              <a:gd name="adj" fmla="val 50000"/>
+            </a:avLst>
+          </a:prstGeom>
+          <a:solidFill>
+            <a:srgbClr val="2F6F5E"/>
+          </a:solidFill>
+          <a:ln>
+            <a:noFill/>
+          </a:ln>
+          <a:effectLst/>
+        </p:spPr>
+        <p:style>
+          <a:lnRef idx="1">
+            <a:schemeClr val="accent1"/>
+          </a:lnRef>
+          <a:fillRef idx="3">
+            <a:schemeClr val="accent1"/>
+          </a:fillRef>
+          <a:effectRef idx="2">
+            <a:schemeClr val="accent1"/>
+          </a:effectRef>
+          <a:fontRef idx="minor">
+            <a:schemeClr val="lt1"/>
+          </a:fontRef>
+        </p:style>
+        <p:txBody>
+          <a:bodyPr rtlCol="0" anchor="ctr"/>
+          <a:lstStyle/>
+          <a:p>
+            <a:pPr algn="ctr"/>
+            <a:endParaRPr/>
+          </a:p>
+        </p:txBody>
+      </p:sp>
+      <p:sp>
+        <p:nvSpPr>
+          <p:cNvPr id="30" name="TextBox 29">
+            <a:extLst>
+              <a:ext uri="{FF2B5EF4-FFF2-40B4-BE49-F238E27FC236}">
+                <a16:creationId xmlns:a16="http://schemas.microsoft.com/office/drawing/2014/main" id="{D7CD166D-CDD0-0A19-00E7-51D920094879}"/>
+              </a:ext>
+            </a:extLst>
+          </p:cNvPr>
+          <p:cNvSpPr txBox="1"/>
+          <p:nvPr/>
+        </p:nvSpPr>
+        <p:spPr>
+          <a:xfrm>
+            <a:off x="9784080" y="1600199"/>
+            <a:ext cx="1371600" cy="256032"/>
+          </a:xfrm>
+          <a:prstGeom prst="rect">
+            <a:avLst/>
+          </a:prstGeom>
+          <a:noFill/>
+        </p:spPr>
+        <p:txBody>
+          <a:bodyPr wrap="square" lIns="0" tIns="0" rIns="0" bIns="0" anchor="ctr">
+            <a:spAutoFit/>
+          </a:bodyPr>
+          <a:lstStyle/>
+          <a:p>
+            <a:pPr algn="ctr"/>
+            <a:r>
+              <a:rPr sz="850" b="1" i="0">
+                <a:solidFill>
+                  <a:srgbClr val="FFFFFF"/>
+                </a:solidFill>
+                <a:latin typeface="Calibri"/>
+              </a:rPr>
+              <a:t>READY TODAY</a:t>
+            </a:r>
+          </a:p>
+        </p:txBody>
+      </p:sp>
+      <p:sp>
+        <p:nvSpPr>
+          <p:cNvPr id="31" name="TextBox 30">
+            <a:extLst>
+              <a:ext uri="{FF2B5EF4-FFF2-40B4-BE49-F238E27FC236}">
+                <a16:creationId xmlns:a16="http://schemas.microsoft.com/office/drawing/2014/main" id="{D1332BDF-7B41-BEBF-DF3F-5353F31E58A0}"/>
+              </a:ext>
+            </a:extLst>
+          </p:cNvPr>
+          <p:cNvSpPr txBox="1"/>
+          <p:nvPr/>
+        </p:nvSpPr>
+        <p:spPr>
+          <a:xfrm>
+            <a:off x="5577840" y="2002536"/>
+            <a:ext cx="5532120" cy="731520"/>
+          </a:xfrm>
+          <a:prstGeom prst="rect">
+            <a:avLst/>
+          </a:prstGeom>
+          <a:noFill/>
+        </p:spPr>
+        <p:txBody>
+          <a:bodyPr wrap="square" lIns="0" tIns="0" rIns="0" bIns="0" anchor="t">
+            <a:spAutoFit/>
+          </a:bodyPr>
+          <a:lstStyle/>
+          <a:p>
+            <a:pPr algn="l">
+              <a:lnSpc>
+                <a:spcPct val="115000"/>
+              </a:lnSpc>
+            </a:pPr>
+            <a:r>
+              <a:rPr sz="1050" b="0" i="0">
+                <a:solidFill>
+                  <a:srgbClr val="484848"/>
+                </a:solidFill>
+                <a:latin typeface="Calibri"/>
+              </a:rPr>
+              <a:t>Run the existing pipeline against a prospect's real legacy pipeline to surface undocumented risk before a full engagement is sold. Needs no new build.</a:t>
+            </a:r>
+          </a:p>
+        </p:txBody>
+      </p:sp>
+      <p:sp>
+        <p:nvSpPr>
+          <p:cNvPr id="32" name="Rounded Rectangle 31">
+            <a:extLst>
+              <a:ext uri="{FF2B5EF4-FFF2-40B4-BE49-F238E27FC236}">
+                <a16:creationId xmlns:a16="http://schemas.microsoft.com/office/drawing/2014/main" id="{565EE474-E302-725B-B333-5F8D96844E06}"/>
+              </a:ext>
+            </a:extLst>
+          </p:cNvPr>
+          <p:cNvSpPr/>
+          <p:nvPr/>
+        </p:nvSpPr>
+        <p:spPr>
+          <a:xfrm>
+            <a:off x="4754879" y="3054096"/>
+            <a:ext cx="6583680" cy="1417320"/>
+          </a:xfrm>
+          <a:prstGeom prst="roundRect">
+            <a:avLst>
+              <a:gd name="adj" fmla="val 7000"/>
+            </a:avLst>
+          </a:prstGeom>
+          <a:solidFill>
+            <a:srgbClr val="F3F8FA"/>
+          </a:solidFill>
+          <a:ln>
+            <a:noFill/>
+          </a:ln>
+          <a:effectLst/>
+        </p:spPr>
+        <p:style>
+          <a:lnRef idx="1">
+            <a:schemeClr val="accent1"/>
+          </a:lnRef>
+          <a:fillRef idx="3">
+            <a:schemeClr val="accent1"/>
+          </a:fillRef>
+          <a:effectRef idx="2">
+            <a:schemeClr val="accent1"/>
+          </a:effectRef>
+          <a:fontRef idx="minor">
+            <a:schemeClr val="lt1"/>
+          </a:fontRef>
+        </p:style>
+        <p:txBody>
+          <a:bodyPr rtlCol="0" anchor="ctr"/>
+          <a:lstStyle/>
+          <a:p>
+            <a:pPr algn="ctr"/>
+            <a:endParaRPr/>
+          </a:p>
+        </p:txBody>
+      </p:sp>
+      <p:sp>
+        <p:nvSpPr>
+          <p:cNvPr id="33" name="Oval 32">
+            <a:extLst>
+              <a:ext uri="{FF2B5EF4-FFF2-40B4-BE49-F238E27FC236}">
+                <a16:creationId xmlns:a16="http://schemas.microsoft.com/office/drawing/2014/main" id="{827B0569-1401-B018-D572-0EE7B29B9A9F}"/>
+              </a:ext>
+            </a:extLst>
+          </p:cNvPr>
+          <p:cNvSpPr/>
+          <p:nvPr/>
+        </p:nvSpPr>
+        <p:spPr>
+          <a:xfrm>
+            <a:off x="4956047" y="3255264"/>
+            <a:ext cx="475488" cy="475488"/>
+          </a:xfrm>
+          <a:prstGeom prst="ellipse">
+            <a:avLst/>
+          </a:prstGeom>
+          <a:solidFill>
+            <a:srgbClr val="005071"/>
+          </a:solidFill>
+          <a:ln>
+            <a:noFill/>
+          </a:ln>
+          <a:effectLst/>
+        </p:spPr>
+        <p:style>
+          <a:lnRef idx="1">
+            <a:schemeClr val="accent1"/>
+          </a:lnRef>
+          <a:fillRef idx="3">
+            <a:schemeClr val="accent1"/>
+          </a:fillRef>
+          <a:effectRef idx="2">
+            <a:schemeClr val="accent1"/>
+          </a:effectRef>
+          <a:fontRef idx="minor">
+            <a:schemeClr val="lt1"/>
+          </a:fontRef>
+        </p:style>
+        <p:txBody>
+          <a:bodyPr rtlCol="0" anchor="ctr"/>
+          <a:lstStyle/>
+          <a:p>
+            <a:pPr algn="ctr"/>
+            <a:endParaRPr/>
+          </a:p>
+        </p:txBody>
+      </p:sp>
+      <p:pic>
+        <p:nvPicPr>
+          <p:cNvPr id="34" name="Picture 33" descr="cloud_white.png">
+            <a:extLst>
+              <a:ext uri="{FF2B5EF4-FFF2-40B4-BE49-F238E27FC236}">
+                <a16:creationId xmlns:a16="http://schemas.microsoft.com/office/drawing/2014/main" id="{A1EBCA9C-DF78-9359-1702-FF81EA7B1E0D}"/>
+              </a:ext>
+            </a:extLst>
+          </p:cNvPr>
+          <p:cNvPicPr>
+            <a:picLocks noChangeAspect="1"/>
+          </p:cNvPicPr>
+          <p:nvPr/>
+        </p:nvPicPr>
+        <p:blipFill>
+          <a:blip r:embed="rId5"/>
+          <a:stretch>
+            <a:fillRect/>
+          </a:stretch>
+        </p:blipFill>
+        <p:spPr>
+          <a:xfrm>
+            <a:off x="5079674" y="3378890"/>
+            <a:ext cx="228234" cy="228234"/>
+          </a:xfrm>
+          <a:prstGeom prst="rect">
+            <a:avLst/>
+          </a:prstGeom>
+        </p:spPr>
+      </p:pic>
+      <p:sp>
+        <p:nvSpPr>
+          <p:cNvPr id="35" name="TextBox 34">
+            <a:extLst>
+              <a:ext uri="{FF2B5EF4-FFF2-40B4-BE49-F238E27FC236}">
+                <a16:creationId xmlns:a16="http://schemas.microsoft.com/office/drawing/2014/main" id="{3B73EDA3-E35F-0E23-4683-9E0A0D26BABD}"/>
+              </a:ext>
+            </a:extLst>
+          </p:cNvPr>
+          <p:cNvSpPr txBox="1"/>
+          <p:nvPr/>
+        </p:nvSpPr>
+        <p:spPr>
+          <a:xfrm>
+            <a:off x="5577840" y="3218688"/>
+            <a:ext cx="4663440" cy="365760"/>
+          </a:xfrm>
+          <a:prstGeom prst="rect">
+            <a:avLst/>
+          </a:prstGeom>
+          <a:noFill/>
+        </p:spPr>
+        <p:txBody>
+          <a:bodyPr wrap="square" lIns="0" tIns="0" rIns="0" bIns="0" anchor="t">
+            <a:spAutoFit/>
+          </a:bodyPr>
+          <a:lstStyle/>
+          <a:p>
+            <a:pPr algn="l"/>
+            <a:r>
+              <a:rPr sz="1300" b="1" i="0">
+                <a:solidFill>
+                  <a:srgbClr val="005071"/>
+                </a:solidFill>
+                <a:latin typeface="Calibri"/>
+              </a:rPr>
+              <a:t>Path 2 — Tiered SaaS Accelerator</a:t>
+            </a:r>
+          </a:p>
+        </p:txBody>
+      </p:sp>
+      <p:sp>
+        <p:nvSpPr>
+          <p:cNvPr id="36" name="Rounded Rectangle 35">
+            <a:extLst>
+              <a:ext uri="{FF2B5EF4-FFF2-40B4-BE49-F238E27FC236}">
+                <a16:creationId xmlns:a16="http://schemas.microsoft.com/office/drawing/2014/main" id="{4B25A950-FDD9-958C-9680-906FA75C546A}"/>
+              </a:ext>
+            </a:extLst>
+          </p:cNvPr>
+          <p:cNvSpPr/>
+          <p:nvPr/>
+        </p:nvSpPr>
+        <p:spPr>
+          <a:xfrm>
+            <a:off x="9784080" y="3218688"/>
+            <a:ext cx="1371600" cy="256032"/>
+          </a:xfrm>
+          <a:prstGeom prst="roundRect">
+            <a:avLst>
+              <a:gd name="adj" fmla="val 50000"/>
+            </a:avLst>
+          </a:prstGeom>
+          <a:solidFill>
+            <a:srgbClr val="9C4444"/>
+          </a:solidFill>
+          <a:ln>
+            <a:noFill/>
+          </a:ln>
+          <a:effectLst/>
+        </p:spPr>
+        <p:style>
+          <a:lnRef idx="1">
+            <a:schemeClr val="accent1"/>
+          </a:lnRef>
+          <a:fillRef idx="3">
+            <a:schemeClr val="accent1"/>
+          </a:fillRef>
+          <a:effectRef idx="2">
+            <a:schemeClr val="accent1"/>
+          </a:effectRef>
+          <a:fontRef idx="minor">
+            <a:schemeClr val="lt1"/>
+          </a:fontRef>
+        </p:style>
+        <p:txBody>
+          <a:bodyPr rtlCol="0" anchor="ctr"/>
+          <a:lstStyle/>
+          <a:p>
+            <a:pPr algn="ctr"/>
+            <a:endParaRPr/>
+          </a:p>
+        </p:txBody>
+      </p:sp>
+      <p:sp>
+        <p:nvSpPr>
+          <p:cNvPr id="37" name="TextBox 36">
+            <a:extLst>
+              <a:ext uri="{FF2B5EF4-FFF2-40B4-BE49-F238E27FC236}">
+                <a16:creationId xmlns:a16="http://schemas.microsoft.com/office/drawing/2014/main" id="{34B40B93-2C66-0506-C873-1D75C2444701}"/>
+              </a:ext>
+            </a:extLst>
+          </p:cNvPr>
+          <p:cNvSpPr txBox="1"/>
+          <p:nvPr/>
+        </p:nvSpPr>
+        <p:spPr>
+          <a:xfrm>
+            <a:off x="9784080" y="3218688"/>
+            <a:ext cx="1371600" cy="256032"/>
+          </a:xfrm>
+          <a:prstGeom prst="rect">
+            <a:avLst/>
+          </a:prstGeom>
+          <a:noFill/>
+        </p:spPr>
+        <p:txBody>
+          <a:bodyPr wrap="square" lIns="0" tIns="0" rIns="0" bIns="0" anchor="ctr">
+            <a:spAutoFit/>
+          </a:bodyPr>
+          <a:lstStyle/>
+          <a:p>
+            <a:pPr algn="ctr"/>
+            <a:r>
+              <a:rPr sz="850" b="1" i="0">
+                <a:solidFill>
+                  <a:srgbClr val="FFFFFF"/>
+                </a:solidFill>
+                <a:latin typeface="Calibri"/>
+              </a:rPr>
+              <a:t>REQUIRES BUILD</a:t>
+            </a:r>
+          </a:p>
+        </p:txBody>
+      </p:sp>
+      <p:sp>
+        <p:nvSpPr>
+          <p:cNvPr id="38" name="TextBox 37">
+            <a:extLst>
+              <a:ext uri="{FF2B5EF4-FFF2-40B4-BE49-F238E27FC236}">
+                <a16:creationId xmlns:a16="http://schemas.microsoft.com/office/drawing/2014/main" id="{913CDF6C-B675-F8BA-236E-64423E62BDFA}"/>
+              </a:ext>
+            </a:extLst>
+          </p:cNvPr>
+          <p:cNvSpPr txBox="1"/>
+          <p:nvPr/>
+        </p:nvSpPr>
+        <p:spPr>
+          <a:xfrm>
+            <a:off x="5577840" y="3621024"/>
+            <a:ext cx="5532120" cy="731520"/>
+          </a:xfrm>
+          <a:prstGeom prst="rect">
+            <a:avLst/>
+          </a:prstGeom>
+          <a:noFill/>
+        </p:spPr>
+        <p:txBody>
+          <a:bodyPr wrap="square" lIns="0" tIns="0" rIns="0" bIns="0" anchor="t">
+            <a:spAutoFit/>
+          </a:bodyPr>
+          <a:lstStyle/>
+          <a:p>
+            <a:pPr algn="l">
+              <a:lnSpc>
+                <a:spcPct val="115000"/>
+              </a:lnSpc>
+            </a:pPr>
+            <a:r>
+              <a:rPr sz="1050" b="0" i="0">
+                <a:solidFill>
+                  <a:srgbClr val="484848"/>
+                </a:solidFill>
+                <a:latin typeface="Calibri"/>
+              </a:rPr>
+              <a:t>Longer-term productized offering for repeat use across similar clients. Assumes a repeatable multi-tenant product that hasn't been built yet.</a:t>
+            </a:r>
+          </a:p>
+        </p:txBody>
+      </p:sp>
+      <p:sp>
+        <p:nvSpPr>
+          <p:cNvPr id="40" name="Rounded Rectangle 39">
+            <a:extLst>
+              <a:ext uri="{FF2B5EF4-FFF2-40B4-BE49-F238E27FC236}">
+                <a16:creationId xmlns:a16="http://schemas.microsoft.com/office/drawing/2014/main" id="{AC46114C-399C-EA87-BFAE-9DE561311FF7}"/>
+              </a:ext>
+            </a:extLst>
+          </p:cNvPr>
+          <p:cNvSpPr/>
+          <p:nvPr/>
+        </p:nvSpPr>
+        <p:spPr>
+          <a:xfrm>
+            <a:off x="4754879" y="4672583"/>
+            <a:ext cx="6583680" cy="621792"/>
+          </a:xfrm>
+          <a:prstGeom prst="roundRect">
+            <a:avLst>
+              <a:gd name="adj" fmla="val 10000"/>
+            </a:avLst>
+          </a:prstGeom>
+          <a:solidFill>
+            <a:srgbClr val="FFF3EA"/>
+          </a:solidFill>
+          <a:ln w="12700">
+            <a:solidFill>
+              <a:srgbClr val="FB4D0A"/>
+            </a:solidFill>
+          </a:ln>
+          <a:effectLst/>
+        </p:spPr>
+        <p:style>
+          <a:lnRef idx="1">
+            <a:schemeClr val="accent1"/>
+          </a:lnRef>
+          <a:fillRef idx="3">
+            <a:schemeClr val="accent1"/>
+          </a:fillRef>
+          <a:effectRef idx="2">
+            <a:schemeClr val="accent1"/>
+          </a:effectRef>
+          <a:fontRef idx="minor">
+            <a:schemeClr val="lt1"/>
+          </a:fontRef>
+        </p:style>
+        <p:txBody>
+          <a:bodyPr rtlCol="0" anchor="ctr"/>
+          <a:lstStyle/>
+          <a:p>
+            <a:pPr algn="ctr"/>
+            <a:endParaRPr/>
+          </a:p>
+        </p:txBody>
+      </p:sp>
+      <p:sp>
+        <p:nvSpPr>
+          <p:cNvPr id="41" name="TextBox 40">
+            <a:extLst>
+              <a:ext uri="{FF2B5EF4-FFF2-40B4-BE49-F238E27FC236}">
+                <a16:creationId xmlns:a16="http://schemas.microsoft.com/office/drawing/2014/main" id="{463F71A5-1B9C-BF1B-70AD-2ED4A5BCF90B}"/>
+              </a:ext>
+            </a:extLst>
+          </p:cNvPr>
+          <p:cNvSpPr txBox="1"/>
+          <p:nvPr/>
+        </p:nvSpPr>
+        <p:spPr>
+          <a:xfrm>
+            <a:off x="4956047" y="4672583"/>
+            <a:ext cx="6181344" cy="621792"/>
+          </a:xfrm>
+          <a:prstGeom prst="rect">
+            <a:avLst/>
+          </a:prstGeom>
+          <a:noFill/>
+        </p:spPr>
+        <p:txBody>
+          <a:bodyPr wrap="square" lIns="0" tIns="0" rIns="0" bIns="0" anchor="ctr">
+            <a:spAutoFit/>
+          </a:bodyPr>
+          <a:lstStyle/>
+          <a:p>
+            <a:pPr algn="l">
+              <a:lnSpc>
+                <a:spcPct val="115000"/>
+              </a:lnSpc>
+            </a:pPr>
+            <a:r>
+              <a:rPr sz="1050" b="1" i="0">
+                <a:solidFill>
+                  <a:srgbClr val="8A4A00"/>
+                </a:solidFill>
+                <a:latin typeface="Calibri"/>
+              </a:rPr>
+              <a:t>Honest status:  </a:t>
+            </a:r>
+            <a:r>
+              <a:rPr sz="1050" b="0" i="0">
+                <a:solidFill>
+                  <a:srgbClr val="6B3E00"/>
+                </a:solidFill>
+                <a:latin typeface="Calibri"/>
+              </a:rPr>
+              <a:t>both are untested ideas, not validated business models — the next real client engagement is the opportunity to prove which one lands.</a:t>
+            </a:r>
+          </a:p>
+        </p:txBody>
+      </p:sp>
+    </p:spTree>
+  </p:cSld>
+  <p:clrMapOvr>
+    <a:masterClrMapping/>
+  </p:clrMapOvr>
+</p:sld>
+</file>
+
+<file path=ppt/slides/slide6.xml><?xml version="1.0" encoding="utf-8"?>
+<p:sld xmlns:a="http://schemas.openxmlformats.org/drawingml/2006/main" xmlns:p="http://schemas.openxmlformats.org/presentationml/2006/main" xmlns:r="http://schemas.openxmlformats.org/officeDocument/2006/relationships">
+  <p:cSld>
+    <p:spTree>
+      <p:nvGrpSpPr>
+        <p:cNvPr id="1" name=""/>
+        <p:cNvGrpSpPr/>
+        <p:nvPr/>
+      </p:nvGrpSpPr>
+      <p:grpSpPr/>
+      <p:sp>
+        <p:nvSpPr>
+          <p:cNvPr id="2" name="TextBox 1"/>
+          <p:cNvSpPr txBox="1"/>
+          <p:nvPr/>
+        </p:nvSpPr>
+        <p:spPr>
+          <a:xfrm>
+            <a:off x="365760" y="274320"/>
+            <a:ext cx="457200" cy="457200"/>
+          </a:xfrm>
+          <a:prstGeom prst="rect">
+            <a:avLst/>
+          </a:prstGeom>
+          <a:noFill/>
+        </p:spPr>
+        <p:txBody>
+          <a:bodyPr wrap="square">
+            <a:spAutoFit/>
+          </a:bodyPr>
+          <a:lstStyle/>
+          <a:p>
+            <a:pPr algn="l"/>
+            <a:r>
+              <a:rPr sz="2200" b="1">
+                <a:solidFill>
+                  <a:srgbClr val="233A5F"/>
+                </a:solidFill>
+                <a:latin typeface="Calibri"/>
+              </a:rPr>
+              <a:t>05</a:t>
+            </a:r>
+          </a:p>
+        </p:txBody>
+      </p:sp>
+      <p:sp>
+        <p:nvSpPr>
+          <p:cNvPr id="3" name="TextBox 2"/>
+          <p:cNvSpPr txBox="1"/>
+          <p:nvPr/>
+        </p:nvSpPr>
+        <p:spPr>
+          <a:xfrm>
+            <a:off x="822960" y="411480"/>
+            <a:ext cx="7132320" cy="457200"/>
+          </a:xfrm>
+          <a:prstGeom prst="rect">
+            <a:avLst/>
+          </a:prstGeom>
+          <a:noFill/>
+        </p:spPr>
+        <p:txBody>
+          <a:bodyPr wrap="square">
+            <a:spAutoFit/>
+          </a:bodyPr>
+          <a:lstStyle/>
+          <a:p>
+            <a:pPr algn="l"/>
+            <a:r>
+              <a:rPr sz="2700" b="1">
+                <a:solidFill>
+                  <a:srgbClr val="233A5F"/>
+                </a:solidFill>
+                <a:latin typeface="Calibri"/>
+              </a:rPr>
+              <a:t>System Architecture</a:t>
+            </a:r>
+          </a:p>
+        </p:txBody>
+      </p:sp>
+      <p:sp>
+        <p:nvSpPr>
+          <p:cNvPr id="4" name="TextBox 3"/>
+          <p:cNvSpPr txBox="1"/>
+          <p:nvPr/>
+        </p:nvSpPr>
+        <p:spPr>
+          <a:xfrm>
+            <a:off x="822960" y="822960"/>
+            <a:ext cx="8229600" cy="457200"/>
+          </a:xfrm>
+          <a:prstGeom prst="rect">
+            <a:avLst/>
+          </a:prstGeom>
+          <a:noFill/>
+        </p:spPr>
+        <p:txBody>
+          <a:bodyPr wrap="square">
+            <a:spAutoFit/>
+          </a:bodyPr>
+          <a:lstStyle/>
+          <a:p>
+            <a:pPr algn="l"/>
+            <a:r>
+              <a:rPr sz="1400" b="0">
+                <a:solidFill>
+                  <a:srgbClr val="4C5664"/>
+                </a:solidFill>
+                <a:latin typeface="Calibri"/>
+              </a:rPr>
+              <a:t>Legacy ETL → AI-assisted discovery → dbt/Snowflake delivery with validation and human review</a:t>
+            </a:r>
+          </a:p>
+        </p:txBody>
+      </p:sp>
+      <p:sp>
+        <p:nvSpPr>
+          <p:cNvPr id="5" name="Rounded Rectangle 4"/>
+          <p:cNvSpPr/>
+          <p:nvPr/>
+        </p:nvSpPr>
+        <p:spPr>
+          <a:xfrm>
+            <a:off x="411480" y="1417320"/>
+            <a:ext cx="1234440" cy="1051560"/>
+          </a:xfrm>
+          <a:prstGeom prst="roundRect">
+            <a:avLst/>
+          </a:prstGeom>
+          <a:solidFill>
+            <a:srgbClr val="365F91"/>
+          </a:solidFill>
+          <a:ln>
+            <a:solidFill>
+              <a:srgbClr val="365F91"/>
+            </a:solidFill>
+          </a:ln>
+        </p:spPr>
+        <p:style>
+          <a:lnRef idx="1">
+            <a:schemeClr val="accent1"/>
+          </a:lnRef>
+          <a:fillRef idx="3">
+            <a:schemeClr val="accent1"/>
+          </a:fillRef>
+          <a:effectRef idx="2">
+            <a:schemeClr val="accent1"/>
+          </a:effectRef>
+          <a:fontRef idx="minor">
+            <a:schemeClr val="lt1"/>
+          </a:fontRef>
+        </p:style>
+        <p:txBody>
+          <a:bodyPr rtlCol="0" anchor="ctr" wrap="square" lIns="73152" rIns="73152" tIns="73152" bIns="73152"/>
+          <a:lstStyle/>
+          <a:p>
+            <a:pPr algn="ctr"/>
+            <a:r>
+              <a:rPr sz="1200" b="1">
+                <a:solidFill>
+                  <a:srgbClr val="FFFFFF"/>
+                </a:solidFill>
+                <a:latin typeface="Calibri"/>
+              </a:rPr>
+              <a:t>Legacy SQL
+&amp; metadata</a:t>
+            </a:r>
+          </a:p>
+        </p:txBody>
+      </p:sp>
+      <p:sp>
+        <p:nvSpPr>
+          <p:cNvPr id="6" name="TextBox 5"/>
+          <p:cNvSpPr txBox="1"/>
+          <p:nvPr/>
+        </p:nvSpPr>
+        <p:spPr>
+          <a:xfrm>
+            <a:off x="1691640" y="1737360"/>
+            <a:ext cx="201168" cy="320040"/>
+          </a:xfrm>
+          <a:prstGeom prst="rect">
+            <a:avLst/>
+          </a:prstGeom>
+          <a:noFill/>
+        </p:spPr>
+        <p:txBody>
+          <a:bodyPr wrap="square">
+            <a:spAutoFit/>
+          </a:bodyPr>
+          <a:lstStyle/>
+          <a:p>
+            <a:pPr algn="ctr"/>
+            <a:r>
+              <a:rPr sz="2200" b="1">
+                <a:solidFill>
+                  <a:srgbClr val="37598E"/>
+                </a:solidFill>
+                <a:latin typeface="Calibri"/>
+              </a:rPr>
+              <a:t>→</a:t>
+            </a:r>
+          </a:p>
+        </p:txBody>
+      </p:sp>
+      <p:sp>
+        <p:nvSpPr>
+          <p:cNvPr id="7" name="Rounded Rectangle 6"/>
+          <p:cNvSpPr/>
+          <p:nvPr/>
+        </p:nvSpPr>
+        <p:spPr>
+          <a:xfrm>
+            <a:off x="1737360" y="1417320"/>
+            <a:ext cx="1234440" cy="1051560"/>
+          </a:xfrm>
+          <a:prstGeom prst="roundRect">
+            <a:avLst/>
+          </a:prstGeom>
+          <a:solidFill>
+            <a:srgbClr val="5276B9"/>
+          </a:solidFill>
+          <a:ln>
+            <a:solidFill>
+              <a:srgbClr val="5276B9"/>
+            </a:solidFill>
+          </a:ln>
+        </p:spPr>
+        <p:style>
+          <a:lnRef idx="1">
+            <a:schemeClr val="accent1"/>
+          </a:lnRef>
+          <a:fillRef idx="3">
+            <a:schemeClr val="accent1"/>
+          </a:fillRef>
+          <a:effectRef idx="2">
+            <a:schemeClr val="accent1"/>
+          </a:effectRef>
+          <a:fontRef idx="minor">
+            <a:schemeClr val="lt1"/>
+          </a:fontRef>
+        </p:style>
+        <p:txBody>
+          <a:bodyPr rtlCol="0" anchor="ctr" wrap="square" lIns="73152" rIns="73152" tIns="73152" bIns="73152"/>
+          <a:lstStyle/>
+          <a:p>
+            <a:pPr algn="ctr"/>
+            <a:r>
+              <a:rPr sz="1200" b="1">
+                <a:solidFill>
+                  <a:srgbClr val="FFFFFF"/>
+                </a:solidFill>
+                <a:latin typeface="Calibri"/>
+              </a:rPr>
+              <a:t>AI Analysis
+Rules + lineage</a:t>
+            </a:r>
+          </a:p>
+        </p:txBody>
+      </p:sp>
+      <p:sp>
+        <p:nvSpPr>
+          <p:cNvPr id="8" name="TextBox 7"/>
+          <p:cNvSpPr txBox="1"/>
+          <p:nvPr/>
+        </p:nvSpPr>
+        <p:spPr>
+          <a:xfrm>
+            <a:off x="3017520" y="1737360"/>
+            <a:ext cx="201168" cy="320040"/>
+          </a:xfrm>
+          <a:prstGeom prst="rect">
+            <a:avLst/>
+          </a:prstGeom>
+          <a:noFill/>
+        </p:spPr>
+        <p:txBody>
+          <a:bodyPr wrap="square">
+            <a:spAutoFit/>
+          </a:bodyPr>
+          <a:lstStyle/>
+          <a:p>
+            <a:pPr algn="ctr"/>
+            <a:r>
+              <a:rPr sz="2200" b="1">
+                <a:solidFill>
+                  <a:srgbClr val="37598E"/>
+                </a:solidFill>
+                <a:latin typeface="Calibri"/>
+              </a:rPr>
+              <a:t>→</a:t>
+            </a:r>
+          </a:p>
+        </p:txBody>
+      </p:sp>
+      <p:sp>
+        <p:nvSpPr>
+          <p:cNvPr id="9" name="Rounded Rectangle 8"/>
+          <p:cNvSpPr/>
+          <p:nvPr/>
+        </p:nvSpPr>
+        <p:spPr>
+          <a:xfrm>
+            <a:off x="3063240" y="1417320"/>
+            <a:ext cx="1234440" cy="1051560"/>
+          </a:xfrm>
+          <a:prstGeom prst="roundRect">
+            <a:avLst/>
+          </a:prstGeom>
+          <a:solidFill>
+            <a:srgbClr val="3794BC"/>
+          </a:solidFill>
+          <a:ln>
+            <a:solidFill>
+              <a:srgbClr val="3794BC"/>
+            </a:solidFill>
+          </a:ln>
+        </p:spPr>
+        <p:style>
+          <a:lnRef idx="1">
+            <a:schemeClr val="accent1"/>
+          </a:lnRef>
+          <a:fillRef idx="3">
+            <a:schemeClr val="accent1"/>
+          </a:fillRef>
+          <a:effectRef idx="2">
+            <a:schemeClr val="accent1"/>
+          </a:effectRef>
+          <a:fontRef idx="minor">
+            <a:schemeClr val="lt1"/>
+          </a:fontRef>
+        </p:style>
+        <p:txBody>
+          <a:bodyPr rtlCol="0" anchor="ctr" wrap="square" lIns="73152" rIns="73152" tIns="73152" bIns="73152"/>
+          <a:lstStyle/>
+          <a:p>
+            <a:pPr algn="ctr"/>
+            <a:r>
+              <a:rPr sz="1200" b="1">
+                <a:solidFill>
+                  <a:srgbClr val="FFFFFF"/>
+                </a:solidFill>
+                <a:latin typeface="Calibri"/>
+              </a:rPr>
+              <a:t>Transformation
+Snowflake / dbt</a:t>
+            </a:r>
+          </a:p>
+        </p:txBody>
+      </p:sp>
+      <p:sp>
+        <p:nvSpPr>
+          <p:cNvPr id="10" name="TextBox 9"/>
+          <p:cNvSpPr txBox="1"/>
+          <p:nvPr/>
+        </p:nvSpPr>
+        <p:spPr>
+          <a:xfrm>
+            <a:off x="4343400" y="1737360"/>
+            <a:ext cx="201168" cy="320040"/>
+          </a:xfrm>
+          <a:prstGeom prst="rect">
+            <a:avLst/>
+          </a:prstGeom>
+          <a:noFill/>
+        </p:spPr>
+        <p:txBody>
+          <a:bodyPr wrap="square">
+            <a:spAutoFit/>
+          </a:bodyPr>
+          <a:lstStyle/>
+          <a:p>
+            <a:pPr algn="ctr"/>
+            <a:r>
+              <a:rPr sz="2200" b="1">
+                <a:solidFill>
+                  <a:srgbClr val="37598E"/>
+                </a:solidFill>
+                <a:latin typeface="Calibri"/>
+              </a:rPr>
+              <a:t>→</a:t>
+            </a:r>
+          </a:p>
+        </p:txBody>
+      </p:sp>
+      <p:sp>
+        <p:nvSpPr>
+          <p:cNvPr id="11" name="Rounded Rectangle 10"/>
+          <p:cNvSpPr/>
+          <p:nvPr/>
+        </p:nvSpPr>
+        <p:spPr>
+          <a:xfrm>
+            <a:off x="4389120" y="1417320"/>
+            <a:ext cx="1234440" cy="1051560"/>
+          </a:xfrm>
+          <a:prstGeom prst="roundRect">
+            <a:avLst/>
+          </a:prstGeom>
+          <a:solidFill>
+            <a:srgbClr val="68A0B3"/>
+          </a:solidFill>
+          <a:ln>
+            <a:solidFill>
+              <a:srgbClr val="68A0B3"/>
+            </a:solidFill>
+          </a:ln>
+        </p:spPr>
+        <p:style>
+          <a:lnRef idx="1">
+            <a:schemeClr val="accent1"/>
+          </a:lnRef>
+          <a:fillRef idx="3">
+            <a:schemeClr val="accent1"/>
+          </a:fillRef>
+          <a:effectRef idx="2">
+            <a:schemeClr val="accent1"/>
+          </a:effectRef>
+          <a:fontRef idx="minor">
+            <a:schemeClr val="lt1"/>
+          </a:fontRef>
+        </p:style>
+        <p:txBody>
+          <a:bodyPr rtlCol="0" anchor="ctr" wrap="square" lIns="73152" rIns="73152" tIns="73152" bIns="73152"/>
+          <a:lstStyle/>
+          <a:p>
+            <a:pPr algn="ctr"/>
+            <a:r>
+              <a:rPr sz="1200" b="1">
+                <a:solidFill>
+                  <a:srgbClr val="FFFFFF"/>
+                </a:solidFill>
+                <a:latin typeface="Calibri"/>
+              </a:rPr>
+              <a:t>Human Review
+Flag &amp; approve</a:t>
+            </a:r>
+          </a:p>
+        </p:txBody>
+      </p:sp>
+      <p:sp>
+        <p:nvSpPr>
+          <p:cNvPr id="12" name="TextBox 11"/>
+          <p:cNvSpPr txBox="1"/>
+          <p:nvPr/>
+        </p:nvSpPr>
+        <p:spPr>
+          <a:xfrm>
+            <a:off x="5669280" y="1737360"/>
+            <a:ext cx="201168" cy="320040"/>
+          </a:xfrm>
+          <a:prstGeom prst="rect">
+            <a:avLst/>
+          </a:prstGeom>
+          <a:noFill/>
+        </p:spPr>
+        <p:txBody>
+          <a:bodyPr wrap="square">
+            <a:spAutoFit/>
+          </a:bodyPr>
+          <a:lstStyle/>
+          <a:p>
+            <a:pPr algn="ctr"/>
+            <a:r>
+              <a:rPr sz="2200" b="1">
+                <a:solidFill>
+                  <a:srgbClr val="37598E"/>
+                </a:solidFill>
+                <a:latin typeface="Calibri"/>
+              </a:rPr>
+              <a:t>→</a:t>
+            </a:r>
+          </a:p>
+        </p:txBody>
+      </p:sp>
+      <p:sp>
+        <p:nvSpPr>
+          <p:cNvPr id="13" name="Rounded Rectangle 12"/>
+          <p:cNvSpPr/>
+          <p:nvPr/>
+        </p:nvSpPr>
+        <p:spPr>
+          <a:xfrm>
+            <a:off x="5715000" y="1417320"/>
+            <a:ext cx="1234440" cy="1051560"/>
+          </a:xfrm>
+          <a:prstGeom prst="roundRect">
+            <a:avLst/>
+          </a:prstGeom>
+          <a:solidFill>
+            <a:srgbClr val="4C947C"/>
+          </a:solidFill>
+          <a:ln>
+            <a:solidFill>
+              <a:srgbClr val="4C947C"/>
+            </a:solidFill>
+          </a:ln>
+        </p:spPr>
+        <p:style>
+          <a:lnRef idx="1">
+            <a:schemeClr val="accent1"/>
+          </a:lnRef>
+          <a:fillRef idx="3">
+            <a:schemeClr val="accent1"/>
+          </a:fillRef>
+          <a:effectRef idx="2">
+            <a:schemeClr val="accent1"/>
+          </a:effectRef>
+          <a:fontRef idx="minor">
+            <a:schemeClr val="lt1"/>
+          </a:fontRef>
+        </p:style>
+        <p:txBody>
+          <a:bodyPr rtlCol="0" anchor="ctr" wrap="square" lIns="73152" rIns="73152" tIns="73152" bIns="73152"/>
+          <a:lstStyle/>
+          <a:p>
+            <a:pPr algn="ctr"/>
+            <a:r>
+              <a:rPr sz="1200" b="1">
+                <a:solidFill>
+                  <a:srgbClr val="FFFFFF"/>
+                </a:solidFill>
+                <a:latin typeface="Calibri"/>
+              </a:rPr>
+              <a:t>Validation
+Ground truth + QA</a:t>
+            </a:r>
+          </a:p>
+        </p:txBody>
+      </p:sp>
+      <p:sp>
+        <p:nvSpPr>
+          <p:cNvPr id="14" name="TextBox 13"/>
+          <p:cNvSpPr txBox="1"/>
+          <p:nvPr/>
+        </p:nvSpPr>
+        <p:spPr>
+          <a:xfrm>
+            <a:off x="6995159" y="1737360"/>
+            <a:ext cx="201168" cy="320040"/>
+          </a:xfrm>
+          <a:prstGeom prst="rect">
+            <a:avLst/>
+          </a:prstGeom>
+          <a:noFill/>
+        </p:spPr>
+        <p:txBody>
+          <a:bodyPr wrap="square">
+            <a:spAutoFit/>
+          </a:bodyPr>
+          <a:lstStyle/>
+          <a:p>
+            <a:pPr algn="ctr"/>
+            <a:r>
+              <a:rPr sz="2200" b="1">
+                <a:solidFill>
+                  <a:srgbClr val="37598E"/>
+                </a:solidFill>
+                <a:latin typeface="Calibri"/>
+              </a:rPr>
+              <a:t>→</a:t>
+            </a:r>
+          </a:p>
+        </p:txBody>
+      </p:sp>
+      <p:sp>
+        <p:nvSpPr>
+          <p:cNvPr id="15" name="Rounded Rectangle 14"/>
+          <p:cNvSpPr/>
+          <p:nvPr/>
+        </p:nvSpPr>
+        <p:spPr>
+          <a:xfrm>
+            <a:off x="7040880" y="1417320"/>
+            <a:ext cx="1234440" cy="1051560"/>
+          </a:xfrm>
+          <a:prstGeom prst="roundRect">
+            <a:avLst/>
+          </a:prstGeom>
+          <a:solidFill>
+            <a:srgbClr val="296F5C"/>
+          </a:solidFill>
+          <a:ln>
+            <a:solidFill>
+              <a:srgbClr val="296F5C"/>
+            </a:solidFill>
+          </a:ln>
+        </p:spPr>
+        <p:style>
+          <a:lnRef idx="1">
+            <a:schemeClr val="accent1"/>
+          </a:lnRef>
+          <a:fillRef idx="3">
+            <a:schemeClr val="accent1"/>
+          </a:fillRef>
+          <a:effectRef idx="2">
+            <a:schemeClr val="accent1"/>
+          </a:effectRef>
+          <a:fontRef idx="minor">
+            <a:schemeClr val="lt1"/>
+          </a:fontRef>
+        </p:style>
+        <p:txBody>
+          <a:bodyPr rtlCol="0" anchor="ctr" wrap="square" lIns="73152" rIns="73152" tIns="73152" bIns="73152"/>
+          <a:lstStyle/>
+          <a:p>
+            <a:pPr algn="ctr"/>
+            <a:r>
+              <a:rPr sz="1200" b="1">
+                <a:solidFill>
+                  <a:srgbClr val="FFFFFF"/>
+                </a:solidFill>
+                <a:latin typeface="Calibri"/>
+              </a:rPr>
+              <a:t>Output
+Migration report</a:t>
+            </a:r>
+          </a:p>
+        </p:txBody>
+      </p:sp>
+      <p:sp>
+        <p:nvSpPr>
+          <p:cNvPr id="16" name="Rounded Rectangle 15"/>
+          <p:cNvSpPr/>
+          <p:nvPr/>
+        </p:nvSpPr>
+        <p:spPr>
+          <a:xfrm>
+            <a:off x="411480" y="3794760"/>
+            <a:ext cx="1097280" cy="914400"/>
+          </a:xfrm>
+          <a:prstGeom prst="roundRect">
+            <a:avLst/>
+          </a:prstGeom>
+          <a:solidFill>
+            <a:srgbClr val="E6EEF8"/>
+          </a:solidFill>
+          <a:ln>
+            <a:solidFill>
+              <a:srgbClr val="566E8C"/>
+            </a:solidFill>
+          </a:ln>
+        </p:spPr>
+        <p:style>
+          <a:lnRef idx="1">
+            <a:schemeClr val="accent1"/>
+          </a:lnRef>
+          <a:fillRef idx="3">
+            <a:schemeClr val="accent1"/>
+          </a:fillRef>
+          <a:effectRef idx="2">
+            <a:schemeClr val="accent1"/>
+          </a:effectRef>
+          <a:fontRef idx="minor">
+            <a:schemeClr val="lt1"/>
+          </a:fontRef>
+        </p:style>
+        <p:txBody>
+          <a:bodyPr rtlCol="0" anchor="ctr" wrap="square"/>
+          <a:lstStyle/>
+          <a:p>
+            <a:pPr algn="ctr"/>
+            <a:r>
+              <a:rPr sz="1100" b="1">
+                <a:solidFill>
+                  <a:srgbClr val="192E3F"/>
+                </a:solidFill>
+                <a:latin typeface="Calibri"/>
+              </a:rPr>
+              <a:t>Landing</a:t>
+            </a:r>
+          </a:p>
+        </p:txBody>
+      </p:sp>
+      <p:sp>
+        <p:nvSpPr>
+          <p:cNvPr id="17" name="Rounded Rectangle 16"/>
+          <p:cNvSpPr/>
+          <p:nvPr/>
+        </p:nvSpPr>
+        <p:spPr>
+          <a:xfrm>
+            <a:off x="1536192" y="3794760"/>
+            <a:ext cx="1097280" cy="914400"/>
+          </a:xfrm>
+          <a:prstGeom prst="roundRect">
+            <a:avLst/>
+          </a:prstGeom>
+          <a:solidFill>
+            <a:srgbClr val="D8E8F7"/>
+          </a:solidFill>
+          <a:ln>
+            <a:solidFill>
+              <a:srgbClr val="566E8C"/>
+            </a:solidFill>
+          </a:ln>
+        </p:spPr>
+        <p:style>
+          <a:lnRef idx="1">
+            <a:schemeClr val="accent1"/>
+          </a:lnRef>
+          <a:fillRef idx="3">
+            <a:schemeClr val="accent1"/>
+          </a:fillRef>
+          <a:effectRef idx="2">
+            <a:schemeClr val="accent1"/>
+          </a:effectRef>
+          <a:fontRef idx="minor">
+            <a:schemeClr val="lt1"/>
+          </a:fontRef>
+        </p:style>
+        <p:txBody>
+          <a:bodyPr rtlCol="0" anchor="ctr" wrap="square"/>
+          <a:lstStyle/>
+          <a:p>
+            <a:pPr algn="ctr"/>
+            <a:r>
+              <a:rPr sz="1100" b="1">
+                <a:solidFill>
+                  <a:srgbClr val="192E3F"/>
+                </a:solidFill>
+                <a:latin typeface="Calibri"/>
+              </a:rPr>
+              <a:t>Staging</a:t>
+            </a:r>
+          </a:p>
+        </p:txBody>
+      </p:sp>
+      <p:sp>
+        <p:nvSpPr>
+          <p:cNvPr id="18" name="Rounded Rectangle 17"/>
+          <p:cNvSpPr/>
+          <p:nvPr/>
+        </p:nvSpPr>
+        <p:spPr>
+          <a:xfrm>
+            <a:off x="2660904" y="3794760"/>
+            <a:ext cx="1097280" cy="914400"/>
+          </a:xfrm>
+          <a:prstGeom prst="roundRect">
+            <a:avLst/>
+          </a:prstGeom>
+          <a:solidFill>
+            <a:srgbClr val="CBDEF4"/>
+          </a:solidFill>
+          <a:ln>
+            <a:solidFill>
+              <a:srgbClr val="566E8C"/>
+            </a:solidFill>
+          </a:ln>
+        </p:spPr>
+        <p:style>
+          <a:lnRef idx="1">
+            <a:schemeClr val="accent1"/>
+          </a:lnRef>
+          <a:fillRef idx="3">
+            <a:schemeClr val="accent1"/>
+          </a:fillRef>
+          <a:effectRef idx="2">
+            <a:schemeClr val="accent1"/>
+          </a:effectRef>
+          <a:fontRef idx="minor">
+            <a:schemeClr val="lt1"/>
+          </a:fontRef>
+        </p:style>
+        <p:txBody>
+          <a:bodyPr rtlCol="0" anchor="ctr" wrap="square"/>
+          <a:lstStyle/>
+          <a:p>
+            <a:pPr algn="ctr"/>
+            <a:r>
+              <a:rPr sz="1100" b="1">
+                <a:solidFill>
+                  <a:srgbClr val="192E3F"/>
+                </a:solidFill>
+                <a:latin typeface="Calibri"/>
+              </a:rPr>
+              <a:t>Curated</a:t>
+            </a:r>
+          </a:p>
+        </p:txBody>
+      </p:sp>
+      <p:sp>
+        <p:nvSpPr>
+          <p:cNvPr id="19" name="Rounded Rectangle 18"/>
+          <p:cNvSpPr/>
+          <p:nvPr/>
+        </p:nvSpPr>
+        <p:spPr>
+          <a:xfrm>
+            <a:off x="3785615" y="3794760"/>
+            <a:ext cx="1097280" cy="914400"/>
+          </a:xfrm>
+          <a:prstGeom prst="roundRect">
+            <a:avLst/>
+          </a:prstGeom>
+          <a:solidFill>
+            <a:srgbClr val="BCD4F0"/>
+          </a:solidFill>
+          <a:ln>
+            <a:solidFill>
+              <a:srgbClr val="566E8C"/>
+            </a:solidFill>
+          </a:ln>
+        </p:spPr>
+        <p:style>
+          <a:lnRef idx="1">
+            <a:schemeClr val="accent1"/>
+          </a:lnRef>
+          <a:fillRef idx="3">
+            <a:schemeClr val="accent1"/>
+          </a:fillRef>
+          <a:effectRef idx="2">
+            <a:schemeClr val="accent1"/>
+          </a:effectRef>
+          <a:fontRef idx="minor">
+            <a:schemeClr val="lt1"/>
+          </a:fontRef>
+        </p:style>
+        <p:txBody>
+          <a:bodyPr rtlCol="0" anchor="ctr" wrap="square"/>
+          <a:lstStyle/>
+          <a:p>
+            <a:pPr algn="ctr"/>
+            <a:r>
+              <a:rPr sz="1100" b="1">
+                <a:solidFill>
+                  <a:srgbClr val="192E3F"/>
+                </a:solidFill>
+                <a:latin typeface="Calibri"/>
+              </a:rPr>
+              <a:t>Data Mart</a:t>
+            </a:r>
+          </a:p>
+        </p:txBody>
+      </p:sp>
+      <p:sp>
+        <p:nvSpPr>
+          <p:cNvPr id="20" name="Rounded Rectangle 19"/>
+          <p:cNvSpPr/>
+          <p:nvPr/>
+        </p:nvSpPr>
+        <p:spPr>
+          <a:xfrm>
+            <a:off x="4910328" y="3794760"/>
+            <a:ext cx="1097280" cy="914400"/>
+          </a:xfrm>
+          <a:prstGeom prst="roundRect">
+            <a:avLst/>
+          </a:prstGeom>
+          <a:solidFill>
+            <a:srgbClr val="A9CAEB"/>
+          </a:solidFill>
+          <a:ln>
+            <a:solidFill>
+              <a:srgbClr val="566E8C"/>
+            </a:solidFill>
+          </a:ln>
+        </p:spPr>
+        <p:style>
+          <a:lnRef idx="1">
+            <a:schemeClr val="accent1"/>
+          </a:lnRef>
+          <a:fillRef idx="3">
+            <a:schemeClr val="accent1"/>
+          </a:fillRef>
+          <a:effectRef idx="2">
+            <a:schemeClr val="accent1"/>
+          </a:effectRef>
+          <a:fontRef idx="minor">
+            <a:schemeClr val="lt1"/>
+          </a:fontRef>
+        </p:style>
+        <p:txBody>
+          <a:bodyPr rtlCol="0" anchor="ctr" wrap="square"/>
+          <a:lstStyle/>
+          <a:p>
+            <a:pPr algn="ctr"/>
+            <a:r>
+              <a:rPr sz="1100" b="1">
+                <a:solidFill>
+                  <a:srgbClr val="192E3F"/>
+                </a:solidFill>
+                <a:latin typeface="Calibri"/>
+              </a:rPr>
+              <a:t>Metadata
+Repository</a:t>
+            </a:r>
+          </a:p>
+        </p:txBody>
+      </p:sp>
+      <p:sp>
+        <p:nvSpPr>
+          <p:cNvPr id="21" name="Rounded Rectangle 20"/>
+          <p:cNvSpPr/>
+          <p:nvPr/>
+        </p:nvSpPr>
+        <p:spPr>
+          <a:xfrm>
+            <a:off x="6035040" y="3794760"/>
+            <a:ext cx="1097280" cy="914400"/>
+          </a:xfrm>
+          <a:prstGeom prst="roundRect">
+            <a:avLst/>
+          </a:prstGeom>
+          <a:solidFill>
+            <a:srgbClr val="98C2E8"/>
+          </a:solidFill>
+          <a:ln>
+            <a:solidFill>
+              <a:srgbClr val="566E8C"/>
+            </a:solidFill>
+          </a:ln>
+        </p:spPr>
+        <p:style>
+          <a:lnRef idx="1">
+            <a:schemeClr val="accent1"/>
+          </a:lnRef>
+          <a:fillRef idx="3">
+            <a:schemeClr val="accent1"/>
+          </a:fillRef>
+          <a:effectRef idx="2">
+            <a:schemeClr val="accent1"/>
+          </a:effectRef>
+          <a:fontRef idx="minor">
+            <a:schemeClr val="lt1"/>
+          </a:fontRef>
+        </p:style>
+        <p:txBody>
+          <a:bodyPr rtlCol="0" anchor="ctr" wrap="square"/>
+          <a:lstStyle/>
+          <a:p>
+            <a:pPr algn="ctr"/>
+            <a:r>
+              <a:rPr sz="1100" b="1">
+                <a:solidFill>
+                  <a:srgbClr val="192E3F"/>
+                </a:solidFill>
+                <a:latin typeface="Calibri"/>
+              </a:rPr>
+              <a:t>Security
+&amp; Monitoring</a:t>
+            </a:r>
+          </a:p>
+        </p:txBody>
+      </p:sp>
+      <p:sp>
+        <p:nvSpPr>
+          <p:cNvPr id="22" name="TextBox 21"/>
+          <p:cNvSpPr txBox="1"/>
+          <p:nvPr/>
+        </p:nvSpPr>
+        <p:spPr>
+          <a:xfrm>
+            <a:off x="731520" y="4892040"/>
+            <a:ext cx="7955279" cy="548640"/>
+          </a:xfrm>
+          <a:prstGeom prst="rect">
+            <a:avLst/>
+          </a:prstGeom>
+          <a:noFill/>
+        </p:spPr>
+        <p:txBody>
+          <a:bodyPr wrap="square">
+            <a:spAutoFit/>
+          </a:bodyPr>
+          <a:lstStyle/>
+          <a:p>
+            <a:pPr algn="l"/>
+            <a:r>
+              <a:rPr sz="1400" b="0">
+                <a:solidFill>
+                  <a:srgbClr val="4C5664"/>
+                </a:solidFill>
+                <a:latin typeface="Calibri"/>
+              </a:rPr>
+              <a:t>Fact-checked outputs: extracted rules, lineage, dbt models, and migration plan are reviewed before approval.</a:t>
+            </a:r>
+          </a:p>
+        </p:txBody>
+      </p:sp>
+    </p:spTree>
+  </p:cSld>
+  <p:clrMapOvr>
+    <a:masterClrMapping/>
+  </p:clrMapOvr>
+</p:sld>
+</file>
+
+<file path=ppt/slides/slide7.xml><?xml version="1.0" encoding="utf-8"?>
+<p:sld xmlns:a="http://schemas.openxmlformats.org/drawingml/2006/main" xmlns:p="http://schemas.openxmlformats.org/presentationml/2006/main" xmlns:r="http://schemas.openxmlformats.org/officeDocument/2006/relationships">
+  <p:cSld>
+    <p:spTree>
+      <p:nvGrpSpPr>
+        <p:cNvPr id="1" name=""/>
+        <p:cNvGrpSpPr/>
+        <p:nvPr/>
+      </p:nvGrpSpPr>
+      <p:grpSpPr/>
+      <p:sp>
+        <p:nvSpPr>
+          <p:cNvPr id="2" name="TextBox 1"/>
+          <p:cNvSpPr txBox="1"/>
+          <p:nvPr/>
+        </p:nvSpPr>
+        <p:spPr>
+          <a:xfrm>
+            <a:off x="365760" y="274320"/>
+            <a:ext cx="457200" cy="457200"/>
+          </a:xfrm>
+          <a:prstGeom prst="rect">
+            <a:avLst/>
+          </a:prstGeom>
+          <a:noFill/>
+        </p:spPr>
+        <p:txBody>
+          <a:bodyPr wrap="square">
+            <a:spAutoFit/>
+          </a:bodyPr>
+          <a:lstStyle/>
+          <a:p>
+            <a:pPr algn="l"/>
+            <a:r>
+              <a:rPr sz="2200" b="1">
+                <a:solidFill>
+                  <a:srgbClr val="233A5F"/>
+                </a:solidFill>
+                <a:latin typeface="Calibri"/>
+              </a:rPr>
+              <a:t>06</a:t>
+            </a:r>
+          </a:p>
+        </p:txBody>
+      </p:sp>
+      <p:sp>
+        <p:nvSpPr>
+          <p:cNvPr id="3" name="TextBox 2"/>
+          <p:cNvSpPr txBox="1"/>
+          <p:nvPr/>
+        </p:nvSpPr>
+        <p:spPr>
+          <a:xfrm>
+            <a:off x="822960" y="411480"/>
+            <a:ext cx="7132320" cy="457200"/>
+          </a:xfrm>
+          <a:prstGeom prst="rect">
+            <a:avLst/>
+          </a:prstGeom>
+          <a:noFill/>
+        </p:spPr>
+        <p:txBody>
+          <a:bodyPr wrap="square">
+            <a:spAutoFit/>
+          </a:bodyPr>
+          <a:lstStyle/>
+          <a:p>
+            <a:pPr algn="l"/>
+            <a:r>
+              <a:rPr sz="2700" b="1">
+                <a:solidFill>
+                  <a:srgbClr val="233A5F"/>
+                </a:solidFill>
+                <a:latin typeface="Calibri"/>
+              </a:rPr>
+              <a:t>What to Present in the Call</a:t>
+            </a:r>
+          </a:p>
+        </p:txBody>
+      </p:sp>
+      <p:sp>
+        <p:nvSpPr>
+          <p:cNvPr id="4" name="TextBox 3"/>
+          <p:cNvSpPr txBox="1"/>
+          <p:nvPr/>
+        </p:nvSpPr>
+        <p:spPr>
+          <a:xfrm>
+            <a:off x="822960" y="822960"/>
+            <a:ext cx="8412480" cy="457200"/>
+          </a:xfrm>
+          <a:prstGeom prst="rect">
+            <a:avLst/>
+          </a:prstGeom>
+          <a:noFill/>
+        </p:spPr>
+        <p:txBody>
+          <a:bodyPr wrap="square">
+            <a:spAutoFit/>
+          </a:bodyPr>
+          <a:lstStyle/>
+          <a:p>
+            <a:pPr algn="l"/>
+            <a:r>
+              <a:rPr sz="1400" b="0">
+                <a:solidFill>
+                  <a:srgbClr val="4C5664"/>
+                </a:solidFill>
+                <a:latin typeface="Calibri"/>
+              </a:rPr>
+              <a:t>Simple narrative with proof points: discovery → output → validation</a:t>
+            </a:r>
+          </a:p>
+        </p:txBody>
+      </p:sp>
+      <p:sp>
+        <p:nvSpPr>
+          <p:cNvPr id="5" name="Rounded Rectangle 4"/>
+          <p:cNvSpPr/>
+          <p:nvPr/>
+        </p:nvSpPr>
+        <p:spPr>
+          <a:xfrm>
+            <a:off x="548640" y="1371600"/>
+            <a:ext cx="2011680" cy="2468880"/>
+          </a:xfrm>
+          <a:prstGeom prst="roundRect">
+            <a:avLst/>
+          </a:prstGeom>
+          <a:solidFill>
+            <a:srgbClr val="465FA0"/>
+          </a:solidFill>
+          <a:ln>
+            <a:solidFill>
+              <a:srgbClr val="465FA0"/>
+            </a:solidFill>
+          </a:ln>
+        </p:spPr>
+        <p:style>
+          <a:lnRef idx="1">
+            <a:schemeClr val="accent1"/>
+          </a:lnRef>
+          <a:fillRef idx="3">
+            <a:schemeClr val="accent1"/>
+          </a:fillRef>
+          <a:effectRef idx="2">
+            <a:schemeClr val="accent1"/>
+          </a:effectRef>
+          <a:fontRef idx="minor">
+            <a:schemeClr val="lt1"/>
+          </a:fontRef>
+        </p:style>
+        <p:txBody>
+          <a:bodyPr rtlCol="0" anchor="ctr" wrap="square" lIns="109728" rIns="109728" tIns="109728" bIns="109728"/>
+          <a:lstStyle/>
+          <a:p>
+            <a:pPr algn="ctr"/>
+            <a:r>
+              <a:rPr sz="1700" b="1">
+                <a:solidFill>
+                  <a:srgbClr val="FFFFFF"/>
+                </a:solidFill>
+                <a:latin typeface="Calibri"/>
+              </a:rPr>
+              <a:t>1. Discover</a:t>
+            </a:r>
+          </a:p>
+          <a:p>
+            <a:pPr algn="l"/>
+            <a:r>
+              <a:rPr sz="1200">
+                <a:solidFill>
+                  <a:srgbClr val="FFFFFF"/>
+                </a:solidFill>
+                <a:latin typeface="Calibri"/>
+              </a:rPr>
+              <a:t>• Legacy SQL + metadata</a:t>
+            </a:r>
+          </a:p>
+          <a:p>
+            <a:pPr algn="l"/>
+            <a:r>
+              <a:rPr sz="1200">
+                <a:solidFill>
+                  <a:srgbClr val="FFFFFF"/>
+                </a:solidFill>
+                <a:latin typeface="Calibri"/>
+              </a:rPr>
+              <a:t>• dependency mapping</a:t>
+            </a:r>
+          </a:p>
+          <a:p>
+            <a:pPr algn="l"/>
+            <a:r>
+              <a:rPr sz="1200">
+                <a:solidFill>
+                  <a:srgbClr val="FFFFFF"/>
+                </a:solidFill>
+                <a:latin typeface="Calibri"/>
+              </a:rPr>
+              <a:t>• undocumented rules surfaced</a:t>
+            </a:r>
+          </a:p>
+        </p:txBody>
+      </p:sp>
+      <p:sp>
+        <p:nvSpPr>
+          <p:cNvPr id="6" name="Rounded Rectangle 5"/>
+          <p:cNvSpPr/>
+          <p:nvPr/>
+        </p:nvSpPr>
+        <p:spPr>
+          <a:xfrm>
+            <a:off x="3017520" y="1371600"/>
+            <a:ext cx="2011680" cy="2468880"/>
+          </a:xfrm>
+          <a:prstGeom prst="roundRect">
+            <a:avLst/>
+          </a:prstGeom>
+          <a:solidFill>
+            <a:srgbClr val="3C87AF"/>
+          </a:solidFill>
+          <a:ln>
+            <a:solidFill>
+              <a:srgbClr val="3C87AF"/>
+            </a:solidFill>
+          </a:ln>
+        </p:spPr>
+        <p:style>
+          <a:lnRef idx="1">
+            <a:schemeClr val="accent1"/>
+          </a:lnRef>
+          <a:fillRef idx="3">
+            <a:schemeClr val="accent1"/>
+          </a:fillRef>
+          <a:effectRef idx="2">
+            <a:schemeClr val="accent1"/>
+          </a:effectRef>
+          <a:fontRef idx="minor">
+            <a:schemeClr val="lt1"/>
+          </a:fontRef>
+        </p:style>
+        <p:txBody>
+          <a:bodyPr rtlCol="0" anchor="ctr" wrap="square" lIns="109728" rIns="109728" tIns="109728" bIns="109728"/>
+          <a:lstStyle/>
+          <a:p>
+            <a:pPr algn="ctr"/>
+            <a:r>
+              <a:rPr sz="1700" b="1">
+                <a:solidFill>
+                  <a:srgbClr val="FFFFFF"/>
+                </a:solidFill>
+                <a:latin typeface="Calibri"/>
+              </a:rPr>
+              <a:t>2. Generate</a:t>
+            </a:r>
+          </a:p>
+          <a:p>
+            <a:pPr algn="l"/>
+            <a:r>
+              <a:rPr sz="1200">
+                <a:solidFill>
+                  <a:srgbClr val="FFFFFF"/>
+                </a:solidFill>
+                <a:latin typeface="Calibri"/>
+              </a:rPr>
+              <a:t>• dbt/Snowflake scaffolds</a:t>
+            </a:r>
+          </a:p>
+          <a:p>
+            <a:pPr algn="l"/>
+            <a:r>
+              <a:rPr sz="1200">
+                <a:solidFill>
+                  <a:srgbClr val="FFFFFF"/>
+                </a:solidFill>
+                <a:latin typeface="Calibri"/>
+              </a:rPr>
+              <a:t>• migration plan</a:t>
+            </a:r>
+          </a:p>
+          <a:p>
+            <a:pPr algn="l"/>
+            <a:r>
+              <a:rPr sz="1200">
+                <a:solidFill>
+                  <a:srgbClr val="FFFFFF"/>
+                </a:solidFill>
+                <a:latin typeface="Calibri"/>
+              </a:rPr>
+              <a:t>• lineage artifacts</a:t>
+            </a:r>
+          </a:p>
+        </p:txBody>
+      </p:sp>
+      <p:sp>
+        <p:nvSpPr>
+          <p:cNvPr id="7" name="Rounded Rectangle 6"/>
+          <p:cNvSpPr/>
+          <p:nvPr/>
+        </p:nvSpPr>
+        <p:spPr>
+          <a:xfrm>
+            <a:off x="5486400" y="1371600"/>
+            <a:ext cx="2011680" cy="2468880"/>
+          </a:xfrm>
+          <a:prstGeom prst="roundRect">
+            <a:avLst/>
+          </a:prstGeom>
+          <a:solidFill>
+            <a:srgbClr val="2D7862"/>
+          </a:solidFill>
+          <a:ln>
+            <a:solidFill>
+              <a:srgbClr val="2D7862"/>
+            </a:solidFill>
+          </a:ln>
+        </p:spPr>
+        <p:style>
+          <a:lnRef idx="1">
+            <a:schemeClr val="accent1"/>
+          </a:lnRef>
+          <a:fillRef idx="3">
+            <a:schemeClr val="accent1"/>
+          </a:fillRef>
+          <a:effectRef idx="2">
+            <a:schemeClr val="accent1"/>
+          </a:effectRef>
+          <a:fontRef idx="minor">
+            <a:schemeClr val="lt1"/>
+          </a:fontRef>
+        </p:style>
+        <p:txBody>
+          <a:bodyPr rtlCol="0" anchor="ctr" wrap="square" lIns="109728" rIns="109728" tIns="109728" bIns="109728"/>
+          <a:lstStyle/>
+          <a:p>
+            <a:pPr algn="ctr"/>
+            <a:r>
+              <a:rPr sz="1700" b="1">
+                <a:solidFill>
+                  <a:srgbClr val="FFFFFF"/>
+                </a:solidFill>
+                <a:latin typeface="Calibri"/>
+              </a:rPr>
+              <a:t>3. Validate</a:t>
+            </a:r>
+          </a:p>
+          <a:p>
+            <a:pPr algn="l"/>
+            <a:r>
+              <a:rPr sz="1200">
+                <a:solidFill>
+                  <a:srgbClr val="FFFFFF"/>
+                </a:solidFill>
+                <a:latin typeface="Calibri"/>
+              </a:rPr>
+              <a:t>• 100% entity grounding</a:t>
+            </a:r>
+          </a:p>
+          <a:p>
+            <a:pPr algn="l"/>
+            <a:r>
+              <a:rPr sz="1200">
+                <a:solidFill>
+                  <a:srgbClr val="FFFFFF"/>
+                </a:solidFill>
+                <a:latin typeface="Calibri"/>
+              </a:rPr>
+              <a:t>• 100% rule coverage</a:t>
+            </a:r>
+          </a:p>
+          <a:p>
+            <a:pPr algn="l"/>
+            <a:r>
+              <a:rPr sz="1200">
+                <a:solidFill>
+                  <a:srgbClr val="FFFFFF"/>
+                </a:solidFill>
+                <a:latin typeface="Calibri"/>
+              </a:rPr>
+              <a:t>• ambiguous rules flagged</a:t>
+            </a:r>
+          </a:p>
+        </p:txBody>
+      </p:sp>
+      <p:sp>
+        <p:nvSpPr>
+          <p:cNvPr id="8" name="Rounded Rectangle 7"/>
+          <p:cNvSpPr/>
+          <p:nvPr/>
+        </p:nvSpPr>
+        <p:spPr>
+          <a:xfrm>
+            <a:off x="6126480" y="1554480"/>
+            <a:ext cx="2468880" cy="2103120"/>
+          </a:xfrm>
+          <a:prstGeom prst="roundRect">
+            <a:avLst/>
+          </a:prstGeom>
+          <a:solidFill>
+            <a:srgbClr val="F3F6FA"/>
+          </a:solidFill>
+          <a:ln>
+            <a:solidFill>
+              <a:srgbClr val="596A7E"/>
+            </a:solidFill>
+          </a:ln>
+        </p:spPr>
+        <p:style>
+          <a:lnRef idx="1">
+            <a:schemeClr val="accent1"/>
+          </a:lnRef>
+          <a:fillRef idx="3">
+            <a:schemeClr val="accent1"/>
+          </a:fillRef>
+          <a:effectRef idx="2">
+            <a:schemeClr val="accent1"/>
+          </a:effectRef>
+          <a:fontRef idx="minor">
+            <a:schemeClr val="lt1"/>
+          </a:fontRef>
+        </p:style>
+        <p:txBody>
+          <a:bodyPr rtlCol="0" anchor="ctr" wrap="square"/>
+          <a:lstStyle/>
+          <a:p>
+            <a:pPr algn="ctr"/>
+            <a:r>
+              <a:rPr sz="1800" b="1">
+                <a:solidFill>
+                  <a:srgbClr val="233A5F"/>
+                </a:solidFill>
+                <a:latin typeface="Calibri"/>
+              </a:rPr>
+              <a:t>Validation proof</a:t>
+            </a:r>
+          </a:p>
+          <a:p>
+            <a:pPr algn="ctr"/>
+            <a:r>
+              <a:rPr sz="1300" b="1">
+                <a:solidFill>
+                  <a:srgbClr val="233A5F"/>
+                </a:solidFill>
+                <a:latin typeface="Calibri"/>
+              </a:rPr>
+              <a:t>Entity grounding: 100%</a:t>
+            </a:r>
+          </a:p>
+          <a:p>
+            <a:pPr algn="ctr"/>
+            <a:r>
+              <a:rPr sz="1300" b="1">
+                <a:solidFill>
+                  <a:srgbClr val="233A5F"/>
+                </a:solidFill>
+                <a:latin typeface="Calibri"/>
+              </a:rPr>
+              <a:t>Rule coverage: 100%</a:t>
+            </a:r>
+          </a:p>
+          <a:p>
+            <a:pPr algn="ctr"/>
+            <a:r>
+              <a:rPr sz="1300" b="1">
+                <a:solidFill>
+                  <a:srgbClr val="233A5F"/>
+                </a:solidFill>
+                <a:latin typeface="Calibri"/>
+              </a:rPr>
+              <a:t>Ambiguity recall: 100%</a:t>
+            </a:r>
+          </a:p>
+          <a:p>
+            <a:pPr algn="ctr"/>
+            <a:r>
+              <a:rPr sz="1300" b="1">
+                <a:solidFill>
+                  <a:srgbClr val="233A5F"/>
+                </a:solidFill>
+                <a:latin typeface="Calibri"/>
+              </a:rPr>
+              <a:t>Status: PASS</a:t>
+            </a:r>
+          </a:p>
+        </p:txBody>
+      </p:sp>
+      <p:sp>
+        <p:nvSpPr>
+          <p:cNvPr id="9" name="TextBox 8"/>
+          <p:cNvSpPr txBox="1"/>
+          <p:nvPr/>
+        </p:nvSpPr>
+        <p:spPr>
+          <a:xfrm>
+            <a:off x="731520" y="4846320"/>
+            <a:ext cx="7772400" cy="640080"/>
+          </a:xfrm>
+          <a:prstGeom prst="rect">
+            <a:avLst/>
+          </a:prstGeom>
+          <a:noFill/>
+        </p:spPr>
+        <p:txBody>
+          <a:bodyPr wrap="square">
+            <a:spAutoFit/>
+          </a:bodyPr>
+          <a:lstStyle/>
+          <a:p>
+            <a:pPr algn="l"/>
+            <a:r>
+              <a:rPr sz="1500" b="0">
+                <a:solidFill>
+                  <a:srgbClr val="4C5664"/>
+                </a:solidFill>
+                <a:latin typeface="Calibri"/>
+              </a:rPr>
+              <a:t>Opening line: “We built a fact-checked AI migration framework that turns legacy ETL into reviewable Snowflake/dbt outputs — without trusting the model blindly.”</a:t>
+            </a:r>
           </a:p>
         </p:txBody>
       </p:sp>

--- a/docs/Dragons_Den_Presentation_Template.pptx
+++ b/docs/Dragons_Den_Presentation_Template.pptx
@@ -13,6 +13,8 @@
     <p:sldId id="258" r:id="rId4"/>
     <p:sldId id="259" r:id="rId5"/>
     <p:sldId id="260" r:id="rId6"/>
+    <p:sldId id="263" r:id="rId16"/>
+    <p:sldId id="264" r:id="rId17"/>
     <p:sldId id="261" r:id="rId14"/>
     <p:sldId id="262" r:id="rId15"/>
   </p:sldIdLst>
@@ -12210,6 +12212,5261 @@
 </p:sld>
 </file>
 
+<file path=ppt/slides/slide8.xml><?xml version="1.0" encoding="utf-8"?>
+<p:sld xmlns:a="http://schemas.openxmlformats.org/drawingml/2006/main" xmlns:p="http://schemas.openxmlformats.org/presentationml/2006/main" xmlns:r="http://schemas.openxmlformats.org/officeDocument/2006/relationships">
+  <p:cSld>
+    <p:spTree>
+      <p:nvGrpSpPr>
+        <p:cNvPr id="1" name=""/>
+        <p:cNvGrpSpPr/>
+        <p:nvPr/>
+      </p:nvGrpSpPr>
+      <p:grpSpPr/>
+      <p:sp>
+        <p:nvSpPr>
+          <p:cNvPr id="2" name="TextBox 1"/>
+          <p:cNvSpPr txBox="1"/>
+          <p:nvPr/>
+        </p:nvSpPr>
+        <p:spPr>
+          <a:xfrm>
+            <a:off x="411480" y="347472"/>
+            <a:ext cx="566928" cy="384048"/>
+          </a:xfrm>
+          <a:prstGeom prst="rect">
+            <a:avLst/>
+          </a:prstGeom>
+          <a:noFill/>
+        </p:spPr>
+        <p:txBody>
+          <a:bodyPr wrap="square" lIns="0" rIns="0" tIns="0" bIns="0" anchor="t">
+            <a:spAutoFit/>
+          </a:bodyPr>
+          <a:lstStyle/>
+          <a:p>
+            <a:pPr algn="l">
+              <a:spcBef>
+                <a:spcPts val="0"/>
+              </a:spcBef>
+              <a:spcAft>
+                <a:spcPts val="0"/>
+              </a:spcAft>
+            </a:pPr>
+            <a:r>
+              <a:rPr sz="2000" b="1">
+                <a:solidFill>
+                  <a:srgbClr val="FB4D0A"/>
+                </a:solidFill>
+                <a:latin typeface="Calibri"/>
+              </a:rPr>
+              <a:t>05</a:t>
+            </a:r>
+          </a:p>
+        </p:txBody>
+      </p:sp>
+      <p:sp>
+        <p:nvSpPr>
+          <p:cNvPr id="3" name="Rectangle 2"/>
+          <p:cNvSpPr/>
+          <p:nvPr/>
+        </p:nvSpPr>
+        <p:spPr>
+          <a:xfrm>
+            <a:off x="1078992" y="429768"/>
+            <a:ext cx="10972" cy="320040"/>
+          </a:xfrm>
+          <a:prstGeom prst="rect">
+            <a:avLst/>
+          </a:prstGeom>
+          <a:solidFill>
+            <a:srgbClr val="D6E4EA"/>
+          </a:solidFill>
+          <a:ln>
+            <a:noFill/>
+          </a:ln>
+          <a:effectLst/>
+        </p:spPr>
+        <p:style>
+          <a:lnRef idx="1">
+            <a:schemeClr val="accent1"/>
+          </a:lnRef>
+          <a:fillRef idx="3">
+            <a:schemeClr val="accent1"/>
+          </a:fillRef>
+          <a:effectRef idx="2">
+            <a:schemeClr val="accent1"/>
+          </a:effectRef>
+          <a:fontRef idx="minor">
+            <a:schemeClr val="lt1"/>
+          </a:fontRef>
+        </p:style>
+        <p:txBody>
+          <a:bodyPr rtlCol="0" anchor="ctr"/>
+          <a:lstStyle/>
+          <a:p>
+            <a:pPr algn="ctr"/>
+          </a:p>
+        </p:txBody>
+      </p:sp>
+      <p:sp>
+        <p:nvSpPr>
+          <p:cNvPr id="4" name="TextBox 3"/>
+          <p:cNvSpPr txBox="1"/>
+          <p:nvPr/>
+        </p:nvSpPr>
+        <p:spPr>
+          <a:xfrm>
+            <a:off x="1207008" y="256032"/>
+            <a:ext cx="8046720" cy="347472"/>
+          </a:xfrm>
+          <a:prstGeom prst="rect">
+            <a:avLst/>
+          </a:prstGeom>
+          <a:noFill/>
+        </p:spPr>
+        <p:txBody>
+          <a:bodyPr wrap="square" lIns="0" rIns="0" tIns="0" bIns="0" anchor="t">
+            <a:spAutoFit/>
+          </a:bodyPr>
+          <a:lstStyle/>
+          <a:p>
+            <a:pPr algn="l">
+              <a:spcBef>
+                <a:spcPts val="0"/>
+              </a:spcBef>
+              <a:spcAft>
+                <a:spcPts val="0"/>
+              </a:spcAft>
+            </a:pPr>
+            <a:r>
+              <a:rPr sz="1700" b="1">
+                <a:solidFill>
+                  <a:srgbClr val="005071"/>
+                </a:solidFill>
+                <a:latin typeface="Calibri"/>
+              </a:rPr>
+              <a:t>Technical Architecture</a:t>
+            </a:r>
+          </a:p>
+        </p:txBody>
+      </p:sp>
+      <p:sp>
+        <p:nvSpPr>
+          <p:cNvPr id="5" name="TextBox 4"/>
+          <p:cNvSpPr txBox="1"/>
+          <p:nvPr/>
+        </p:nvSpPr>
+        <p:spPr>
+          <a:xfrm>
+            <a:off x="1207008" y="649224"/>
+            <a:ext cx="9509760" cy="256032"/>
+          </a:xfrm>
+          <a:prstGeom prst="rect">
+            <a:avLst/>
+          </a:prstGeom>
+          <a:noFill/>
+        </p:spPr>
+        <p:txBody>
+          <a:bodyPr wrap="square" lIns="0" rIns="0" tIns="0" bIns="0" anchor="t">
+            <a:spAutoFit/>
+          </a:bodyPr>
+          <a:lstStyle/>
+          <a:p>
+            <a:pPr algn="l">
+              <a:spcBef>
+                <a:spcPts val="0"/>
+              </a:spcBef>
+              <a:spcAft>
+                <a:spcPts val="0"/>
+              </a:spcAft>
+            </a:pPr>
+            <a:r>
+              <a:rPr sz="880" b="0">
+                <a:solidFill>
+                  <a:srgbClr val="484848"/>
+                </a:solidFill>
+                <a:latin typeface="Calibri"/>
+              </a:rPr>
+              <a:t>How the framework actually runs — orchestration, processing layers, guardrails, and the artifacts every run produces</a:t>
+            </a:r>
+          </a:p>
+        </p:txBody>
+      </p:sp>
+      <p:sp>
+        <p:nvSpPr>
+          <p:cNvPr id="6" name="Rectangle 5"/>
+          <p:cNvSpPr/>
+          <p:nvPr/>
+        </p:nvSpPr>
+        <p:spPr>
+          <a:xfrm>
+            <a:off x="411480" y="960120"/>
+            <a:ext cx="11064240" cy="10972"/>
+          </a:xfrm>
+          <a:prstGeom prst="rect">
+            <a:avLst/>
+          </a:prstGeom>
+          <a:solidFill>
+            <a:srgbClr val="D6E4EA"/>
+          </a:solidFill>
+          <a:ln>
+            <a:noFill/>
+          </a:ln>
+          <a:effectLst/>
+        </p:spPr>
+        <p:style>
+          <a:lnRef idx="1">
+            <a:schemeClr val="accent1"/>
+          </a:lnRef>
+          <a:fillRef idx="3">
+            <a:schemeClr val="accent1"/>
+          </a:fillRef>
+          <a:effectRef idx="2">
+            <a:schemeClr val="accent1"/>
+          </a:effectRef>
+          <a:fontRef idx="minor">
+            <a:schemeClr val="lt1"/>
+          </a:fontRef>
+        </p:style>
+        <p:txBody>
+          <a:bodyPr rtlCol="0" anchor="ctr"/>
+          <a:lstStyle/>
+          <a:p>
+            <a:pPr algn="ctr"/>
+          </a:p>
+        </p:txBody>
+      </p:sp>
+      <p:sp>
+        <p:nvSpPr>
+          <p:cNvPr id="7" name="Rectangle 6"/>
+          <p:cNvSpPr/>
+          <p:nvPr/>
+        </p:nvSpPr>
+        <p:spPr>
+          <a:xfrm>
+            <a:off x="594360" y="1298448"/>
+            <a:ext cx="91440" cy="4846320"/>
+          </a:xfrm>
+          <a:prstGeom prst="rect">
+            <a:avLst/>
+          </a:prstGeom>
+          <a:solidFill>
+            <a:srgbClr val="FB4D0A"/>
+          </a:solidFill>
+          <a:ln>
+            <a:noFill/>
+          </a:ln>
+          <a:effectLst/>
+        </p:spPr>
+        <p:style>
+          <a:lnRef idx="1">
+            <a:schemeClr val="accent1"/>
+          </a:lnRef>
+          <a:fillRef idx="3">
+            <a:schemeClr val="accent1"/>
+          </a:fillRef>
+          <a:effectRef idx="2">
+            <a:schemeClr val="accent1"/>
+          </a:effectRef>
+          <a:fontRef idx="minor">
+            <a:schemeClr val="lt1"/>
+          </a:fontRef>
+        </p:style>
+        <p:txBody>
+          <a:bodyPr rtlCol="0" anchor="ctr"/>
+          <a:lstStyle/>
+          <a:p>
+            <a:pPr algn="ctr"/>
+          </a:p>
+        </p:txBody>
+      </p:sp>
+      <p:sp>
+        <p:nvSpPr>
+          <p:cNvPr id="8" name="Rounded Rectangle 7"/>
+          <p:cNvSpPr/>
+          <p:nvPr/>
+        </p:nvSpPr>
+        <p:spPr>
+          <a:xfrm>
+            <a:off x="868680" y="1316736"/>
+            <a:ext cx="10469880" cy="365760"/>
+          </a:xfrm>
+          <a:prstGeom prst="roundRect">
+            <a:avLst>
+              <a:gd name="adj" fmla="val 16000"/>
+            </a:avLst>
+          </a:prstGeom>
+          <a:solidFill>
+            <a:srgbClr val="005071"/>
+          </a:solidFill>
+          <a:ln>
+            <a:noFill/>
+          </a:ln>
+          <a:effectLst/>
+        </p:spPr>
+        <p:style>
+          <a:lnRef idx="1">
+            <a:schemeClr val="accent1"/>
+          </a:lnRef>
+          <a:fillRef idx="3">
+            <a:schemeClr val="accent1"/>
+          </a:fillRef>
+          <a:effectRef idx="2">
+            <a:schemeClr val="accent1"/>
+          </a:effectRef>
+          <a:fontRef idx="minor">
+            <a:schemeClr val="lt1"/>
+          </a:fontRef>
+        </p:style>
+        <p:txBody>
+          <a:bodyPr rtlCol="0" anchor="ctr" wrap="square" lIns="0" rIns="0" tIns="0" bIns="0"/>
+          <a:lstStyle/>
+          <a:p>
+            <a:pPr algn="ctr"/>
+            <a:r>
+              <a:rPr sz="1000" b="1">
+                <a:solidFill>
+                  <a:srgbClr val="FFFFFF"/>
+                </a:solidFill>
+                <a:latin typeface="Calibri"/>
+              </a:rPr>
+              <a:t>ORCHESTRATOR   prototype/main.py</a:t>
+            </a:r>
+            <a:r>
+              <a:rPr sz="1000" b="0">
+                <a:solidFill>
+                  <a:srgbClr val="CAE0EA"/>
+                </a:solidFill>
+                <a:latin typeface="Calibri"/>
+              </a:rPr>
+              <a:t>          --target &lt;sql file | workflow folder&gt;          --auto-approve (CI mode)</a:t>
+            </a:r>
+          </a:p>
+        </p:txBody>
+      </p:sp>
+      <p:sp>
+        <p:nvSpPr>
+          <p:cNvPr id="9" name="Rounded Rectangle 8"/>
+          <p:cNvSpPr/>
+          <p:nvPr/>
+        </p:nvSpPr>
+        <p:spPr>
+          <a:xfrm>
+            <a:off x="868680" y="1847088"/>
+            <a:ext cx="1874519" cy="1810512"/>
+          </a:xfrm>
+          <a:prstGeom prst="roundRect">
+            <a:avLst/>
+          </a:prstGeom>
+          <a:solidFill>
+            <a:srgbClr val="F3F8FA"/>
+          </a:solidFill>
+          <a:ln>
+            <a:noFill/>
+          </a:ln>
+          <a:effectLst/>
+        </p:spPr>
+        <p:style>
+          <a:lnRef idx="1">
+            <a:schemeClr val="accent1"/>
+          </a:lnRef>
+          <a:fillRef idx="3">
+            <a:schemeClr val="accent1"/>
+          </a:fillRef>
+          <a:effectRef idx="2">
+            <a:schemeClr val="accent1"/>
+          </a:effectRef>
+          <a:fontRef idx="minor">
+            <a:schemeClr val="lt1"/>
+          </a:fontRef>
+        </p:style>
+        <p:txBody>
+          <a:bodyPr rtlCol="0" anchor="ctr" wrap="square" lIns="0" rIns="0" tIns="0" bIns="0"/>
+          <a:lstStyle/>
+          <a:p>
+            <a:pPr algn="ctr"/>
+          </a:p>
+        </p:txBody>
+      </p:sp>
+      <p:sp>
+        <p:nvSpPr>
+          <p:cNvPr id="10" name="TextBox 9"/>
+          <p:cNvSpPr txBox="1"/>
+          <p:nvPr/>
+        </p:nvSpPr>
+        <p:spPr>
+          <a:xfrm>
+            <a:off x="1033271" y="1993392"/>
+            <a:ext cx="1554480" cy="182880"/>
+          </a:xfrm>
+          <a:prstGeom prst="rect">
+            <a:avLst/>
+          </a:prstGeom>
+          <a:noFill/>
+        </p:spPr>
+        <p:txBody>
+          <a:bodyPr wrap="square" lIns="0" rIns="0" tIns="0" bIns="0" anchor="t">
+            <a:spAutoFit/>
+          </a:bodyPr>
+          <a:lstStyle/>
+          <a:p>
+            <a:pPr algn="l">
+              <a:spcBef>
+                <a:spcPts val="0"/>
+              </a:spcBef>
+              <a:spcAft>
+                <a:spcPts val="0"/>
+              </a:spcAft>
+            </a:pPr>
+            <a:r>
+              <a:rPr sz="850" b="1">
+                <a:solidFill>
+                  <a:srgbClr val="8A8A8A"/>
+                </a:solidFill>
+                <a:latin typeface="Calibri"/>
+              </a:rPr>
+              <a:t>INPUT</a:t>
+            </a:r>
+          </a:p>
+        </p:txBody>
+      </p:sp>
+      <p:sp>
+        <p:nvSpPr>
+          <p:cNvPr id="11" name="TextBox 10"/>
+          <p:cNvSpPr txBox="1"/>
+          <p:nvPr/>
+        </p:nvSpPr>
+        <p:spPr>
+          <a:xfrm>
+            <a:off x="1033271" y="2249424"/>
+            <a:ext cx="1572768" cy="1280160"/>
+          </a:xfrm>
+          <a:prstGeom prst="rect">
+            <a:avLst/>
+          </a:prstGeom>
+          <a:noFill/>
+        </p:spPr>
+        <p:txBody>
+          <a:bodyPr wrap="square" lIns="0" rIns="0" tIns="0" bIns="0" anchor="t">
+            <a:spAutoFit/>
+          </a:bodyPr>
+          <a:lstStyle/>
+          <a:p>
+            <a:pPr algn="l">
+              <a:lnSpc>
+                <a:spcPct val="95000"/>
+              </a:lnSpc>
+              <a:spcBef>
+                <a:spcPts val="0"/>
+              </a:spcBef>
+              <a:spcAft>
+                <a:spcPts val="500"/>
+              </a:spcAft>
+            </a:pPr>
+            <a:r>
+              <a:rPr sz="880" b="0">
+                <a:solidFill>
+                  <a:srgbClr val="1F2A2E"/>
+                </a:solidFill>
+                <a:latin typeface="Calibri"/>
+              </a:rPr>
+              <a:t>legacy_customer_orders_etl.sql</a:t>
+            </a:r>
+          </a:p>
+          <a:p>
+            <a:pPr algn="l">
+              <a:lnSpc>
+                <a:spcPct val="95000"/>
+              </a:lnSpc>
+              <a:spcBef>
+                <a:spcPts val="0"/>
+              </a:spcBef>
+              <a:spcAft>
+                <a:spcPts val="500"/>
+              </a:spcAft>
+            </a:pPr>
+            <a:r>
+              <a:rPr sz="880" b="0">
+                <a:solidFill>
+                  <a:srgbClr val="1F2A2E"/>
+                </a:solidFill>
+                <a:latin typeface="Calibri"/>
+              </a:rPr>
+              <a:t>legacy_metadata.json</a:t>
+            </a:r>
+          </a:p>
+          <a:p>
+            <a:pPr algn="l">
+              <a:lnSpc>
+                <a:spcPct val="95000"/>
+              </a:lnSpc>
+              <a:spcBef>
+                <a:spcPts val="0"/>
+              </a:spcBef>
+              <a:spcAft>
+                <a:spcPts val="500"/>
+              </a:spcAft>
+            </a:pPr>
+            <a:r>
+              <a:rPr sz="880" b="0">
+                <a:solidFill>
+                  <a:srgbClr val="1F2A2E"/>
+                </a:solidFill>
+                <a:latin typeface="Calibri"/>
+              </a:rPr>
+              <a:t>manifest.json  (multi-job)</a:t>
+            </a:r>
+          </a:p>
+          <a:p>
+            <a:pPr algn="l">
+              <a:lnSpc>
+                <a:spcPct val="95000"/>
+              </a:lnSpc>
+              <a:spcBef>
+                <a:spcPts val="0"/>
+              </a:spcBef>
+              <a:spcAft>
+                <a:spcPts val="500"/>
+              </a:spcAft>
+            </a:pPr>
+            <a:r>
+              <a:rPr sz="880" b="0">
+                <a:solidFill>
+                  <a:srgbClr val="1F2A2E"/>
+                </a:solidFill>
+                <a:latin typeface="Calibri"/>
+              </a:rPr>
+              <a:t>ground_truth_rules.json</a:t>
+            </a:r>
+          </a:p>
+        </p:txBody>
+      </p:sp>
+      <p:sp>
+        <p:nvSpPr>
+          <p:cNvPr id="12" name="TextBox 11"/>
+          <p:cNvSpPr txBox="1"/>
+          <p:nvPr/>
+        </p:nvSpPr>
+        <p:spPr>
+          <a:xfrm>
+            <a:off x="2798064" y="2596896"/>
+            <a:ext cx="219456" cy="310896"/>
+          </a:xfrm>
+          <a:prstGeom prst="rect">
+            <a:avLst/>
+          </a:prstGeom>
+          <a:noFill/>
+        </p:spPr>
+        <p:txBody>
+          <a:bodyPr wrap="square" lIns="0" rIns="0" tIns="0" bIns="0" anchor="t">
+            <a:spAutoFit/>
+          </a:bodyPr>
+          <a:lstStyle/>
+          <a:p>
+            <a:pPr algn="ctr">
+              <a:spcBef>
+                <a:spcPts val="0"/>
+              </a:spcBef>
+              <a:spcAft>
+                <a:spcPts val="0"/>
+              </a:spcAft>
+            </a:pPr>
+            <a:r>
+              <a:rPr sz="1500" b="1">
+                <a:solidFill>
+                  <a:srgbClr val="FB4D0A"/>
+                </a:solidFill>
+                <a:latin typeface="Calibri"/>
+              </a:rPr>
+              <a:t>→</a:t>
+            </a:r>
+          </a:p>
+        </p:txBody>
+      </p:sp>
+      <p:sp>
+        <p:nvSpPr>
+          <p:cNvPr id="13" name="Rounded Rectangle 12"/>
+          <p:cNvSpPr/>
+          <p:nvPr/>
+        </p:nvSpPr>
+        <p:spPr>
+          <a:xfrm>
+            <a:off x="3063240" y="1847088"/>
+            <a:ext cx="1216152" cy="1810512"/>
+          </a:xfrm>
+          <a:prstGeom prst="roundRect">
+            <a:avLst/>
+          </a:prstGeom>
+          <a:solidFill>
+            <a:srgbClr val="005071"/>
+          </a:solidFill>
+          <a:ln>
+            <a:noFill/>
+          </a:ln>
+          <a:effectLst/>
+        </p:spPr>
+        <p:style>
+          <a:lnRef idx="1">
+            <a:schemeClr val="accent1"/>
+          </a:lnRef>
+          <a:fillRef idx="3">
+            <a:schemeClr val="accent1"/>
+          </a:fillRef>
+          <a:effectRef idx="2">
+            <a:schemeClr val="accent1"/>
+          </a:effectRef>
+          <a:fontRef idx="minor">
+            <a:schemeClr val="lt1"/>
+          </a:fontRef>
+        </p:style>
+        <p:txBody>
+          <a:bodyPr rtlCol="0" anchor="ctr" wrap="square" lIns="0" rIns="0" tIns="0" bIns="0"/>
+          <a:lstStyle/>
+          <a:p>
+            <a:pPr algn="ctr"/>
+          </a:p>
+        </p:txBody>
+      </p:sp>
+      <p:sp>
+        <p:nvSpPr>
+          <p:cNvPr id="14" name="Oval 13"/>
+          <p:cNvSpPr/>
+          <p:nvPr/>
+        </p:nvSpPr>
+        <p:spPr>
+          <a:xfrm>
+            <a:off x="3895344" y="1965960"/>
+            <a:ext cx="256032" cy="256032"/>
+          </a:xfrm>
+          <a:prstGeom prst="ellipse">
+            <a:avLst/>
+          </a:prstGeom>
+          <a:solidFill>
+            <a:srgbClr val="FB4D0A"/>
+          </a:solidFill>
+          <a:ln>
+            <a:noFill/>
+          </a:ln>
+          <a:effectLst/>
+        </p:spPr>
+        <p:style>
+          <a:lnRef idx="1">
+            <a:schemeClr val="accent1"/>
+          </a:lnRef>
+          <a:fillRef idx="3">
+            <a:schemeClr val="accent1"/>
+          </a:fillRef>
+          <a:effectRef idx="2">
+            <a:schemeClr val="accent1"/>
+          </a:effectRef>
+          <a:fontRef idx="minor">
+            <a:schemeClr val="lt1"/>
+          </a:fontRef>
+        </p:style>
+        <p:txBody>
+          <a:bodyPr rtlCol="0" anchor="ctr" wrap="square" lIns="0" rIns="0" tIns="0" bIns="0"/>
+          <a:lstStyle/>
+          <a:p>
+            <a:pPr algn="ctr">
+              <a:spcBef>
+                <a:spcPts val="0"/>
+              </a:spcBef>
+              <a:spcAft>
+                <a:spcPts val="0"/>
+              </a:spcAft>
+            </a:pPr>
+            <a:r>
+              <a:rPr sz="900" b="1">
+                <a:solidFill>
+                  <a:srgbClr val="FFFFFF"/>
+                </a:solidFill>
+                <a:latin typeface="Calibri"/>
+              </a:rPr>
+              <a:t>1</a:t>
+            </a:r>
+          </a:p>
+        </p:txBody>
+      </p:sp>
+      <p:sp>
+        <p:nvSpPr>
+          <p:cNvPr id="15" name="TextBox 14"/>
+          <p:cNvSpPr txBox="1"/>
+          <p:nvPr/>
+        </p:nvSpPr>
+        <p:spPr>
+          <a:xfrm>
+            <a:off x="3182112" y="2322576"/>
+            <a:ext cx="978408" cy="548640"/>
+          </a:xfrm>
+          <a:prstGeom prst="rect">
+            <a:avLst/>
+          </a:prstGeom>
+          <a:noFill/>
+        </p:spPr>
+        <p:txBody>
+          <a:bodyPr wrap="square" lIns="0" rIns="0" tIns="0" bIns="0" anchor="t">
+            <a:spAutoFit/>
+          </a:bodyPr>
+          <a:lstStyle/>
+          <a:p>
+            <a:pPr algn="l">
+              <a:lnSpc>
+                <a:spcPct val="92000"/>
+              </a:lnSpc>
+              <a:spcBef>
+                <a:spcPts val="0"/>
+              </a:spcBef>
+              <a:spcAft>
+                <a:spcPts val="0"/>
+              </a:spcAft>
+            </a:pPr>
+            <a:r>
+              <a:rPr sz="1050" b="1">
+                <a:solidFill>
+                  <a:srgbClr val="FFFFFF"/>
+                </a:solidFill>
+                <a:latin typeface="Calibri"/>
+              </a:rPr>
+              <a:t>AI Analysis</a:t>
+            </a:r>
+          </a:p>
+        </p:txBody>
+      </p:sp>
+      <p:sp>
+        <p:nvSpPr>
+          <p:cNvPr id="16" name="TextBox 15"/>
+          <p:cNvSpPr txBox="1"/>
+          <p:nvPr/>
+        </p:nvSpPr>
+        <p:spPr>
+          <a:xfrm>
+            <a:off x="3145536" y="2852928"/>
+            <a:ext cx="1069848" cy="274320"/>
+          </a:xfrm>
+          <a:prstGeom prst="rect">
+            <a:avLst/>
+          </a:prstGeom>
+          <a:noFill/>
+        </p:spPr>
+        <p:txBody>
+          <a:bodyPr wrap="square" lIns="0" rIns="0" tIns="0" bIns="0" anchor="t">
+            <a:spAutoFit/>
+          </a:bodyPr>
+          <a:lstStyle/>
+          <a:p>
+            <a:pPr algn="l">
+              <a:lnSpc>
+                <a:spcPct val="95000"/>
+              </a:lnSpc>
+              <a:spcBef>
+                <a:spcPts val="0"/>
+              </a:spcBef>
+              <a:spcAft>
+                <a:spcPts val="0"/>
+              </a:spcAft>
+            </a:pPr>
+            <a:r>
+              <a:rPr sz="720" b="1">
+                <a:solidFill>
+                  <a:srgbClr val="FB4D0A"/>
+                </a:solidFill>
+                <a:latin typeface="Calibri"/>
+              </a:rPr>
+              <a:t>ai_analysis.py</a:t>
+            </a:r>
+          </a:p>
+        </p:txBody>
+      </p:sp>
+      <p:sp>
+        <p:nvSpPr>
+          <p:cNvPr id="17" name="TextBox 16"/>
+          <p:cNvSpPr txBox="1"/>
+          <p:nvPr/>
+        </p:nvSpPr>
+        <p:spPr>
+          <a:xfrm>
+            <a:off x="3182112" y="3108960"/>
+            <a:ext cx="978408" cy="475488"/>
+          </a:xfrm>
+          <a:prstGeom prst="rect">
+            <a:avLst/>
+          </a:prstGeom>
+          <a:noFill/>
+        </p:spPr>
+        <p:txBody>
+          <a:bodyPr wrap="square" lIns="0" rIns="0" tIns="0" bIns="0" anchor="t">
+            <a:spAutoFit/>
+          </a:bodyPr>
+          <a:lstStyle/>
+          <a:p>
+            <a:pPr algn="l">
+              <a:lnSpc>
+                <a:spcPct val="95000"/>
+              </a:lnSpc>
+              <a:spcBef>
+                <a:spcPts val="0"/>
+              </a:spcBef>
+              <a:spcAft>
+                <a:spcPts val="0"/>
+              </a:spcAft>
+            </a:pPr>
+            <a:r>
+              <a:rPr sz="800" b="0">
+                <a:solidFill>
+                  <a:srgbClr val="B9CFDA"/>
+                </a:solidFill>
+                <a:latin typeface="Calibri"/>
+              </a:rPr>
+              <a:t>tables · rules · dependencies</a:t>
+            </a:r>
+          </a:p>
+        </p:txBody>
+      </p:sp>
+      <p:sp>
+        <p:nvSpPr>
+          <p:cNvPr id="18" name="Rounded Rectangle 17"/>
+          <p:cNvSpPr/>
+          <p:nvPr/>
+        </p:nvSpPr>
+        <p:spPr>
+          <a:xfrm>
+            <a:off x="4462272" y="1847088"/>
+            <a:ext cx="1216152" cy="1810512"/>
+          </a:xfrm>
+          <a:prstGeom prst="roundRect">
+            <a:avLst/>
+          </a:prstGeom>
+          <a:solidFill>
+            <a:srgbClr val="005071"/>
+          </a:solidFill>
+          <a:ln>
+            <a:noFill/>
+          </a:ln>
+          <a:effectLst/>
+        </p:spPr>
+        <p:style>
+          <a:lnRef idx="1">
+            <a:schemeClr val="accent1"/>
+          </a:lnRef>
+          <a:fillRef idx="3">
+            <a:schemeClr val="accent1"/>
+          </a:fillRef>
+          <a:effectRef idx="2">
+            <a:schemeClr val="accent1"/>
+          </a:effectRef>
+          <a:fontRef idx="minor">
+            <a:schemeClr val="lt1"/>
+          </a:fontRef>
+        </p:style>
+        <p:txBody>
+          <a:bodyPr rtlCol="0" anchor="ctr" wrap="square" lIns="0" rIns="0" tIns="0" bIns="0"/>
+          <a:lstStyle/>
+          <a:p>
+            <a:pPr algn="ctr"/>
+          </a:p>
+        </p:txBody>
+      </p:sp>
+      <p:sp>
+        <p:nvSpPr>
+          <p:cNvPr id="19" name="Oval 18"/>
+          <p:cNvSpPr/>
+          <p:nvPr/>
+        </p:nvSpPr>
+        <p:spPr>
+          <a:xfrm>
+            <a:off x="5294376" y="1965960"/>
+            <a:ext cx="256032" cy="256032"/>
+          </a:xfrm>
+          <a:prstGeom prst="ellipse">
+            <a:avLst/>
+          </a:prstGeom>
+          <a:solidFill>
+            <a:srgbClr val="FB4D0A"/>
+          </a:solidFill>
+          <a:ln>
+            <a:noFill/>
+          </a:ln>
+          <a:effectLst/>
+        </p:spPr>
+        <p:style>
+          <a:lnRef idx="1">
+            <a:schemeClr val="accent1"/>
+          </a:lnRef>
+          <a:fillRef idx="3">
+            <a:schemeClr val="accent1"/>
+          </a:fillRef>
+          <a:effectRef idx="2">
+            <a:schemeClr val="accent1"/>
+          </a:effectRef>
+          <a:fontRef idx="minor">
+            <a:schemeClr val="lt1"/>
+          </a:fontRef>
+        </p:style>
+        <p:txBody>
+          <a:bodyPr rtlCol="0" anchor="ctr" wrap="square" lIns="0" rIns="0" tIns="0" bIns="0"/>
+          <a:lstStyle/>
+          <a:p>
+            <a:pPr algn="ctr">
+              <a:spcBef>
+                <a:spcPts val="0"/>
+              </a:spcBef>
+              <a:spcAft>
+                <a:spcPts val="0"/>
+              </a:spcAft>
+            </a:pPr>
+            <a:r>
+              <a:rPr sz="900" b="1">
+                <a:solidFill>
+                  <a:srgbClr val="FFFFFF"/>
+                </a:solidFill>
+                <a:latin typeface="Calibri"/>
+              </a:rPr>
+              <a:t>2</a:t>
+            </a:r>
+          </a:p>
+        </p:txBody>
+      </p:sp>
+      <p:sp>
+        <p:nvSpPr>
+          <p:cNvPr id="20" name="TextBox 19"/>
+          <p:cNvSpPr txBox="1"/>
+          <p:nvPr/>
+        </p:nvSpPr>
+        <p:spPr>
+          <a:xfrm>
+            <a:off x="4581144" y="2322576"/>
+            <a:ext cx="978408" cy="548640"/>
+          </a:xfrm>
+          <a:prstGeom prst="rect">
+            <a:avLst/>
+          </a:prstGeom>
+          <a:noFill/>
+        </p:spPr>
+        <p:txBody>
+          <a:bodyPr wrap="square" lIns="0" rIns="0" tIns="0" bIns="0" anchor="t">
+            <a:spAutoFit/>
+          </a:bodyPr>
+          <a:lstStyle/>
+          <a:p>
+            <a:pPr algn="l">
+              <a:lnSpc>
+                <a:spcPct val="92000"/>
+              </a:lnSpc>
+              <a:spcBef>
+                <a:spcPts val="0"/>
+              </a:spcBef>
+              <a:spcAft>
+                <a:spcPts val="0"/>
+              </a:spcAft>
+            </a:pPr>
+            <a:r>
+              <a:rPr sz="1050" b="1">
+                <a:solidFill>
+                  <a:srgbClr val="FFFFFF"/>
+                </a:solidFill>
+                <a:latin typeface="Calibri"/>
+              </a:rPr>
+              <a:t>Metadata Interp</a:t>
+            </a:r>
+          </a:p>
+        </p:txBody>
+      </p:sp>
+      <p:sp>
+        <p:nvSpPr>
+          <p:cNvPr id="21" name="TextBox 20"/>
+          <p:cNvSpPr txBox="1"/>
+          <p:nvPr/>
+        </p:nvSpPr>
+        <p:spPr>
+          <a:xfrm>
+            <a:off x="4544568" y="2852928"/>
+            <a:ext cx="1069848" cy="274320"/>
+          </a:xfrm>
+          <a:prstGeom prst="rect">
+            <a:avLst/>
+          </a:prstGeom>
+          <a:noFill/>
+        </p:spPr>
+        <p:txBody>
+          <a:bodyPr wrap="square" lIns="0" rIns="0" tIns="0" bIns="0" anchor="t">
+            <a:spAutoFit/>
+          </a:bodyPr>
+          <a:lstStyle/>
+          <a:p>
+            <a:pPr algn="l">
+              <a:lnSpc>
+                <a:spcPct val="95000"/>
+              </a:lnSpc>
+              <a:spcBef>
+                <a:spcPts val="0"/>
+              </a:spcBef>
+              <a:spcAft>
+                <a:spcPts val="0"/>
+              </a:spcAft>
+            </a:pPr>
+            <a:r>
+              <a:rPr sz="720" b="1">
+                <a:solidFill>
+                  <a:srgbClr val="FB4D0A"/>
+                </a:solidFill>
+                <a:latin typeface="Calibri"/>
+              </a:rPr>
+              <a:t>metadata_interpreter.py</a:t>
+            </a:r>
+          </a:p>
+        </p:txBody>
+      </p:sp>
+      <p:sp>
+        <p:nvSpPr>
+          <p:cNvPr id="22" name="TextBox 21"/>
+          <p:cNvSpPr txBox="1"/>
+          <p:nvPr/>
+        </p:nvSpPr>
+        <p:spPr>
+          <a:xfrm>
+            <a:off x="4581144" y="3108960"/>
+            <a:ext cx="978408" cy="475488"/>
+          </a:xfrm>
+          <a:prstGeom prst="rect">
+            <a:avLst/>
+          </a:prstGeom>
+          <a:noFill/>
+        </p:spPr>
+        <p:txBody>
+          <a:bodyPr wrap="square" lIns="0" rIns="0" tIns="0" bIns="0" anchor="t">
+            <a:spAutoFit/>
+          </a:bodyPr>
+          <a:lstStyle/>
+          <a:p>
+            <a:pPr algn="l">
+              <a:lnSpc>
+                <a:spcPct val="95000"/>
+              </a:lnSpc>
+              <a:spcBef>
+                <a:spcPts val="0"/>
+              </a:spcBef>
+              <a:spcAft>
+                <a:spcPts val="0"/>
+              </a:spcAft>
+            </a:pPr>
+            <a:r>
+              <a:rPr sz="800" b="0">
+                <a:solidFill>
+                  <a:srgbClr val="B9CFDA"/>
+                </a:solidFill>
+                <a:latin typeface="Calibri"/>
+              </a:rPr>
+              <a:t>undocumented / dead columns</a:t>
+            </a:r>
+          </a:p>
+        </p:txBody>
+      </p:sp>
+      <p:sp>
+        <p:nvSpPr>
+          <p:cNvPr id="23" name="Rounded Rectangle 22"/>
+          <p:cNvSpPr/>
+          <p:nvPr/>
+        </p:nvSpPr>
+        <p:spPr>
+          <a:xfrm>
+            <a:off x="5861304" y="1847088"/>
+            <a:ext cx="1216152" cy="1810512"/>
+          </a:xfrm>
+          <a:prstGeom prst="roundRect">
+            <a:avLst/>
+          </a:prstGeom>
+          <a:solidFill>
+            <a:srgbClr val="005071"/>
+          </a:solidFill>
+          <a:ln>
+            <a:noFill/>
+          </a:ln>
+          <a:effectLst/>
+        </p:spPr>
+        <p:style>
+          <a:lnRef idx="1">
+            <a:schemeClr val="accent1"/>
+          </a:lnRef>
+          <a:fillRef idx="3">
+            <a:schemeClr val="accent1"/>
+          </a:fillRef>
+          <a:effectRef idx="2">
+            <a:schemeClr val="accent1"/>
+          </a:effectRef>
+          <a:fontRef idx="minor">
+            <a:schemeClr val="lt1"/>
+          </a:fontRef>
+        </p:style>
+        <p:txBody>
+          <a:bodyPr rtlCol="0" anchor="ctr" wrap="square" lIns="0" rIns="0" tIns="0" bIns="0"/>
+          <a:lstStyle/>
+          <a:p>
+            <a:pPr algn="ctr"/>
+          </a:p>
+        </p:txBody>
+      </p:sp>
+      <p:sp>
+        <p:nvSpPr>
+          <p:cNvPr id="24" name="Oval 23"/>
+          <p:cNvSpPr/>
+          <p:nvPr/>
+        </p:nvSpPr>
+        <p:spPr>
+          <a:xfrm>
+            <a:off x="6693408" y="1965960"/>
+            <a:ext cx="256032" cy="256032"/>
+          </a:xfrm>
+          <a:prstGeom prst="ellipse">
+            <a:avLst/>
+          </a:prstGeom>
+          <a:solidFill>
+            <a:srgbClr val="FB4D0A"/>
+          </a:solidFill>
+          <a:ln>
+            <a:noFill/>
+          </a:ln>
+          <a:effectLst/>
+        </p:spPr>
+        <p:style>
+          <a:lnRef idx="1">
+            <a:schemeClr val="accent1"/>
+          </a:lnRef>
+          <a:fillRef idx="3">
+            <a:schemeClr val="accent1"/>
+          </a:fillRef>
+          <a:effectRef idx="2">
+            <a:schemeClr val="accent1"/>
+          </a:effectRef>
+          <a:fontRef idx="minor">
+            <a:schemeClr val="lt1"/>
+          </a:fontRef>
+        </p:style>
+        <p:txBody>
+          <a:bodyPr rtlCol="0" anchor="ctr" wrap="square" lIns="0" rIns="0" tIns="0" bIns="0"/>
+          <a:lstStyle/>
+          <a:p>
+            <a:pPr algn="ctr">
+              <a:spcBef>
+                <a:spcPts val="0"/>
+              </a:spcBef>
+              <a:spcAft>
+                <a:spcPts val="0"/>
+              </a:spcAft>
+            </a:pPr>
+            <a:r>
+              <a:rPr sz="900" b="1">
+                <a:solidFill>
+                  <a:srgbClr val="FFFFFF"/>
+                </a:solidFill>
+                <a:latin typeface="Calibri"/>
+              </a:rPr>
+              <a:t>3</a:t>
+            </a:r>
+          </a:p>
+        </p:txBody>
+      </p:sp>
+      <p:sp>
+        <p:nvSpPr>
+          <p:cNvPr id="25" name="TextBox 24"/>
+          <p:cNvSpPr txBox="1"/>
+          <p:nvPr/>
+        </p:nvSpPr>
+        <p:spPr>
+          <a:xfrm>
+            <a:off x="5980176" y="2322576"/>
+            <a:ext cx="978408" cy="548640"/>
+          </a:xfrm>
+          <a:prstGeom prst="rect">
+            <a:avLst/>
+          </a:prstGeom>
+          <a:noFill/>
+        </p:spPr>
+        <p:txBody>
+          <a:bodyPr wrap="square" lIns="0" rIns="0" tIns="0" bIns="0" anchor="t">
+            <a:spAutoFit/>
+          </a:bodyPr>
+          <a:lstStyle/>
+          <a:p>
+            <a:pPr algn="l">
+              <a:lnSpc>
+                <a:spcPct val="92000"/>
+              </a:lnSpc>
+              <a:spcBef>
+                <a:spcPts val="0"/>
+              </a:spcBef>
+              <a:spcAft>
+                <a:spcPts val="0"/>
+              </a:spcAft>
+            </a:pPr>
+            <a:r>
+              <a:rPr sz="1050" b="1">
+                <a:solidFill>
+                  <a:srgbClr val="FFFFFF"/>
+                </a:solidFill>
+                <a:latin typeface="Calibri"/>
+              </a:rPr>
+              <a:t>Transformation</a:t>
+            </a:r>
+          </a:p>
+        </p:txBody>
+      </p:sp>
+      <p:sp>
+        <p:nvSpPr>
+          <p:cNvPr id="26" name="TextBox 25"/>
+          <p:cNvSpPr txBox="1"/>
+          <p:nvPr/>
+        </p:nvSpPr>
+        <p:spPr>
+          <a:xfrm>
+            <a:off x="5943600" y="2852928"/>
+            <a:ext cx="1069848" cy="274320"/>
+          </a:xfrm>
+          <a:prstGeom prst="rect">
+            <a:avLst/>
+          </a:prstGeom>
+          <a:noFill/>
+        </p:spPr>
+        <p:txBody>
+          <a:bodyPr wrap="square" lIns="0" rIns="0" tIns="0" bIns="0" anchor="t">
+            <a:spAutoFit/>
+          </a:bodyPr>
+          <a:lstStyle/>
+          <a:p>
+            <a:pPr algn="l">
+              <a:lnSpc>
+                <a:spcPct val="95000"/>
+              </a:lnSpc>
+              <a:spcBef>
+                <a:spcPts val="0"/>
+              </a:spcBef>
+              <a:spcAft>
+                <a:spcPts val="0"/>
+              </a:spcAft>
+            </a:pPr>
+            <a:r>
+              <a:rPr sz="720" b="1">
+                <a:solidFill>
+                  <a:srgbClr val="FB4D0A"/>
+                </a:solidFill>
+                <a:latin typeface="Calibri"/>
+              </a:rPr>
+              <a:t>transform.py</a:t>
+            </a:r>
+          </a:p>
+        </p:txBody>
+      </p:sp>
+      <p:sp>
+        <p:nvSpPr>
+          <p:cNvPr id="27" name="TextBox 26"/>
+          <p:cNvSpPr txBox="1"/>
+          <p:nvPr/>
+        </p:nvSpPr>
+        <p:spPr>
+          <a:xfrm>
+            <a:off x="5980176" y="3108960"/>
+            <a:ext cx="978408" cy="475488"/>
+          </a:xfrm>
+          <a:prstGeom prst="rect">
+            <a:avLst/>
+          </a:prstGeom>
+          <a:noFill/>
+        </p:spPr>
+        <p:txBody>
+          <a:bodyPr wrap="square" lIns="0" rIns="0" tIns="0" bIns="0" anchor="t">
+            <a:spAutoFit/>
+          </a:bodyPr>
+          <a:lstStyle/>
+          <a:p>
+            <a:pPr algn="l">
+              <a:lnSpc>
+                <a:spcPct val="95000"/>
+              </a:lnSpc>
+              <a:spcBef>
+                <a:spcPts val="0"/>
+              </a:spcBef>
+              <a:spcAft>
+                <a:spcPts val="0"/>
+              </a:spcAft>
+            </a:pPr>
+            <a:r>
+              <a:rPr sz="800" b="0">
+                <a:solidFill>
+                  <a:srgbClr val="B9CFDA"/>
+                </a:solidFill>
+                <a:latin typeface="Calibri"/>
+              </a:rPr>
+              <a:t>staging → intermediate → marts</a:t>
+            </a:r>
+          </a:p>
+        </p:txBody>
+      </p:sp>
+      <p:sp>
+        <p:nvSpPr>
+          <p:cNvPr id="28" name="Rounded Rectangle 27"/>
+          <p:cNvSpPr/>
+          <p:nvPr/>
+        </p:nvSpPr>
+        <p:spPr>
+          <a:xfrm>
+            <a:off x="7260336" y="1847088"/>
+            <a:ext cx="1216152" cy="1810512"/>
+          </a:xfrm>
+          <a:prstGeom prst="roundRect">
+            <a:avLst/>
+          </a:prstGeom>
+          <a:solidFill>
+            <a:srgbClr val="005071"/>
+          </a:solidFill>
+          <a:ln>
+            <a:noFill/>
+          </a:ln>
+          <a:effectLst/>
+        </p:spPr>
+        <p:style>
+          <a:lnRef idx="1">
+            <a:schemeClr val="accent1"/>
+          </a:lnRef>
+          <a:fillRef idx="3">
+            <a:schemeClr val="accent1"/>
+          </a:fillRef>
+          <a:effectRef idx="2">
+            <a:schemeClr val="accent1"/>
+          </a:effectRef>
+          <a:fontRef idx="minor">
+            <a:schemeClr val="lt1"/>
+          </a:fontRef>
+        </p:style>
+        <p:txBody>
+          <a:bodyPr rtlCol="0" anchor="ctr" wrap="square" lIns="0" rIns="0" tIns="0" bIns="0"/>
+          <a:lstStyle/>
+          <a:p>
+            <a:pPr algn="ctr"/>
+          </a:p>
+        </p:txBody>
+      </p:sp>
+      <p:sp>
+        <p:nvSpPr>
+          <p:cNvPr id="29" name="Oval 28"/>
+          <p:cNvSpPr/>
+          <p:nvPr/>
+        </p:nvSpPr>
+        <p:spPr>
+          <a:xfrm>
+            <a:off x="8092440" y="1965960"/>
+            <a:ext cx="256032" cy="256032"/>
+          </a:xfrm>
+          <a:prstGeom prst="ellipse">
+            <a:avLst/>
+          </a:prstGeom>
+          <a:solidFill>
+            <a:srgbClr val="FB4D0A"/>
+          </a:solidFill>
+          <a:ln>
+            <a:noFill/>
+          </a:ln>
+          <a:effectLst/>
+        </p:spPr>
+        <p:style>
+          <a:lnRef idx="1">
+            <a:schemeClr val="accent1"/>
+          </a:lnRef>
+          <a:fillRef idx="3">
+            <a:schemeClr val="accent1"/>
+          </a:fillRef>
+          <a:effectRef idx="2">
+            <a:schemeClr val="accent1"/>
+          </a:effectRef>
+          <a:fontRef idx="minor">
+            <a:schemeClr val="lt1"/>
+          </a:fontRef>
+        </p:style>
+        <p:txBody>
+          <a:bodyPr rtlCol="0" anchor="ctr" wrap="square" lIns="0" rIns="0" tIns="0" bIns="0"/>
+          <a:lstStyle/>
+          <a:p>
+            <a:pPr algn="ctr">
+              <a:spcBef>
+                <a:spcPts val="0"/>
+              </a:spcBef>
+              <a:spcAft>
+                <a:spcPts val="0"/>
+              </a:spcAft>
+            </a:pPr>
+            <a:r>
+              <a:rPr sz="900" b="1">
+                <a:solidFill>
+                  <a:srgbClr val="FFFFFF"/>
+                </a:solidFill>
+                <a:latin typeface="Calibri"/>
+              </a:rPr>
+              <a:t>4</a:t>
+            </a:r>
+          </a:p>
+        </p:txBody>
+      </p:sp>
+      <p:sp>
+        <p:nvSpPr>
+          <p:cNvPr id="30" name="TextBox 29"/>
+          <p:cNvSpPr txBox="1"/>
+          <p:nvPr/>
+        </p:nvSpPr>
+        <p:spPr>
+          <a:xfrm>
+            <a:off x="7379208" y="2322576"/>
+            <a:ext cx="978408" cy="548640"/>
+          </a:xfrm>
+          <a:prstGeom prst="rect">
+            <a:avLst/>
+          </a:prstGeom>
+          <a:noFill/>
+        </p:spPr>
+        <p:txBody>
+          <a:bodyPr wrap="square" lIns="0" rIns="0" tIns="0" bIns="0" anchor="t">
+            <a:spAutoFit/>
+          </a:bodyPr>
+          <a:lstStyle/>
+          <a:p>
+            <a:pPr algn="l">
+              <a:lnSpc>
+                <a:spcPct val="92000"/>
+              </a:lnSpc>
+              <a:spcBef>
+                <a:spcPts val="0"/>
+              </a:spcBef>
+              <a:spcAft>
+                <a:spcPts val="0"/>
+              </a:spcAft>
+            </a:pPr>
+            <a:r>
+              <a:rPr sz="1050" b="1">
+                <a:solidFill>
+                  <a:srgbClr val="FFFFFF"/>
+                </a:solidFill>
+                <a:latin typeface="Calibri"/>
+              </a:rPr>
+              <a:t>Human Review</a:t>
+            </a:r>
+          </a:p>
+        </p:txBody>
+      </p:sp>
+      <p:sp>
+        <p:nvSpPr>
+          <p:cNvPr id="31" name="TextBox 30"/>
+          <p:cNvSpPr txBox="1"/>
+          <p:nvPr/>
+        </p:nvSpPr>
+        <p:spPr>
+          <a:xfrm>
+            <a:off x="7342631" y="2852928"/>
+            <a:ext cx="1069848" cy="274320"/>
+          </a:xfrm>
+          <a:prstGeom prst="rect">
+            <a:avLst/>
+          </a:prstGeom>
+          <a:noFill/>
+        </p:spPr>
+        <p:txBody>
+          <a:bodyPr wrap="square" lIns="0" rIns="0" tIns="0" bIns="0" anchor="t">
+            <a:spAutoFit/>
+          </a:bodyPr>
+          <a:lstStyle/>
+          <a:p>
+            <a:pPr algn="l">
+              <a:lnSpc>
+                <a:spcPct val="95000"/>
+              </a:lnSpc>
+              <a:spcBef>
+                <a:spcPts val="0"/>
+              </a:spcBef>
+              <a:spcAft>
+                <a:spcPts val="0"/>
+              </a:spcAft>
+            </a:pPr>
+            <a:r>
+              <a:rPr sz="720" b="1">
+                <a:solidFill>
+                  <a:srgbClr val="FB4D0A"/>
+                </a:solidFill>
+                <a:latin typeface="Calibri"/>
+              </a:rPr>
+              <a:t>main.py gate</a:t>
+            </a:r>
+          </a:p>
+        </p:txBody>
+      </p:sp>
+      <p:sp>
+        <p:nvSpPr>
+          <p:cNvPr id="32" name="TextBox 31"/>
+          <p:cNvSpPr txBox="1"/>
+          <p:nvPr/>
+        </p:nvSpPr>
+        <p:spPr>
+          <a:xfrm>
+            <a:off x="7379208" y="3108960"/>
+            <a:ext cx="978408" cy="475488"/>
+          </a:xfrm>
+          <a:prstGeom prst="rect">
+            <a:avLst/>
+          </a:prstGeom>
+          <a:noFill/>
+        </p:spPr>
+        <p:txBody>
+          <a:bodyPr wrap="square" lIns="0" rIns="0" tIns="0" bIns="0" anchor="t">
+            <a:spAutoFit/>
+          </a:bodyPr>
+          <a:lstStyle/>
+          <a:p>
+            <a:pPr algn="l">
+              <a:lnSpc>
+                <a:spcPct val="95000"/>
+              </a:lnSpc>
+              <a:spcBef>
+                <a:spcPts val="0"/>
+              </a:spcBef>
+              <a:spcAft>
+                <a:spcPts val="0"/>
+              </a:spcAft>
+            </a:pPr>
+            <a:r>
+              <a:rPr sz="800" b="0">
+                <a:solidFill>
+                  <a:srgbClr val="B9CFDA"/>
+                </a:solidFill>
+                <a:latin typeface="Calibri"/>
+              </a:rPr>
+              <a:t>approve · edit · reject</a:t>
+            </a:r>
+          </a:p>
+        </p:txBody>
+      </p:sp>
+      <p:sp>
+        <p:nvSpPr>
+          <p:cNvPr id="33" name="Rounded Rectangle 32"/>
+          <p:cNvSpPr/>
+          <p:nvPr/>
+        </p:nvSpPr>
+        <p:spPr>
+          <a:xfrm>
+            <a:off x="8659368" y="1847088"/>
+            <a:ext cx="1216152" cy="1810512"/>
+          </a:xfrm>
+          <a:prstGeom prst="roundRect">
+            <a:avLst/>
+          </a:prstGeom>
+          <a:solidFill>
+            <a:srgbClr val="005071"/>
+          </a:solidFill>
+          <a:ln>
+            <a:noFill/>
+          </a:ln>
+          <a:effectLst/>
+        </p:spPr>
+        <p:style>
+          <a:lnRef idx="1">
+            <a:schemeClr val="accent1"/>
+          </a:lnRef>
+          <a:fillRef idx="3">
+            <a:schemeClr val="accent1"/>
+          </a:fillRef>
+          <a:effectRef idx="2">
+            <a:schemeClr val="accent1"/>
+          </a:effectRef>
+          <a:fontRef idx="minor">
+            <a:schemeClr val="lt1"/>
+          </a:fontRef>
+        </p:style>
+        <p:txBody>
+          <a:bodyPr rtlCol="0" anchor="ctr" wrap="square" lIns="0" rIns="0" tIns="0" bIns="0"/>
+          <a:lstStyle/>
+          <a:p>
+            <a:pPr algn="ctr"/>
+          </a:p>
+        </p:txBody>
+      </p:sp>
+      <p:sp>
+        <p:nvSpPr>
+          <p:cNvPr id="34" name="Oval 33"/>
+          <p:cNvSpPr/>
+          <p:nvPr/>
+        </p:nvSpPr>
+        <p:spPr>
+          <a:xfrm>
+            <a:off x="9491472" y="1965960"/>
+            <a:ext cx="256032" cy="256032"/>
+          </a:xfrm>
+          <a:prstGeom prst="ellipse">
+            <a:avLst/>
+          </a:prstGeom>
+          <a:solidFill>
+            <a:srgbClr val="FB4D0A"/>
+          </a:solidFill>
+          <a:ln>
+            <a:noFill/>
+          </a:ln>
+          <a:effectLst/>
+        </p:spPr>
+        <p:style>
+          <a:lnRef idx="1">
+            <a:schemeClr val="accent1"/>
+          </a:lnRef>
+          <a:fillRef idx="3">
+            <a:schemeClr val="accent1"/>
+          </a:fillRef>
+          <a:effectRef idx="2">
+            <a:schemeClr val="accent1"/>
+          </a:effectRef>
+          <a:fontRef idx="minor">
+            <a:schemeClr val="lt1"/>
+          </a:fontRef>
+        </p:style>
+        <p:txBody>
+          <a:bodyPr rtlCol="0" anchor="ctr" wrap="square" lIns="0" rIns="0" tIns="0" bIns="0"/>
+          <a:lstStyle/>
+          <a:p>
+            <a:pPr algn="ctr">
+              <a:spcBef>
+                <a:spcPts val="0"/>
+              </a:spcBef>
+              <a:spcAft>
+                <a:spcPts val="0"/>
+              </a:spcAft>
+            </a:pPr>
+            <a:r>
+              <a:rPr sz="900" b="1">
+                <a:solidFill>
+                  <a:srgbClr val="FFFFFF"/>
+                </a:solidFill>
+                <a:latin typeface="Calibri"/>
+              </a:rPr>
+              <a:t>5</a:t>
+            </a:r>
+          </a:p>
+        </p:txBody>
+      </p:sp>
+      <p:sp>
+        <p:nvSpPr>
+          <p:cNvPr id="35" name="TextBox 34"/>
+          <p:cNvSpPr txBox="1"/>
+          <p:nvPr/>
+        </p:nvSpPr>
+        <p:spPr>
+          <a:xfrm>
+            <a:off x="8778240" y="2322576"/>
+            <a:ext cx="978408" cy="548640"/>
+          </a:xfrm>
+          <a:prstGeom prst="rect">
+            <a:avLst/>
+          </a:prstGeom>
+          <a:noFill/>
+        </p:spPr>
+        <p:txBody>
+          <a:bodyPr wrap="square" lIns="0" rIns="0" tIns="0" bIns="0" anchor="t">
+            <a:spAutoFit/>
+          </a:bodyPr>
+          <a:lstStyle/>
+          <a:p>
+            <a:pPr algn="l">
+              <a:lnSpc>
+                <a:spcPct val="92000"/>
+              </a:lnSpc>
+              <a:spcBef>
+                <a:spcPts val="0"/>
+              </a:spcBef>
+              <a:spcAft>
+                <a:spcPts val="0"/>
+              </a:spcAft>
+            </a:pPr>
+            <a:r>
+              <a:rPr sz="1050" b="1">
+                <a:solidFill>
+                  <a:srgbClr val="FFFFFF"/>
+                </a:solidFill>
+                <a:latin typeface="Calibri"/>
+              </a:rPr>
+              <a:t>Validation</a:t>
+            </a:r>
+          </a:p>
+        </p:txBody>
+      </p:sp>
+      <p:sp>
+        <p:nvSpPr>
+          <p:cNvPr id="36" name="TextBox 35"/>
+          <p:cNvSpPr txBox="1"/>
+          <p:nvPr/>
+        </p:nvSpPr>
+        <p:spPr>
+          <a:xfrm>
+            <a:off x="8741664" y="2852928"/>
+            <a:ext cx="1069848" cy="274320"/>
+          </a:xfrm>
+          <a:prstGeom prst="rect">
+            <a:avLst/>
+          </a:prstGeom>
+          <a:noFill/>
+        </p:spPr>
+        <p:txBody>
+          <a:bodyPr wrap="square" lIns="0" rIns="0" tIns="0" bIns="0" anchor="t">
+            <a:spAutoFit/>
+          </a:bodyPr>
+          <a:lstStyle/>
+          <a:p>
+            <a:pPr algn="l">
+              <a:lnSpc>
+                <a:spcPct val="95000"/>
+              </a:lnSpc>
+              <a:spcBef>
+                <a:spcPts val="0"/>
+              </a:spcBef>
+              <a:spcAft>
+                <a:spcPts val="0"/>
+              </a:spcAft>
+            </a:pPr>
+            <a:r>
+              <a:rPr sz="720" b="1">
+                <a:solidFill>
+                  <a:srgbClr val="FB4D0A"/>
+                </a:solidFill>
+                <a:latin typeface="Calibri"/>
+              </a:rPr>
+              <a:t>validate.py</a:t>
+            </a:r>
+          </a:p>
+        </p:txBody>
+      </p:sp>
+      <p:sp>
+        <p:nvSpPr>
+          <p:cNvPr id="37" name="TextBox 36"/>
+          <p:cNvSpPr txBox="1"/>
+          <p:nvPr/>
+        </p:nvSpPr>
+        <p:spPr>
+          <a:xfrm>
+            <a:off x="8778240" y="3108960"/>
+            <a:ext cx="978408" cy="475488"/>
+          </a:xfrm>
+          <a:prstGeom prst="rect">
+            <a:avLst/>
+          </a:prstGeom>
+          <a:noFill/>
+        </p:spPr>
+        <p:txBody>
+          <a:bodyPr wrap="square" lIns="0" rIns="0" tIns="0" bIns="0" anchor="t">
+            <a:spAutoFit/>
+          </a:bodyPr>
+          <a:lstStyle/>
+          <a:p>
+            <a:pPr algn="l">
+              <a:lnSpc>
+                <a:spcPct val="95000"/>
+              </a:lnSpc>
+              <a:spcBef>
+                <a:spcPts val="0"/>
+              </a:spcBef>
+              <a:spcAft>
+                <a:spcPts val="0"/>
+              </a:spcAft>
+            </a:pPr>
+            <a:r>
+              <a:rPr sz="800" b="0">
+                <a:solidFill>
+                  <a:srgbClr val="B9CFDA"/>
+                </a:solidFill>
+                <a:latin typeface="Calibri"/>
+              </a:rPr>
+              <a:t>3 metrics vs ground truth</a:t>
+            </a:r>
+          </a:p>
+        </p:txBody>
+      </p:sp>
+      <p:sp>
+        <p:nvSpPr>
+          <p:cNvPr id="38" name="Rounded Rectangle 37"/>
+          <p:cNvSpPr/>
+          <p:nvPr/>
+        </p:nvSpPr>
+        <p:spPr>
+          <a:xfrm>
+            <a:off x="10058400" y="1847088"/>
+            <a:ext cx="1216152" cy="1810512"/>
+          </a:xfrm>
+          <a:prstGeom prst="roundRect">
+            <a:avLst/>
+          </a:prstGeom>
+          <a:solidFill>
+            <a:srgbClr val="005071"/>
+          </a:solidFill>
+          <a:ln>
+            <a:noFill/>
+          </a:ln>
+          <a:effectLst/>
+        </p:spPr>
+        <p:style>
+          <a:lnRef idx="1">
+            <a:schemeClr val="accent1"/>
+          </a:lnRef>
+          <a:fillRef idx="3">
+            <a:schemeClr val="accent1"/>
+          </a:fillRef>
+          <a:effectRef idx="2">
+            <a:schemeClr val="accent1"/>
+          </a:effectRef>
+          <a:fontRef idx="minor">
+            <a:schemeClr val="lt1"/>
+          </a:fontRef>
+        </p:style>
+        <p:txBody>
+          <a:bodyPr rtlCol="0" anchor="ctr" wrap="square" lIns="0" rIns="0" tIns="0" bIns="0"/>
+          <a:lstStyle/>
+          <a:p>
+            <a:pPr algn="ctr"/>
+          </a:p>
+        </p:txBody>
+      </p:sp>
+      <p:sp>
+        <p:nvSpPr>
+          <p:cNvPr id="39" name="Oval 38"/>
+          <p:cNvSpPr/>
+          <p:nvPr/>
+        </p:nvSpPr>
+        <p:spPr>
+          <a:xfrm>
+            <a:off x="10890504" y="1965960"/>
+            <a:ext cx="256032" cy="256032"/>
+          </a:xfrm>
+          <a:prstGeom prst="ellipse">
+            <a:avLst/>
+          </a:prstGeom>
+          <a:solidFill>
+            <a:srgbClr val="FB4D0A"/>
+          </a:solidFill>
+          <a:ln>
+            <a:noFill/>
+          </a:ln>
+          <a:effectLst/>
+        </p:spPr>
+        <p:style>
+          <a:lnRef idx="1">
+            <a:schemeClr val="accent1"/>
+          </a:lnRef>
+          <a:fillRef idx="3">
+            <a:schemeClr val="accent1"/>
+          </a:fillRef>
+          <a:effectRef idx="2">
+            <a:schemeClr val="accent1"/>
+          </a:effectRef>
+          <a:fontRef idx="minor">
+            <a:schemeClr val="lt1"/>
+          </a:fontRef>
+        </p:style>
+        <p:txBody>
+          <a:bodyPr rtlCol="0" anchor="ctr" wrap="square" lIns="0" rIns="0" tIns="0" bIns="0"/>
+          <a:lstStyle/>
+          <a:p>
+            <a:pPr algn="ctr">
+              <a:spcBef>
+                <a:spcPts val="0"/>
+              </a:spcBef>
+              <a:spcAft>
+                <a:spcPts val="0"/>
+              </a:spcAft>
+            </a:pPr>
+            <a:r>
+              <a:rPr sz="900" b="1">
+                <a:solidFill>
+                  <a:srgbClr val="FFFFFF"/>
+                </a:solidFill>
+                <a:latin typeface="Calibri"/>
+              </a:rPr>
+              <a:t>6</a:t>
+            </a:r>
+          </a:p>
+        </p:txBody>
+      </p:sp>
+      <p:sp>
+        <p:nvSpPr>
+          <p:cNvPr id="40" name="TextBox 39"/>
+          <p:cNvSpPr txBox="1"/>
+          <p:nvPr/>
+        </p:nvSpPr>
+        <p:spPr>
+          <a:xfrm>
+            <a:off x="10177272" y="2322576"/>
+            <a:ext cx="978408" cy="548640"/>
+          </a:xfrm>
+          <a:prstGeom prst="rect">
+            <a:avLst/>
+          </a:prstGeom>
+          <a:noFill/>
+        </p:spPr>
+        <p:txBody>
+          <a:bodyPr wrap="square" lIns="0" rIns="0" tIns="0" bIns="0" anchor="t">
+            <a:spAutoFit/>
+          </a:bodyPr>
+          <a:lstStyle/>
+          <a:p>
+            <a:pPr algn="l">
+              <a:lnSpc>
+                <a:spcPct val="92000"/>
+              </a:lnSpc>
+              <a:spcBef>
+                <a:spcPts val="0"/>
+              </a:spcBef>
+              <a:spcAft>
+                <a:spcPts val="0"/>
+              </a:spcAft>
+            </a:pPr>
+            <a:r>
+              <a:rPr sz="1050" b="1">
+                <a:solidFill>
+                  <a:srgbClr val="FFFFFF"/>
+                </a:solidFill>
+                <a:latin typeface="Calibri"/>
+              </a:rPr>
+              <a:t>Plan &amp; Output</a:t>
+            </a:r>
+          </a:p>
+        </p:txBody>
+      </p:sp>
+      <p:sp>
+        <p:nvSpPr>
+          <p:cNvPr id="41" name="TextBox 40"/>
+          <p:cNvSpPr txBox="1"/>
+          <p:nvPr/>
+        </p:nvSpPr>
+        <p:spPr>
+          <a:xfrm>
+            <a:off x="10140696" y="2852928"/>
+            <a:ext cx="1069848" cy="274320"/>
+          </a:xfrm>
+          <a:prstGeom prst="rect">
+            <a:avLst/>
+          </a:prstGeom>
+          <a:noFill/>
+        </p:spPr>
+        <p:txBody>
+          <a:bodyPr wrap="square" lIns="0" rIns="0" tIns="0" bIns="0" anchor="t">
+            <a:spAutoFit/>
+          </a:bodyPr>
+          <a:lstStyle/>
+          <a:p>
+            <a:pPr algn="l">
+              <a:lnSpc>
+                <a:spcPct val="95000"/>
+              </a:lnSpc>
+              <a:spcBef>
+                <a:spcPts val="0"/>
+              </a:spcBef>
+              <a:spcAft>
+                <a:spcPts val="0"/>
+              </a:spcAft>
+            </a:pPr>
+            <a:r>
+              <a:rPr sz="720" b="1">
+                <a:solidFill>
+                  <a:srgbClr val="FB4D0A"/>
+                </a:solidFill>
+                <a:latin typeface="Calibri"/>
+              </a:rPr>
+              <a:t>planner · docs</a:t>
+            </a:r>
+          </a:p>
+        </p:txBody>
+      </p:sp>
+      <p:sp>
+        <p:nvSpPr>
+          <p:cNvPr id="42" name="TextBox 41"/>
+          <p:cNvSpPr txBox="1"/>
+          <p:nvPr/>
+        </p:nvSpPr>
+        <p:spPr>
+          <a:xfrm>
+            <a:off x="10177272" y="3108960"/>
+            <a:ext cx="978408" cy="475488"/>
+          </a:xfrm>
+          <a:prstGeom prst="rect">
+            <a:avLst/>
+          </a:prstGeom>
+          <a:noFill/>
+        </p:spPr>
+        <p:txBody>
+          <a:bodyPr wrap="square" lIns="0" rIns="0" tIns="0" bIns="0" anchor="t">
+            <a:spAutoFit/>
+          </a:bodyPr>
+          <a:lstStyle/>
+          <a:p>
+            <a:pPr algn="l">
+              <a:lnSpc>
+                <a:spcPct val="95000"/>
+              </a:lnSpc>
+              <a:spcBef>
+                <a:spcPts val="0"/>
+              </a:spcBef>
+              <a:spcAft>
+                <a:spcPts val="0"/>
+              </a:spcAft>
+            </a:pPr>
+            <a:r>
+              <a:rPr sz="800" b="0">
+                <a:solidFill>
+                  <a:srgbClr val="B9CFDA"/>
+                </a:solidFill>
+                <a:latin typeface="Calibri"/>
+              </a:rPr>
+              <a:t>ordered plan · report · lineage</a:t>
+            </a:r>
+          </a:p>
+        </p:txBody>
+      </p:sp>
+      <p:sp>
+        <p:nvSpPr>
+          <p:cNvPr id="43" name="TextBox 42"/>
+          <p:cNvSpPr txBox="1"/>
+          <p:nvPr/>
+        </p:nvSpPr>
+        <p:spPr>
+          <a:xfrm>
+            <a:off x="4261104" y="2596896"/>
+            <a:ext cx="219456" cy="310896"/>
+          </a:xfrm>
+          <a:prstGeom prst="rect">
+            <a:avLst/>
+          </a:prstGeom>
+          <a:noFill/>
+        </p:spPr>
+        <p:txBody>
+          <a:bodyPr wrap="square" lIns="0" rIns="0" tIns="0" bIns="0" anchor="t">
+            <a:spAutoFit/>
+          </a:bodyPr>
+          <a:lstStyle/>
+          <a:p>
+            <a:pPr algn="ctr">
+              <a:spcBef>
+                <a:spcPts val="0"/>
+              </a:spcBef>
+              <a:spcAft>
+                <a:spcPts val="0"/>
+              </a:spcAft>
+            </a:pPr>
+            <a:r>
+              <a:rPr sz="1500" b="1">
+                <a:solidFill>
+                  <a:srgbClr val="FB4D0A"/>
+                </a:solidFill>
+                <a:latin typeface="Calibri"/>
+              </a:rPr>
+              <a:t>→</a:t>
+            </a:r>
+          </a:p>
+        </p:txBody>
+      </p:sp>
+      <p:sp>
+        <p:nvSpPr>
+          <p:cNvPr id="44" name="TextBox 43"/>
+          <p:cNvSpPr txBox="1"/>
+          <p:nvPr/>
+        </p:nvSpPr>
+        <p:spPr>
+          <a:xfrm>
+            <a:off x="5660136" y="2596896"/>
+            <a:ext cx="219456" cy="310896"/>
+          </a:xfrm>
+          <a:prstGeom prst="rect">
+            <a:avLst/>
+          </a:prstGeom>
+          <a:noFill/>
+        </p:spPr>
+        <p:txBody>
+          <a:bodyPr wrap="square" lIns="0" rIns="0" tIns="0" bIns="0" anchor="t">
+            <a:spAutoFit/>
+          </a:bodyPr>
+          <a:lstStyle/>
+          <a:p>
+            <a:pPr algn="ctr">
+              <a:spcBef>
+                <a:spcPts val="0"/>
+              </a:spcBef>
+              <a:spcAft>
+                <a:spcPts val="0"/>
+              </a:spcAft>
+            </a:pPr>
+            <a:r>
+              <a:rPr sz="1500" b="1">
+                <a:solidFill>
+                  <a:srgbClr val="FB4D0A"/>
+                </a:solidFill>
+                <a:latin typeface="Calibri"/>
+              </a:rPr>
+              <a:t>→</a:t>
+            </a:r>
+          </a:p>
+        </p:txBody>
+      </p:sp>
+      <p:sp>
+        <p:nvSpPr>
+          <p:cNvPr id="45" name="TextBox 44"/>
+          <p:cNvSpPr txBox="1"/>
+          <p:nvPr/>
+        </p:nvSpPr>
+        <p:spPr>
+          <a:xfrm>
+            <a:off x="7059168" y="2596896"/>
+            <a:ext cx="219456" cy="310896"/>
+          </a:xfrm>
+          <a:prstGeom prst="rect">
+            <a:avLst/>
+          </a:prstGeom>
+          <a:noFill/>
+        </p:spPr>
+        <p:txBody>
+          <a:bodyPr wrap="square" lIns="0" rIns="0" tIns="0" bIns="0" anchor="t">
+            <a:spAutoFit/>
+          </a:bodyPr>
+          <a:lstStyle/>
+          <a:p>
+            <a:pPr algn="ctr">
+              <a:spcBef>
+                <a:spcPts val="0"/>
+              </a:spcBef>
+              <a:spcAft>
+                <a:spcPts val="0"/>
+              </a:spcAft>
+            </a:pPr>
+            <a:r>
+              <a:rPr sz="1500" b="1">
+                <a:solidFill>
+                  <a:srgbClr val="FB4D0A"/>
+                </a:solidFill>
+                <a:latin typeface="Calibri"/>
+              </a:rPr>
+              <a:t>→</a:t>
+            </a:r>
+          </a:p>
+        </p:txBody>
+      </p:sp>
+      <p:sp>
+        <p:nvSpPr>
+          <p:cNvPr id="46" name="TextBox 45"/>
+          <p:cNvSpPr txBox="1"/>
+          <p:nvPr/>
+        </p:nvSpPr>
+        <p:spPr>
+          <a:xfrm>
+            <a:off x="8458200" y="2596896"/>
+            <a:ext cx="219456" cy="310896"/>
+          </a:xfrm>
+          <a:prstGeom prst="rect">
+            <a:avLst/>
+          </a:prstGeom>
+          <a:noFill/>
+        </p:spPr>
+        <p:txBody>
+          <a:bodyPr wrap="square" lIns="0" rIns="0" tIns="0" bIns="0" anchor="t">
+            <a:spAutoFit/>
+          </a:bodyPr>
+          <a:lstStyle/>
+          <a:p>
+            <a:pPr algn="ctr">
+              <a:spcBef>
+                <a:spcPts val="0"/>
+              </a:spcBef>
+              <a:spcAft>
+                <a:spcPts val="0"/>
+              </a:spcAft>
+            </a:pPr>
+            <a:r>
+              <a:rPr sz="1500" b="1">
+                <a:solidFill>
+                  <a:srgbClr val="FB4D0A"/>
+                </a:solidFill>
+                <a:latin typeface="Calibri"/>
+              </a:rPr>
+              <a:t>→</a:t>
+            </a:r>
+          </a:p>
+        </p:txBody>
+      </p:sp>
+      <p:sp>
+        <p:nvSpPr>
+          <p:cNvPr id="47" name="TextBox 46"/>
+          <p:cNvSpPr txBox="1"/>
+          <p:nvPr/>
+        </p:nvSpPr>
+        <p:spPr>
+          <a:xfrm>
+            <a:off x="9857232" y="2596896"/>
+            <a:ext cx="219456" cy="310896"/>
+          </a:xfrm>
+          <a:prstGeom prst="rect">
+            <a:avLst/>
+          </a:prstGeom>
+          <a:noFill/>
+        </p:spPr>
+        <p:txBody>
+          <a:bodyPr wrap="square" lIns="0" rIns="0" tIns="0" bIns="0" anchor="t">
+            <a:spAutoFit/>
+          </a:bodyPr>
+          <a:lstStyle/>
+          <a:p>
+            <a:pPr algn="ctr">
+              <a:spcBef>
+                <a:spcPts val="0"/>
+              </a:spcBef>
+              <a:spcAft>
+                <a:spcPts val="0"/>
+              </a:spcAft>
+            </a:pPr>
+            <a:r>
+              <a:rPr sz="1500" b="1">
+                <a:solidFill>
+                  <a:srgbClr val="FB4D0A"/>
+                </a:solidFill>
+                <a:latin typeface="Calibri"/>
+              </a:rPr>
+              <a:t>→</a:t>
+            </a:r>
+          </a:p>
+        </p:txBody>
+      </p:sp>
+      <p:sp>
+        <p:nvSpPr>
+          <p:cNvPr id="48" name="Rounded Rectangle 47"/>
+          <p:cNvSpPr/>
+          <p:nvPr/>
+        </p:nvSpPr>
+        <p:spPr>
+          <a:xfrm>
+            <a:off x="868680" y="3767328"/>
+            <a:ext cx="1874519" cy="1335024"/>
+          </a:xfrm>
+          <a:prstGeom prst="roundRect">
+            <a:avLst/>
+          </a:prstGeom>
+          <a:solidFill>
+            <a:srgbClr val="FFF3EA"/>
+          </a:solidFill>
+          <a:ln w="12700">
+            <a:solidFill>
+              <a:srgbClr val="FB4D0A"/>
+            </a:solidFill>
+          </a:ln>
+          <a:effectLst/>
+        </p:spPr>
+        <p:style>
+          <a:lnRef idx="1">
+            <a:schemeClr val="accent1"/>
+          </a:lnRef>
+          <a:fillRef idx="3">
+            <a:schemeClr val="accent1"/>
+          </a:fillRef>
+          <a:effectRef idx="2">
+            <a:schemeClr val="accent1"/>
+          </a:effectRef>
+          <a:fontRef idx="minor">
+            <a:schemeClr val="lt1"/>
+          </a:fontRef>
+        </p:style>
+        <p:txBody>
+          <a:bodyPr rtlCol="0" anchor="ctr" wrap="square" lIns="0" rIns="0" tIns="0" bIns="0"/>
+          <a:lstStyle/>
+          <a:p>
+            <a:pPr algn="ctr"/>
+          </a:p>
+        </p:txBody>
+      </p:sp>
+      <p:sp>
+        <p:nvSpPr>
+          <p:cNvPr id="49" name="TextBox 48"/>
+          <p:cNvSpPr txBox="1"/>
+          <p:nvPr/>
+        </p:nvSpPr>
+        <p:spPr>
+          <a:xfrm>
+            <a:off x="1033271" y="3895344"/>
+            <a:ext cx="1554480" cy="182880"/>
+          </a:xfrm>
+          <a:prstGeom prst="rect">
+            <a:avLst/>
+          </a:prstGeom>
+          <a:noFill/>
+        </p:spPr>
+        <p:txBody>
+          <a:bodyPr wrap="square" lIns="0" rIns="0" tIns="0" bIns="0" anchor="t">
+            <a:spAutoFit/>
+          </a:bodyPr>
+          <a:lstStyle/>
+          <a:p>
+            <a:pPr algn="l">
+              <a:spcBef>
+                <a:spcPts val="0"/>
+              </a:spcBef>
+              <a:spcAft>
+                <a:spcPts val="0"/>
+              </a:spcAft>
+            </a:pPr>
+            <a:r>
+              <a:rPr sz="850" b="1">
+                <a:solidFill>
+                  <a:srgbClr val="FB4D0A"/>
+                </a:solidFill>
+                <a:latin typeface="Calibri"/>
+              </a:rPr>
+              <a:t>MODEL LAYER</a:t>
+            </a:r>
+          </a:p>
+        </p:txBody>
+      </p:sp>
+      <p:sp>
+        <p:nvSpPr>
+          <p:cNvPr id="50" name="TextBox 49"/>
+          <p:cNvSpPr txBox="1"/>
+          <p:nvPr/>
+        </p:nvSpPr>
+        <p:spPr>
+          <a:xfrm>
+            <a:off x="1033271" y="4133088"/>
+            <a:ext cx="1572768" cy="749808"/>
+          </a:xfrm>
+          <a:prstGeom prst="rect">
+            <a:avLst/>
+          </a:prstGeom>
+          <a:noFill/>
+        </p:spPr>
+        <p:txBody>
+          <a:bodyPr wrap="square" lIns="0" rIns="0" tIns="0" bIns="0" anchor="t">
+            <a:spAutoFit/>
+          </a:bodyPr>
+          <a:lstStyle/>
+          <a:p>
+            <a:pPr algn="l">
+              <a:lnSpc>
+                <a:spcPct val="95000"/>
+              </a:lnSpc>
+              <a:spcBef>
+                <a:spcPts val="0"/>
+              </a:spcBef>
+              <a:spcAft>
+                <a:spcPts val="0"/>
+              </a:spcAft>
+            </a:pPr>
+            <a:r>
+              <a:rPr sz="880" b="1">
+                <a:solidFill>
+                  <a:srgbClr val="1F2A2E"/>
+                </a:solidFill>
+                <a:latin typeface="Calibri"/>
+              </a:rPr>
+              <a:t>llm_client.py</a:t>
+            </a:r>
+          </a:p>
+          <a:p>
+            <a:pPr algn="l">
+              <a:lnSpc>
+                <a:spcPct val="95000"/>
+              </a:lnSpc>
+              <a:spcBef>
+                <a:spcPts val="200"/>
+              </a:spcBef>
+              <a:spcAft>
+                <a:spcPts val="0"/>
+              </a:spcAft>
+            </a:pPr>
+            <a:r>
+              <a:rPr sz="800" b="0">
+                <a:solidFill>
+                  <a:srgbClr val="484848"/>
+                </a:solidFill>
+                <a:latin typeface="Calibri"/>
+              </a:rPr>
+              <a:t>Anthropic · OpenAI · mock-heuristic — selected by which API key is present. No code change to swap.</a:t>
+            </a:r>
+          </a:p>
+        </p:txBody>
+      </p:sp>
+      <p:sp>
+        <p:nvSpPr>
+          <p:cNvPr id="51" name="Rounded Rectangle 50"/>
+          <p:cNvSpPr/>
+          <p:nvPr/>
+        </p:nvSpPr>
+        <p:spPr>
+          <a:xfrm>
+            <a:off x="3063240" y="3767328"/>
+            <a:ext cx="8275320" cy="1335024"/>
+          </a:xfrm>
+          <a:prstGeom prst="roundRect">
+            <a:avLst/>
+          </a:prstGeom>
+          <a:solidFill>
+            <a:srgbClr val="F3F8FA"/>
+          </a:solidFill>
+          <a:ln>
+            <a:noFill/>
+          </a:ln>
+          <a:effectLst/>
+        </p:spPr>
+        <p:style>
+          <a:lnRef idx="1">
+            <a:schemeClr val="accent1"/>
+          </a:lnRef>
+          <a:fillRef idx="3">
+            <a:schemeClr val="accent1"/>
+          </a:fillRef>
+          <a:effectRef idx="2">
+            <a:schemeClr val="accent1"/>
+          </a:effectRef>
+          <a:fontRef idx="minor">
+            <a:schemeClr val="lt1"/>
+          </a:fontRef>
+        </p:style>
+        <p:txBody>
+          <a:bodyPr rtlCol="0" anchor="ctr" wrap="square" lIns="0" rIns="0" tIns="0" bIns="0"/>
+          <a:lstStyle/>
+          <a:p>
+            <a:pPr algn="ctr"/>
+          </a:p>
+        </p:txBody>
+      </p:sp>
+      <p:sp>
+        <p:nvSpPr>
+          <p:cNvPr id="52" name="TextBox 51"/>
+          <p:cNvSpPr txBox="1"/>
+          <p:nvPr/>
+        </p:nvSpPr>
+        <p:spPr>
+          <a:xfrm>
+            <a:off x="3227832" y="3895344"/>
+            <a:ext cx="3657600" cy="182880"/>
+          </a:xfrm>
+          <a:prstGeom prst="rect">
+            <a:avLst/>
+          </a:prstGeom>
+          <a:noFill/>
+        </p:spPr>
+        <p:txBody>
+          <a:bodyPr wrap="square" lIns="0" rIns="0" tIns="0" bIns="0" anchor="t">
+            <a:spAutoFit/>
+          </a:bodyPr>
+          <a:lstStyle/>
+          <a:p>
+            <a:pPr algn="l">
+              <a:spcBef>
+                <a:spcPts val="0"/>
+              </a:spcBef>
+              <a:spcAft>
+                <a:spcPts val="0"/>
+              </a:spcAft>
+            </a:pPr>
+            <a:r>
+              <a:rPr sz="850" b="1">
+                <a:solidFill>
+                  <a:srgbClr val="8A8A8A"/>
+                </a:solidFill>
+                <a:latin typeface="Calibri"/>
+              </a:rPr>
+              <a:t>GENERATED ARTIFACTS   prototype/output/</a:t>
+            </a:r>
+          </a:p>
+        </p:txBody>
+      </p:sp>
+      <p:sp>
+        <p:nvSpPr>
+          <p:cNvPr id="53" name="Rounded Rectangle 52"/>
+          <p:cNvSpPr/>
+          <p:nvPr/>
+        </p:nvSpPr>
+        <p:spPr>
+          <a:xfrm>
+            <a:off x="3227832" y="4133088"/>
+            <a:ext cx="2578608" cy="237744"/>
+          </a:xfrm>
+          <a:prstGeom prst="roundRect">
+            <a:avLst>
+              <a:gd name="adj" fmla="val 30000"/>
+            </a:avLst>
+          </a:prstGeom>
+          <a:solidFill>
+            <a:srgbClr val="FFFFFF"/>
+          </a:solidFill>
+          <a:ln w="9525">
+            <a:solidFill>
+              <a:srgbClr val="D6E4EA"/>
+            </a:solidFill>
+          </a:ln>
+          <a:effectLst/>
+        </p:spPr>
+        <p:style>
+          <a:lnRef idx="1">
+            <a:schemeClr val="accent1"/>
+          </a:lnRef>
+          <a:fillRef idx="3">
+            <a:schemeClr val="accent1"/>
+          </a:fillRef>
+          <a:effectRef idx="2">
+            <a:schemeClr val="accent1"/>
+          </a:effectRef>
+          <a:fontRef idx="minor">
+            <a:schemeClr val="lt1"/>
+          </a:fontRef>
+        </p:style>
+        <p:txBody>
+          <a:bodyPr rtlCol="0" anchor="ctr" wrap="square" lIns="0" rIns="0" tIns="0" bIns="0"/>
+          <a:lstStyle/>
+          <a:p>
+            <a:pPr algn="ctr">
+              <a:spcBef>
+                <a:spcPts val="0"/>
+              </a:spcBef>
+              <a:spcAft>
+                <a:spcPts val="0"/>
+              </a:spcAft>
+            </a:pPr>
+            <a:r>
+              <a:rPr sz="819" b="1">
+                <a:solidFill>
+                  <a:srgbClr val="005071"/>
+                </a:solidFill>
+                <a:latin typeface="Calibri"/>
+              </a:rPr>
+              <a:t>analysis.json</a:t>
+            </a:r>
+          </a:p>
+        </p:txBody>
+      </p:sp>
+      <p:sp>
+        <p:nvSpPr>
+          <p:cNvPr id="54" name="Rounded Rectangle 53"/>
+          <p:cNvSpPr/>
+          <p:nvPr/>
+        </p:nvSpPr>
+        <p:spPr>
+          <a:xfrm>
+            <a:off x="5897879" y="4133088"/>
+            <a:ext cx="2578608" cy="237744"/>
+          </a:xfrm>
+          <a:prstGeom prst="roundRect">
+            <a:avLst>
+              <a:gd name="adj" fmla="val 30000"/>
+            </a:avLst>
+          </a:prstGeom>
+          <a:solidFill>
+            <a:srgbClr val="FFFFFF"/>
+          </a:solidFill>
+          <a:ln w="9525">
+            <a:solidFill>
+              <a:srgbClr val="D6E4EA"/>
+            </a:solidFill>
+          </a:ln>
+          <a:effectLst/>
+        </p:spPr>
+        <p:style>
+          <a:lnRef idx="1">
+            <a:schemeClr val="accent1"/>
+          </a:lnRef>
+          <a:fillRef idx="3">
+            <a:schemeClr val="accent1"/>
+          </a:fillRef>
+          <a:effectRef idx="2">
+            <a:schemeClr val="accent1"/>
+          </a:effectRef>
+          <a:fontRef idx="minor">
+            <a:schemeClr val="lt1"/>
+          </a:fontRef>
+        </p:style>
+        <p:txBody>
+          <a:bodyPr rtlCol="0" anchor="ctr" wrap="square" lIns="0" rIns="0" tIns="0" bIns="0"/>
+          <a:lstStyle/>
+          <a:p>
+            <a:pPr algn="ctr">
+              <a:spcBef>
+                <a:spcPts val="0"/>
+              </a:spcBef>
+              <a:spcAft>
+                <a:spcPts val="0"/>
+              </a:spcAft>
+            </a:pPr>
+            <a:r>
+              <a:rPr sz="819" b="1">
+                <a:solidFill>
+                  <a:srgbClr val="005071"/>
+                </a:solidFill>
+                <a:latin typeface="Calibri"/>
+              </a:rPr>
+              <a:t>metadata_interpretation.json</a:t>
+            </a:r>
+          </a:p>
+        </p:txBody>
+      </p:sp>
+      <p:sp>
+        <p:nvSpPr>
+          <p:cNvPr id="55" name="Rounded Rectangle 54"/>
+          <p:cNvSpPr/>
+          <p:nvPr/>
+        </p:nvSpPr>
+        <p:spPr>
+          <a:xfrm>
+            <a:off x="8567928" y="4133088"/>
+            <a:ext cx="2578608" cy="237744"/>
+          </a:xfrm>
+          <a:prstGeom prst="roundRect">
+            <a:avLst>
+              <a:gd name="adj" fmla="val 30000"/>
+            </a:avLst>
+          </a:prstGeom>
+          <a:solidFill>
+            <a:srgbClr val="FFFFFF"/>
+          </a:solidFill>
+          <a:ln w="9525">
+            <a:solidFill>
+              <a:srgbClr val="D6E4EA"/>
+            </a:solidFill>
+          </a:ln>
+          <a:effectLst/>
+        </p:spPr>
+        <p:style>
+          <a:lnRef idx="1">
+            <a:schemeClr val="accent1"/>
+          </a:lnRef>
+          <a:fillRef idx="3">
+            <a:schemeClr val="accent1"/>
+          </a:fillRef>
+          <a:effectRef idx="2">
+            <a:schemeClr val="accent1"/>
+          </a:effectRef>
+          <a:fontRef idx="minor">
+            <a:schemeClr val="lt1"/>
+          </a:fontRef>
+        </p:style>
+        <p:txBody>
+          <a:bodyPr rtlCol="0" anchor="ctr" wrap="square" lIns="0" rIns="0" tIns="0" bIns="0"/>
+          <a:lstStyle/>
+          <a:p>
+            <a:pPr algn="ctr">
+              <a:spcBef>
+                <a:spcPts val="0"/>
+              </a:spcBef>
+              <a:spcAft>
+                <a:spcPts val="0"/>
+              </a:spcAft>
+            </a:pPr>
+            <a:r>
+              <a:rPr sz="819" b="1">
+                <a:solidFill>
+                  <a:srgbClr val="005071"/>
+                </a:solidFill>
+                <a:latin typeface="Calibri"/>
+              </a:rPr>
+              <a:t>dbt_models/ (staging · intermediate · marts)</a:t>
+            </a:r>
+          </a:p>
+        </p:txBody>
+      </p:sp>
+      <p:sp>
+        <p:nvSpPr>
+          <p:cNvPr id="56" name="Rounded Rectangle 55"/>
+          <p:cNvSpPr/>
+          <p:nvPr/>
+        </p:nvSpPr>
+        <p:spPr>
+          <a:xfrm>
+            <a:off x="3227832" y="4434840"/>
+            <a:ext cx="2578608" cy="237744"/>
+          </a:xfrm>
+          <a:prstGeom prst="roundRect">
+            <a:avLst>
+              <a:gd name="adj" fmla="val 30000"/>
+            </a:avLst>
+          </a:prstGeom>
+          <a:solidFill>
+            <a:srgbClr val="FFFFFF"/>
+          </a:solidFill>
+          <a:ln w="9525">
+            <a:solidFill>
+              <a:srgbClr val="D6E4EA"/>
+            </a:solidFill>
+          </a:ln>
+          <a:effectLst/>
+        </p:spPr>
+        <p:style>
+          <a:lnRef idx="1">
+            <a:schemeClr val="accent1"/>
+          </a:lnRef>
+          <a:fillRef idx="3">
+            <a:schemeClr val="accent1"/>
+          </a:fillRef>
+          <a:effectRef idx="2">
+            <a:schemeClr val="accent1"/>
+          </a:effectRef>
+          <a:fontRef idx="minor">
+            <a:schemeClr val="lt1"/>
+          </a:fontRef>
+        </p:style>
+        <p:txBody>
+          <a:bodyPr rtlCol="0" anchor="ctr" wrap="square" lIns="0" rIns="0" tIns="0" bIns="0"/>
+          <a:lstStyle/>
+          <a:p>
+            <a:pPr algn="ctr">
+              <a:spcBef>
+                <a:spcPts val="0"/>
+              </a:spcBef>
+              <a:spcAft>
+                <a:spcPts val="0"/>
+              </a:spcAft>
+            </a:pPr>
+            <a:r>
+              <a:rPr sz="819" b="1">
+                <a:solidFill>
+                  <a:srgbClr val="005071"/>
+                </a:solidFill>
+                <a:latin typeface="Calibri"/>
+              </a:rPr>
+              <a:t>sources.yml · schema.yml</a:t>
+            </a:r>
+          </a:p>
+        </p:txBody>
+      </p:sp>
+      <p:sp>
+        <p:nvSpPr>
+          <p:cNvPr id="57" name="Rounded Rectangle 56"/>
+          <p:cNvSpPr/>
+          <p:nvPr/>
+        </p:nvSpPr>
+        <p:spPr>
+          <a:xfrm>
+            <a:off x="5897879" y="4434840"/>
+            <a:ext cx="2578608" cy="237744"/>
+          </a:xfrm>
+          <a:prstGeom prst="roundRect">
+            <a:avLst>
+              <a:gd name="adj" fmla="val 30000"/>
+            </a:avLst>
+          </a:prstGeom>
+          <a:solidFill>
+            <a:srgbClr val="FFFFFF"/>
+          </a:solidFill>
+          <a:ln w="9525">
+            <a:solidFill>
+              <a:srgbClr val="D6E4EA"/>
+            </a:solidFill>
+          </a:ln>
+          <a:effectLst/>
+        </p:spPr>
+        <p:style>
+          <a:lnRef idx="1">
+            <a:schemeClr val="accent1"/>
+          </a:lnRef>
+          <a:fillRef idx="3">
+            <a:schemeClr val="accent1"/>
+          </a:fillRef>
+          <a:effectRef idx="2">
+            <a:schemeClr val="accent1"/>
+          </a:effectRef>
+          <a:fontRef idx="minor">
+            <a:schemeClr val="lt1"/>
+          </a:fontRef>
+        </p:style>
+        <p:txBody>
+          <a:bodyPr rtlCol="0" anchor="ctr" wrap="square" lIns="0" rIns="0" tIns="0" bIns="0"/>
+          <a:lstStyle/>
+          <a:p>
+            <a:pPr algn="ctr">
+              <a:spcBef>
+                <a:spcPts val="0"/>
+              </a:spcBef>
+              <a:spcAft>
+                <a:spcPts val="0"/>
+              </a:spcAft>
+            </a:pPr>
+            <a:r>
+              <a:rPr sz="819" b="1">
+                <a:solidFill>
+                  <a:srgbClr val="005071"/>
+                </a:solidFill>
+                <a:latin typeface="Calibri"/>
+              </a:rPr>
+              <a:t>validation_report.json</a:t>
+            </a:r>
+          </a:p>
+        </p:txBody>
+      </p:sp>
+      <p:sp>
+        <p:nvSpPr>
+          <p:cNvPr id="58" name="Rounded Rectangle 57"/>
+          <p:cNvSpPr/>
+          <p:nvPr/>
+        </p:nvSpPr>
+        <p:spPr>
+          <a:xfrm>
+            <a:off x="8567928" y="4434840"/>
+            <a:ext cx="2578608" cy="237744"/>
+          </a:xfrm>
+          <a:prstGeom prst="roundRect">
+            <a:avLst>
+              <a:gd name="adj" fmla="val 30000"/>
+            </a:avLst>
+          </a:prstGeom>
+          <a:solidFill>
+            <a:srgbClr val="FFFFFF"/>
+          </a:solidFill>
+          <a:ln w="9525">
+            <a:solidFill>
+              <a:srgbClr val="D6E4EA"/>
+            </a:solidFill>
+          </a:ln>
+          <a:effectLst/>
+        </p:spPr>
+        <p:style>
+          <a:lnRef idx="1">
+            <a:schemeClr val="accent1"/>
+          </a:lnRef>
+          <a:fillRef idx="3">
+            <a:schemeClr val="accent1"/>
+          </a:fillRef>
+          <a:effectRef idx="2">
+            <a:schemeClr val="accent1"/>
+          </a:effectRef>
+          <a:fontRef idx="minor">
+            <a:schemeClr val="lt1"/>
+          </a:fontRef>
+        </p:style>
+        <p:txBody>
+          <a:bodyPr rtlCol="0" anchor="ctr" wrap="square" lIns="0" rIns="0" tIns="0" bIns="0"/>
+          <a:lstStyle/>
+          <a:p>
+            <a:pPr algn="ctr">
+              <a:spcBef>
+                <a:spcPts val="0"/>
+              </a:spcBef>
+              <a:spcAft>
+                <a:spcPts val="0"/>
+              </a:spcAft>
+            </a:pPr>
+            <a:r>
+              <a:rPr sz="819" b="1">
+                <a:solidFill>
+                  <a:srgbClr val="005071"/>
+                </a:solidFill>
+                <a:latin typeface="Calibri"/>
+              </a:rPr>
+              <a:t>migration_plan.json</a:t>
+            </a:r>
+          </a:p>
+        </p:txBody>
+      </p:sp>
+      <p:sp>
+        <p:nvSpPr>
+          <p:cNvPr id="59" name="Rounded Rectangle 58"/>
+          <p:cNvSpPr/>
+          <p:nvPr/>
+        </p:nvSpPr>
+        <p:spPr>
+          <a:xfrm>
+            <a:off x="3227832" y="4736592"/>
+            <a:ext cx="2578608" cy="237744"/>
+          </a:xfrm>
+          <a:prstGeom prst="roundRect">
+            <a:avLst>
+              <a:gd name="adj" fmla="val 30000"/>
+            </a:avLst>
+          </a:prstGeom>
+          <a:solidFill>
+            <a:srgbClr val="FFFFFF"/>
+          </a:solidFill>
+          <a:ln w="9525">
+            <a:solidFill>
+              <a:srgbClr val="D6E4EA"/>
+            </a:solidFill>
+          </a:ln>
+          <a:effectLst/>
+        </p:spPr>
+        <p:style>
+          <a:lnRef idx="1">
+            <a:schemeClr val="accent1"/>
+          </a:lnRef>
+          <a:fillRef idx="3">
+            <a:schemeClr val="accent1"/>
+          </a:fillRef>
+          <a:effectRef idx="2">
+            <a:schemeClr val="accent1"/>
+          </a:effectRef>
+          <a:fontRef idx="minor">
+            <a:schemeClr val="lt1"/>
+          </a:fontRef>
+        </p:style>
+        <p:txBody>
+          <a:bodyPr rtlCol="0" anchor="ctr" wrap="square" lIns="0" rIns="0" tIns="0" bIns="0"/>
+          <a:lstStyle/>
+          <a:p>
+            <a:pPr algn="ctr">
+              <a:spcBef>
+                <a:spcPts val="0"/>
+              </a:spcBef>
+              <a:spcAft>
+                <a:spcPts val="0"/>
+              </a:spcAft>
+            </a:pPr>
+            <a:r>
+              <a:rPr sz="819" b="1">
+                <a:solidFill>
+                  <a:srgbClr val="005071"/>
+                </a:solidFill>
+                <a:latin typeface="Calibri"/>
+              </a:rPr>
+              <a:t>lineage.json · .dot · _mermaid.md</a:t>
+            </a:r>
+          </a:p>
+        </p:txBody>
+      </p:sp>
+      <p:sp>
+        <p:nvSpPr>
+          <p:cNvPr id="60" name="Rounded Rectangle 59"/>
+          <p:cNvSpPr/>
+          <p:nvPr/>
+        </p:nvSpPr>
+        <p:spPr>
+          <a:xfrm>
+            <a:off x="5897879" y="4736592"/>
+            <a:ext cx="2578608" cy="237744"/>
+          </a:xfrm>
+          <a:prstGeom prst="roundRect">
+            <a:avLst>
+              <a:gd name="adj" fmla="val 30000"/>
+            </a:avLst>
+          </a:prstGeom>
+          <a:solidFill>
+            <a:srgbClr val="FFFFFF"/>
+          </a:solidFill>
+          <a:ln w="9525">
+            <a:solidFill>
+              <a:srgbClr val="D6E4EA"/>
+            </a:solidFill>
+          </a:ln>
+          <a:effectLst/>
+        </p:spPr>
+        <p:style>
+          <a:lnRef idx="1">
+            <a:schemeClr val="accent1"/>
+          </a:lnRef>
+          <a:fillRef idx="3">
+            <a:schemeClr val="accent1"/>
+          </a:fillRef>
+          <a:effectRef idx="2">
+            <a:schemeClr val="accent1"/>
+          </a:effectRef>
+          <a:fontRef idx="minor">
+            <a:schemeClr val="lt1"/>
+          </a:fontRef>
+        </p:style>
+        <p:txBody>
+          <a:bodyPr rtlCol="0" anchor="ctr" wrap="square" lIns="0" rIns="0" tIns="0" bIns="0"/>
+          <a:lstStyle/>
+          <a:p>
+            <a:pPr algn="ctr">
+              <a:spcBef>
+                <a:spcPts val="0"/>
+              </a:spcBef>
+              <a:spcAft>
+                <a:spcPts val="0"/>
+              </a:spcAft>
+            </a:pPr>
+            <a:r>
+              <a:rPr sz="819" b="1">
+                <a:solidFill>
+                  <a:srgbClr val="005071"/>
+                </a:solidFill>
+                <a:latin typeface="Calibri"/>
+              </a:rPr>
+              <a:t>estimates.json</a:t>
+            </a:r>
+          </a:p>
+        </p:txBody>
+      </p:sp>
+      <p:sp>
+        <p:nvSpPr>
+          <p:cNvPr id="61" name="Rounded Rectangle 60"/>
+          <p:cNvSpPr/>
+          <p:nvPr/>
+        </p:nvSpPr>
+        <p:spPr>
+          <a:xfrm>
+            <a:off x="8567928" y="4736592"/>
+            <a:ext cx="2578608" cy="237744"/>
+          </a:xfrm>
+          <a:prstGeom prst="roundRect">
+            <a:avLst>
+              <a:gd name="adj" fmla="val 30000"/>
+            </a:avLst>
+          </a:prstGeom>
+          <a:solidFill>
+            <a:srgbClr val="FFFFFF"/>
+          </a:solidFill>
+          <a:ln w="9525">
+            <a:solidFill>
+              <a:srgbClr val="D6E4EA"/>
+            </a:solidFill>
+          </a:ln>
+          <a:effectLst/>
+        </p:spPr>
+        <p:style>
+          <a:lnRef idx="1">
+            <a:schemeClr val="accent1"/>
+          </a:lnRef>
+          <a:fillRef idx="3">
+            <a:schemeClr val="accent1"/>
+          </a:fillRef>
+          <a:effectRef idx="2">
+            <a:schemeClr val="accent1"/>
+          </a:effectRef>
+          <a:fontRef idx="minor">
+            <a:schemeClr val="lt1"/>
+          </a:fontRef>
+        </p:style>
+        <p:txBody>
+          <a:bodyPr rtlCol="0" anchor="ctr" wrap="square" lIns="0" rIns="0" tIns="0" bIns="0"/>
+          <a:lstStyle/>
+          <a:p>
+            <a:pPr algn="ctr">
+              <a:spcBef>
+                <a:spcPts val="0"/>
+              </a:spcBef>
+              <a:spcAft>
+                <a:spcPts val="0"/>
+              </a:spcAft>
+            </a:pPr>
+            <a:r>
+              <a:rPr sz="819" b="1">
+                <a:solidFill>
+                  <a:srgbClr val="005071"/>
+                </a:solidFill>
+                <a:latin typeface="Calibri"/>
+              </a:rPr>
+              <a:t>migration_report.md</a:t>
+            </a:r>
+          </a:p>
+        </p:txBody>
+      </p:sp>
+      <p:sp>
+        <p:nvSpPr>
+          <p:cNvPr id="62" name="Rounded Rectangle 61"/>
+          <p:cNvSpPr/>
+          <p:nvPr/>
+        </p:nvSpPr>
+        <p:spPr>
+          <a:xfrm>
+            <a:off x="868680" y="5212080"/>
+            <a:ext cx="10469880" cy="896112"/>
+          </a:xfrm>
+          <a:prstGeom prst="roundRect">
+            <a:avLst/>
+          </a:prstGeom>
+          <a:solidFill>
+            <a:srgbClr val="FFF3EA"/>
+          </a:solidFill>
+          <a:ln w="12700">
+            <a:solidFill>
+              <a:srgbClr val="FB4D0A"/>
+            </a:solidFill>
+          </a:ln>
+          <a:effectLst/>
+        </p:spPr>
+        <p:style>
+          <a:lnRef idx="1">
+            <a:schemeClr val="accent1"/>
+          </a:lnRef>
+          <a:fillRef idx="3">
+            <a:schemeClr val="accent1"/>
+          </a:fillRef>
+          <a:effectRef idx="2">
+            <a:schemeClr val="accent1"/>
+          </a:effectRef>
+          <a:fontRef idx="minor">
+            <a:schemeClr val="lt1"/>
+          </a:fontRef>
+        </p:style>
+        <p:txBody>
+          <a:bodyPr rtlCol="0" anchor="ctr" wrap="square" lIns="0" rIns="0" tIns="0" bIns="0"/>
+          <a:lstStyle/>
+          <a:p>
+            <a:pPr algn="ctr"/>
+          </a:p>
+        </p:txBody>
+      </p:sp>
+      <p:sp>
+        <p:nvSpPr>
+          <p:cNvPr id="63" name="TextBox 62"/>
+          <p:cNvSpPr txBox="1"/>
+          <p:nvPr/>
+        </p:nvSpPr>
+        <p:spPr>
+          <a:xfrm>
+            <a:off x="1097280" y="5358384"/>
+            <a:ext cx="10058400" cy="731520"/>
+          </a:xfrm>
+          <a:prstGeom prst="rect">
+            <a:avLst/>
+          </a:prstGeom>
+          <a:noFill/>
+        </p:spPr>
+        <p:txBody>
+          <a:bodyPr wrap="square" lIns="0" rIns="0" tIns="0" bIns="0" anchor="t">
+            <a:spAutoFit/>
+          </a:bodyPr>
+          <a:lstStyle/>
+          <a:p>
+            <a:pPr algn="l"/>
+            <a:r>
+              <a:rPr sz="1050" b="1">
+                <a:solidFill>
+                  <a:srgbClr val="8A4A00"/>
+                </a:solidFill>
+                <a:latin typeface="Calibri"/>
+              </a:rPr>
+              <a:t>Verified run  </a:t>
+            </a:r>
+            <a:r>
+              <a:rPr sz="1050" b="0">
+                <a:solidFill>
+                  <a:srgbClr val="6B3E00"/>
+                </a:solidFill>
+                <a:latin typeface="Calibri"/>
+              </a:rPr>
+              <a:t>(mock provider, single-script target):  7 tables · 8 business rules · 2 flagged ambiguous · 7 dbt artifacts · validation PASS — grounding 100%, coverage 100%, ambiguity recall 100%.</a:t>
+            </a:r>
+          </a:p>
+          <a:p>
+            <a:pPr algn="l">
+              <a:lnSpc>
+                <a:spcPct val="98000"/>
+              </a:lnSpc>
+              <a:spcBef>
+                <a:spcPts val="400"/>
+              </a:spcBef>
+              <a:spcAft>
+                <a:spcPts val="0"/>
+              </a:spcAft>
+            </a:pPr>
+            <a:r>
+              <a:rPr sz="1050" b="0">
+                <a:solidFill>
+                  <a:srgbClr val="6B3E00"/>
+                </a:solidFill>
+                <a:latin typeface="Calibri"/>
+              </a:rPr>
+              <a:t>Runs with no API key, no network calls and no third-party packages — the entire pipeline is reproducible live on a laptop.</a:t>
+            </a:r>
+          </a:p>
+        </p:txBody>
+      </p:sp>
+    </p:spTree>
+  </p:cSld>
+  <p:clrMapOvr>
+    <a:masterClrMapping/>
+  </p:clrMapOvr>
+</p:sld>
+</file>
+
+<file path=ppt/slides/slide9.xml><?xml version="1.0" encoding="utf-8"?>
+<p:sld xmlns:a="http://schemas.openxmlformats.org/drawingml/2006/main" xmlns:p="http://schemas.openxmlformats.org/presentationml/2006/main" xmlns:r="http://schemas.openxmlformats.org/officeDocument/2006/relationships">
+  <p:cSld>
+    <p:spTree>
+      <p:nvGrpSpPr>
+        <p:cNvPr id="1" name=""/>
+        <p:cNvGrpSpPr/>
+        <p:nvPr/>
+      </p:nvGrpSpPr>
+      <p:grpSpPr/>
+      <p:sp>
+        <p:nvSpPr>
+          <p:cNvPr id="2" name="TextBox 1"/>
+          <p:cNvSpPr txBox="1"/>
+          <p:nvPr/>
+        </p:nvSpPr>
+        <p:spPr>
+          <a:xfrm>
+            <a:off x="411480" y="347472"/>
+            <a:ext cx="566928" cy="384048"/>
+          </a:xfrm>
+          <a:prstGeom prst="rect">
+            <a:avLst/>
+          </a:prstGeom>
+          <a:noFill/>
+        </p:spPr>
+        <p:txBody>
+          <a:bodyPr wrap="square" lIns="0" rIns="0" tIns="0" bIns="0" anchor="t">
+            <a:spAutoFit/>
+          </a:bodyPr>
+          <a:lstStyle/>
+          <a:p>
+            <a:pPr algn="l">
+              <a:spcBef>
+                <a:spcPts val="0"/>
+              </a:spcBef>
+              <a:spcAft>
+                <a:spcPts val="0"/>
+              </a:spcAft>
+            </a:pPr>
+            <a:r>
+              <a:rPr sz="2000" b="1">
+                <a:solidFill>
+                  <a:srgbClr val="FB4D0A"/>
+                </a:solidFill>
+                <a:latin typeface="Calibri"/>
+              </a:rPr>
+              <a:t>06</a:t>
+            </a:r>
+          </a:p>
+        </p:txBody>
+      </p:sp>
+      <p:sp>
+        <p:nvSpPr>
+          <p:cNvPr id="3" name="Rectangle 2"/>
+          <p:cNvSpPr/>
+          <p:nvPr/>
+        </p:nvSpPr>
+        <p:spPr>
+          <a:xfrm>
+            <a:off x="1078992" y="429768"/>
+            <a:ext cx="10972" cy="320040"/>
+          </a:xfrm>
+          <a:prstGeom prst="rect">
+            <a:avLst/>
+          </a:prstGeom>
+          <a:solidFill>
+            <a:srgbClr val="D6E4EA"/>
+          </a:solidFill>
+          <a:ln>
+            <a:noFill/>
+          </a:ln>
+          <a:effectLst/>
+        </p:spPr>
+        <p:style>
+          <a:lnRef idx="1">
+            <a:schemeClr val="accent1"/>
+          </a:lnRef>
+          <a:fillRef idx="3">
+            <a:schemeClr val="accent1"/>
+          </a:fillRef>
+          <a:effectRef idx="2">
+            <a:schemeClr val="accent1"/>
+          </a:effectRef>
+          <a:fontRef idx="minor">
+            <a:schemeClr val="lt1"/>
+          </a:fontRef>
+        </p:style>
+        <p:txBody>
+          <a:bodyPr rtlCol="0" anchor="ctr"/>
+          <a:lstStyle/>
+          <a:p>
+            <a:pPr algn="ctr"/>
+          </a:p>
+        </p:txBody>
+      </p:sp>
+      <p:sp>
+        <p:nvSpPr>
+          <p:cNvPr id="4" name="TextBox 3"/>
+          <p:cNvSpPr txBox="1"/>
+          <p:nvPr/>
+        </p:nvSpPr>
+        <p:spPr>
+          <a:xfrm>
+            <a:off x="1207008" y="256032"/>
+            <a:ext cx="8046720" cy="347472"/>
+          </a:xfrm>
+          <a:prstGeom prst="rect">
+            <a:avLst/>
+          </a:prstGeom>
+          <a:noFill/>
+        </p:spPr>
+        <p:txBody>
+          <a:bodyPr wrap="square" lIns="0" rIns="0" tIns="0" bIns="0" anchor="t">
+            <a:spAutoFit/>
+          </a:bodyPr>
+          <a:lstStyle/>
+          <a:p>
+            <a:pPr algn="l">
+              <a:spcBef>
+                <a:spcPts val="0"/>
+              </a:spcBef>
+              <a:spcAft>
+                <a:spcPts val="0"/>
+              </a:spcAft>
+            </a:pPr>
+            <a:r>
+              <a:rPr sz="1700" b="1">
+                <a:solidFill>
+                  <a:srgbClr val="005071"/>
+                </a:solidFill>
+                <a:latin typeface="Calibri"/>
+              </a:rPr>
+              <a:t>Live Code Demo</a:t>
+            </a:r>
+          </a:p>
+        </p:txBody>
+      </p:sp>
+      <p:sp>
+        <p:nvSpPr>
+          <p:cNvPr id="5" name="TextBox 4"/>
+          <p:cNvSpPr txBox="1"/>
+          <p:nvPr/>
+        </p:nvSpPr>
+        <p:spPr>
+          <a:xfrm>
+            <a:off x="1207008" y="649224"/>
+            <a:ext cx="9509760" cy="256032"/>
+          </a:xfrm>
+          <a:prstGeom prst="rect">
+            <a:avLst/>
+          </a:prstGeom>
+          <a:noFill/>
+        </p:spPr>
+        <p:txBody>
+          <a:bodyPr wrap="square" lIns="0" rIns="0" tIns="0" bIns="0" anchor="t">
+            <a:spAutoFit/>
+          </a:bodyPr>
+          <a:lstStyle/>
+          <a:p>
+            <a:pPr algn="l">
+              <a:spcBef>
+                <a:spcPts val="0"/>
+              </a:spcBef>
+              <a:spcAft>
+                <a:spcPts val="0"/>
+              </a:spcAft>
+            </a:pPr>
+            <a:r>
+              <a:rPr sz="880" b="0">
+                <a:solidFill>
+                  <a:srgbClr val="484848"/>
+                </a:solidFill>
+                <a:latin typeface="Calibri"/>
+              </a:rPr>
+              <a:t>What to run on screen, and what to point at — one command, reproducible with no API key</a:t>
+            </a:r>
+          </a:p>
+        </p:txBody>
+      </p:sp>
+      <p:sp>
+        <p:nvSpPr>
+          <p:cNvPr id="6" name="Rectangle 5"/>
+          <p:cNvSpPr/>
+          <p:nvPr/>
+        </p:nvSpPr>
+        <p:spPr>
+          <a:xfrm>
+            <a:off x="411480" y="960120"/>
+            <a:ext cx="11064240" cy="10972"/>
+          </a:xfrm>
+          <a:prstGeom prst="rect">
+            <a:avLst/>
+          </a:prstGeom>
+          <a:solidFill>
+            <a:srgbClr val="D6E4EA"/>
+          </a:solidFill>
+          <a:ln>
+            <a:noFill/>
+          </a:ln>
+          <a:effectLst/>
+        </p:spPr>
+        <p:style>
+          <a:lnRef idx="1">
+            <a:schemeClr val="accent1"/>
+          </a:lnRef>
+          <a:fillRef idx="3">
+            <a:schemeClr val="accent1"/>
+          </a:fillRef>
+          <a:effectRef idx="2">
+            <a:schemeClr val="accent1"/>
+          </a:effectRef>
+          <a:fontRef idx="minor">
+            <a:schemeClr val="lt1"/>
+          </a:fontRef>
+        </p:style>
+        <p:txBody>
+          <a:bodyPr rtlCol="0" anchor="ctr"/>
+          <a:lstStyle/>
+          <a:p>
+            <a:pPr algn="ctr"/>
+          </a:p>
+        </p:txBody>
+      </p:sp>
+      <p:sp>
+        <p:nvSpPr>
+          <p:cNvPr id="7" name="Rectangle 6"/>
+          <p:cNvSpPr/>
+          <p:nvPr/>
+        </p:nvSpPr>
+        <p:spPr>
+          <a:xfrm>
+            <a:off x="594360" y="1298448"/>
+            <a:ext cx="91440" cy="4846320"/>
+          </a:xfrm>
+          <a:prstGeom prst="rect">
+            <a:avLst/>
+          </a:prstGeom>
+          <a:solidFill>
+            <a:srgbClr val="FB4D0A"/>
+          </a:solidFill>
+          <a:ln>
+            <a:noFill/>
+          </a:ln>
+          <a:effectLst/>
+        </p:spPr>
+        <p:style>
+          <a:lnRef idx="1">
+            <a:schemeClr val="accent1"/>
+          </a:lnRef>
+          <a:fillRef idx="3">
+            <a:schemeClr val="accent1"/>
+          </a:fillRef>
+          <a:effectRef idx="2">
+            <a:schemeClr val="accent1"/>
+          </a:effectRef>
+          <a:fontRef idx="minor">
+            <a:schemeClr val="lt1"/>
+          </a:fontRef>
+        </p:style>
+        <p:txBody>
+          <a:bodyPr rtlCol="0" anchor="ctr"/>
+          <a:lstStyle/>
+          <a:p>
+            <a:pPr algn="ctr"/>
+          </a:p>
+        </p:txBody>
+      </p:sp>
+      <p:sp>
+        <p:nvSpPr>
+          <p:cNvPr id="8" name="Rounded Rectangle 7"/>
+          <p:cNvSpPr/>
+          <p:nvPr/>
+        </p:nvSpPr>
+        <p:spPr>
+          <a:xfrm>
+            <a:off x="868680" y="1371600"/>
+            <a:ext cx="4846320" cy="2542032"/>
+          </a:xfrm>
+          <a:prstGeom prst="roundRect">
+            <a:avLst>
+              <a:gd name="adj" fmla="val 5000"/>
+            </a:avLst>
+          </a:prstGeom>
+          <a:solidFill>
+            <a:srgbClr val="0B2735"/>
+          </a:solidFill>
+          <a:ln>
+            <a:noFill/>
+          </a:ln>
+          <a:effectLst/>
+        </p:spPr>
+        <p:style>
+          <a:lnRef idx="1">
+            <a:schemeClr val="accent1"/>
+          </a:lnRef>
+          <a:fillRef idx="3">
+            <a:schemeClr val="accent1"/>
+          </a:fillRef>
+          <a:effectRef idx="2">
+            <a:schemeClr val="accent1"/>
+          </a:effectRef>
+          <a:fontRef idx="minor">
+            <a:schemeClr val="lt1"/>
+          </a:fontRef>
+        </p:style>
+        <p:txBody>
+          <a:bodyPr rtlCol="0" anchor="ctr" wrap="square" lIns="0" rIns="0" tIns="0" bIns="0"/>
+          <a:lstStyle/>
+          <a:p>
+            <a:pPr algn="ctr"/>
+          </a:p>
+        </p:txBody>
+      </p:sp>
+      <p:sp>
+        <p:nvSpPr>
+          <p:cNvPr id="9" name="Rounded Rectangle 8"/>
+          <p:cNvSpPr/>
+          <p:nvPr/>
+        </p:nvSpPr>
+        <p:spPr>
+          <a:xfrm>
+            <a:off x="868680" y="1371600"/>
+            <a:ext cx="4846320" cy="274320"/>
+          </a:xfrm>
+          <a:prstGeom prst="roundRect">
+            <a:avLst>
+              <a:gd name="adj" fmla="val 16000"/>
+            </a:avLst>
+          </a:prstGeom>
+          <a:solidFill>
+            <a:srgbClr val="163D50"/>
+          </a:solidFill>
+          <a:ln>
+            <a:noFill/>
+          </a:ln>
+          <a:effectLst/>
+        </p:spPr>
+        <p:style>
+          <a:lnRef idx="1">
+            <a:schemeClr val="accent1"/>
+          </a:lnRef>
+          <a:fillRef idx="3">
+            <a:schemeClr val="accent1"/>
+          </a:fillRef>
+          <a:effectRef idx="2">
+            <a:schemeClr val="accent1"/>
+          </a:effectRef>
+          <a:fontRef idx="minor">
+            <a:schemeClr val="lt1"/>
+          </a:fontRef>
+        </p:style>
+        <p:txBody>
+          <a:bodyPr rtlCol="0" anchor="ctr" wrap="square" lIns="0" rIns="0" tIns="0" bIns="0"/>
+          <a:lstStyle/>
+          <a:p>
+            <a:pPr algn="l">
+              <a:spcBef>
+                <a:spcPts val="0"/>
+              </a:spcBef>
+              <a:spcAft>
+                <a:spcPts val="0"/>
+              </a:spcAft>
+            </a:pPr>
+            <a:r>
+              <a:rPr sz="850" b="1">
+                <a:solidFill>
+                  <a:srgbClr val="8FB2C1"/>
+                </a:solidFill>
+                <a:latin typeface="Calibri"/>
+              </a:rPr>
+              <a:t>   TERMINAL   —   working directory:  prototype/</a:t>
+            </a:r>
+          </a:p>
+        </p:txBody>
+      </p:sp>
+      <p:sp>
+        <p:nvSpPr>
+          <p:cNvPr id="10" name="TextBox 9"/>
+          <p:cNvSpPr txBox="1"/>
+          <p:nvPr/>
+        </p:nvSpPr>
+        <p:spPr>
+          <a:xfrm>
+            <a:off x="1051560" y="1755648"/>
+            <a:ext cx="4517136" cy="2039111"/>
+          </a:xfrm>
+          <a:prstGeom prst="rect">
+            <a:avLst/>
+          </a:prstGeom>
+          <a:noFill/>
+        </p:spPr>
+        <p:txBody>
+          <a:bodyPr wrap="square" lIns="0" rIns="0" tIns="0" bIns="0" anchor="t">
+            <a:spAutoFit/>
+          </a:bodyPr>
+          <a:lstStyle/>
+          <a:p>
+            <a:pPr algn="l">
+              <a:lnSpc>
+                <a:spcPct val="98000"/>
+              </a:lnSpc>
+              <a:spcBef>
+                <a:spcPts val="0"/>
+              </a:spcBef>
+              <a:spcAft>
+                <a:spcPts val="0"/>
+              </a:spcAft>
+            </a:pPr>
+            <a:r>
+              <a:rPr sz="819" b="1">
+                <a:solidFill>
+                  <a:srgbClr val="62C893"/>
+                </a:solidFill>
+                <a:latin typeface="Consolas"/>
+              </a:rPr>
+              <a:t>$ cd prototype</a:t>
+            </a:r>
+          </a:p>
+          <a:p>
+            <a:pPr algn="l">
+              <a:lnSpc>
+                <a:spcPct val="98000"/>
+              </a:lnSpc>
+              <a:spcBef>
+                <a:spcPts val="0"/>
+              </a:spcBef>
+              <a:spcAft>
+                <a:spcPts val="0"/>
+              </a:spcAft>
+            </a:pPr>
+            <a:r>
+              <a:rPr sz="819" b="1">
+                <a:solidFill>
+                  <a:srgbClr val="62C893"/>
+                </a:solidFill>
+                <a:latin typeface="Consolas"/>
+              </a:rPr>
+              <a:t>$ python main.py --auto-approve</a:t>
+            </a:r>
+          </a:p>
+          <a:p>
+            <a:pPr algn="l">
+              <a:lnSpc>
+                <a:spcPct val="98000"/>
+              </a:lnSpc>
+              <a:spcBef>
+                <a:spcPts val="0"/>
+              </a:spcBef>
+              <a:spcAft>
+                <a:spcPts val="0"/>
+              </a:spcAft>
+            </a:pPr>
+            <a:r>
+              <a:rPr sz="819" b="0">
+                <a:solidFill>
+                  <a:srgbClr val="D5E6ED"/>
+                </a:solidFill>
+                <a:latin typeface="Consolas"/>
+              </a:rPr>
+              <a:t/>
+            </a:r>
+          </a:p>
+          <a:p>
+            <a:pPr algn="l">
+              <a:lnSpc>
+                <a:spcPct val="98000"/>
+              </a:lnSpc>
+              <a:spcBef>
+                <a:spcPts val="0"/>
+              </a:spcBef>
+              <a:spcAft>
+                <a:spcPts val="0"/>
+              </a:spcAft>
+            </a:pPr>
+            <a:r>
+              <a:rPr sz="819" b="0">
+                <a:solidFill>
+                  <a:srgbClr val="8FB2C1"/>
+                </a:solidFill>
+                <a:latin typeface="Consolas"/>
+              </a:rPr>
+              <a:t>Running pipeline with provider: mock (mock-heuristic-v1)</a:t>
+            </a:r>
+          </a:p>
+          <a:p>
+            <a:pPr algn="l">
+              <a:lnSpc>
+                <a:spcPct val="98000"/>
+              </a:lnSpc>
+              <a:spcBef>
+                <a:spcPts val="0"/>
+              </a:spcBef>
+              <a:spcAft>
+                <a:spcPts val="0"/>
+              </a:spcAft>
+            </a:pPr>
+            <a:r>
+              <a:rPr sz="819" b="0">
+                <a:solidFill>
+                  <a:srgbClr val="D5E6ED"/>
+                </a:solidFill>
+                <a:latin typeface="Consolas"/>
+              </a:rPr>
+              <a:t>--- Phase 2: AI Analysis Layer ---</a:t>
+            </a:r>
+          </a:p>
+          <a:p>
+            <a:pPr algn="l">
+              <a:lnSpc>
+                <a:spcPct val="98000"/>
+              </a:lnSpc>
+              <a:spcBef>
+                <a:spcPts val="0"/>
+              </a:spcBef>
+              <a:spcAft>
+                <a:spcPts val="0"/>
+              </a:spcAft>
+            </a:pPr>
+            <a:r>
+              <a:rPr sz="819" b="0">
+                <a:solidFill>
+                  <a:srgbClr val="D5E6ED"/>
+                </a:solidFill>
+                <a:latin typeface="Consolas"/>
+              </a:rPr>
+              <a:t>Extracted 7 tables, 8 business rules.</a:t>
+            </a:r>
+          </a:p>
+          <a:p>
+            <a:pPr algn="l">
+              <a:lnSpc>
+                <a:spcPct val="98000"/>
+              </a:lnSpc>
+              <a:spcBef>
+                <a:spcPts val="0"/>
+              </a:spcBef>
+              <a:spcAft>
+                <a:spcPts val="0"/>
+              </a:spcAft>
+            </a:pPr>
+            <a:r>
+              <a:rPr sz="819" b="0">
+                <a:solidFill>
+                  <a:srgbClr val="D5E6ED"/>
+                </a:solidFill>
+                <a:latin typeface="Consolas"/>
+              </a:rPr>
+              <a:t>--- Phase 3: Transformation Layer ---</a:t>
+            </a:r>
+          </a:p>
+          <a:p>
+            <a:pPr algn="l">
+              <a:lnSpc>
+                <a:spcPct val="98000"/>
+              </a:lnSpc>
+              <a:spcBef>
+                <a:spcPts val="0"/>
+              </a:spcBef>
+              <a:spcAft>
+                <a:spcPts val="0"/>
+              </a:spcAft>
+            </a:pPr>
+            <a:r>
+              <a:rPr sz="819" b="0">
+                <a:solidFill>
+                  <a:srgbClr val="D5E6ED"/>
+                </a:solidFill>
+                <a:latin typeface="Consolas"/>
+              </a:rPr>
+              <a:t>Generated 7 dbt/Snowflake artifact files.</a:t>
+            </a:r>
+          </a:p>
+          <a:p>
+            <a:pPr algn="l">
+              <a:lnSpc>
+                <a:spcPct val="98000"/>
+              </a:lnSpc>
+              <a:spcBef>
+                <a:spcPts val="0"/>
+              </a:spcBef>
+              <a:spcAft>
+                <a:spcPts val="0"/>
+              </a:spcAft>
+            </a:pPr>
+            <a:r>
+              <a:rPr sz="819" b="1">
+                <a:solidFill>
+                  <a:srgbClr val="FF8A4D"/>
+                </a:solidFill>
+                <a:latin typeface="Consolas"/>
+              </a:rPr>
+              <a:t>--- HUMAN-IN-THE-LOOP CHECKPOINT ---</a:t>
+            </a:r>
+          </a:p>
+          <a:p>
+            <a:pPr algn="l">
+              <a:lnSpc>
+                <a:spcPct val="98000"/>
+              </a:lnSpc>
+              <a:spcBef>
+                <a:spcPts val="0"/>
+              </a:spcBef>
+              <a:spcAft>
+                <a:spcPts val="0"/>
+              </a:spcAft>
+            </a:pPr>
+            <a:r>
+              <a:rPr sz="819" b="0">
+                <a:solidFill>
+                  <a:srgbClr val="FF8A4D"/>
+                </a:solidFill>
+                <a:latin typeface="Consolas"/>
+              </a:rPr>
+              <a:t>2 rule(s) flagged for mandatory human review</a:t>
+            </a:r>
+          </a:p>
+          <a:p>
+            <a:pPr algn="l">
+              <a:lnSpc>
+                <a:spcPct val="98000"/>
+              </a:lnSpc>
+              <a:spcBef>
+                <a:spcPts val="0"/>
+              </a:spcBef>
+              <a:spcAft>
+                <a:spcPts val="0"/>
+              </a:spcAft>
+            </a:pPr>
+            <a:r>
+              <a:rPr sz="819" b="0">
+                <a:solidFill>
+                  <a:srgbClr val="D5E6ED"/>
+                </a:solidFill>
+                <a:latin typeface="Consolas"/>
+              </a:rPr>
+              <a:t>--- Phase 4: Validation Layer ---</a:t>
+            </a:r>
+          </a:p>
+          <a:p>
+            <a:pPr algn="l">
+              <a:lnSpc>
+                <a:spcPct val="98000"/>
+              </a:lnSpc>
+              <a:spcBef>
+                <a:spcPts val="0"/>
+              </a:spcBef>
+              <a:spcAft>
+                <a:spcPts val="0"/>
+              </a:spcAft>
+            </a:pPr>
+            <a:r>
+              <a:rPr sz="819" b="1">
+                <a:solidFill>
+                  <a:srgbClr val="62C893"/>
+                </a:solidFill>
+                <a:latin typeface="Consolas"/>
+              </a:rPr>
+              <a:t>Validation status: PASS</a:t>
+            </a:r>
+          </a:p>
+          <a:p>
+            <a:pPr algn="l">
+              <a:lnSpc>
+                <a:spcPct val="98000"/>
+              </a:lnSpc>
+              <a:spcBef>
+                <a:spcPts val="0"/>
+              </a:spcBef>
+              <a:spcAft>
+                <a:spcPts val="0"/>
+              </a:spcAft>
+            </a:pPr>
+            <a:r>
+              <a:rPr sz="819" b="0">
+                <a:solidFill>
+                  <a:srgbClr val="62C893"/>
+                </a:solidFill>
+                <a:latin typeface="Consolas"/>
+              </a:rPr>
+              <a:t>  PASS: Entity Grounding Accuracy: 100.0%</a:t>
+            </a:r>
+          </a:p>
+          <a:p>
+            <a:pPr algn="l">
+              <a:lnSpc>
+                <a:spcPct val="98000"/>
+              </a:lnSpc>
+              <a:spcBef>
+                <a:spcPts val="0"/>
+              </a:spcBef>
+              <a:spcAft>
+                <a:spcPts val="0"/>
+              </a:spcAft>
+            </a:pPr>
+            <a:r>
+              <a:rPr sz="819" b="0">
+                <a:solidFill>
+                  <a:srgbClr val="62C893"/>
+                </a:solidFill>
+                <a:latin typeface="Consolas"/>
+              </a:rPr>
+              <a:t>  PASS: Business Rule Extraction Coverage: 100.0%</a:t>
+            </a:r>
+          </a:p>
+          <a:p>
+            <a:pPr algn="l">
+              <a:lnSpc>
+                <a:spcPct val="98000"/>
+              </a:lnSpc>
+              <a:spcBef>
+                <a:spcPts val="0"/>
+              </a:spcBef>
+              <a:spcAft>
+                <a:spcPts val="0"/>
+              </a:spcAft>
+            </a:pPr>
+            <a:r>
+              <a:rPr sz="819" b="0">
+                <a:solidFill>
+                  <a:srgbClr val="62C893"/>
+                </a:solidFill>
+                <a:latin typeface="Consolas"/>
+              </a:rPr>
+              <a:t>  PASS: Ambiguity Flag Recall: 100.0%</a:t>
+            </a:r>
+          </a:p>
+          <a:p>
+            <a:pPr algn="l">
+              <a:lnSpc>
+                <a:spcPct val="98000"/>
+              </a:lnSpc>
+              <a:spcBef>
+                <a:spcPts val="0"/>
+              </a:spcBef>
+              <a:spcAft>
+                <a:spcPts val="0"/>
+              </a:spcAft>
+            </a:pPr>
+            <a:r>
+              <a:rPr sz="819" b="0">
+                <a:solidFill>
+                  <a:srgbClr val="D5E6ED"/>
+                </a:solidFill>
+                <a:latin typeface="Consolas"/>
+              </a:rPr>
+              <a:t>Pipeline complete. See prototype/output/</a:t>
+            </a:r>
+          </a:p>
+        </p:txBody>
+      </p:sp>
+      <p:sp>
+        <p:nvSpPr>
+          <p:cNvPr id="11" name="Rounded Rectangle 10"/>
+          <p:cNvSpPr/>
+          <p:nvPr/>
+        </p:nvSpPr>
+        <p:spPr>
+          <a:xfrm>
+            <a:off x="868680" y="4041648"/>
+            <a:ext cx="4846320" cy="1700784"/>
+          </a:xfrm>
+          <a:prstGeom prst="roundRect">
+            <a:avLst/>
+          </a:prstGeom>
+          <a:solidFill>
+            <a:srgbClr val="FFF3EA"/>
+          </a:solidFill>
+          <a:ln w="12700">
+            <a:solidFill>
+              <a:srgbClr val="FB4D0A"/>
+            </a:solidFill>
+          </a:ln>
+          <a:effectLst/>
+        </p:spPr>
+        <p:style>
+          <a:lnRef idx="1">
+            <a:schemeClr val="accent1"/>
+          </a:lnRef>
+          <a:fillRef idx="3">
+            <a:schemeClr val="accent1"/>
+          </a:fillRef>
+          <a:effectRef idx="2">
+            <a:schemeClr val="accent1"/>
+          </a:effectRef>
+          <a:fontRef idx="minor">
+            <a:schemeClr val="lt1"/>
+          </a:fontRef>
+        </p:style>
+        <p:txBody>
+          <a:bodyPr rtlCol="0" anchor="ctr" wrap="square" lIns="0" rIns="0" tIns="0" bIns="0"/>
+          <a:lstStyle/>
+          <a:p>
+            <a:pPr algn="ctr"/>
+          </a:p>
+        </p:txBody>
+      </p:sp>
+      <p:sp>
+        <p:nvSpPr>
+          <p:cNvPr id="12" name="TextBox 11"/>
+          <p:cNvSpPr txBox="1"/>
+          <p:nvPr/>
+        </p:nvSpPr>
+        <p:spPr>
+          <a:xfrm>
+            <a:off x="1069848" y="4187952"/>
+            <a:ext cx="4443983" cy="201168"/>
+          </a:xfrm>
+          <a:prstGeom prst="rect">
+            <a:avLst/>
+          </a:prstGeom>
+          <a:noFill/>
+        </p:spPr>
+        <p:txBody>
+          <a:bodyPr wrap="square" lIns="0" rIns="0" tIns="0" bIns="0" anchor="t">
+            <a:spAutoFit/>
+          </a:bodyPr>
+          <a:lstStyle/>
+          <a:p>
+            <a:pPr algn="l">
+              <a:spcBef>
+                <a:spcPts val="0"/>
+              </a:spcBef>
+              <a:spcAft>
+                <a:spcPts val="0"/>
+              </a:spcAft>
+            </a:pPr>
+            <a:r>
+              <a:rPr sz="850" b="1">
+                <a:solidFill>
+                  <a:srgbClr val="FB4D0A"/>
+                </a:solidFill>
+                <a:latin typeface="Calibri"/>
+              </a:rPr>
+              <a:t>THEN RUN IT AGAIN WITHOUT --auto-approve</a:t>
+            </a:r>
+          </a:p>
+        </p:txBody>
+      </p:sp>
+      <p:sp>
+        <p:nvSpPr>
+          <p:cNvPr id="13" name="TextBox 12"/>
+          <p:cNvSpPr txBox="1"/>
+          <p:nvPr/>
+        </p:nvSpPr>
+        <p:spPr>
+          <a:xfrm>
+            <a:off x="1069848" y="4462272"/>
+            <a:ext cx="4443983" cy="1188720"/>
+          </a:xfrm>
+          <a:prstGeom prst="rect">
+            <a:avLst/>
+          </a:prstGeom>
+          <a:noFill/>
+        </p:spPr>
+        <p:txBody>
+          <a:bodyPr wrap="square" lIns="0" rIns="0" tIns="0" bIns="0" anchor="t">
+            <a:spAutoFit/>
+          </a:bodyPr>
+          <a:lstStyle/>
+          <a:p>
+            <a:pPr algn="l">
+              <a:lnSpc>
+                <a:spcPct val="98000"/>
+              </a:lnSpc>
+              <a:spcBef>
+                <a:spcPts val="0"/>
+              </a:spcBef>
+              <a:spcAft>
+                <a:spcPts val="0"/>
+              </a:spcAft>
+            </a:pPr>
+            <a:r>
+              <a:rPr sz="950" b="1">
+                <a:solidFill>
+                  <a:srgbClr val="8A4A00"/>
+                </a:solidFill>
+                <a:latin typeface="Consolas"/>
+              </a:rPr>
+              <a:t>$ python main.py</a:t>
+            </a:r>
+          </a:p>
+          <a:p>
+            <a:pPr algn="l">
+              <a:lnSpc>
+                <a:spcPct val="98000"/>
+              </a:lnSpc>
+              <a:spcBef>
+                <a:spcPts val="400"/>
+              </a:spcBef>
+              <a:spcAft>
+                <a:spcPts val="0"/>
+              </a:spcAft>
+            </a:pPr>
+            <a:r>
+              <a:rPr sz="880" b="0">
+                <a:solidFill>
+                  <a:srgbClr val="6B3E00"/>
+                </a:solidFill>
+                <a:latin typeface="Consolas"/>
+              </a:rPr>
+              <a:t>Rule ID: AI-04  Order Aging Discount Exception</a:t>
+            </a:r>
+          </a:p>
+          <a:p>
+            <a:pPr algn="l">
+              <a:lnSpc>
+                <a:spcPct val="98000"/>
+              </a:lnSpc>
+              <a:spcBef>
+                <a:spcPts val="0"/>
+              </a:spcBef>
+              <a:spcAft>
+                <a:spcPts val="0"/>
+              </a:spcAft>
+            </a:pPr>
+            <a:r>
+              <a:rPr sz="880" b="0">
+                <a:solidFill>
+                  <a:srgbClr val="6B3E00"/>
+                </a:solidFill>
+                <a:latin typeface="Consolas"/>
+              </a:rPr>
+              <a:t>Choose action: [a]pprove as-is, [e]dit description,</a:t>
+            </a:r>
+          </a:p>
+          <a:p>
+            <a:pPr algn="l">
+              <a:lnSpc>
+                <a:spcPct val="98000"/>
+              </a:lnSpc>
+              <a:spcBef>
+                <a:spcPts val="0"/>
+              </a:spcBef>
+              <a:spcAft>
+                <a:spcPts val="0"/>
+              </a:spcAft>
+            </a:pPr>
+            <a:r>
+              <a:rPr sz="880" b="0">
+                <a:solidFill>
+                  <a:srgbClr val="6B3E00"/>
+                </a:solidFill>
+                <a:latin typeface="Consolas"/>
+              </a:rPr>
+              <a:t>               [r]eject and halt pipeline</a:t>
+            </a:r>
+          </a:p>
+          <a:p>
+            <a:pPr algn="l">
+              <a:lnSpc>
+                <a:spcPct val="98000"/>
+              </a:lnSpc>
+              <a:spcBef>
+                <a:spcPts val="600"/>
+              </a:spcBef>
+              <a:spcAft>
+                <a:spcPts val="0"/>
+              </a:spcAft>
+            </a:pPr>
+            <a:r>
+              <a:rPr sz="950" b="1">
+                <a:solidFill>
+                  <a:srgbClr val="8A4A00"/>
+                </a:solidFill>
+                <a:latin typeface="Calibri"/>
+              </a:rPr>
+              <a:t>Reject halts the run. The framework will not ship a rule a reviewer has not signed off on.</a:t>
+            </a:r>
+          </a:p>
+        </p:txBody>
+      </p:sp>
+      <p:sp>
+        <p:nvSpPr>
+          <p:cNvPr id="14" name="TextBox 13"/>
+          <p:cNvSpPr txBox="1"/>
+          <p:nvPr/>
+        </p:nvSpPr>
+        <p:spPr>
+          <a:xfrm>
+            <a:off x="5989320" y="1371600"/>
+            <a:ext cx="5349240" cy="201168"/>
+          </a:xfrm>
+          <a:prstGeom prst="rect">
+            <a:avLst/>
+          </a:prstGeom>
+          <a:noFill/>
+        </p:spPr>
+        <p:txBody>
+          <a:bodyPr wrap="square" lIns="0" rIns="0" tIns="0" bIns="0" anchor="t">
+            <a:spAutoFit/>
+          </a:bodyPr>
+          <a:lstStyle/>
+          <a:p>
+            <a:pPr algn="l">
+              <a:spcBef>
+                <a:spcPts val="0"/>
+              </a:spcBef>
+              <a:spcAft>
+                <a:spcPts val="0"/>
+              </a:spcAft>
+            </a:pPr>
+            <a:r>
+              <a:rPr sz="850" b="1">
+                <a:solidFill>
+                  <a:srgbClr val="8A8A8A"/>
+                </a:solidFill>
+                <a:latin typeface="Calibri"/>
+              </a:rPr>
+              <a:t>WHAT TO POINT AT, IN THIS ORDER</a:t>
+            </a:r>
+          </a:p>
+        </p:txBody>
+      </p:sp>
+      <p:sp>
+        <p:nvSpPr>
+          <p:cNvPr id="15" name="Rounded Rectangle 14"/>
+          <p:cNvSpPr/>
+          <p:nvPr/>
+        </p:nvSpPr>
+        <p:spPr>
+          <a:xfrm>
+            <a:off x="5989320" y="1627632"/>
+            <a:ext cx="5349240" cy="969264"/>
+          </a:xfrm>
+          <a:prstGeom prst="roundRect">
+            <a:avLst/>
+          </a:prstGeom>
+          <a:solidFill>
+            <a:srgbClr val="F3F8FA"/>
+          </a:solidFill>
+          <a:ln>
+            <a:noFill/>
+          </a:ln>
+          <a:effectLst/>
+        </p:spPr>
+        <p:style>
+          <a:lnRef idx="1">
+            <a:schemeClr val="accent1"/>
+          </a:lnRef>
+          <a:fillRef idx="3">
+            <a:schemeClr val="accent1"/>
+          </a:fillRef>
+          <a:effectRef idx="2">
+            <a:schemeClr val="accent1"/>
+          </a:effectRef>
+          <a:fontRef idx="minor">
+            <a:schemeClr val="lt1"/>
+          </a:fontRef>
+        </p:style>
+        <p:txBody>
+          <a:bodyPr rtlCol="0" anchor="ctr" wrap="square" lIns="0" rIns="0" tIns="0" bIns="0"/>
+          <a:lstStyle/>
+          <a:p>
+            <a:pPr algn="ctr"/>
+          </a:p>
+        </p:txBody>
+      </p:sp>
+      <p:sp>
+        <p:nvSpPr>
+          <p:cNvPr id="16" name="Rectangle 15"/>
+          <p:cNvSpPr/>
+          <p:nvPr/>
+        </p:nvSpPr>
+        <p:spPr>
+          <a:xfrm>
+            <a:off x="5989320" y="1627632"/>
+            <a:ext cx="68580" cy="969264"/>
+          </a:xfrm>
+          <a:prstGeom prst="rect">
+            <a:avLst/>
+          </a:prstGeom>
+          <a:solidFill>
+            <a:srgbClr val="005071"/>
+          </a:solidFill>
+          <a:ln>
+            <a:noFill/>
+          </a:ln>
+          <a:effectLst/>
+        </p:spPr>
+        <p:style>
+          <a:lnRef idx="1">
+            <a:schemeClr val="accent1"/>
+          </a:lnRef>
+          <a:fillRef idx="3">
+            <a:schemeClr val="accent1"/>
+          </a:fillRef>
+          <a:effectRef idx="2">
+            <a:schemeClr val="accent1"/>
+          </a:effectRef>
+          <a:fontRef idx="minor">
+            <a:schemeClr val="lt1"/>
+          </a:fontRef>
+        </p:style>
+        <p:txBody>
+          <a:bodyPr rtlCol="0" anchor="ctr" wrap="square" lIns="0" rIns="0" tIns="0" bIns="0"/>
+          <a:lstStyle/>
+          <a:p>
+            <a:pPr algn="ctr"/>
+          </a:p>
+        </p:txBody>
+      </p:sp>
+      <p:sp>
+        <p:nvSpPr>
+          <p:cNvPr id="17" name="TextBox 16"/>
+          <p:cNvSpPr txBox="1"/>
+          <p:nvPr/>
+        </p:nvSpPr>
+        <p:spPr>
+          <a:xfrm>
+            <a:off x="6208776" y="1728216"/>
+            <a:ext cx="365760" cy="219456"/>
+          </a:xfrm>
+          <a:prstGeom prst="rect">
+            <a:avLst/>
+          </a:prstGeom>
+          <a:noFill/>
+        </p:spPr>
+        <p:txBody>
+          <a:bodyPr wrap="square" lIns="0" rIns="0" tIns="0" bIns="0" anchor="t">
+            <a:spAutoFit/>
+          </a:bodyPr>
+          <a:lstStyle/>
+          <a:p>
+            <a:pPr algn="l">
+              <a:spcBef>
+                <a:spcPts val="0"/>
+              </a:spcBef>
+              <a:spcAft>
+                <a:spcPts val="0"/>
+              </a:spcAft>
+            </a:pPr>
+            <a:r>
+              <a:rPr sz="1100" b="1">
+                <a:solidFill>
+                  <a:srgbClr val="FB4D0A"/>
+                </a:solidFill>
+                <a:latin typeface="Calibri"/>
+              </a:rPr>
+              <a:t>01</a:t>
+            </a:r>
+          </a:p>
+        </p:txBody>
+      </p:sp>
+      <p:sp>
+        <p:nvSpPr>
+          <p:cNvPr id="18" name="TextBox 17"/>
+          <p:cNvSpPr txBox="1"/>
+          <p:nvPr/>
+        </p:nvSpPr>
+        <p:spPr>
+          <a:xfrm>
+            <a:off x="6629400" y="1719072"/>
+            <a:ext cx="1920240" cy="237744"/>
+          </a:xfrm>
+          <a:prstGeom prst="rect">
+            <a:avLst/>
+          </a:prstGeom>
+          <a:noFill/>
+        </p:spPr>
+        <p:txBody>
+          <a:bodyPr wrap="square" lIns="0" rIns="0" tIns="0" bIns="0" anchor="t">
+            <a:spAutoFit/>
+          </a:bodyPr>
+          <a:lstStyle/>
+          <a:p>
+            <a:pPr algn="l">
+              <a:spcBef>
+                <a:spcPts val="0"/>
+              </a:spcBef>
+              <a:spcAft>
+                <a:spcPts val="0"/>
+              </a:spcAft>
+            </a:pPr>
+            <a:r>
+              <a:rPr sz="1100" b="1">
+                <a:solidFill>
+                  <a:srgbClr val="005071"/>
+                </a:solidFill>
+                <a:latin typeface="Calibri"/>
+              </a:rPr>
+              <a:t>The guardrail firing</a:t>
+            </a:r>
+          </a:p>
+        </p:txBody>
+      </p:sp>
+      <p:sp>
+        <p:nvSpPr>
+          <p:cNvPr id="19" name="TextBox 18"/>
+          <p:cNvSpPr txBox="1"/>
+          <p:nvPr/>
+        </p:nvSpPr>
+        <p:spPr>
+          <a:xfrm>
+            <a:off x="8503920" y="1737360"/>
+            <a:ext cx="2697480" cy="219456"/>
+          </a:xfrm>
+          <a:prstGeom prst="rect">
+            <a:avLst/>
+          </a:prstGeom>
+          <a:noFill/>
+        </p:spPr>
+        <p:txBody>
+          <a:bodyPr wrap="square" lIns="0" rIns="0" tIns="0" bIns="0" anchor="t">
+            <a:spAutoFit/>
+          </a:bodyPr>
+          <a:lstStyle/>
+          <a:p>
+            <a:pPr algn="r">
+              <a:spcBef>
+                <a:spcPts val="0"/>
+              </a:spcBef>
+              <a:spcAft>
+                <a:spcPts val="0"/>
+              </a:spcAft>
+            </a:pPr>
+            <a:r>
+              <a:rPr sz="819" b="1">
+                <a:solidFill>
+                  <a:srgbClr val="2E6D86"/>
+                </a:solidFill>
+                <a:latin typeface="Consolas"/>
+              </a:rPr>
+              <a:t>output/analysis.json</a:t>
+            </a:r>
+          </a:p>
+        </p:txBody>
+      </p:sp>
+      <p:sp>
+        <p:nvSpPr>
+          <p:cNvPr id="20" name="TextBox 19"/>
+          <p:cNvSpPr txBox="1"/>
+          <p:nvPr/>
+        </p:nvSpPr>
+        <p:spPr>
+          <a:xfrm>
+            <a:off x="6629400" y="2011680"/>
+            <a:ext cx="4480559" cy="530352"/>
+          </a:xfrm>
+          <a:prstGeom prst="rect">
+            <a:avLst/>
+          </a:prstGeom>
+          <a:noFill/>
+        </p:spPr>
+        <p:txBody>
+          <a:bodyPr wrap="square" lIns="0" rIns="0" tIns="0" bIns="0" anchor="t">
+            <a:spAutoFit/>
+          </a:bodyPr>
+          <a:lstStyle/>
+          <a:p>
+            <a:pPr algn="l">
+              <a:lnSpc>
+                <a:spcPct val="98000"/>
+              </a:lnSpc>
+              <a:spcBef>
+                <a:spcPts val="0"/>
+              </a:spcBef>
+              <a:spcAft>
+                <a:spcPts val="0"/>
+              </a:spcAft>
+            </a:pPr>
+            <a:r>
+              <a:rPr sz="919" b="0">
+                <a:solidFill>
+                  <a:srgbClr val="484848"/>
+                </a:solidFill>
+                <a:latin typeface="Calibri"/>
+              </a:rPr>
+              <a:t>Rules AI-04 and AI-07 carry ambiguity_flag: true plus confidence_notes. The model declines to invent a rationale it cannot find in the source.</a:t>
+            </a:r>
+          </a:p>
+        </p:txBody>
+      </p:sp>
+      <p:sp>
+        <p:nvSpPr>
+          <p:cNvPr id="21" name="Rounded Rectangle 20"/>
+          <p:cNvSpPr/>
+          <p:nvPr/>
+        </p:nvSpPr>
+        <p:spPr>
+          <a:xfrm>
+            <a:off x="5989320" y="2688336"/>
+            <a:ext cx="5349240" cy="969264"/>
+          </a:xfrm>
+          <a:prstGeom prst="roundRect">
+            <a:avLst/>
+          </a:prstGeom>
+          <a:solidFill>
+            <a:srgbClr val="F3F8FA"/>
+          </a:solidFill>
+          <a:ln>
+            <a:noFill/>
+          </a:ln>
+          <a:effectLst/>
+        </p:spPr>
+        <p:style>
+          <a:lnRef idx="1">
+            <a:schemeClr val="accent1"/>
+          </a:lnRef>
+          <a:fillRef idx="3">
+            <a:schemeClr val="accent1"/>
+          </a:fillRef>
+          <a:effectRef idx="2">
+            <a:schemeClr val="accent1"/>
+          </a:effectRef>
+          <a:fontRef idx="minor">
+            <a:schemeClr val="lt1"/>
+          </a:fontRef>
+        </p:style>
+        <p:txBody>
+          <a:bodyPr rtlCol="0" anchor="ctr" wrap="square" lIns="0" rIns="0" tIns="0" bIns="0"/>
+          <a:lstStyle/>
+          <a:p>
+            <a:pPr algn="ctr"/>
+          </a:p>
+        </p:txBody>
+      </p:sp>
+      <p:sp>
+        <p:nvSpPr>
+          <p:cNvPr id="22" name="Rectangle 21"/>
+          <p:cNvSpPr/>
+          <p:nvPr/>
+        </p:nvSpPr>
+        <p:spPr>
+          <a:xfrm>
+            <a:off x="5989320" y="2688336"/>
+            <a:ext cx="68580" cy="969264"/>
+          </a:xfrm>
+          <a:prstGeom prst="rect">
+            <a:avLst/>
+          </a:prstGeom>
+          <a:solidFill>
+            <a:srgbClr val="005071"/>
+          </a:solidFill>
+          <a:ln>
+            <a:noFill/>
+          </a:ln>
+          <a:effectLst/>
+        </p:spPr>
+        <p:style>
+          <a:lnRef idx="1">
+            <a:schemeClr val="accent1"/>
+          </a:lnRef>
+          <a:fillRef idx="3">
+            <a:schemeClr val="accent1"/>
+          </a:fillRef>
+          <a:effectRef idx="2">
+            <a:schemeClr val="accent1"/>
+          </a:effectRef>
+          <a:fontRef idx="minor">
+            <a:schemeClr val="lt1"/>
+          </a:fontRef>
+        </p:style>
+        <p:txBody>
+          <a:bodyPr rtlCol="0" anchor="ctr" wrap="square" lIns="0" rIns="0" tIns="0" bIns="0"/>
+          <a:lstStyle/>
+          <a:p>
+            <a:pPr algn="ctr"/>
+          </a:p>
+        </p:txBody>
+      </p:sp>
+      <p:sp>
+        <p:nvSpPr>
+          <p:cNvPr id="23" name="TextBox 22"/>
+          <p:cNvSpPr txBox="1"/>
+          <p:nvPr/>
+        </p:nvSpPr>
+        <p:spPr>
+          <a:xfrm>
+            <a:off x="6208776" y="2788920"/>
+            <a:ext cx="365760" cy="219456"/>
+          </a:xfrm>
+          <a:prstGeom prst="rect">
+            <a:avLst/>
+          </a:prstGeom>
+          <a:noFill/>
+        </p:spPr>
+        <p:txBody>
+          <a:bodyPr wrap="square" lIns="0" rIns="0" tIns="0" bIns="0" anchor="t">
+            <a:spAutoFit/>
+          </a:bodyPr>
+          <a:lstStyle/>
+          <a:p>
+            <a:pPr algn="l">
+              <a:spcBef>
+                <a:spcPts val="0"/>
+              </a:spcBef>
+              <a:spcAft>
+                <a:spcPts val="0"/>
+              </a:spcAft>
+            </a:pPr>
+            <a:r>
+              <a:rPr sz="1100" b="1">
+                <a:solidFill>
+                  <a:srgbClr val="FB4D0A"/>
+                </a:solidFill>
+                <a:latin typeface="Calibri"/>
+              </a:rPr>
+              <a:t>02</a:t>
+            </a:r>
+          </a:p>
+        </p:txBody>
+      </p:sp>
+      <p:sp>
+        <p:nvSpPr>
+          <p:cNvPr id="24" name="TextBox 23"/>
+          <p:cNvSpPr txBox="1"/>
+          <p:nvPr/>
+        </p:nvSpPr>
+        <p:spPr>
+          <a:xfrm>
+            <a:off x="6629400" y="2779776"/>
+            <a:ext cx="1920240" cy="237744"/>
+          </a:xfrm>
+          <a:prstGeom prst="rect">
+            <a:avLst/>
+          </a:prstGeom>
+          <a:noFill/>
+        </p:spPr>
+        <p:txBody>
+          <a:bodyPr wrap="square" lIns="0" rIns="0" tIns="0" bIns="0" anchor="t">
+            <a:spAutoFit/>
+          </a:bodyPr>
+          <a:lstStyle/>
+          <a:p>
+            <a:pPr algn="l">
+              <a:spcBef>
+                <a:spcPts val="0"/>
+              </a:spcBef>
+              <a:spcAft>
+                <a:spcPts val="0"/>
+              </a:spcAft>
+            </a:pPr>
+            <a:r>
+              <a:rPr sz="1100" b="1">
+                <a:solidFill>
+                  <a:srgbClr val="005071"/>
+                </a:solidFill>
+                <a:latin typeface="Calibri"/>
+              </a:rPr>
+              <a:t>The generated target</a:t>
+            </a:r>
+          </a:p>
+        </p:txBody>
+      </p:sp>
+      <p:sp>
+        <p:nvSpPr>
+          <p:cNvPr id="25" name="TextBox 24"/>
+          <p:cNvSpPr txBox="1"/>
+          <p:nvPr/>
+        </p:nvSpPr>
+        <p:spPr>
+          <a:xfrm>
+            <a:off x="8503920" y="2798064"/>
+            <a:ext cx="2697480" cy="219456"/>
+          </a:xfrm>
+          <a:prstGeom prst="rect">
+            <a:avLst/>
+          </a:prstGeom>
+          <a:noFill/>
+        </p:spPr>
+        <p:txBody>
+          <a:bodyPr wrap="square" lIns="0" rIns="0" tIns="0" bIns="0" anchor="t">
+            <a:spAutoFit/>
+          </a:bodyPr>
+          <a:lstStyle/>
+          <a:p>
+            <a:pPr algn="r">
+              <a:spcBef>
+                <a:spcPts val="0"/>
+              </a:spcBef>
+              <a:spcAft>
+                <a:spcPts val="0"/>
+              </a:spcAft>
+            </a:pPr>
+            <a:r>
+              <a:rPr sz="819" b="1">
+                <a:solidFill>
+                  <a:srgbClr val="2E6D86"/>
+                </a:solidFill>
+                <a:latin typeface="Consolas"/>
+              </a:rPr>
+              <a:t>output/dbt_models/</a:t>
+            </a:r>
+          </a:p>
+        </p:txBody>
+      </p:sp>
+      <p:sp>
+        <p:nvSpPr>
+          <p:cNvPr id="26" name="TextBox 25"/>
+          <p:cNvSpPr txBox="1"/>
+          <p:nvPr/>
+        </p:nvSpPr>
+        <p:spPr>
+          <a:xfrm>
+            <a:off x="6629400" y="3072384"/>
+            <a:ext cx="4480559" cy="530352"/>
+          </a:xfrm>
+          <a:prstGeom prst="rect">
+            <a:avLst/>
+          </a:prstGeom>
+          <a:noFill/>
+        </p:spPr>
+        <p:txBody>
+          <a:bodyPr wrap="square" lIns="0" rIns="0" tIns="0" bIns="0" anchor="t">
+            <a:spAutoFit/>
+          </a:bodyPr>
+          <a:lstStyle/>
+          <a:p>
+            <a:pPr algn="l">
+              <a:lnSpc>
+                <a:spcPct val="98000"/>
+              </a:lnSpc>
+              <a:spcBef>
+                <a:spcPts val="0"/>
+              </a:spcBef>
+              <a:spcAft>
+                <a:spcPts val="0"/>
+              </a:spcAft>
+            </a:pPr>
+            <a:r>
+              <a:rPr sz="919" b="0">
+                <a:solidFill>
+                  <a:srgbClr val="484848"/>
+                </a:solidFill>
+                <a:latin typeface="Calibri"/>
+              </a:rPr>
+              <a:t>A real dbt layout — staging → intermediate → marts, with sources.yml and schema.yml. Reviewable SQL, not pseudocode.</a:t>
+            </a:r>
+          </a:p>
+        </p:txBody>
+      </p:sp>
+      <p:sp>
+        <p:nvSpPr>
+          <p:cNvPr id="27" name="Rounded Rectangle 26"/>
+          <p:cNvSpPr/>
+          <p:nvPr/>
+        </p:nvSpPr>
+        <p:spPr>
+          <a:xfrm>
+            <a:off x="5989320" y="3749040"/>
+            <a:ext cx="5349240" cy="969264"/>
+          </a:xfrm>
+          <a:prstGeom prst="roundRect">
+            <a:avLst/>
+          </a:prstGeom>
+          <a:solidFill>
+            <a:srgbClr val="F3F8FA"/>
+          </a:solidFill>
+          <a:ln>
+            <a:noFill/>
+          </a:ln>
+          <a:effectLst/>
+        </p:spPr>
+        <p:style>
+          <a:lnRef idx="1">
+            <a:schemeClr val="accent1"/>
+          </a:lnRef>
+          <a:fillRef idx="3">
+            <a:schemeClr val="accent1"/>
+          </a:fillRef>
+          <a:effectRef idx="2">
+            <a:schemeClr val="accent1"/>
+          </a:effectRef>
+          <a:fontRef idx="minor">
+            <a:schemeClr val="lt1"/>
+          </a:fontRef>
+        </p:style>
+        <p:txBody>
+          <a:bodyPr rtlCol="0" anchor="ctr" wrap="square" lIns="0" rIns="0" tIns="0" bIns="0"/>
+          <a:lstStyle/>
+          <a:p>
+            <a:pPr algn="ctr"/>
+          </a:p>
+        </p:txBody>
+      </p:sp>
+      <p:sp>
+        <p:nvSpPr>
+          <p:cNvPr id="28" name="Rectangle 27"/>
+          <p:cNvSpPr/>
+          <p:nvPr/>
+        </p:nvSpPr>
+        <p:spPr>
+          <a:xfrm>
+            <a:off x="5989320" y="3749040"/>
+            <a:ext cx="68580" cy="969264"/>
+          </a:xfrm>
+          <a:prstGeom prst="rect">
+            <a:avLst/>
+          </a:prstGeom>
+          <a:solidFill>
+            <a:srgbClr val="005071"/>
+          </a:solidFill>
+          <a:ln>
+            <a:noFill/>
+          </a:ln>
+          <a:effectLst/>
+        </p:spPr>
+        <p:style>
+          <a:lnRef idx="1">
+            <a:schemeClr val="accent1"/>
+          </a:lnRef>
+          <a:fillRef idx="3">
+            <a:schemeClr val="accent1"/>
+          </a:fillRef>
+          <a:effectRef idx="2">
+            <a:schemeClr val="accent1"/>
+          </a:effectRef>
+          <a:fontRef idx="minor">
+            <a:schemeClr val="lt1"/>
+          </a:fontRef>
+        </p:style>
+        <p:txBody>
+          <a:bodyPr rtlCol="0" anchor="ctr" wrap="square" lIns="0" rIns="0" tIns="0" bIns="0"/>
+          <a:lstStyle/>
+          <a:p>
+            <a:pPr algn="ctr"/>
+          </a:p>
+        </p:txBody>
+      </p:sp>
+      <p:sp>
+        <p:nvSpPr>
+          <p:cNvPr id="29" name="TextBox 28"/>
+          <p:cNvSpPr txBox="1"/>
+          <p:nvPr/>
+        </p:nvSpPr>
+        <p:spPr>
+          <a:xfrm>
+            <a:off x="6208776" y="3849624"/>
+            <a:ext cx="365760" cy="219456"/>
+          </a:xfrm>
+          <a:prstGeom prst="rect">
+            <a:avLst/>
+          </a:prstGeom>
+          <a:noFill/>
+        </p:spPr>
+        <p:txBody>
+          <a:bodyPr wrap="square" lIns="0" rIns="0" tIns="0" bIns="0" anchor="t">
+            <a:spAutoFit/>
+          </a:bodyPr>
+          <a:lstStyle/>
+          <a:p>
+            <a:pPr algn="l">
+              <a:spcBef>
+                <a:spcPts val="0"/>
+              </a:spcBef>
+              <a:spcAft>
+                <a:spcPts val="0"/>
+              </a:spcAft>
+            </a:pPr>
+            <a:r>
+              <a:rPr sz="1100" b="1">
+                <a:solidFill>
+                  <a:srgbClr val="FB4D0A"/>
+                </a:solidFill>
+                <a:latin typeface="Calibri"/>
+              </a:rPr>
+              <a:t>03</a:t>
+            </a:r>
+          </a:p>
+        </p:txBody>
+      </p:sp>
+      <p:sp>
+        <p:nvSpPr>
+          <p:cNvPr id="30" name="TextBox 29"/>
+          <p:cNvSpPr txBox="1"/>
+          <p:nvPr/>
+        </p:nvSpPr>
+        <p:spPr>
+          <a:xfrm>
+            <a:off x="6629400" y="3840480"/>
+            <a:ext cx="1920240" cy="237744"/>
+          </a:xfrm>
+          <a:prstGeom prst="rect">
+            <a:avLst/>
+          </a:prstGeom>
+          <a:noFill/>
+        </p:spPr>
+        <p:txBody>
+          <a:bodyPr wrap="square" lIns="0" rIns="0" tIns="0" bIns="0" anchor="t">
+            <a:spAutoFit/>
+          </a:bodyPr>
+          <a:lstStyle/>
+          <a:p>
+            <a:pPr algn="l">
+              <a:spcBef>
+                <a:spcPts val="0"/>
+              </a:spcBef>
+              <a:spcAft>
+                <a:spcPts val="0"/>
+              </a:spcAft>
+            </a:pPr>
+            <a:r>
+              <a:rPr sz="1100" b="1">
+                <a:solidFill>
+                  <a:srgbClr val="005071"/>
+                </a:solidFill>
+                <a:latin typeface="Calibri"/>
+              </a:rPr>
+              <a:t>The fact-check</a:t>
+            </a:r>
+          </a:p>
+        </p:txBody>
+      </p:sp>
+      <p:sp>
+        <p:nvSpPr>
+          <p:cNvPr id="31" name="TextBox 30"/>
+          <p:cNvSpPr txBox="1"/>
+          <p:nvPr/>
+        </p:nvSpPr>
+        <p:spPr>
+          <a:xfrm>
+            <a:off x="8503920" y="3858768"/>
+            <a:ext cx="2697480" cy="219456"/>
+          </a:xfrm>
+          <a:prstGeom prst="rect">
+            <a:avLst/>
+          </a:prstGeom>
+          <a:noFill/>
+        </p:spPr>
+        <p:txBody>
+          <a:bodyPr wrap="square" lIns="0" rIns="0" tIns="0" bIns="0" anchor="t">
+            <a:spAutoFit/>
+          </a:bodyPr>
+          <a:lstStyle/>
+          <a:p>
+            <a:pPr algn="r">
+              <a:spcBef>
+                <a:spcPts val="0"/>
+              </a:spcBef>
+              <a:spcAft>
+                <a:spcPts val="0"/>
+              </a:spcAft>
+            </a:pPr>
+            <a:r>
+              <a:rPr sz="819" b="1">
+                <a:solidFill>
+                  <a:srgbClr val="2E6D86"/>
+                </a:solidFill>
+                <a:latin typeface="Consolas"/>
+              </a:rPr>
+              <a:t>output/validation_report.json</a:t>
+            </a:r>
+          </a:p>
+        </p:txBody>
+      </p:sp>
+      <p:sp>
+        <p:nvSpPr>
+          <p:cNvPr id="32" name="TextBox 31"/>
+          <p:cNvSpPr txBox="1"/>
+          <p:nvPr/>
+        </p:nvSpPr>
+        <p:spPr>
+          <a:xfrm>
+            <a:off x="6629400" y="4133088"/>
+            <a:ext cx="4480559" cy="530352"/>
+          </a:xfrm>
+          <a:prstGeom prst="rect">
+            <a:avLst/>
+          </a:prstGeom>
+          <a:noFill/>
+        </p:spPr>
+        <p:txBody>
+          <a:bodyPr wrap="square" lIns="0" rIns="0" tIns="0" bIns="0" anchor="t">
+            <a:spAutoFit/>
+          </a:bodyPr>
+          <a:lstStyle/>
+          <a:p>
+            <a:pPr algn="l">
+              <a:lnSpc>
+                <a:spcPct val="98000"/>
+              </a:lnSpc>
+              <a:spcBef>
+                <a:spcPts val="0"/>
+              </a:spcBef>
+              <a:spcAft>
+                <a:spcPts val="0"/>
+              </a:spcAft>
+            </a:pPr>
+            <a:r>
+              <a:rPr sz="919" b="0">
+                <a:solidFill>
+                  <a:srgbClr val="484848"/>
+                </a:solidFill>
+                <a:latin typeface="Calibri"/>
+              </a:rPr>
+              <a:t>Three metrics scored against hand-annotated ground_truth_rules.json. Thresholds and logic live in src/validate.py — open it if challenged.</a:t>
+            </a:r>
+          </a:p>
+        </p:txBody>
+      </p:sp>
+      <p:sp>
+        <p:nvSpPr>
+          <p:cNvPr id="33" name="Rounded Rectangle 32"/>
+          <p:cNvSpPr/>
+          <p:nvPr/>
+        </p:nvSpPr>
+        <p:spPr>
+          <a:xfrm>
+            <a:off x="5989320" y="4809744"/>
+            <a:ext cx="5349240" cy="969264"/>
+          </a:xfrm>
+          <a:prstGeom prst="roundRect">
+            <a:avLst/>
+          </a:prstGeom>
+          <a:solidFill>
+            <a:srgbClr val="F3F8FA"/>
+          </a:solidFill>
+          <a:ln>
+            <a:noFill/>
+          </a:ln>
+          <a:effectLst/>
+        </p:spPr>
+        <p:style>
+          <a:lnRef idx="1">
+            <a:schemeClr val="accent1"/>
+          </a:lnRef>
+          <a:fillRef idx="3">
+            <a:schemeClr val="accent1"/>
+          </a:fillRef>
+          <a:effectRef idx="2">
+            <a:schemeClr val="accent1"/>
+          </a:effectRef>
+          <a:fontRef idx="minor">
+            <a:schemeClr val="lt1"/>
+          </a:fontRef>
+        </p:style>
+        <p:txBody>
+          <a:bodyPr rtlCol="0" anchor="ctr" wrap="square" lIns="0" rIns="0" tIns="0" bIns="0"/>
+          <a:lstStyle/>
+          <a:p>
+            <a:pPr algn="ctr"/>
+          </a:p>
+        </p:txBody>
+      </p:sp>
+      <p:sp>
+        <p:nvSpPr>
+          <p:cNvPr id="34" name="Rectangle 33"/>
+          <p:cNvSpPr/>
+          <p:nvPr/>
+        </p:nvSpPr>
+        <p:spPr>
+          <a:xfrm>
+            <a:off x="5989320" y="4809744"/>
+            <a:ext cx="68580" cy="969264"/>
+          </a:xfrm>
+          <a:prstGeom prst="rect">
+            <a:avLst/>
+          </a:prstGeom>
+          <a:solidFill>
+            <a:srgbClr val="FB4D0A"/>
+          </a:solidFill>
+          <a:ln>
+            <a:noFill/>
+          </a:ln>
+          <a:effectLst/>
+        </p:spPr>
+        <p:style>
+          <a:lnRef idx="1">
+            <a:schemeClr val="accent1"/>
+          </a:lnRef>
+          <a:fillRef idx="3">
+            <a:schemeClr val="accent1"/>
+          </a:fillRef>
+          <a:effectRef idx="2">
+            <a:schemeClr val="accent1"/>
+          </a:effectRef>
+          <a:fontRef idx="minor">
+            <a:schemeClr val="lt1"/>
+          </a:fontRef>
+        </p:style>
+        <p:txBody>
+          <a:bodyPr rtlCol="0" anchor="ctr" wrap="square" lIns="0" rIns="0" tIns="0" bIns="0"/>
+          <a:lstStyle/>
+          <a:p>
+            <a:pPr algn="ctr"/>
+          </a:p>
+        </p:txBody>
+      </p:sp>
+      <p:sp>
+        <p:nvSpPr>
+          <p:cNvPr id="35" name="TextBox 34"/>
+          <p:cNvSpPr txBox="1"/>
+          <p:nvPr/>
+        </p:nvSpPr>
+        <p:spPr>
+          <a:xfrm>
+            <a:off x="6208776" y="4910328"/>
+            <a:ext cx="365760" cy="219456"/>
+          </a:xfrm>
+          <a:prstGeom prst="rect">
+            <a:avLst/>
+          </a:prstGeom>
+          <a:noFill/>
+        </p:spPr>
+        <p:txBody>
+          <a:bodyPr wrap="square" lIns="0" rIns="0" tIns="0" bIns="0" anchor="t">
+            <a:spAutoFit/>
+          </a:bodyPr>
+          <a:lstStyle/>
+          <a:p>
+            <a:pPr algn="l">
+              <a:spcBef>
+                <a:spcPts val="0"/>
+              </a:spcBef>
+              <a:spcAft>
+                <a:spcPts val="0"/>
+              </a:spcAft>
+            </a:pPr>
+            <a:r>
+              <a:rPr sz="1100" b="1">
+                <a:solidFill>
+                  <a:srgbClr val="FB4D0A"/>
+                </a:solidFill>
+                <a:latin typeface="Calibri"/>
+              </a:rPr>
+              <a:t>04</a:t>
+            </a:r>
+          </a:p>
+        </p:txBody>
+      </p:sp>
+      <p:sp>
+        <p:nvSpPr>
+          <p:cNvPr id="36" name="TextBox 35"/>
+          <p:cNvSpPr txBox="1"/>
+          <p:nvPr/>
+        </p:nvSpPr>
+        <p:spPr>
+          <a:xfrm>
+            <a:off x="6629400" y="4901184"/>
+            <a:ext cx="1920240" cy="237744"/>
+          </a:xfrm>
+          <a:prstGeom prst="rect">
+            <a:avLst/>
+          </a:prstGeom>
+          <a:noFill/>
+        </p:spPr>
+        <p:txBody>
+          <a:bodyPr wrap="square" lIns="0" rIns="0" tIns="0" bIns="0" anchor="t">
+            <a:spAutoFit/>
+          </a:bodyPr>
+          <a:lstStyle/>
+          <a:p>
+            <a:pPr algn="l">
+              <a:spcBef>
+                <a:spcPts val="0"/>
+              </a:spcBef>
+              <a:spcAft>
+                <a:spcPts val="0"/>
+              </a:spcAft>
+            </a:pPr>
+            <a:r>
+              <a:rPr sz="1100" b="1">
+                <a:solidFill>
+                  <a:srgbClr val="005071"/>
+                </a:solidFill>
+                <a:latin typeface="Calibri"/>
+              </a:rPr>
+              <a:t>The deliverable</a:t>
+            </a:r>
+          </a:p>
+        </p:txBody>
+      </p:sp>
+      <p:sp>
+        <p:nvSpPr>
+          <p:cNvPr id="37" name="TextBox 36"/>
+          <p:cNvSpPr txBox="1"/>
+          <p:nvPr/>
+        </p:nvSpPr>
+        <p:spPr>
+          <a:xfrm>
+            <a:off x="8503920" y="4919472"/>
+            <a:ext cx="2697480" cy="219456"/>
+          </a:xfrm>
+          <a:prstGeom prst="rect">
+            <a:avLst/>
+          </a:prstGeom>
+          <a:noFill/>
+        </p:spPr>
+        <p:txBody>
+          <a:bodyPr wrap="square" lIns="0" rIns="0" tIns="0" bIns="0" anchor="t">
+            <a:spAutoFit/>
+          </a:bodyPr>
+          <a:lstStyle/>
+          <a:p>
+            <a:pPr algn="r">
+              <a:spcBef>
+                <a:spcPts val="0"/>
+              </a:spcBef>
+              <a:spcAft>
+                <a:spcPts val="0"/>
+              </a:spcAft>
+            </a:pPr>
+            <a:r>
+              <a:rPr sz="819" b="1">
+                <a:solidFill>
+                  <a:srgbClr val="2E6D86"/>
+                </a:solidFill>
+                <a:latin typeface="Consolas"/>
+              </a:rPr>
+              <a:t>output/migration_report.md</a:t>
+            </a:r>
+          </a:p>
+        </p:txBody>
+      </p:sp>
+      <p:sp>
+        <p:nvSpPr>
+          <p:cNvPr id="38" name="TextBox 37"/>
+          <p:cNvSpPr txBox="1"/>
+          <p:nvPr/>
+        </p:nvSpPr>
+        <p:spPr>
+          <a:xfrm>
+            <a:off x="6629400" y="5193792"/>
+            <a:ext cx="4480559" cy="530352"/>
+          </a:xfrm>
+          <a:prstGeom prst="rect">
+            <a:avLst/>
+          </a:prstGeom>
+          <a:noFill/>
+        </p:spPr>
+        <p:txBody>
+          <a:bodyPr wrap="square" lIns="0" rIns="0" tIns="0" bIns="0" anchor="t">
+            <a:spAutoFit/>
+          </a:bodyPr>
+          <a:lstStyle/>
+          <a:p>
+            <a:pPr algn="l">
+              <a:lnSpc>
+                <a:spcPct val="98000"/>
+              </a:lnSpc>
+              <a:spcBef>
+                <a:spcPts val="0"/>
+              </a:spcBef>
+              <a:spcAft>
+                <a:spcPts val="0"/>
+              </a:spcAft>
+            </a:pPr>
+            <a:r>
+              <a:rPr sz="919" b="0">
+                <a:solidFill>
+                  <a:srgbClr val="484848"/>
+                </a:solidFill>
+                <a:latin typeface="Calibri"/>
+              </a:rPr>
+              <a:t>Plus migration_plan.json — dependency-ordered steps with effort and blocking flags — and lineage_mermaid.md, which renders straight in a browser.</a:t>
+            </a:r>
+          </a:p>
+        </p:txBody>
+      </p:sp>
+      <p:sp>
+        <p:nvSpPr>
+          <p:cNvPr id="39" name="TextBox 38"/>
+          <p:cNvSpPr txBox="1"/>
+          <p:nvPr/>
+        </p:nvSpPr>
+        <p:spPr>
+          <a:xfrm>
+            <a:off x="5989320" y="5852160"/>
+            <a:ext cx="5349240" cy="274320"/>
+          </a:xfrm>
+          <a:prstGeom prst="rect">
+            <a:avLst/>
+          </a:prstGeom>
+          <a:noFill/>
+        </p:spPr>
+        <p:txBody>
+          <a:bodyPr wrap="square" lIns="0" rIns="0" tIns="0" bIns="0" anchor="t">
+            <a:spAutoFit/>
+          </a:bodyPr>
+          <a:lstStyle/>
+          <a:p>
+            <a:pPr algn="l">
+              <a:lnSpc>
+                <a:spcPct val="98000"/>
+              </a:lnSpc>
+              <a:spcBef>
+                <a:spcPts val="0"/>
+              </a:spcBef>
+              <a:spcAft>
+                <a:spcPts val="0"/>
+              </a:spcAft>
+            </a:pPr>
+            <a:r>
+              <a:rPr sz="850" b="0">
+                <a:solidFill>
+                  <a:srgbClr val="8A8A8A"/>
+                </a:solidFill>
+                <a:latin typeface="Calibri"/>
+              </a:rPr>
+              <a:t>Fallback if anything goes wrong: prototype/output/ is already populated from a previous run — walk the artifacts instead.</a:t>
+            </a:r>
+          </a:p>
+        </p:txBody>
+      </p:sp>
+    </p:spTree>
+  </p:cSld>
+  <p:clrMapOvr>
+    <a:masterClrMapping/>
+  </p:clrMapOvr>
+</p:sld>
+</file>
+
 <file path=ppt/theme/theme1.xml><?xml version="1.0" encoding="utf-8"?>
 <a:theme xmlns:a="http://schemas.openxmlformats.org/drawingml/2006/main" name="Office Theme">
   <a:themeElements>
